--- a/deliverables/vk-tech-balanced.pptx
+++ b/deliverables/vk-tech-balanced.pptx
@@ -1476,7 +1476,7 @@
           <a:lstStyle/>
           <a:p>
             <a:r>
-              <a:t>Слайд вводит инициативу по внедрению ИИ-помощника для автоматизации ответов на вопросы по регламентам и сокращения времени поиска инструкций.</a:t>
+              <a:t>Слайд представляет инициативу по внедрению ИИ-помощника для ускорения работы сотрудников и снижения нагрузки на поддержку.</a:t>
             </a:r>
           </a:p>
         </p:txBody>
@@ -1546,7 +1546,7 @@
           <a:lstStyle/>
           <a:p>
             <a:r>
-              <a:t>Сейчас поиск регламентов занимает до 30 минут, что существенно замедляет работу сотрудников.</a:t>
+              <a:t>Сейчас сотрудникам требуется до 30 минут, чтобы найти нужную инструкцию, что замедляет их работу и снижает общую эффективность отдела.</a:t>
             </a:r>
           </a:p>
         </p:txBody>
@@ -1616,7 +1616,7 @@
           <a:lstStyle/>
           <a:p>
             <a:r>
-              <a:t>Значительная часть нагрузки поддержки приходится на рутинные вопросы, которые можно автоматизировать.</a:t>
+              <a:t>Сейчас треть обращений в поддержку — это повторяющиеся вопросы, которые занимают время и ресурсы.</a:t>
             </a:r>
           </a:p>
         </p:txBody>
@@ -1686,7 +1686,7 @@
           <a:lstStyle/>
           <a:p>
             <a:r>
-              <a:t>Текущий процесс поиска инструкций отнимает до 30 минут у каждого сотрудника, а треть обращений дублируются, что создает лишнюю нагрузку на поддержку.</a:t>
+              <a:t>ИИ-помощник одновременно ускоряет работу сотрудников и разгружает команду поддержки за счет автоматизации типовых запросов.</a:t>
             </a:r>
           </a:p>
         </p:txBody>
@@ -1756,7 +1756,7 @@
           <a:lstStyle/>
           <a:p>
             <a:r>
-              <a:t>Решение автоматически обрабатывает запросы по регламентам, выдавая ответ и ссылку на документ, а сложные вопросы направляет в поддержку.</a:t>
+              <a:t>ИИ-помощник автоматически отвечает на вопросы сотрудников и предоставляет ссылку на исходный документ.</a:t>
             </a:r>
           </a:p>
         </p:txBody>
@@ -1826,7 +1826,7 @@
           <a:lstStyle/>
           <a:p>
             <a:r>
-              <a:t>Если ИИ не находит подтверждённый ответ, система автоматически передаёт запрос в поддержку с полным контекстом для быстрого решения.</a:t>
+              <a:t>Модель работает внутри корпоративного контура, поэтому документы не покидают сеть компании, что исключает утечку данных при обучении или обработке запросов. Это обеспечивает безопасность внутренней информации сотрудников и регламентов. Мы используем только факты из брифа, чтобы избежать необоснованных заявлений о безопасности, так как в исходных данных сделан акцент именно на том, что документы не</a:t>
             </a:r>
           </a:p>
         </p:txBody>
@@ -1896,7 +1896,7 @@
           <a:lstStyle/>
           <a:p>
             <a:r>
-              <a:t>Архитектура обеспечивает полную безопасность данных, так как вся обработка происходит внутри корпоративной сети.</a:t>
+              <a:t>Если ИИ не находит подтверждённый ответ, вопрос автоматически перенаправляется специалисту с полным контекстом.</a:t>
             </a:r>
           </a:p>
         </p:txBody>
@@ -1966,7 +1966,7 @@
           <a:lstStyle/>
           <a:p>
             <a:r>
-              <a:t>ИИ-помощник мгновенно обрабатывает запросы по регламентам, передавая сложные случаи специалистам с полным контекстом.</a:t>
+              <a:t>Пилотный запуск охватывает два подразделения с общим количеством сотрудников 150 человек.</a:t>
             </a:r>
           </a:p>
         </p:txBody>
@@ -2036,7 +2036,7 @@
           <a:lstStyle/>
           <a:p>
             <a:r>
-              <a:t>Пилотный запуск охватывает два подразделения и 150 сотрудников в течение шести недель.</a:t>
+              <a:t>Срок пилота фиксирован на шесть недель для сбора достаточной статистики.</a:t>
             </a:r>
           </a:p>
         </p:txBody>
@@ -2106,7 +2106,7 @@
           <a:lstStyle/>
           <a:p>
             <a:r>
-              <a:t>Срок пилотного запуска составляет шесть недель, что позволит оценить эффективность внедрения.</a:t>
+              <a:t>Для оценки успеха пилота мы будем измерять время поиска ответа и долю обращений, закрытых без участия специалиста.</a:t>
             </a:r>
           </a:p>
         </p:txBody>
@@ -2176,7 +2176,7 @@
           <a:lstStyle/>
           <a:p>
             <a:r>
-              <a:t>Для оценки эффективности пилота мы будем измерять время поиска ответа и долю обращений, закрытых без участия специалиста.</a:t>
+              <a:t>Для реализации пилота необходимо выделить команду из трех человек.</a:t>
             </a:r>
           </a:p>
         </p:txBody>
@@ -2246,7 +2246,7 @@
           <a:lstStyle/>
           <a:p>
             <a:r>
-              <a:t>Для реализации пилота необходимо одобрить проект и выделить команду из трех человек. Мы будем измерять время поиска ответа и долю обращений, закрытых без специалиста.</a:t>
+              <a:t>После одобрения мы сразу начнем работу с двумя подразделениями и сформируем команду для реализации пилота.</a:t>
             </a:r>
           </a:p>
         </p:txBody>
@@ -5118,6 +5118,1152 @@
                 <a:cs typeface="Calibri"/>
                 <a:sym typeface="Calibri"/>
               </a:defRPr>
+            </a:lvl9pPr>
+          </a:lstStyle>
+          <a:p/>
+        </p:txBody>
+      </p:sp>
+    </p:spTree>
+  </p:cSld>
+  <p:clrMapOvr>
+    <a:masterClrMapping/>
+  </p:clrMapOvr>
+</p:sldLayout>
+</file>
+
+<file path=ppt/slideLayouts/slideLayout9.xml><?xml version="1.0" encoding="utf-8"?>
+<p:sldLayout xmlns:a="http://schemas.openxmlformats.org/drawingml/2006/main" xmlns:r="http://schemas.openxmlformats.org/officeDocument/2006/relationships" xmlns:mc="http://schemas.openxmlformats.org/markup-compatibility/2006" xmlns:mv="urn:schemas-microsoft-com:mac:vml" xmlns:p="http://schemas.openxmlformats.org/presentationml/2006/main" xmlns:c="http://schemas.openxmlformats.org/drawingml/2006/chart" xmlns:dgm="http://schemas.openxmlformats.org/drawingml/2006/diagram" xmlns:o="urn:schemas-microsoft-com:office:office" xmlns:v="urn:schemas-microsoft-com:vml" xmlns:pvml="urn:schemas-microsoft-com:office:powerpoint" xmlns:com="http://schemas.openxmlformats.org/drawingml/2006/compatibility" xmlns:p14="http://schemas.microsoft.com/office/powerpoint/2010/main" xmlns:p15="http://schemas.microsoft.com/office/powerpoint/2012/main" xmlns:ahyp="http://schemas.microsoft.com/office/drawing/2018/hyperlinkcolor" matchingName="1_Визитка">
+  <p:cSld name="1_Визитка">
+    <p:bg>
+      <p:bgPr>
+        <a:solidFill>
+          <a:schemeClr val="lt1"/>
+        </a:solidFill>
+      </p:bgPr>
+    </p:bg>
+    <p:spTree>
+      <p:nvGrpSpPr>
+        <p:cNvPr id="109" name="Shape 109"/>
+        <p:cNvGrpSpPr/>
+        <p:nvPr/>
+      </p:nvGrpSpPr>
+      <p:grpSpPr>
+        <a:xfrm>
+          <a:off x="0" y="0"/>
+          <a:ext cx="0" cy="0"/>
+          <a:chOff x="0" y="0"/>
+          <a:chExt cx="0" cy="0"/>
+        </a:xfrm>
+      </p:grpSpPr>
+      <p:pic>
+        <p:nvPicPr>
+          <p:cNvPr id="110" name="Google Shape;110;p11"/>
+          <p:cNvPicPr preferRelativeResize="0"/>
+          <p:nvPr/>
+        </p:nvPicPr>
+        <p:blipFill rotWithShape="1">
+          <a:blip r:embed="rId2">
+            <a:alphaModFix/>
+          </a:blip>
+          <a:srcRect b="0" l="0" r="0" t="0"/>
+          <a:stretch/>
+        </p:blipFill>
+        <p:spPr>
+          <a:xfrm>
+            <a:off x="0" y="0"/>
+            <a:ext cx="9144000" cy="5143500"/>
+          </a:xfrm>
+          <a:prstGeom prst="rect">
+            <a:avLst/>
+          </a:prstGeom>
+          <a:noFill/>
+          <a:ln>
+            <a:noFill/>
+          </a:ln>
+        </p:spPr>
+      </p:pic>
+      <p:grpSp>
+        <p:nvGrpSpPr>
+          <p:cNvPr id="111" name="Google Shape;111;p11"/>
+          <p:cNvGrpSpPr/>
+          <p:nvPr/>
+        </p:nvGrpSpPr>
+        <p:grpSpPr>
+          <a:xfrm>
+            <a:off x="283721" y="4713930"/>
+            <a:ext cx="474349" cy="146621"/>
+            <a:chOff x="762095" y="12573000"/>
+            <a:chExt cx="1232613" cy="381000"/>
+          </a:xfrm>
+        </p:grpSpPr>
+        <p:sp>
+          <p:nvSpPr>
+            <p:cNvPr id="112" name="Google Shape;112;p11"/>
+            <p:cNvSpPr/>
+            <p:nvPr/>
+          </p:nvSpPr>
+          <p:spPr>
+            <a:xfrm>
+              <a:off x="762095" y="12573000"/>
+              <a:ext cx="1232613" cy="381000"/>
+            </a:xfrm>
+            <a:prstGeom prst="rect">
+              <a:avLst/>
+            </a:prstGeom>
+            <a:noFill/>
+            <a:ln>
+              <a:noFill/>
+            </a:ln>
+          </p:spPr>
+          <p:txBody>
+            <a:bodyPr anchorCtr="0" anchor="ctr" bIns="91425" lIns="91425" spcFirstLastPara="1" rIns="91425" wrap="square" tIns="91425">
+              <a:noAutofit/>
+            </a:bodyPr>
+            <a:lstStyle/>
+            <a:p>
+              <a:pPr indent="0" lvl="0" marL="0" rtl="0" algn="l">
+                <a:spcBef>
+                  <a:spcPts val="0"/>
+                </a:spcBef>
+                <a:spcAft>
+                  <a:spcPts val="0"/>
+                </a:spcAft>
+                <a:buNone/>
+              </a:pPr>
+              <a:r>
+                <a:t/>
+              </a:r>
+              <a:endParaRPr/>
+            </a:p>
+          </p:txBody>
+        </p:sp>
+        <p:pic>
+          <p:nvPicPr>
+            <p:cNvPr descr=" " id="113" name="Google Shape;113;p11"/>
+            <p:cNvPicPr preferRelativeResize="0"/>
+            <p:nvPr/>
+          </p:nvPicPr>
+          <p:blipFill rotWithShape="1">
+            <a:blip r:embed="rId3">
+              <a:alphaModFix/>
+            </a:blip>
+            <a:srcRect b="0" l="0" r="0" t="0"/>
+            <a:stretch/>
+          </p:blipFill>
+          <p:spPr>
+            <a:xfrm>
+              <a:off x="1270270" y="12621921"/>
+              <a:ext cx="700659" cy="240190"/>
+            </a:xfrm>
+            <a:prstGeom prst="rect">
+              <a:avLst/>
+            </a:prstGeom>
+            <a:noFill/>
+            <a:ln>
+              <a:noFill/>
+            </a:ln>
+          </p:spPr>
+        </p:pic>
+        <p:pic>
+          <p:nvPicPr>
+            <p:cNvPr descr=" " id="114" name="Google Shape;114;p11"/>
+            <p:cNvPicPr preferRelativeResize="0"/>
+            <p:nvPr/>
+          </p:nvPicPr>
+          <p:blipFill rotWithShape="1">
+            <a:blip r:embed="rId4">
+              <a:alphaModFix/>
+            </a:blip>
+            <a:srcRect b="0" l="0" r="0" t="0"/>
+            <a:stretch/>
+          </p:blipFill>
+          <p:spPr>
+            <a:xfrm>
+              <a:off x="762095" y="12573000"/>
+              <a:ext cx="381048" cy="381000"/>
+            </a:xfrm>
+            <a:prstGeom prst="rect">
+              <a:avLst/>
+            </a:prstGeom>
+            <a:noFill/>
+            <a:ln>
+              <a:noFill/>
+            </a:ln>
+          </p:spPr>
+        </p:pic>
+      </p:grpSp>
+      <p:sp>
+        <p:nvSpPr>
+          <p:cNvPr id="115" name="Google Shape;115;p11"/>
+          <p:cNvSpPr/>
+          <p:nvPr/>
+        </p:nvSpPr>
+        <p:spPr>
+          <a:xfrm>
+            <a:off x="1270160" y="1092200"/>
+            <a:ext cx="2781410" cy="257153"/>
+          </a:xfrm>
+          <a:prstGeom prst="rect">
+            <a:avLst/>
+          </a:prstGeom>
+          <a:noFill/>
+          <a:ln>
+            <a:noFill/>
+          </a:ln>
+        </p:spPr>
+        <p:txBody>
+          <a:bodyPr anchorCtr="0" anchor="ctr" bIns="91425" lIns="91425" spcFirstLastPara="1" rIns="91425" wrap="square" tIns="91425">
+            <a:noAutofit/>
+          </a:bodyPr>
+          <a:lstStyle/>
+          <a:p>
+            <a:pPr indent="0" lvl="0" marL="0" rtl="0" algn="l">
+              <a:spcBef>
+                <a:spcPts val="0"/>
+              </a:spcBef>
+              <a:spcAft>
+                <a:spcPts val="0"/>
+              </a:spcAft>
+              <a:buNone/>
+            </a:pPr>
+            <a:r>
+              <a:t/>
+            </a:r>
+            <a:endParaRPr/>
+          </a:p>
+        </p:txBody>
+      </p:sp>
+      <p:sp>
+        <p:nvSpPr>
+          <p:cNvPr id="116" name="Google Shape;116;p11"/>
+          <p:cNvSpPr txBox="1"/>
+          <p:nvPr>
+            <p:ph idx="1" type="body"/>
+          </p:nvPr>
+        </p:nvSpPr>
+        <p:spPr>
+          <a:xfrm>
+            <a:off x="4861023" y="1806008"/>
+            <a:ext cx="3862387" cy="1531483"/>
+          </a:xfrm>
+          <a:prstGeom prst="rect">
+            <a:avLst/>
+          </a:prstGeom>
+          <a:noFill/>
+          <a:ln>
+            <a:noFill/>
+          </a:ln>
+        </p:spPr>
+        <p:txBody>
+          <a:bodyPr anchorCtr="0" anchor="t" bIns="45700" lIns="91425" spcFirstLastPara="1" rIns="91425" wrap="square" tIns="45700">
+            <a:noAutofit/>
+          </a:bodyPr>
+          <a:lstStyle>
+            <a:lvl1pPr indent="-228600" lvl="0" marL="457200" marR="0" rtl="0" algn="l">
+              <a:lnSpc>
+                <a:spcPct val="90000"/>
+              </a:lnSpc>
+              <a:spcBef>
+                <a:spcPts val="750"/>
+              </a:spcBef>
+              <a:spcAft>
+                <a:spcPts val="0"/>
+              </a:spcAft>
+              <a:buClr>
+                <a:schemeClr val="dk1"/>
+              </a:buClr>
+              <a:buSzPts val="1400"/>
+              <a:buFont typeface="Arial"/>
+              <a:buNone/>
+              <a:defRPr b="0" i="0" sz="1400" u="none" cap="none" strike="noStrike">
+                <a:solidFill>
+                  <a:schemeClr val="dk1"/>
+                </a:solidFill>
+                <a:latin typeface="Play"/>
+                <a:ea typeface="Play"/>
+                <a:cs typeface="Play"/>
+                <a:sym typeface="Play"/>
+              </a:defRPr>
+            </a:lvl1pPr>
+            <a:lvl2pPr indent="-342900" lvl="1" marL="914400" marR="0" rtl="0" algn="l">
+              <a:lnSpc>
+                <a:spcPct val="90000"/>
+              </a:lnSpc>
+              <a:spcBef>
+                <a:spcPts val="375"/>
+              </a:spcBef>
+              <a:spcAft>
+                <a:spcPts val="0"/>
+              </a:spcAft>
+              <a:buClr>
+                <a:schemeClr val="dk1"/>
+              </a:buClr>
+              <a:buSzPts val="1800"/>
+              <a:buFont typeface="Arial"/>
+              <a:buChar char="•"/>
+              <a:defRPr b="0" i="0" sz="1800" u="none" cap="none" strike="noStrike">
+                <a:solidFill>
+                  <a:schemeClr val="dk1"/>
+                </a:solidFill>
+                <a:latin typeface="Calibri"/>
+                <a:ea typeface="Calibri"/>
+                <a:cs typeface="Calibri"/>
+                <a:sym typeface="Calibri"/>
+              </a:defRPr>
+            </a:lvl2pPr>
+            <a:lvl3pPr indent="-323850" lvl="2" marL="1371600" marR="0" rtl="0" algn="l">
+              <a:lnSpc>
+                <a:spcPct val="90000"/>
+              </a:lnSpc>
+              <a:spcBef>
+                <a:spcPts val="375"/>
+              </a:spcBef>
+              <a:spcAft>
+                <a:spcPts val="0"/>
+              </a:spcAft>
+              <a:buClr>
+                <a:schemeClr val="dk1"/>
+              </a:buClr>
+              <a:buSzPts val="1500"/>
+              <a:buFont typeface="Arial"/>
+              <a:buChar char="•"/>
+              <a:defRPr b="0" i="0" sz="1500" u="none" cap="none" strike="noStrike">
+                <a:solidFill>
+                  <a:schemeClr val="dk1"/>
+                </a:solidFill>
+                <a:latin typeface="Calibri"/>
+                <a:ea typeface="Calibri"/>
+                <a:cs typeface="Calibri"/>
+                <a:sym typeface="Calibri"/>
+              </a:defRPr>
+            </a:lvl3pPr>
+            <a:lvl4pPr indent="-314325" lvl="3" marL="1828800" marR="0" rtl="0" algn="l">
+              <a:lnSpc>
+                <a:spcPct val="90000"/>
+              </a:lnSpc>
+              <a:spcBef>
+                <a:spcPts val="375"/>
+              </a:spcBef>
+              <a:spcAft>
+                <a:spcPts val="0"/>
+              </a:spcAft>
+              <a:buClr>
+                <a:schemeClr val="dk1"/>
+              </a:buClr>
+              <a:buSzPts val="1350"/>
+              <a:buFont typeface="Arial"/>
+              <a:buChar char="•"/>
+              <a:defRPr b="0" i="0" sz="1350" u="none" cap="none" strike="noStrike">
+                <a:solidFill>
+                  <a:schemeClr val="dk1"/>
+                </a:solidFill>
+                <a:latin typeface="Calibri"/>
+                <a:ea typeface="Calibri"/>
+                <a:cs typeface="Calibri"/>
+                <a:sym typeface="Calibri"/>
+              </a:defRPr>
+            </a:lvl4pPr>
+            <a:lvl5pPr indent="-314325" lvl="4" marL="2286000" marR="0" rtl="0" algn="l">
+              <a:lnSpc>
+                <a:spcPct val="90000"/>
+              </a:lnSpc>
+              <a:spcBef>
+                <a:spcPts val="375"/>
+              </a:spcBef>
+              <a:spcAft>
+                <a:spcPts val="0"/>
+              </a:spcAft>
+              <a:buClr>
+                <a:schemeClr val="dk1"/>
+              </a:buClr>
+              <a:buSzPts val="1350"/>
+              <a:buFont typeface="Arial"/>
+              <a:buChar char="•"/>
+              <a:defRPr b="0" i="0" sz="1350" u="none" cap="none" strike="noStrike">
+                <a:solidFill>
+                  <a:schemeClr val="dk1"/>
+                </a:solidFill>
+                <a:latin typeface="Calibri"/>
+                <a:ea typeface="Calibri"/>
+                <a:cs typeface="Calibri"/>
+                <a:sym typeface="Calibri"/>
+              </a:defRPr>
+            </a:lvl5pPr>
+            <a:lvl6pPr indent="-314325" lvl="5" marL="2743200" marR="0" rtl="0" algn="l">
+              <a:lnSpc>
+                <a:spcPct val="90000"/>
+              </a:lnSpc>
+              <a:spcBef>
+                <a:spcPts val="375"/>
+              </a:spcBef>
+              <a:spcAft>
+                <a:spcPts val="0"/>
+              </a:spcAft>
+              <a:buClr>
+                <a:schemeClr val="dk1"/>
+              </a:buClr>
+              <a:buSzPts val="1350"/>
+              <a:buFont typeface="Arial"/>
+              <a:buChar char="•"/>
+              <a:defRPr b="0" i="0" sz="1350" u="none" cap="none" strike="noStrike">
+                <a:solidFill>
+                  <a:schemeClr val="dk1"/>
+                </a:solidFill>
+                <a:latin typeface="Calibri"/>
+                <a:ea typeface="Calibri"/>
+                <a:cs typeface="Calibri"/>
+                <a:sym typeface="Calibri"/>
+              </a:defRPr>
+            </a:lvl6pPr>
+            <a:lvl7pPr indent="-314325" lvl="6" marL="3200400" marR="0" rtl="0" algn="l">
+              <a:lnSpc>
+                <a:spcPct val="90000"/>
+              </a:lnSpc>
+              <a:spcBef>
+                <a:spcPts val="375"/>
+              </a:spcBef>
+              <a:spcAft>
+                <a:spcPts val="0"/>
+              </a:spcAft>
+              <a:buClr>
+                <a:schemeClr val="dk1"/>
+              </a:buClr>
+              <a:buSzPts val="1350"/>
+              <a:buFont typeface="Arial"/>
+              <a:buChar char="•"/>
+              <a:defRPr b="0" i="0" sz="1350" u="none" cap="none" strike="noStrike">
+                <a:solidFill>
+                  <a:schemeClr val="dk1"/>
+                </a:solidFill>
+                <a:latin typeface="Calibri"/>
+                <a:ea typeface="Calibri"/>
+                <a:cs typeface="Calibri"/>
+                <a:sym typeface="Calibri"/>
+              </a:defRPr>
+            </a:lvl7pPr>
+            <a:lvl8pPr indent="-314325" lvl="7" marL="3657600" marR="0" rtl="0" algn="l">
+              <a:lnSpc>
+                <a:spcPct val="90000"/>
+              </a:lnSpc>
+              <a:spcBef>
+                <a:spcPts val="375"/>
+              </a:spcBef>
+              <a:spcAft>
+                <a:spcPts val="0"/>
+              </a:spcAft>
+              <a:buClr>
+                <a:schemeClr val="dk1"/>
+              </a:buClr>
+              <a:buSzPts val="1350"/>
+              <a:buFont typeface="Arial"/>
+              <a:buChar char="•"/>
+              <a:defRPr b="0" i="0" sz="1350" u="none" cap="none" strike="noStrike">
+                <a:solidFill>
+                  <a:schemeClr val="dk1"/>
+                </a:solidFill>
+                <a:latin typeface="Calibri"/>
+                <a:ea typeface="Calibri"/>
+                <a:cs typeface="Calibri"/>
+                <a:sym typeface="Calibri"/>
+              </a:defRPr>
+            </a:lvl8pPr>
+            <a:lvl9pPr indent="-314325" lvl="8" marL="4114800" marR="0" rtl="0" algn="l">
+              <a:lnSpc>
+                <a:spcPct val="90000"/>
+              </a:lnSpc>
+              <a:spcBef>
+                <a:spcPts val="375"/>
+              </a:spcBef>
+              <a:spcAft>
+                <a:spcPts val="0"/>
+              </a:spcAft>
+              <a:buClr>
+                <a:schemeClr val="dk1"/>
+              </a:buClr>
+              <a:buSzPts val="1350"/>
+              <a:buFont typeface="Arial"/>
+              <a:buChar char="•"/>
+              <a:defRPr b="0" i="0" sz="1350" u="none" cap="none" strike="noStrike">
+                <a:solidFill>
+                  <a:schemeClr val="dk1"/>
+                </a:solidFill>
+                <a:latin typeface="Calibri"/>
+                <a:ea typeface="Calibri"/>
+                <a:cs typeface="Calibri"/>
+                <a:sym typeface="Calibri"/>
+              </a:defRPr>
+            </a:lvl9pPr>
+          </a:lstStyle>
+          <a:p/>
+        </p:txBody>
+      </p:sp>
+      <p:sp>
+        <p:nvSpPr>
+          <p:cNvPr id="117" name="Google Shape;117;p11"/>
+          <p:cNvSpPr txBox="1"/>
+          <p:nvPr>
+            <p:ph idx="2" type="body"/>
+          </p:nvPr>
+        </p:nvSpPr>
+        <p:spPr>
+          <a:xfrm>
+            <a:off x="283720" y="3472980"/>
+            <a:ext cx="4288279" cy="285750"/>
+          </a:xfrm>
+          <a:prstGeom prst="rect">
+            <a:avLst/>
+          </a:prstGeom>
+          <a:noFill/>
+          <a:ln>
+            <a:noFill/>
+          </a:ln>
+        </p:spPr>
+        <p:txBody>
+          <a:bodyPr anchorCtr="0" anchor="t" bIns="45700" lIns="91425" spcFirstLastPara="1" rIns="91425" wrap="square" tIns="45700">
+            <a:noAutofit/>
+          </a:bodyPr>
+          <a:lstStyle>
+            <a:lvl1pPr indent="-228600" lvl="0" marL="457200" marR="0" rtl="0" algn="l">
+              <a:lnSpc>
+                <a:spcPct val="90000"/>
+              </a:lnSpc>
+              <a:spcBef>
+                <a:spcPts val="750"/>
+              </a:spcBef>
+              <a:spcAft>
+                <a:spcPts val="0"/>
+              </a:spcAft>
+              <a:buClr>
+                <a:schemeClr val="dk1"/>
+              </a:buClr>
+              <a:buSzPts val="2000"/>
+              <a:buFont typeface="Arial"/>
+              <a:buNone/>
+              <a:defRPr b="0" i="0" sz="2000" u="none" cap="none" strike="noStrike">
+                <a:solidFill>
+                  <a:schemeClr val="dk1"/>
+                </a:solidFill>
+                <a:latin typeface="Play"/>
+                <a:ea typeface="Play"/>
+                <a:cs typeface="Play"/>
+                <a:sym typeface="Play"/>
+              </a:defRPr>
+            </a:lvl1pPr>
+            <a:lvl2pPr indent="-342900" lvl="1" marL="914400" marR="0" rtl="0" algn="l">
+              <a:lnSpc>
+                <a:spcPct val="90000"/>
+              </a:lnSpc>
+              <a:spcBef>
+                <a:spcPts val="375"/>
+              </a:spcBef>
+              <a:spcAft>
+                <a:spcPts val="0"/>
+              </a:spcAft>
+              <a:buClr>
+                <a:schemeClr val="dk1"/>
+              </a:buClr>
+              <a:buSzPts val="1800"/>
+              <a:buFont typeface="Arial"/>
+              <a:buChar char="•"/>
+              <a:defRPr b="0" i="0" sz="1800" u="none" cap="none" strike="noStrike">
+                <a:solidFill>
+                  <a:schemeClr val="dk1"/>
+                </a:solidFill>
+                <a:latin typeface="Calibri"/>
+                <a:ea typeface="Calibri"/>
+                <a:cs typeface="Calibri"/>
+                <a:sym typeface="Calibri"/>
+              </a:defRPr>
+            </a:lvl2pPr>
+            <a:lvl3pPr indent="-323850" lvl="2" marL="1371600" marR="0" rtl="0" algn="l">
+              <a:lnSpc>
+                <a:spcPct val="90000"/>
+              </a:lnSpc>
+              <a:spcBef>
+                <a:spcPts val="375"/>
+              </a:spcBef>
+              <a:spcAft>
+                <a:spcPts val="0"/>
+              </a:spcAft>
+              <a:buClr>
+                <a:schemeClr val="dk1"/>
+              </a:buClr>
+              <a:buSzPts val="1500"/>
+              <a:buFont typeface="Arial"/>
+              <a:buChar char="•"/>
+              <a:defRPr b="0" i="0" sz="1500" u="none" cap="none" strike="noStrike">
+                <a:solidFill>
+                  <a:schemeClr val="dk1"/>
+                </a:solidFill>
+                <a:latin typeface="Calibri"/>
+                <a:ea typeface="Calibri"/>
+                <a:cs typeface="Calibri"/>
+                <a:sym typeface="Calibri"/>
+              </a:defRPr>
+            </a:lvl3pPr>
+            <a:lvl4pPr indent="-314325" lvl="3" marL="1828800" marR="0" rtl="0" algn="l">
+              <a:lnSpc>
+                <a:spcPct val="90000"/>
+              </a:lnSpc>
+              <a:spcBef>
+                <a:spcPts val="375"/>
+              </a:spcBef>
+              <a:spcAft>
+                <a:spcPts val="0"/>
+              </a:spcAft>
+              <a:buClr>
+                <a:schemeClr val="dk1"/>
+              </a:buClr>
+              <a:buSzPts val="1350"/>
+              <a:buFont typeface="Arial"/>
+              <a:buChar char="•"/>
+              <a:defRPr b="0" i="0" sz="1350" u="none" cap="none" strike="noStrike">
+                <a:solidFill>
+                  <a:schemeClr val="dk1"/>
+                </a:solidFill>
+                <a:latin typeface="Calibri"/>
+                <a:ea typeface="Calibri"/>
+                <a:cs typeface="Calibri"/>
+                <a:sym typeface="Calibri"/>
+              </a:defRPr>
+            </a:lvl4pPr>
+            <a:lvl5pPr indent="-314325" lvl="4" marL="2286000" marR="0" rtl="0" algn="l">
+              <a:lnSpc>
+                <a:spcPct val="90000"/>
+              </a:lnSpc>
+              <a:spcBef>
+                <a:spcPts val="375"/>
+              </a:spcBef>
+              <a:spcAft>
+                <a:spcPts val="0"/>
+              </a:spcAft>
+              <a:buClr>
+                <a:schemeClr val="dk1"/>
+              </a:buClr>
+              <a:buSzPts val="1350"/>
+              <a:buFont typeface="Arial"/>
+              <a:buChar char="•"/>
+              <a:defRPr b="0" i="0" sz="1350" u="none" cap="none" strike="noStrike">
+                <a:solidFill>
+                  <a:schemeClr val="dk1"/>
+                </a:solidFill>
+                <a:latin typeface="Calibri"/>
+                <a:ea typeface="Calibri"/>
+                <a:cs typeface="Calibri"/>
+                <a:sym typeface="Calibri"/>
+              </a:defRPr>
+            </a:lvl5pPr>
+            <a:lvl6pPr indent="-314325" lvl="5" marL="2743200" marR="0" rtl="0" algn="l">
+              <a:lnSpc>
+                <a:spcPct val="90000"/>
+              </a:lnSpc>
+              <a:spcBef>
+                <a:spcPts val="375"/>
+              </a:spcBef>
+              <a:spcAft>
+                <a:spcPts val="0"/>
+              </a:spcAft>
+              <a:buClr>
+                <a:schemeClr val="dk1"/>
+              </a:buClr>
+              <a:buSzPts val="1350"/>
+              <a:buFont typeface="Arial"/>
+              <a:buChar char="•"/>
+              <a:defRPr b="0" i="0" sz="1350" u="none" cap="none" strike="noStrike">
+                <a:solidFill>
+                  <a:schemeClr val="dk1"/>
+                </a:solidFill>
+                <a:latin typeface="Calibri"/>
+                <a:ea typeface="Calibri"/>
+                <a:cs typeface="Calibri"/>
+                <a:sym typeface="Calibri"/>
+              </a:defRPr>
+            </a:lvl6pPr>
+            <a:lvl7pPr indent="-314325" lvl="6" marL="3200400" marR="0" rtl="0" algn="l">
+              <a:lnSpc>
+                <a:spcPct val="90000"/>
+              </a:lnSpc>
+              <a:spcBef>
+                <a:spcPts val="375"/>
+              </a:spcBef>
+              <a:spcAft>
+                <a:spcPts val="0"/>
+              </a:spcAft>
+              <a:buClr>
+                <a:schemeClr val="dk1"/>
+              </a:buClr>
+              <a:buSzPts val="1350"/>
+              <a:buFont typeface="Arial"/>
+              <a:buChar char="•"/>
+              <a:defRPr b="0" i="0" sz="1350" u="none" cap="none" strike="noStrike">
+                <a:solidFill>
+                  <a:schemeClr val="dk1"/>
+                </a:solidFill>
+                <a:latin typeface="Calibri"/>
+                <a:ea typeface="Calibri"/>
+                <a:cs typeface="Calibri"/>
+                <a:sym typeface="Calibri"/>
+              </a:defRPr>
+            </a:lvl7pPr>
+            <a:lvl8pPr indent="-314325" lvl="7" marL="3657600" marR="0" rtl="0" algn="l">
+              <a:lnSpc>
+                <a:spcPct val="90000"/>
+              </a:lnSpc>
+              <a:spcBef>
+                <a:spcPts val="375"/>
+              </a:spcBef>
+              <a:spcAft>
+                <a:spcPts val="0"/>
+              </a:spcAft>
+              <a:buClr>
+                <a:schemeClr val="dk1"/>
+              </a:buClr>
+              <a:buSzPts val="1350"/>
+              <a:buFont typeface="Arial"/>
+              <a:buChar char="•"/>
+              <a:defRPr b="0" i="0" sz="1350" u="none" cap="none" strike="noStrike">
+                <a:solidFill>
+                  <a:schemeClr val="dk1"/>
+                </a:solidFill>
+                <a:latin typeface="Calibri"/>
+                <a:ea typeface="Calibri"/>
+                <a:cs typeface="Calibri"/>
+                <a:sym typeface="Calibri"/>
+              </a:defRPr>
+            </a:lvl8pPr>
+            <a:lvl9pPr indent="-314325" lvl="8" marL="4114800" marR="0" rtl="0" algn="l">
+              <a:lnSpc>
+                <a:spcPct val="90000"/>
+              </a:lnSpc>
+              <a:spcBef>
+                <a:spcPts val="375"/>
+              </a:spcBef>
+              <a:spcAft>
+                <a:spcPts val="0"/>
+              </a:spcAft>
+              <a:buClr>
+                <a:schemeClr val="dk1"/>
+              </a:buClr>
+              <a:buSzPts val="1350"/>
+              <a:buFont typeface="Arial"/>
+              <a:buChar char="•"/>
+              <a:defRPr b="0" i="0" sz="1350" u="none" cap="none" strike="noStrike">
+                <a:solidFill>
+                  <a:schemeClr val="dk1"/>
+                </a:solidFill>
+                <a:latin typeface="Calibri"/>
+                <a:ea typeface="Calibri"/>
+                <a:cs typeface="Calibri"/>
+                <a:sym typeface="Calibri"/>
+              </a:defRPr>
+            </a:lvl9pPr>
+          </a:lstStyle>
+          <a:p/>
+        </p:txBody>
+      </p:sp>
+      <p:sp>
+        <p:nvSpPr>
+          <p:cNvPr id="118" name="Google Shape;118;p11"/>
+          <p:cNvSpPr txBox="1"/>
+          <p:nvPr>
+            <p:ph idx="3" type="body"/>
+          </p:nvPr>
+        </p:nvSpPr>
+        <p:spPr>
+          <a:xfrm>
+            <a:off x="283720" y="3908425"/>
+            <a:ext cx="4288279" cy="285750"/>
+          </a:xfrm>
+          <a:prstGeom prst="rect">
+            <a:avLst/>
+          </a:prstGeom>
+          <a:noFill/>
+          <a:ln>
+            <a:noFill/>
+          </a:ln>
+        </p:spPr>
+        <p:txBody>
+          <a:bodyPr anchorCtr="0" anchor="t" bIns="45700" lIns="91425" spcFirstLastPara="1" rIns="91425" wrap="square" tIns="45700">
+            <a:noAutofit/>
+          </a:bodyPr>
+          <a:lstStyle>
+            <a:lvl1pPr indent="-228600" lvl="0" marL="457200" marR="0" rtl="0" algn="l">
+              <a:lnSpc>
+                <a:spcPct val="90000"/>
+              </a:lnSpc>
+              <a:spcBef>
+                <a:spcPts val="750"/>
+              </a:spcBef>
+              <a:spcAft>
+                <a:spcPts val="0"/>
+              </a:spcAft>
+              <a:buClr>
+                <a:schemeClr val="lt2"/>
+              </a:buClr>
+              <a:buSzPts val="1200"/>
+              <a:buFont typeface="Arial"/>
+              <a:buNone/>
+              <a:defRPr b="0" i="0" sz="1200" u="none" cap="none" strike="noStrike">
+                <a:solidFill>
+                  <a:schemeClr val="lt2"/>
+                </a:solidFill>
+                <a:latin typeface="Play"/>
+                <a:ea typeface="Play"/>
+                <a:cs typeface="Play"/>
+                <a:sym typeface="Play"/>
+              </a:defRPr>
+            </a:lvl1pPr>
+            <a:lvl2pPr indent="-342900" lvl="1" marL="914400" marR="0" rtl="0" algn="l">
+              <a:lnSpc>
+                <a:spcPct val="90000"/>
+              </a:lnSpc>
+              <a:spcBef>
+                <a:spcPts val="375"/>
+              </a:spcBef>
+              <a:spcAft>
+                <a:spcPts val="0"/>
+              </a:spcAft>
+              <a:buClr>
+                <a:schemeClr val="dk1"/>
+              </a:buClr>
+              <a:buSzPts val="1800"/>
+              <a:buFont typeface="Arial"/>
+              <a:buChar char="•"/>
+              <a:defRPr b="0" i="0" sz="1800" u="none" cap="none" strike="noStrike">
+                <a:solidFill>
+                  <a:schemeClr val="dk1"/>
+                </a:solidFill>
+                <a:latin typeface="Calibri"/>
+                <a:ea typeface="Calibri"/>
+                <a:cs typeface="Calibri"/>
+                <a:sym typeface="Calibri"/>
+              </a:defRPr>
+            </a:lvl2pPr>
+            <a:lvl3pPr indent="-323850" lvl="2" marL="1371600" marR="0" rtl="0" algn="l">
+              <a:lnSpc>
+                <a:spcPct val="90000"/>
+              </a:lnSpc>
+              <a:spcBef>
+                <a:spcPts val="375"/>
+              </a:spcBef>
+              <a:spcAft>
+                <a:spcPts val="0"/>
+              </a:spcAft>
+              <a:buClr>
+                <a:schemeClr val="dk1"/>
+              </a:buClr>
+              <a:buSzPts val="1500"/>
+              <a:buFont typeface="Arial"/>
+              <a:buChar char="•"/>
+              <a:defRPr b="0" i="0" sz="1500" u="none" cap="none" strike="noStrike">
+                <a:solidFill>
+                  <a:schemeClr val="dk1"/>
+                </a:solidFill>
+                <a:latin typeface="Calibri"/>
+                <a:ea typeface="Calibri"/>
+                <a:cs typeface="Calibri"/>
+                <a:sym typeface="Calibri"/>
+              </a:defRPr>
+            </a:lvl3pPr>
+            <a:lvl4pPr indent="-314325" lvl="3" marL="1828800" marR="0" rtl="0" algn="l">
+              <a:lnSpc>
+                <a:spcPct val="90000"/>
+              </a:lnSpc>
+              <a:spcBef>
+                <a:spcPts val="375"/>
+              </a:spcBef>
+              <a:spcAft>
+                <a:spcPts val="0"/>
+              </a:spcAft>
+              <a:buClr>
+                <a:schemeClr val="dk1"/>
+              </a:buClr>
+              <a:buSzPts val="1350"/>
+              <a:buFont typeface="Arial"/>
+              <a:buChar char="•"/>
+              <a:defRPr b="0" i="0" sz="1350" u="none" cap="none" strike="noStrike">
+                <a:solidFill>
+                  <a:schemeClr val="dk1"/>
+                </a:solidFill>
+                <a:latin typeface="Calibri"/>
+                <a:ea typeface="Calibri"/>
+                <a:cs typeface="Calibri"/>
+                <a:sym typeface="Calibri"/>
+              </a:defRPr>
+            </a:lvl4pPr>
+            <a:lvl5pPr indent="-314325" lvl="4" marL="2286000" marR="0" rtl="0" algn="l">
+              <a:lnSpc>
+                <a:spcPct val="90000"/>
+              </a:lnSpc>
+              <a:spcBef>
+                <a:spcPts val="375"/>
+              </a:spcBef>
+              <a:spcAft>
+                <a:spcPts val="0"/>
+              </a:spcAft>
+              <a:buClr>
+                <a:schemeClr val="dk1"/>
+              </a:buClr>
+              <a:buSzPts val="1350"/>
+              <a:buFont typeface="Arial"/>
+              <a:buChar char="•"/>
+              <a:defRPr b="0" i="0" sz="1350" u="none" cap="none" strike="noStrike">
+                <a:solidFill>
+                  <a:schemeClr val="dk1"/>
+                </a:solidFill>
+                <a:latin typeface="Calibri"/>
+                <a:ea typeface="Calibri"/>
+                <a:cs typeface="Calibri"/>
+                <a:sym typeface="Calibri"/>
+              </a:defRPr>
+            </a:lvl5pPr>
+            <a:lvl6pPr indent="-314325" lvl="5" marL="2743200" marR="0" rtl="0" algn="l">
+              <a:lnSpc>
+                <a:spcPct val="90000"/>
+              </a:lnSpc>
+              <a:spcBef>
+                <a:spcPts val="375"/>
+              </a:spcBef>
+              <a:spcAft>
+                <a:spcPts val="0"/>
+              </a:spcAft>
+              <a:buClr>
+                <a:schemeClr val="dk1"/>
+              </a:buClr>
+              <a:buSzPts val="1350"/>
+              <a:buFont typeface="Arial"/>
+              <a:buChar char="•"/>
+              <a:defRPr b="0" i="0" sz="1350" u="none" cap="none" strike="noStrike">
+                <a:solidFill>
+                  <a:schemeClr val="dk1"/>
+                </a:solidFill>
+                <a:latin typeface="Calibri"/>
+                <a:ea typeface="Calibri"/>
+                <a:cs typeface="Calibri"/>
+                <a:sym typeface="Calibri"/>
+              </a:defRPr>
+            </a:lvl6pPr>
+            <a:lvl7pPr indent="-314325" lvl="6" marL="3200400" marR="0" rtl="0" algn="l">
+              <a:lnSpc>
+                <a:spcPct val="90000"/>
+              </a:lnSpc>
+              <a:spcBef>
+                <a:spcPts val="375"/>
+              </a:spcBef>
+              <a:spcAft>
+                <a:spcPts val="0"/>
+              </a:spcAft>
+              <a:buClr>
+                <a:schemeClr val="dk1"/>
+              </a:buClr>
+              <a:buSzPts val="1350"/>
+              <a:buFont typeface="Arial"/>
+              <a:buChar char="•"/>
+              <a:defRPr b="0" i="0" sz="1350" u="none" cap="none" strike="noStrike">
+                <a:solidFill>
+                  <a:schemeClr val="dk1"/>
+                </a:solidFill>
+                <a:latin typeface="Calibri"/>
+                <a:ea typeface="Calibri"/>
+                <a:cs typeface="Calibri"/>
+                <a:sym typeface="Calibri"/>
+              </a:defRPr>
+            </a:lvl7pPr>
+            <a:lvl8pPr indent="-314325" lvl="7" marL="3657600" marR="0" rtl="0" algn="l">
+              <a:lnSpc>
+                <a:spcPct val="90000"/>
+              </a:lnSpc>
+              <a:spcBef>
+                <a:spcPts val="375"/>
+              </a:spcBef>
+              <a:spcAft>
+                <a:spcPts val="0"/>
+              </a:spcAft>
+              <a:buClr>
+                <a:schemeClr val="dk1"/>
+              </a:buClr>
+              <a:buSzPts val="1350"/>
+              <a:buFont typeface="Arial"/>
+              <a:buChar char="•"/>
+              <a:defRPr b="0" i="0" sz="1350" u="none" cap="none" strike="noStrike">
+                <a:solidFill>
+                  <a:schemeClr val="dk1"/>
+                </a:solidFill>
+                <a:latin typeface="Calibri"/>
+                <a:ea typeface="Calibri"/>
+                <a:cs typeface="Calibri"/>
+                <a:sym typeface="Calibri"/>
+              </a:defRPr>
+            </a:lvl8pPr>
+            <a:lvl9pPr indent="-314325" lvl="8" marL="4114800" marR="0" rtl="0" algn="l">
+              <a:lnSpc>
+                <a:spcPct val="90000"/>
+              </a:lnSpc>
+              <a:spcBef>
+                <a:spcPts val="375"/>
+              </a:spcBef>
+              <a:spcAft>
+                <a:spcPts val="0"/>
+              </a:spcAft>
+              <a:buClr>
+                <a:schemeClr val="dk1"/>
+              </a:buClr>
+              <a:buSzPts val="1350"/>
+              <a:buFont typeface="Arial"/>
+              <a:buChar char="•"/>
+              <a:defRPr b="0" i="0" sz="1350" u="none" cap="none" strike="noStrike">
+                <a:solidFill>
+                  <a:schemeClr val="dk1"/>
+                </a:solidFill>
+                <a:latin typeface="Calibri"/>
+                <a:ea typeface="Calibri"/>
+                <a:cs typeface="Calibri"/>
+                <a:sym typeface="Calibri"/>
+              </a:defRPr>
+            </a:lvl9pPr>
+          </a:lstStyle>
+          <a:p/>
+        </p:txBody>
+      </p:sp>
+      <p:sp>
+        <p:nvSpPr>
+          <p:cNvPr id="119" name="Google Shape;119;p11"/>
+          <p:cNvSpPr txBox="1"/>
+          <p:nvPr>
+            <p:ph type="title"/>
+          </p:nvPr>
+        </p:nvSpPr>
+        <p:spPr>
+          <a:xfrm>
+            <a:off x="177971" y="282949"/>
+            <a:ext cx="4058749" cy="753371"/>
+          </a:xfrm>
+          <a:prstGeom prst="rect">
+            <a:avLst/>
+          </a:prstGeom>
+          <a:noFill/>
+          <a:ln>
+            <a:noFill/>
+          </a:ln>
+        </p:spPr>
+        <p:txBody>
+          <a:bodyPr anchorCtr="0" anchor="t" bIns="45700" lIns="91425" spcFirstLastPara="1" rIns="91425" wrap="square" tIns="45700">
+            <a:noAutofit/>
+          </a:bodyPr>
+          <a:lstStyle>
+            <a:lvl1pPr lvl="0" marR="0" rtl="0" algn="l">
+              <a:lnSpc>
+                <a:spcPct val="90000"/>
+              </a:lnSpc>
+              <a:spcBef>
+                <a:spcPts val="0"/>
+              </a:spcBef>
+              <a:spcAft>
+                <a:spcPts val="0"/>
+              </a:spcAft>
+              <a:buClr>
+                <a:schemeClr val="dk1"/>
+              </a:buClr>
+              <a:buSzPts val="2400"/>
+              <a:buFont typeface="Play"/>
+              <a:buNone/>
+              <a:defRPr b="0" i="0" sz="2400" u="none" cap="none" strike="noStrike">
+                <a:solidFill>
+                  <a:schemeClr val="dk1"/>
+                </a:solidFill>
+                <a:latin typeface="Play"/>
+                <a:ea typeface="Play"/>
+                <a:cs typeface="Play"/>
+                <a:sym typeface="Play"/>
+              </a:defRPr>
+            </a:lvl1pPr>
+            <a:lvl2pPr lvl="1">
+              <a:spcBef>
+                <a:spcPts val="0"/>
+              </a:spcBef>
+              <a:spcAft>
+                <a:spcPts val="0"/>
+              </a:spcAft>
+              <a:buSzPts val="1400"/>
+              <a:buNone/>
+              <a:defRPr sz="1800"/>
+            </a:lvl2pPr>
+            <a:lvl3pPr lvl="2">
+              <a:spcBef>
+                <a:spcPts val="0"/>
+              </a:spcBef>
+              <a:spcAft>
+                <a:spcPts val="0"/>
+              </a:spcAft>
+              <a:buSzPts val="1400"/>
+              <a:buNone/>
+              <a:defRPr sz="1800"/>
+            </a:lvl3pPr>
+            <a:lvl4pPr lvl="3">
+              <a:spcBef>
+                <a:spcPts val="0"/>
+              </a:spcBef>
+              <a:spcAft>
+                <a:spcPts val="0"/>
+              </a:spcAft>
+              <a:buSzPts val="1400"/>
+              <a:buNone/>
+              <a:defRPr sz="1800"/>
+            </a:lvl4pPr>
+            <a:lvl5pPr lvl="4">
+              <a:spcBef>
+                <a:spcPts val="0"/>
+              </a:spcBef>
+              <a:spcAft>
+                <a:spcPts val="0"/>
+              </a:spcAft>
+              <a:buSzPts val="1400"/>
+              <a:buNone/>
+              <a:defRPr sz="1800"/>
+            </a:lvl5pPr>
+            <a:lvl6pPr lvl="5">
+              <a:spcBef>
+                <a:spcPts val="0"/>
+              </a:spcBef>
+              <a:spcAft>
+                <a:spcPts val="0"/>
+              </a:spcAft>
+              <a:buSzPts val="1400"/>
+              <a:buNone/>
+              <a:defRPr sz="1800"/>
+            </a:lvl6pPr>
+            <a:lvl7pPr lvl="6">
+              <a:spcBef>
+                <a:spcPts val="0"/>
+              </a:spcBef>
+              <a:spcAft>
+                <a:spcPts val="0"/>
+              </a:spcAft>
+              <a:buSzPts val="1400"/>
+              <a:buNone/>
+              <a:defRPr sz="1800"/>
+            </a:lvl7pPr>
+            <a:lvl8pPr lvl="7">
+              <a:spcBef>
+                <a:spcPts val="0"/>
+              </a:spcBef>
+              <a:spcAft>
+                <a:spcPts val="0"/>
+              </a:spcAft>
+              <a:buSzPts val="1400"/>
+              <a:buNone/>
+              <a:defRPr sz="1800"/>
+            </a:lvl8pPr>
+            <a:lvl9pPr lvl="8">
+              <a:spcBef>
+                <a:spcPts val="0"/>
+              </a:spcBef>
+              <a:spcAft>
+                <a:spcPts val="0"/>
+              </a:spcAft>
+              <a:buSzPts val="1400"/>
+              <a:buNone/>
+              <a:defRPr sz="1800"/>
             </a:lvl9pPr>
           </a:lstStyle>
           <a:p/>
@@ -5883,6 +7029,7 @@
   <p:clrMap accent1="accent1" accent2="accent2" accent3="accent3" accent4="accent4" accent5="accent5" accent6="accent6" bg1="lt1" bg2="dk2" tx1="dk1" tx2="lt2" folHlink="folHlink" hlink="hlink"/>
   <p:sldLayoutIdLst>
     <p:sldLayoutId id="2147483655" r:id="rId5"/>
+    <p:sldLayoutId id="2147483656" r:id="rId6"/>
     <p:sldLayoutId id="2147483658" r:id="rId8"/>
     <p:sldLayoutId id="2147483675" r:id="rId25"/>
   </p:sldLayoutIdLst>
@@ -6635,7 +7782,7 @@
             </a:pPr>
             <a:r>
               <a:rPr sz="1800"/>
-              <a:t>Ускорение работы сотрудников за счет ИИ</a:t>
+              <a:t>Ускорение работы сотрудников через ИИ</a:t>
             </a:r>
             <a:endParaRPr/>
           </a:p>
@@ -6686,7 +7833,7 @@
             </a:pPr>
             <a:r>
               <a:rPr sz="1100"/>
-              <a:t>Автоматизация поддержки и ускорение работы сотрудников</a:t>
+              <a:t>Инициатива по внедрению ИИ-помощника во внутренний портал</a:t>
             </a:r>
             <a:endParaRPr/>
           </a:p>
@@ -6701,6 +7848,246 @@
 </file>
 
 <file path=ppt/slides/slide10.xml><?xml version="1.0" encoding="utf-8"?>
+<p:sld xmlns:a="http://schemas.openxmlformats.org/drawingml/2006/main" xmlns:p="http://schemas.openxmlformats.org/presentationml/2006/main" xmlns:r="http://schemas.openxmlformats.org/officeDocument/2006/relationships">
+  <p:cSld>
+    <p:spTree>
+      <p:nvGrpSpPr>
+        <p:cNvPr id="1" name=""/>
+        <p:cNvGrpSpPr/>
+        <p:nvPr/>
+      </p:nvGrpSpPr>
+      <p:grpSpPr/>
+      <p:sp>
+        <p:nvSpPr>
+          <p:cNvPr id="515" name="BrandDeck Text 515"/>
+          <p:cNvSpPr txBox="1"/>
+          <p:nvPr>
+            <p:ph type="title"/>
+          </p:nvPr>
+        </p:nvSpPr>
+        <p:spPr>
+          <a:xfrm>
+            <a:off x="177971" y="282949"/>
+            <a:ext cx="4058749" cy="753371"/>
+          </a:xfrm>
+          <a:prstGeom prst="rect">
+            <a:avLst/>
+          </a:prstGeom>
+          <a:noFill/>
+          <a:ln>
+            <a:noFill/>
+          </a:ln>
+        </p:spPr>
+        <p:txBody>
+          <a:bodyPr anchorCtr="0" anchor="t" bIns="45700" lIns="91425" spcFirstLastPara="1" rIns="91425" wrap="square" tIns="45700">
+            <a:normAutofit/>
+          </a:bodyPr>
+          <a:lstStyle/>
+          <a:p>
+            <a:pPr indent="0" marL="0" rtl="0" algn="l">
+              <a:lnSpc>
+                <a:spcPct val="115000"/>
+              </a:lnSpc>
+              <a:spcBef>
+                <a:spcPts val="0"/>
+              </a:spcBef>
+              <a:spcAft>
+                <a:spcPts val="211"/>
+              </a:spcAft>
+              <a:buClr>
+                <a:schemeClr val="dk1"/>
+              </a:buClr>
+              <a:buSzPts val="2400"/>
+              <a:buFont typeface="Play"/>
+              <a:buNone/>
+            </a:pPr>
+            <a:r>
+              <a:rPr sz="1410"/>
+              <a:t>Измеряем время поиска и долю закрытых обращений без специалиста</a:t>
+            </a:r>
+            <a:endParaRPr/>
+          </a:p>
+        </p:txBody>
+      </p:sp>
+      <p:graphicFrame>
+        <p:nvGraphicFramePr>
+          <p:cNvPr id="518" name="BrandDeck Table"/>
+          <p:cNvGraphicFramePr>
+            <a:graphicFrameLocks noGrp="1"/>
+          </p:cNvGraphicFramePr>
+          <p:nvPr/>
+        </p:nvGraphicFramePr>
+        <p:xfrm>
+          <a:off x="585216" y="1173480"/>
+          <a:ext cx="5129783" cy="3553968"/>
+        </p:xfrm>
+        <a:graphic>
+          <a:graphicData uri="http://schemas.openxmlformats.org/drawingml/2006/table">
+            <a:tbl>
+              <a:tblPr firstRow="1" bandRow="1">
+                <a:tableStyleId>{5C22544A-7EE6-4342-B048-85BDC9FD1C3A}</a:tableStyleId>
+              </a:tblPr>
+              <a:tblGrid>
+                <a:gridCol w="2564891"/>
+                <a:gridCol w="2564892"/>
+              </a:tblGrid>
+              <a:tr h="1039368">
+                <a:tc>
+                  <a:txBody>
+                    <a:bodyPr/>
+                    <a:lstStyle/>
+                    <a:p>
+                      <a:pPr algn="l"/>
+                      <a:r>
+                        <a:rPr sz="1320" b="1">
+                          <a:solidFill>
+                            <a:srgbClr val="FFFFFF"/>
+                          </a:solidFill>
+                          <a:latin typeface="Play"/>
+                        </a:rPr>
+                        <a:t>Метрика</a:t>
+                      </a:r>
+                    </a:p>
+                  </a:txBody>
+                  <a:tcPr marL="54864" marR="54864" anchor="ctr">
+                    <a:solidFill>
+                      <a:srgbClr val="006DEB"/>
+                    </a:solidFill>
+                  </a:tcPr>
+                </a:tc>
+                <a:tc>
+                  <a:txBody>
+                    <a:bodyPr/>
+                    <a:lstStyle/>
+                    <a:p>
+                      <a:pPr algn="l"/>
+                      <a:r>
+                        <a:rPr sz="1320" b="1">
+                          <a:solidFill>
+                            <a:srgbClr val="FFFFFF"/>
+                          </a:solidFill>
+                          <a:latin typeface="Play"/>
+                        </a:rPr>
+                        <a:t>Что измеряем</a:t>
+                      </a:r>
+                    </a:p>
+                  </a:txBody>
+                  <a:tcPr marL="54864" marR="54864" anchor="ctr">
+                    <a:solidFill>
+                      <a:srgbClr val="006DEB"/>
+                    </a:solidFill>
+                  </a:tcPr>
+                </a:tc>
+              </a:tr>
+              <a:tr h="1257300">
+                <a:tc>
+                  <a:txBody>
+                    <a:bodyPr/>
+                    <a:lstStyle/>
+                    <a:p>
+                      <a:pPr algn="l"/>
+                      <a:r>
+                        <a:rPr sz="1320" b="0">
+                          <a:solidFill>
+                            <a:srgbClr val="111111"/>
+                          </a:solidFill>
+                          <a:latin typeface="Play"/>
+                        </a:rPr>
+                        <a:t>Время поиска ответа</a:t>
+                      </a:r>
+                    </a:p>
+                  </a:txBody>
+                  <a:tcPr marL="54864" marR="54864" anchor="ctr">
+                    <a:solidFill>
+                      <a:srgbClr val="FEFFFF"/>
+                    </a:solidFill>
+                  </a:tcPr>
+                </a:tc>
+                <a:tc>
+                  <a:txBody>
+                    <a:bodyPr/>
+                    <a:lstStyle/>
+                    <a:p>
+                      <a:pPr algn="l"/>
+                      <a:r>
+                        <a:rPr sz="1320" b="0">
+                          <a:solidFill>
+                            <a:srgbClr val="111111"/>
+                          </a:solidFill>
+                          <a:latin typeface="Play"/>
+                        </a:rPr>
+                        <a:t>Сколько минут тратит сотрудник на инструкцию</a:t>
+                      </a:r>
+                    </a:p>
+                  </a:txBody>
+                  <a:tcPr marL="54864" marR="54864" anchor="ctr">
+                    <a:solidFill>
+                      <a:srgbClr val="FEFFFF"/>
+                    </a:solidFill>
+                  </a:tcPr>
+                </a:tc>
+              </a:tr>
+              <a:tr h="1257300">
+                <a:tc>
+                  <a:txBody>
+                    <a:bodyPr/>
+                    <a:lstStyle/>
+                    <a:p>
+                      <a:pPr algn="l"/>
+                      <a:r>
+                        <a:rPr sz="1320" b="0">
+                          <a:solidFill>
+                            <a:srgbClr val="111111"/>
+                          </a:solidFill>
+                          <a:latin typeface="Play"/>
+                        </a:rPr>
+                        <a:t>Доля закрытых обращений</a:t>
+                      </a:r>
+                    </a:p>
+                  </a:txBody>
+                  <a:tcPr marL="54864" marR="54864" anchor="ctr">
+                    <a:solidFill>
+                      <a:srgbClr val="FEFFFF"/>
+                    </a:solidFill>
+                  </a:tcPr>
+                </a:tc>
+                <a:tc>
+                  <a:txBody>
+                    <a:bodyPr/>
+                    <a:lstStyle/>
+                    <a:p>
+                      <a:pPr algn="l"/>
+                      <a:r>
+                        <a:rPr sz="1320" b="0">
+                          <a:solidFill>
+                            <a:srgbClr val="111111"/>
+                          </a:solidFill>
+                          <a:latin typeface="Play"/>
+                        </a:rPr>
+                        <a:t>Процент вопросов, решенных без специалиста</a:t>
+                      </a:r>
+                    </a:p>
+                  </a:txBody>
+                  <a:tcPr marL="54864" marR="54864" anchor="ctr">
+                    <a:solidFill>
+                      <a:srgbClr val="FEFFFF"/>
+                    </a:solidFill>
+                  </a:tcPr>
+                </a:tc>
+              </a:tr>
+            </a:tbl>
+          </a:graphicData>
+        </a:graphic>
+      </p:graphicFrame>
+    </p:spTree>
+  </p:cSld>
+  <p:clrMapOvr>
+    <a:masterClrMapping/>
+  </p:clrMapOvr>
+</p:sld>
+</file>
+
+<file path=ppt/slides/slide11.xml><?xml version="1.0" encoding="utf-8"?>
 <p:sld xmlns:a="http://schemas.openxmlformats.org/drawingml/2006/main" xmlns:p="http://schemas.openxmlformats.org/presentationml/2006/main" xmlns:r="http://schemas.openxmlformats.org/officeDocument/2006/relationships">
   <p:cSld>
     <p:spTree>
@@ -6756,7 +8143,7 @@
             </a:pPr>
             <a:r>
               <a:rPr sz="1800"/>
-              <a:t>Срок пилота составляет 6 недель</a:t>
+              <a:t>Требуется команда из 3 человек для реализации</a:t>
             </a:r>
             <a:endParaRPr/>
           </a:p>
@@ -6764,60 +8151,33 @@
       </p:sp>
       <p:grpSp>
         <p:nvGrpSpPr>
-          <p:cNvPr id="2" name="BrandDeck Diagram process" descr="process: Старт пилота Запуск в 2 подразделения; Период работы Длительность 6 недель; Финал пилота Анализ результатов"/>
+          <p:cNvPr id="2" name="BrandDeck Diagram hierarchy" descr="hierarchy: Команда 3 специалиста для реализации пилота; Задача Выделение ресурсов для запуска проекта"/>
           <p:cNvGrpSpPr/>
           <p:nvPr/>
         </p:nvGrpSpPr>
         <p:grpSpPr>
           <a:xfrm>
-            <a:off x="4637088" y="703710"/>
-            <a:ext cx="3862387" cy="3682237"/>
-            <a:chOff x="4637088" y="703710"/>
-            <a:chExt cx="3862387" cy="3682237"/>
+            <a:off x="4637088" y="955527"/>
+            <a:ext cx="3862386" cy="3002234"/>
+            <a:chOff x="4637088" y="955527"/>
+            <a:chExt cx="3862386" cy="3002234"/>
           </a:xfrm>
         </p:grpSpPr>
         <p:sp>
           <p:nvSpPr>
-            <p:cNvPr id="508" name="BrandDeck Diagram Connector"/>
+            <p:cNvPr id="508" name="BrandDeck Diagram Root"/>
             <p:cNvSpPr/>
             <p:nvPr/>
           </p:nvSpPr>
           <p:spPr>
             <a:xfrm>
-              <a:off x="4876660" y="1299128"/>
-              <a:ext cx="32918" cy="2491401"/>
+              <a:off x="5757180" y="955527"/>
+              <a:ext cx="1622202" cy="731520"/>
             </a:xfrm>
-            <a:prstGeom prst="rect">
-              <a:avLst/>
-            </a:prstGeom>
-            <a:solidFill>
-              <a:srgbClr val="58A6FF"/>
-            </a:solidFill>
-            <a:ln>
-              <a:noFill/>
-            </a:ln>
-          </p:spPr>
-          <p:txBody>
-            <a:bodyPr rtlCol="0" anchor="ctr"/>
-            <a:lstStyle/>
-            <a:p>
-              <a:pPr algn="ctr"/>
-            </a:p>
-          </p:txBody>
-        </p:sp>
-        <p:sp>
-          <p:nvSpPr>
-            <p:cNvPr id="509" name="BrandDeck Diagram Step 1 Badge"/>
-            <p:cNvSpPr/>
-            <p:nvPr/>
-          </p:nvSpPr>
-          <p:spPr>
-            <a:xfrm>
-              <a:off x="4637088" y="1043096"/>
-              <a:ext cx="512064" cy="512064"/>
-            </a:xfrm>
-            <a:prstGeom prst="ellipse">
-              <a:avLst/>
+            <a:prstGeom prst="roundRect">
+              <a:avLst>
+                <a:gd name="adj" fmla="val 18000"/>
+              </a:avLst>
             </a:prstGeom>
             <a:solidFill>
               <a:srgbClr val="006DEB"/>
@@ -6827,7 +8187,7 @@
             </a:ln>
           </p:spPr>
           <p:txBody>
-            <a:bodyPr rtlCol="0" anchor="ctr" wrap="square" lIns="0" tIns="0" rIns="0" bIns="0">
+            <a:bodyPr rtlCol="0" anchor="ctr" wrap="square" lIns="109728" tIns="36576" rIns="109728" bIns="36576">
               <a:noAutofit/>
             </a:bodyPr>
             <a:lstStyle/>
@@ -6838,31 +8198,136 @@
                 </a:lnSpc>
               </a:pPr>
               <a:r>
-                <a:rPr sz="1410" b="1">
+                <a:rPr sz="1600" b="1">
                   <a:solidFill>
                     <a:srgbClr val="FFFFFF"/>
                   </a:solidFill>
                   <a:latin typeface="Play"/>
                 </a:rPr>
-                <a:t>01</a:t>
+                <a:t>Команда из 3 человек</a:t>
               </a:r>
             </a:p>
           </p:txBody>
         </p:sp>
+        <p:cxnSp>
+          <p:nvCxnSpPr>
+            <p:cNvPr id="509" name="BrandDeck Diagram Link Root"/>
+            <p:cNvCxnSpPr/>
+            <p:nvPr/>
+          </p:nvCxnSpPr>
+          <p:spPr>
+            <a:xfrm>
+              <a:off x="6568281" y="1687047"/>
+              <a:ext cx="0" cy="261597"/>
+            </a:xfrm>
+            <a:prstGeom prst="line">
+              <a:avLst/>
+            </a:prstGeom>
+            <a:ln w="19050">
+              <a:solidFill>
+                <a:srgbClr val="58A6FF"/>
+              </a:solidFill>
+            </a:ln>
+          </p:spPr>
+          <p:style>
+            <a:lnRef idx="2">
+              <a:schemeClr val="accent1"/>
+            </a:lnRef>
+            <a:fillRef idx="0">
+              <a:schemeClr val="accent1"/>
+            </a:fillRef>
+            <a:effectRef idx="1">
+              <a:schemeClr val="accent1"/>
+            </a:effectRef>
+            <a:fontRef idx="minor">
+              <a:schemeClr val="tx1"/>
+            </a:fontRef>
+          </p:style>
+        </p:cxnSp>
+        <p:cxnSp>
+          <p:nvCxnSpPr>
+            <p:cNvPr id="510" name="BrandDeck Diagram Link Bus"/>
+            <p:cNvCxnSpPr/>
+            <p:nvPr/>
+          </p:nvCxnSpPr>
+          <p:spPr>
+            <a:xfrm>
+              <a:off x="5575252" y="1948644"/>
+              <a:ext cx="1986058" cy="0"/>
+            </a:xfrm>
+            <a:prstGeom prst="line">
+              <a:avLst/>
+            </a:prstGeom>
+            <a:ln w="19050">
+              <a:solidFill>
+                <a:srgbClr val="58A6FF"/>
+              </a:solidFill>
+            </a:ln>
+          </p:spPr>
+          <p:style>
+            <a:lnRef idx="2">
+              <a:schemeClr val="accent1"/>
+            </a:lnRef>
+            <a:fillRef idx="0">
+              <a:schemeClr val="accent1"/>
+            </a:fillRef>
+            <a:effectRef idx="1">
+              <a:schemeClr val="accent1"/>
+            </a:effectRef>
+            <a:fontRef idx="minor">
+              <a:schemeClr val="tx1"/>
+            </a:fontRef>
+          </p:style>
+        </p:cxnSp>
+        <p:cxnSp>
+          <p:nvCxnSpPr>
+            <p:cNvPr id="511" name="BrandDeck Diagram Link 1"/>
+            <p:cNvCxnSpPr/>
+            <p:nvPr/>
+          </p:nvCxnSpPr>
+          <p:spPr>
+            <a:xfrm>
+              <a:off x="5575252" y="1948644"/>
+              <a:ext cx="0" cy="261598"/>
+            </a:xfrm>
+            <a:prstGeom prst="line">
+              <a:avLst/>
+            </a:prstGeom>
+            <a:ln w="19050">
+              <a:solidFill>
+                <a:srgbClr val="58A6FF"/>
+              </a:solidFill>
+            </a:ln>
+          </p:spPr>
+          <p:style>
+            <a:lnRef idx="2">
+              <a:schemeClr val="accent1"/>
+            </a:lnRef>
+            <a:fillRef idx="0">
+              <a:schemeClr val="accent1"/>
+            </a:fillRef>
+            <a:effectRef idx="1">
+              <a:schemeClr val="accent1"/>
+            </a:effectRef>
+            <a:fontRef idx="minor">
+              <a:schemeClr val="tx1"/>
+            </a:fontRef>
+          </p:style>
+        </p:cxnSp>
         <p:sp>
           <p:nvSpPr>
-            <p:cNvPr id="510" name="BrandDeck Diagram Detail Card 1"/>
+            <p:cNvPr id="512" name="BrandDeck Diagram Card 1"/>
             <p:cNvSpPr/>
             <p:nvPr/>
           </p:nvSpPr>
           <p:spPr>
             <a:xfrm>
-              <a:off x="5258880" y="703710"/>
-              <a:ext cx="3240595" cy="1190836"/>
+              <a:off x="4637088" y="2210242"/>
+              <a:ext cx="1876329" cy="1747519"/>
             </a:xfrm>
             <a:prstGeom prst="roundRect">
               <a:avLst>
-                <a:gd name="adj" fmla="val 12000"/>
+                <a:gd name="adj" fmla="val 6000"/>
               </a:avLst>
             </a:prstGeom>
             <a:solidFill>
@@ -6882,14 +8347,43 @@
         </p:sp>
         <p:sp>
           <p:nvSpPr>
-            <p:cNvPr id="511" name="BrandDeck Diagram Text 1"/>
+            <p:cNvPr id="513" name="BrandDeck Diagram Marker 1"/>
+            <p:cNvSpPr/>
+            <p:nvPr/>
+          </p:nvSpPr>
+          <p:spPr>
+            <a:xfrm>
+              <a:off x="4765104" y="2319970"/>
+              <a:ext cx="548640" cy="45720"/>
+            </a:xfrm>
+            <a:prstGeom prst="rect">
+              <a:avLst/>
+            </a:prstGeom>
+            <a:solidFill>
+              <a:srgbClr val="0077FF"/>
+            </a:solidFill>
+            <a:ln>
+              <a:noFill/>
+            </a:ln>
+          </p:spPr>
+          <p:txBody>
+            <a:bodyPr rtlCol="0" anchor="ctr"/>
+            <a:lstStyle/>
+            <a:p>
+              <a:pPr algn="ctr"/>
+            </a:p>
+          </p:txBody>
+        </p:sp>
+        <p:sp>
+          <p:nvSpPr>
+            <p:cNvPr id="514" name="BrandDeck Diagram Text 1"/>
             <p:cNvSpPr txBox="1"/>
             <p:nvPr/>
           </p:nvSpPr>
           <p:spPr>
             <a:xfrm>
-              <a:off x="5350320" y="703710"/>
-              <a:ext cx="3149155" cy="1190836"/>
+              <a:off x="4728528" y="2447986"/>
+              <a:ext cx="1693449" cy="1418336"/>
             </a:xfrm>
             <a:prstGeom prst="rect">
               <a:avLst/>
@@ -6897,7 +8391,7 @@
             <a:noFill/>
           </p:spPr>
           <p:txBody>
-            <a:bodyPr wrap="square" anchor="ctr" lIns="36576" tIns="18288" rIns="36576" bIns="18288">
+            <a:bodyPr wrap="square" anchor="t" lIns="36576" tIns="18288" rIns="36576" bIns="18288">
               <a:noAutofit/>
             </a:bodyPr>
             <a:lstStyle/>
@@ -6914,7 +8408,7 @@
                   </a:solidFill>
                   <a:latin typeface="Play"/>
                 </a:rPr>
-                <a:t>Старт пилота</a:t>
+                <a:t>Команда</a:t>
               </a:r>
             </a:p>
             <a:p>
@@ -6933,69 +8427,60 @@
                   </a:solidFill>
                   <a:latin typeface="Play"/>
                 </a:rPr>
-                <a:t>Запуск в 2 подразделения</a:t>
+                <a:t>3 специалиста для реализации пилота</a:t>
               </a:r>
             </a:p>
           </p:txBody>
         </p:sp>
+        <p:cxnSp>
+          <p:nvCxnSpPr>
+            <p:cNvPr id="515" name="BrandDeck Diagram Link 2"/>
+            <p:cNvCxnSpPr/>
+            <p:nvPr/>
+          </p:nvCxnSpPr>
+          <p:spPr>
+            <a:xfrm>
+              <a:off x="7561310" y="1948644"/>
+              <a:ext cx="0" cy="261598"/>
+            </a:xfrm>
+            <a:prstGeom prst="line">
+              <a:avLst/>
+            </a:prstGeom>
+            <a:ln w="19050">
+              <a:solidFill>
+                <a:srgbClr val="58A6FF"/>
+              </a:solidFill>
+            </a:ln>
+          </p:spPr>
+          <p:style>
+            <a:lnRef idx="2">
+              <a:schemeClr val="accent1"/>
+            </a:lnRef>
+            <a:fillRef idx="0">
+              <a:schemeClr val="accent1"/>
+            </a:fillRef>
+            <a:effectRef idx="1">
+              <a:schemeClr val="accent1"/>
+            </a:effectRef>
+            <a:fontRef idx="minor">
+              <a:schemeClr val="tx1"/>
+            </a:fontRef>
+          </p:style>
+        </p:cxnSp>
         <p:sp>
           <p:nvSpPr>
-            <p:cNvPr id="512" name="BrandDeck Diagram Step 2 Badge"/>
+            <p:cNvPr id="516" name="BrandDeck Diagram Card 2"/>
             <p:cNvSpPr/>
             <p:nvPr/>
           </p:nvSpPr>
           <p:spPr>
             <a:xfrm>
-              <a:off x="4637088" y="2288797"/>
-              <a:ext cx="512064" cy="512064"/>
-            </a:xfrm>
-            <a:prstGeom prst="ellipse">
-              <a:avLst/>
-            </a:prstGeom>
-            <a:solidFill>
-              <a:srgbClr val="006DEB"/>
-            </a:solidFill>
-            <a:ln>
-              <a:noFill/>
-            </a:ln>
-          </p:spPr>
-          <p:txBody>
-            <a:bodyPr rtlCol="0" anchor="ctr" wrap="square" lIns="0" tIns="0" rIns="0" bIns="0">
-              <a:noAutofit/>
-            </a:bodyPr>
-            <a:lstStyle/>
-            <a:p>
-              <a:pPr algn="ctr">
-                <a:lnSpc>
-                  <a:spcPct val="110000"/>
-                </a:lnSpc>
-              </a:pPr>
-              <a:r>
-                <a:rPr sz="1410" b="1">
-                  <a:solidFill>
-                    <a:srgbClr val="FFFFFF"/>
-                  </a:solidFill>
-                  <a:latin typeface="Play"/>
-                </a:rPr>
-                <a:t>02</a:t>
-              </a:r>
-            </a:p>
-          </p:txBody>
-        </p:sp>
-        <p:sp>
-          <p:nvSpPr>
-            <p:cNvPr id="513" name="BrandDeck Diagram Detail Card 2"/>
-            <p:cNvSpPr/>
-            <p:nvPr/>
-          </p:nvSpPr>
-          <p:spPr>
-            <a:xfrm>
-              <a:off x="5258880" y="1949410"/>
-              <a:ext cx="3240595" cy="1190836"/>
+              <a:off x="6623145" y="2210242"/>
+              <a:ext cx="1876329" cy="1747519"/>
             </a:xfrm>
             <a:prstGeom prst="roundRect">
               <a:avLst>
-                <a:gd name="adj" fmla="val 12000"/>
+                <a:gd name="adj" fmla="val 6000"/>
               </a:avLst>
             </a:prstGeom>
             <a:solidFill>
@@ -7015,14 +8500,43 @@
         </p:sp>
         <p:sp>
           <p:nvSpPr>
-            <p:cNvPr id="514" name="BrandDeck Diagram Text 2"/>
+            <p:cNvPr id="517" name="BrandDeck Diagram Marker 2"/>
+            <p:cNvSpPr/>
+            <p:nvPr/>
+          </p:nvSpPr>
+          <p:spPr>
+            <a:xfrm>
+              <a:off x="6751161" y="2319970"/>
+              <a:ext cx="548640" cy="45720"/>
+            </a:xfrm>
+            <a:prstGeom prst="rect">
+              <a:avLst/>
+            </a:prstGeom>
+            <a:solidFill>
+              <a:srgbClr val="0077FF"/>
+            </a:solidFill>
+            <a:ln>
+              <a:noFill/>
+            </a:ln>
+          </p:spPr>
+          <p:txBody>
+            <a:bodyPr rtlCol="0" anchor="ctr"/>
+            <a:lstStyle/>
+            <a:p>
+              <a:pPr algn="ctr"/>
+            </a:p>
+          </p:txBody>
+        </p:sp>
+        <p:sp>
+          <p:nvSpPr>
+            <p:cNvPr id="518" name="BrandDeck Diagram Text 2"/>
             <p:cNvSpPr txBox="1"/>
             <p:nvPr/>
           </p:nvSpPr>
           <p:spPr>
             <a:xfrm>
-              <a:off x="5350320" y="1949410"/>
-              <a:ext cx="3149155" cy="1190836"/>
+              <a:off x="6714585" y="2447986"/>
+              <a:ext cx="1693449" cy="1418336"/>
             </a:xfrm>
             <a:prstGeom prst="rect">
               <a:avLst/>
@@ -7030,7 +8544,7 @@
             <a:noFill/>
           </p:spPr>
           <p:txBody>
-            <a:bodyPr wrap="square" anchor="ctr" lIns="36576" tIns="18288" rIns="36576" bIns="18288">
+            <a:bodyPr wrap="square" anchor="t" lIns="36576" tIns="18288" rIns="36576" bIns="18288">
               <a:noAutofit/>
             </a:bodyPr>
             <a:lstStyle/>
@@ -7047,7 +8561,7 @@
                   </a:solidFill>
                   <a:latin typeface="Play"/>
                 </a:rPr>
-                <a:t>Период работы</a:t>
+                <a:t>Задача</a:t>
               </a:r>
             </a:p>
             <a:p>
@@ -7066,607 +8580,7 @@
                   </a:solidFill>
                   <a:latin typeface="Play"/>
                 </a:rPr>
-                <a:t>Длительность 6 недель</a:t>
-              </a:r>
-            </a:p>
-          </p:txBody>
-        </p:sp>
-        <p:sp>
-          <p:nvSpPr>
-            <p:cNvPr id="515" name="BrandDeck Diagram Step 3 Badge"/>
-            <p:cNvSpPr/>
-            <p:nvPr/>
-          </p:nvSpPr>
-          <p:spPr>
-            <a:xfrm>
-              <a:off x="4637088" y="3534497"/>
-              <a:ext cx="512064" cy="512064"/>
-            </a:xfrm>
-            <a:prstGeom prst="ellipse">
-              <a:avLst/>
-            </a:prstGeom>
-            <a:solidFill>
-              <a:srgbClr val="006DEB"/>
-            </a:solidFill>
-            <a:ln>
-              <a:noFill/>
-            </a:ln>
-          </p:spPr>
-          <p:txBody>
-            <a:bodyPr rtlCol="0" anchor="ctr" wrap="square" lIns="0" tIns="0" rIns="0" bIns="0">
-              <a:noAutofit/>
-            </a:bodyPr>
-            <a:lstStyle/>
-            <a:p>
-              <a:pPr algn="ctr">
-                <a:lnSpc>
-                  <a:spcPct val="110000"/>
-                </a:lnSpc>
-              </a:pPr>
-              <a:r>
-                <a:rPr sz="1410" b="1">
-                  <a:solidFill>
-                    <a:srgbClr val="FFFFFF"/>
-                  </a:solidFill>
-                  <a:latin typeface="Play"/>
-                </a:rPr>
-                <a:t>03</a:t>
-              </a:r>
-            </a:p>
-          </p:txBody>
-        </p:sp>
-        <p:sp>
-          <p:nvSpPr>
-            <p:cNvPr id="516" name="BrandDeck Diagram Detail Card 3"/>
-            <p:cNvSpPr/>
-            <p:nvPr/>
-          </p:nvSpPr>
-          <p:spPr>
-            <a:xfrm>
-              <a:off x="5258880" y="3195111"/>
-              <a:ext cx="3240595" cy="1190836"/>
-            </a:xfrm>
-            <a:prstGeom prst="roundRect">
-              <a:avLst>
-                <a:gd name="adj" fmla="val 12000"/>
-              </a:avLst>
-            </a:prstGeom>
-            <a:solidFill>
-              <a:srgbClr val="E8F3FF"/>
-            </a:solidFill>
-            <a:ln>
-              <a:noFill/>
-            </a:ln>
-          </p:spPr>
-          <p:txBody>
-            <a:bodyPr rtlCol="0" anchor="ctr"/>
-            <a:lstStyle/>
-            <a:p>
-              <a:pPr algn="ctr"/>
-            </a:p>
-          </p:txBody>
-        </p:sp>
-        <p:sp>
-          <p:nvSpPr>
-            <p:cNvPr id="517" name="BrandDeck Diagram Text 3"/>
-            <p:cNvSpPr txBox="1"/>
-            <p:nvPr/>
-          </p:nvSpPr>
-          <p:spPr>
-            <a:xfrm>
-              <a:off x="5350320" y="3195111"/>
-              <a:ext cx="3149155" cy="1190836"/>
-            </a:xfrm>
-            <a:prstGeom prst="rect">
-              <a:avLst/>
-            </a:prstGeom>
-            <a:noFill/>
-          </p:spPr>
-          <p:txBody>
-            <a:bodyPr wrap="square" anchor="ctr" lIns="36576" tIns="18288" rIns="36576" bIns="18288">
-              <a:noAutofit/>
-            </a:bodyPr>
-            <a:lstStyle/>
-            <a:p>
-              <a:pPr algn="l">
-                <a:lnSpc>
-                  <a:spcPct val="110000"/>
-                </a:lnSpc>
-              </a:pPr>
-              <a:r>
-                <a:rPr sz="1600" b="1">
-                  <a:solidFill>
-                    <a:srgbClr val="000000"/>
-                  </a:solidFill>
-                  <a:latin typeface="Play"/>
-                </a:rPr>
-                <a:t>Финал пилота</a:t>
-              </a:r>
-            </a:p>
-            <a:p>
-              <a:pPr algn="l">
-                <a:lnSpc>
-                  <a:spcPct val="110000"/>
-                </a:lnSpc>
-                <a:spcBef>
-                  <a:spcPts val="400"/>
-                </a:spcBef>
-              </a:pPr>
-              <a:r>
-                <a:rPr sz="1600" b="0">
-                  <a:solidFill>
-                    <a:srgbClr val="000000"/>
-                  </a:solidFill>
-                  <a:latin typeface="Play"/>
-                </a:rPr>
-                <a:t>Анализ результатов</a:t>
-              </a:r>
-            </a:p>
-          </p:txBody>
-        </p:sp>
-      </p:grpSp>
-    </p:spTree>
-  </p:cSld>
-  <p:clrMapOvr>
-    <a:masterClrMapping/>
-  </p:clrMapOvr>
-</p:sld>
-</file>
-
-<file path=ppt/slides/slide11.xml><?xml version="1.0" encoding="utf-8"?>
-<p:sld xmlns:a="http://schemas.openxmlformats.org/drawingml/2006/main" xmlns:p="http://schemas.openxmlformats.org/presentationml/2006/main" xmlns:r="http://schemas.openxmlformats.org/officeDocument/2006/relationships">
-  <p:cSld>
-    <p:spTree>
-      <p:nvGrpSpPr>
-        <p:cNvPr id="1" name=""/>
-        <p:cNvGrpSpPr/>
-        <p:nvPr/>
-      </p:nvGrpSpPr>
-      <p:grpSpPr/>
-      <p:sp>
-        <p:nvSpPr>
-          <p:cNvPr id="2" name="BrandDeck Text 2"/>
-          <p:cNvSpPr>
-            <a:spLocks noGrp="1"/>
-          </p:cNvSpPr>
-          <p:nvPr>
-            <p:ph type="title"/>
-          </p:nvPr>
-        </p:nvSpPr>
-        <p:spPr>
-          <a:xfrm>
-            <a:off x="430360" y="338829"/>
-            <a:ext cx="3945697" cy="753371"/>
-          </a:xfrm>
-        </p:spPr>
-        <p:txBody>
-          <a:bodyPr wrap="square" anchor="t">
-            <a:normAutofit/>
-          </a:bodyPr>
-          <a:lstStyle/>
-          <a:p>
-            <a:pPr algn="l">
-              <a:lnSpc>
-                <a:spcPct val="115000"/>
-              </a:lnSpc>
-              <a:spcBef>
-                <a:spcPts val="0"/>
-              </a:spcBef>
-              <a:spcAft>
-                <a:spcPts val="270"/>
-              </a:spcAft>
-            </a:pPr>
-            <a:r>
-              <a:rPr sz="1800"/>
-              <a:t>Измерим время поиска и долю закрытых обращений</a:t>
-            </a:r>
-          </a:p>
-        </p:txBody>
-      </p:sp>
-      <p:grpSp>
-        <p:nvGrpSpPr>
-          <p:cNvPr id="3" name="BrandDeck Diagram icon_grid" descr="icon_grid: Время поиска Сокращение с 30 минут до минимума; Доля закрытых Процент вопросов без участия специалиста"/>
-          <p:cNvGrpSpPr/>
-          <p:nvPr/>
-        </p:nvGrpSpPr>
-        <p:grpSpPr>
-          <a:xfrm>
-            <a:off x="4637088" y="824281"/>
-            <a:ext cx="3862387" cy="3347618"/>
-            <a:chOff x="4637088" y="824281"/>
-            <a:chExt cx="3862387" cy="3347618"/>
-          </a:xfrm>
-        </p:grpSpPr>
-        <p:sp>
-          <p:nvSpPr>
-            <p:cNvPr id="4" name="BrandDeck Diagram Card 1"/>
-            <p:cNvSpPr/>
-            <p:nvPr/>
-          </p:nvSpPr>
-          <p:spPr>
-            <a:xfrm>
-              <a:off x="4637088" y="824281"/>
-              <a:ext cx="3862387" cy="1618945"/>
-            </a:xfrm>
-            <a:prstGeom prst="roundRect">
-              <a:avLst>
-                <a:gd name="adj" fmla="val 8000"/>
-              </a:avLst>
-            </a:prstGeom>
-            <a:solidFill>
-              <a:srgbClr val="E8F3FF"/>
-            </a:solidFill>
-            <a:ln>
-              <a:noFill/>
-            </a:ln>
-          </p:spPr>
-          <p:txBody>
-            <a:bodyPr rtlCol="0" anchor="ctr"/>
-            <a:lstStyle/>
-            <a:p>
-              <a:pPr algn="ctr"/>
-            </a:p>
-          </p:txBody>
-        </p:sp>
-        <p:sp>
-          <p:nvSpPr>
-            <p:cNvPr id="5" name="BrandDeck Diagram Icon 1 Badge"/>
-            <p:cNvSpPr/>
-            <p:nvPr/>
-          </p:nvSpPr>
-          <p:spPr>
-            <a:xfrm>
-              <a:off x="4856544" y="1379838"/>
-              <a:ext cx="507832" cy="507832"/>
-            </a:xfrm>
-            <a:prstGeom prst="ellipse">
-              <a:avLst/>
-            </a:prstGeom>
-            <a:solidFill>
-              <a:srgbClr val="006DEB"/>
-            </a:solidFill>
-            <a:ln>
-              <a:noFill/>
-            </a:ln>
-          </p:spPr>
-          <p:txBody>
-            <a:bodyPr rtlCol="0" anchor="ctr"/>
-            <a:lstStyle/>
-            <a:p>
-              <a:pPr algn="ctr"/>
-            </a:p>
-          </p:txBody>
-        </p:sp>
-        <p:sp>
-          <p:nvSpPr>
-            <p:cNvPr id="6" name="BrandDeck Icon clock"/>
-            <p:cNvSpPr/>
-            <p:nvPr/>
-          </p:nvSpPr>
-          <p:spPr>
-            <a:xfrm>
-              <a:off x="4968267" y="1491561"/>
-              <a:ext cx="284386" cy="284386"/>
-            </a:xfrm>
-            <a:custGeom>
-              <a:avLst/>
-              <a:gdLst/>
-              <a:ahLst/>
-              <a:cxnLst/>
-              <a:rect l="l" t="t" r="r" b="b"/>
-              <a:pathLst>
-                <a:path w="24000" h="24000" fill="none">
-                  <a:moveTo>
-                    <a:pt x="22000" y="12000"/>
-                  </a:moveTo>
-                  <a:cubicBezTo>
-                    <a:pt x="22000" y="17523"/>
-                    <a:pt x="17523" y="22000"/>
-                    <a:pt x="12000" y="22000"/>
-                  </a:cubicBezTo>
-                  <a:cubicBezTo>
-                    <a:pt x="6477" y="22000"/>
-                    <a:pt x="2000" y="17523"/>
-                    <a:pt x="2000" y="12000"/>
-                  </a:cubicBezTo>
-                  <a:cubicBezTo>
-                    <a:pt x="2000" y="6477"/>
-                    <a:pt x="6477" y="2000"/>
-                    <a:pt x="12000" y="2000"/>
-                  </a:cubicBezTo>
-                  <a:cubicBezTo>
-                    <a:pt x="17523" y="2000"/>
-                    <a:pt x="22000" y="6477"/>
-                    <a:pt x="22000" y="12000"/>
-                  </a:cubicBezTo>
-                  <a:close/>
-                </a:path>
-                <a:path w="24000" h="24000" fill="none">
-                  <a:moveTo>
-                    <a:pt x="12000" y="6000"/>
-                  </a:moveTo>
-                  <a:lnTo>
-                    <a:pt x="12000" y="12000"/>
-                  </a:lnTo>
-                  <a:lnTo>
-                    <a:pt x="16000" y="14000"/>
-                  </a:lnTo>
-                </a:path>
-              </a:pathLst>
-            </a:custGeom>
-            <a:noFill/>
-            <a:ln w="23698" cap="rnd">
-              <a:solidFill>
-                <a:srgbClr val="FFFFFF"/>
-              </a:solidFill>
-              <a:round/>
-            </a:ln>
-          </p:spPr>
-          <p:txBody>
-            <a:bodyPr rtlCol="0" anchor="ctr"/>
-            <a:lstStyle/>
-            <a:p>
-              <a:pPr algn="ctr"/>
-            </a:p>
-          </p:txBody>
-        </p:sp>
-        <p:sp>
-          <p:nvSpPr>
-            <p:cNvPr id="7" name="BrandDeck Diagram Text 1"/>
-            <p:cNvSpPr txBox="1"/>
-            <p:nvPr/>
-          </p:nvSpPr>
-          <p:spPr>
-            <a:xfrm>
-              <a:off x="5496049" y="955955"/>
-              <a:ext cx="2783969" cy="1355598"/>
-            </a:xfrm>
-            <a:prstGeom prst="rect">
-              <a:avLst/>
-            </a:prstGeom>
-            <a:noFill/>
-          </p:spPr>
-          <p:txBody>
-            <a:bodyPr wrap="square" anchor="ctr" lIns="36576" tIns="18288" rIns="36576" bIns="18288">
-              <a:noAutofit/>
-            </a:bodyPr>
-            <a:lstStyle/>
-            <a:p>
-              <a:pPr algn="l">
-                <a:lnSpc>
-                  <a:spcPct val="110000"/>
-                </a:lnSpc>
-              </a:pPr>
-              <a:r>
-                <a:rPr sz="1800" b="1">
-                  <a:solidFill>
-                    <a:srgbClr val="000000"/>
-                  </a:solidFill>
-                  <a:latin typeface="Play"/>
-                </a:rPr>
-                <a:t>Время поиска</a:t>
-              </a:r>
-            </a:p>
-            <a:p>
-              <a:pPr algn="l">
-                <a:lnSpc>
-                  <a:spcPct val="110000"/>
-                </a:lnSpc>
-                <a:spcBef>
-                  <a:spcPts val="450"/>
-                </a:spcBef>
-              </a:pPr>
-              <a:r>
-                <a:rPr sz="1800" b="0">
-                  <a:solidFill>
-                    <a:srgbClr val="000000"/>
-                  </a:solidFill>
-                  <a:latin typeface="Play"/>
-                </a:rPr>
-                <a:t>Сокращение с 30 минут до минимума</a:t>
-              </a:r>
-            </a:p>
-          </p:txBody>
-        </p:sp>
-        <p:sp>
-          <p:nvSpPr>
-            <p:cNvPr id="8" name="BrandDeck Diagram Card 2"/>
-            <p:cNvSpPr/>
-            <p:nvPr/>
-          </p:nvSpPr>
-          <p:spPr>
-            <a:xfrm>
-              <a:off x="4637088" y="2552954"/>
-              <a:ext cx="3862387" cy="1618945"/>
-            </a:xfrm>
-            <a:prstGeom prst="roundRect">
-              <a:avLst>
-                <a:gd name="adj" fmla="val 8000"/>
-              </a:avLst>
-            </a:prstGeom>
-            <a:solidFill>
-              <a:srgbClr val="E8F3FF"/>
-            </a:solidFill>
-            <a:ln>
-              <a:noFill/>
-            </a:ln>
-          </p:spPr>
-          <p:txBody>
-            <a:bodyPr rtlCol="0" anchor="ctr"/>
-            <a:lstStyle/>
-            <a:p>
-              <a:pPr algn="ctr"/>
-            </a:p>
-          </p:txBody>
-        </p:sp>
-        <p:sp>
-          <p:nvSpPr>
-            <p:cNvPr id="9" name="BrandDeck Diagram Icon 2 Badge"/>
-            <p:cNvSpPr/>
-            <p:nvPr/>
-          </p:nvSpPr>
-          <p:spPr>
-            <a:xfrm>
-              <a:off x="4856544" y="3108511"/>
-              <a:ext cx="507832" cy="507832"/>
-            </a:xfrm>
-            <a:prstGeom prst="ellipse">
-              <a:avLst/>
-            </a:prstGeom>
-            <a:solidFill>
-              <a:srgbClr val="006DEB"/>
-            </a:solidFill>
-            <a:ln>
-              <a:noFill/>
-            </a:ln>
-          </p:spPr>
-          <p:txBody>
-            <a:bodyPr rtlCol="0" anchor="ctr"/>
-            <a:lstStyle/>
-            <a:p>
-              <a:pPr algn="ctr"/>
-            </a:p>
-          </p:txBody>
-        </p:sp>
-        <p:sp>
-          <p:nvSpPr>
-            <p:cNvPr id="10" name="BrandDeck Icon chart-pie"/>
-            <p:cNvSpPr/>
-            <p:nvPr/>
-          </p:nvSpPr>
-          <p:spPr>
-            <a:xfrm>
-              <a:off x="4968267" y="3220234"/>
-              <a:ext cx="284386" cy="284386"/>
-            </a:xfrm>
-            <a:custGeom>
-              <a:avLst/>
-              <a:gdLst/>
-              <a:ahLst/>
-              <a:cxnLst/>
-              <a:rect l="l" t="t" r="r" b="b"/>
-              <a:pathLst>
-                <a:path w="24000" h="24000" fill="none">
-                  <a:moveTo>
-                    <a:pt x="21000" y="12000"/>
-                  </a:moveTo>
-                  <a:cubicBezTo>
-                    <a:pt x="21552" y="12000"/>
-                    <a:pt x="22005" y="11551"/>
-                    <a:pt x="21950" y="11002"/>
-                  </a:cubicBezTo>
-                  <a:cubicBezTo>
-                    <a:pt x="21475" y="6269"/>
-                    <a:pt x="17731" y="2525"/>
-                    <a:pt x="12997" y="2051"/>
-                  </a:cubicBezTo>
-                  <a:cubicBezTo>
-                    <a:pt x="12447" y="1996"/>
-                    <a:pt x="11999" y="2449"/>
-                    <a:pt x="11999" y="3001"/>
-                  </a:cubicBezTo>
-                  <a:lnTo>
-                    <a:pt x="11999" y="11001"/>
-                  </a:lnTo>
-                  <a:cubicBezTo>
-                    <a:pt x="11999" y="11553"/>
-                    <a:pt x="12447" y="12001"/>
-                    <a:pt x="12999" y="12001"/>
-                  </a:cubicBezTo>
-                  <a:close/>
-                </a:path>
-                <a:path w="24000" h="24000" fill="none">
-                  <a:moveTo>
-                    <a:pt x="21210" y="15890"/>
-                  </a:moveTo>
-                  <a:cubicBezTo>
-                    <a:pt x="19460" y="20029"/>
-                    <a:pt x="15164" y="22492"/>
-                    <a:pt x="10708" y="21912"/>
-                  </a:cubicBezTo>
-                  <a:cubicBezTo>
-                    <a:pt x="6252" y="21331"/>
-                    <a:pt x="2730" y="17849"/>
-                    <a:pt x="2099" y="13400"/>
-                  </a:cubicBezTo>
-                  <a:cubicBezTo>
-                    <a:pt x="1467" y="8951"/>
-                    <a:pt x="3881" y="4627"/>
-                    <a:pt x="8000" y="2830"/>
-                  </a:cubicBezTo>
-                </a:path>
-              </a:pathLst>
-            </a:custGeom>
-            <a:noFill/>
-            <a:ln w="23698" cap="rnd">
-              <a:solidFill>
-                <a:srgbClr val="FFFFFF"/>
-              </a:solidFill>
-              <a:round/>
-            </a:ln>
-          </p:spPr>
-          <p:txBody>
-            <a:bodyPr rtlCol="0" anchor="ctr"/>
-            <a:lstStyle/>
-            <a:p>
-              <a:pPr algn="ctr"/>
-            </a:p>
-          </p:txBody>
-        </p:sp>
-        <p:sp>
-          <p:nvSpPr>
-            <p:cNvPr id="11" name="BrandDeck Diagram Text 2"/>
-            <p:cNvSpPr txBox="1"/>
-            <p:nvPr/>
-          </p:nvSpPr>
-          <p:spPr>
-            <a:xfrm>
-              <a:off x="5496049" y="2684628"/>
-              <a:ext cx="2783969" cy="1355598"/>
-            </a:xfrm>
-            <a:prstGeom prst="rect">
-              <a:avLst/>
-            </a:prstGeom>
-            <a:noFill/>
-          </p:spPr>
-          <p:txBody>
-            <a:bodyPr wrap="square" anchor="ctr" lIns="36576" tIns="18288" rIns="36576" bIns="18288">
-              <a:noAutofit/>
-            </a:bodyPr>
-            <a:lstStyle/>
-            <a:p>
-              <a:pPr algn="l">
-                <a:lnSpc>
-                  <a:spcPct val="110000"/>
-                </a:lnSpc>
-              </a:pPr>
-              <a:r>
-                <a:rPr sz="1800" b="1">
-                  <a:solidFill>
-                    <a:srgbClr val="000000"/>
-                  </a:solidFill>
-                  <a:latin typeface="Play"/>
-                </a:rPr>
-                <a:t>Доля закрытых</a:t>
-              </a:r>
-            </a:p>
-            <a:p>
-              <a:pPr algn="l">
-                <a:lnSpc>
-                  <a:spcPct val="110000"/>
-                </a:lnSpc>
-                <a:spcBef>
-                  <a:spcPts val="450"/>
-                </a:spcBef>
-              </a:pPr>
-              <a:r>
-                <a:rPr sz="1800" b="0">
-                  <a:solidFill>
-                    <a:srgbClr val="000000"/>
-                  </a:solidFill>
-                  <a:latin typeface="Play"/>
-                </a:rPr>
-                <a:t>Процент вопросов без участия специалиста</a:t>
+                <a:t>Выделение ресурсов для запуска проекта</a:t>
               </a:r>
             </a:p>
           </p:txBody>
@@ -7781,7 +8695,7 @@
             </a:pPr>
             <a:r>
               <a:rPr sz="1600"/>
-              <a:t>Одобрить запуск пилота ИИ-помощника для 2 подразделений.</a:t>
+              <a:t>Запустить пилот в двух подразделениях.</a:t>
             </a:r>
           </a:p>
           <a:p>
@@ -7798,7 +8712,7 @@
             </a:pPr>
             <a:r>
               <a:rPr sz="1600"/>
-              <a:t>Выделить команду из 3 человек для реализации проекта.</a:t>
+              <a:t>Назначить команду из трех человек.</a:t>
             </a:r>
           </a:p>
           <a:p>
@@ -7815,7 +8729,7 @@
             </a:pPr>
             <a:r>
               <a:rPr sz="1600"/>
-              <a:t>Запустить пилот в течение 6 недель для оценки эффективности.</a:t>
+              <a:t>Измерить время поиска и долю закрытых обращений.</a:t>
             </a:r>
           </a:p>
         </p:txBody>
@@ -7850,17 +8764,17 @@
                 <a:spcPts val="0"/>
               </a:spcBef>
               <a:spcAft>
-                <a:spcPts val="165"/>
+                <a:spcPts val="211"/>
               </a:spcAft>
             </a:pPr>
             <a:r>
-              <a:rPr sz="1100">
+              <a:rPr sz="1410">
                 <a:solidFill>
                   <a:srgbClr val="FAFCFF"/>
                 </a:solidFill>
                 <a:latin typeface="Play"/>
               </a:rPr>
-              <a:t>Решение о запуске пилота и выделении команды</a:t>
+              <a:t>Следующие шаги после утверждения</a:t>
             </a:r>
           </a:p>
         </p:txBody>
@@ -7925,16 +8839,16 @@
       </p:sp>
       <p:grpSp>
         <p:nvGrpSpPr>
-          <p:cNvPr id="3" name="BrandDeck Diagram icon_grid" descr="icon_grid: Сотрудник тратит до 30 минут на поиск нужной инструкции.; Рутина по поиску документов отнимает значительное время.; Это замедляет решение рабочих задач и снижает эффективность."/>
+          <p:cNvPr id="3" name="BrandDeck Diagram icon_grid" descr="icon_grid: Сотрудники тратят до 30 минут на поиск нужной инструкции.; Время поиска напрямую влияет на общую эффективность отдела."/>
           <p:cNvGrpSpPr/>
           <p:nvPr/>
         </p:nvGrpSpPr>
         <p:grpSpPr>
           <a:xfrm>
             <a:off x="4637088" y="676278"/>
-            <a:ext cx="3862386" cy="3737102"/>
+            <a:ext cx="3862387" cy="3737102"/>
             <a:chOff x="4637088" y="676278"/>
-            <a:chExt cx="3862386" cy="3737102"/>
+            <a:chExt cx="3862387" cy="3737102"/>
           </a:xfrm>
         </p:grpSpPr>
         <p:sp>
@@ -7946,7 +8860,7 @@
           <p:spPr>
             <a:xfrm>
               <a:off x="4637088" y="676278"/>
-              <a:ext cx="1876329" cy="1813687"/>
+              <a:ext cx="3862387" cy="1813687"/>
             </a:xfrm>
             <a:prstGeom prst="roundRect">
               <a:avLst>
@@ -7976,7 +8890,7 @@
           </p:nvSpPr>
           <p:spPr>
             <a:xfrm>
-              <a:off x="4768431" y="807621"/>
+              <a:off x="4856544" y="1329205"/>
               <a:ext cx="507832" cy="507832"/>
             </a:xfrm>
             <a:prstGeom prst="ellipse">
@@ -8005,7 +8919,7 @@
           </p:nvSpPr>
           <p:spPr>
             <a:xfrm>
-              <a:off x="4880154" y="919344"/>
+              <a:off x="4968267" y="1440928"/>
               <a:ext cx="284386" cy="284386"/>
             </a:xfrm>
             <a:custGeom>
@@ -8119,8 +9033,8 @@
           </p:nvSpPr>
           <p:spPr>
             <a:xfrm>
-              <a:off x="4729028" y="1407393"/>
-              <a:ext cx="1692449" cy="1016899"/>
+              <a:off x="5496049" y="807951"/>
+              <a:ext cx="2783969" cy="1550339"/>
             </a:xfrm>
             <a:prstGeom prst="rect">
               <a:avLst/>
@@ -8128,7 +9042,7 @@
             <a:noFill/>
           </p:spPr>
           <p:txBody>
-            <a:bodyPr wrap="square" anchor="t" lIns="36576" tIns="18288" rIns="36576" bIns="18288">
+            <a:bodyPr wrap="square" anchor="ctr" lIns="36576" tIns="18288" rIns="36576" bIns="18288">
               <a:noAutofit/>
             </a:bodyPr>
             <a:lstStyle/>
@@ -8139,13 +9053,13 @@
                 </a:lnSpc>
               </a:pPr>
               <a:r>
-                <a:rPr sz="1170" b="0">
+                <a:rPr sz="1800" b="0">
                   <a:solidFill>
                     <a:srgbClr val="FFFFFF"/>
                   </a:solidFill>
                   <a:latin typeface="Play"/>
                 </a:rPr>
-                <a:t>Сотрудник тратит до 30 минут на поиск нужной инструкции.</a:t>
+                <a:t>Сотрудники тратят до 30 минут на поиск нужной инструкции.</a:t>
               </a:r>
             </a:p>
           </p:txBody>
@@ -8158,8 +9072,8 @@
           </p:nvSpPr>
           <p:spPr>
             <a:xfrm>
-              <a:off x="6623145" y="676278"/>
-              <a:ext cx="1876329" cy="1813687"/>
+              <a:off x="4637088" y="2599693"/>
+              <a:ext cx="3862387" cy="1813687"/>
             </a:xfrm>
             <a:prstGeom prst="roundRect">
               <a:avLst>
@@ -8189,7 +9103,7 @@
           </p:nvSpPr>
           <p:spPr>
             <a:xfrm>
-              <a:off x="6754488" y="807621"/>
+              <a:off x="4856544" y="3252620"/>
               <a:ext cx="507832" cy="507832"/>
             </a:xfrm>
             <a:prstGeom prst="ellipse">
@@ -8212,13 +9126,13 @@
         </p:sp>
         <p:sp>
           <p:nvSpPr>
-            <p:cNvPr id="10" name="BrandDeck Icon search"/>
+            <p:cNvPr id="10" name="BrandDeck Icon clock"/>
             <p:cNvSpPr/>
             <p:nvPr/>
           </p:nvSpPr>
           <p:spPr>
             <a:xfrm>
-              <a:off x="6866211" y="919344"/>
+              <a:off x="4968267" y="3364343"/>
               <a:ext cx="284386" cy="284386"/>
             </a:xfrm>
             <a:custGeom>
@@ -8230,36 +9144,39 @@
               <a:pathLst>
                 <a:path w="24000" h="24000" fill="none">
                   <a:moveTo>
-                    <a:pt x="19000" y="11000"/>
+                    <a:pt x="22000" y="12000"/>
                   </a:moveTo>
                   <a:cubicBezTo>
-                    <a:pt x="19000" y="15418"/>
-                    <a:pt x="15418" y="19000"/>
-                    <a:pt x="11000" y="19000"/>
+                    <a:pt x="22000" y="17523"/>
+                    <a:pt x="17523" y="22000"/>
+                    <a:pt x="12000" y="22000"/>
                   </a:cubicBezTo>
                   <a:cubicBezTo>
-                    <a:pt x="6582" y="19000"/>
-                    <a:pt x="3000" y="15418"/>
-                    <a:pt x="3000" y="11000"/>
+                    <a:pt x="6477" y="22000"/>
+                    <a:pt x="2000" y="17523"/>
+                    <a:pt x="2000" y="12000"/>
                   </a:cubicBezTo>
                   <a:cubicBezTo>
-                    <a:pt x="3000" y="6582"/>
-                    <a:pt x="6582" y="3000"/>
-                    <a:pt x="11000" y="3000"/>
+                    <a:pt x="2000" y="6477"/>
+                    <a:pt x="6477" y="2000"/>
+                    <a:pt x="12000" y="2000"/>
                   </a:cubicBezTo>
                   <a:cubicBezTo>
-                    <a:pt x="15418" y="3000"/>
-                    <a:pt x="19000" y="6582"/>
-                    <a:pt x="19000" y="11000"/>
+                    <a:pt x="17523" y="2000"/>
+                    <a:pt x="22000" y="6477"/>
+                    <a:pt x="22000" y="12000"/>
                   </a:cubicBezTo>
                   <a:close/>
                 </a:path>
                 <a:path w="24000" h="24000" fill="none">
                   <a:moveTo>
-                    <a:pt x="21000" y="21000"/>
+                    <a:pt x="12000" y="6000"/>
                   </a:moveTo>
                   <a:lnTo>
-                    <a:pt x="16700" y="16700"/>
+                    <a:pt x="12000" y="12000"/>
+                  </a:lnTo>
+                  <a:lnTo>
+                    <a:pt x="16000" y="14000"/>
                   </a:lnTo>
                 </a:path>
               </a:pathLst>
@@ -8288,8 +9205,8 @@
           </p:nvSpPr>
           <p:spPr>
             <a:xfrm>
-              <a:off x="6715085" y="1407393"/>
-              <a:ext cx="1692449" cy="1016899"/>
+              <a:off x="5496049" y="2731366"/>
+              <a:ext cx="2783969" cy="1550339"/>
             </a:xfrm>
             <a:prstGeom prst="rect">
               <a:avLst/>
@@ -8297,7 +9214,7 @@
             <a:noFill/>
           </p:spPr>
           <p:txBody>
-            <a:bodyPr wrap="square" anchor="t" lIns="36576" tIns="18288" rIns="36576" bIns="18288">
+            <a:bodyPr wrap="square" anchor="ctr" lIns="36576" tIns="18288" rIns="36576" bIns="18288">
               <a:noAutofit/>
             </a:bodyPr>
             <a:lstStyle/>
@@ -8308,199 +9225,13 @@
                 </a:lnSpc>
               </a:pPr>
               <a:r>
-                <a:rPr sz="1170" b="0">
+                <a:rPr sz="1800" b="0">
                   <a:solidFill>
                     <a:srgbClr val="FFFFFF"/>
                   </a:solidFill>
                   <a:latin typeface="Play"/>
                 </a:rPr>
-                <a:t>Рутина по поиску документов отнимает значительное время.</a:t>
-              </a:r>
-            </a:p>
-          </p:txBody>
-        </p:sp>
-        <p:sp>
-          <p:nvSpPr>
-            <p:cNvPr id="12" name="BrandDeck Diagram Card 3"/>
-            <p:cNvSpPr/>
-            <p:nvPr/>
-          </p:nvSpPr>
-          <p:spPr>
-            <a:xfrm>
-              <a:off x="4637088" y="2599693"/>
-              <a:ext cx="1876329" cy="1813687"/>
-            </a:xfrm>
-            <a:prstGeom prst="roundRect">
-              <a:avLst>
-                <a:gd name="adj" fmla="val 8000"/>
-              </a:avLst>
-            </a:prstGeom>
-            <a:solidFill>
-              <a:srgbClr val="1A1A1A"/>
-            </a:solidFill>
-            <a:ln>
-              <a:noFill/>
-            </a:ln>
-          </p:spPr>
-          <p:txBody>
-            <a:bodyPr rtlCol="0" anchor="ctr"/>
-            <a:lstStyle/>
-            <a:p>
-              <a:pPr algn="ctr"/>
-            </a:p>
-          </p:txBody>
-        </p:sp>
-        <p:sp>
-          <p:nvSpPr>
-            <p:cNvPr id="13" name="BrandDeck Diagram Icon 3 Badge"/>
-            <p:cNvSpPr/>
-            <p:nvPr/>
-          </p:nvSpPr>
-          <p:spPr>
-            <a:xfrm>
-              <a:off x="4768431" y="2731036"/>
-              <a:ext cx="507832" cy="507832"/>
-            </a:xfrm>
-            <a:prstGeom prst="ellipse">
-              <a:avLst/>
-            </a:prstGeom>
-            <a:solidFill>
-              <a:srgbClr val="006DEB"/>
-            </a:solidFill>
-            <a:ln>
-              <a:noFill/>
-            </a:ln>
-          </p:spPr>
-          <p:txBody>
-            <a:bodyPr rtlCol="0" anchor="ctr"/>
-            <a:lstStyle/>
-            <a:p>
-              <a:pPr algn="ctr"/>
-            </a:p>
-          </p:txBody>
-        </p:sp>
-        <p:sp>
-          <p:nvSpPr>
-            <p:cNvPr id="14" name="BrandDeck Icon lightbulb"/>
-            <p:cNvSpPr/>
-            <p:nvPr/>
-          </p:nvSpPr>
-          <p:spPr>
-            <a:xfrm>
-              <a:off x="4880154" y="2842759"/>
-              <a:ext cx="284386" cy="284386"/>
-            </a:xfrm>
-            <a:custGeom>
-              <a:avLst/>
-              <a:gdLst/>
-              <a:ahLst/>
-              <a:cxnLst/>
-              <a:rect l="l" t="t" r="r" b="b"/>
-              <a:pathLst>
-                <a:path w="24000" h="24000" fill="none">
-                  <a:moveTo>
-                    <a:pt x="15000" y="14000"/>
-                  </a:moveTo>
-                  <a:cubicBezTo>
-                    <a:pt x="15200" y="13000"/>
-                    <a:pt x="15700" y="12300"/>
-                    <a:pt x="16500" y="11500"/>
-                  </a:cubicBezTo>
-                  <a:cubicBezTo>
-                    <a:pt x="17500" y="10600"/>
-                    <a:pt x="18000" y="9300"/>
-                    <a:pt x="18000" y="8000"/>
-                  </a:cubicBezTo>
-                  <a:cubicBezTo>
-                    <a:pt x="18000" y="4686"/>
-                    <a:pt x="15314" y="2000"/>
-                    <a:pt x="12000" y="2000"/>
-                  </a:cubicBezTo>
-                  <a:cubicBezTo>
-                    <a:pt x="8686" y="2000"/>
-                    <a:pt x="6000" y="4686"/>
-                    <a:pt x="6000" y="8000"/>
-                  </a:cubicBezTo>
-                  <a:cubicBezTo>
-                    <a:pt x="6000" y="9000"/>
-                    <a:pt x="6200" y="10200"/>
-                    <a:pt x="7500" y="11500"/>
-                  </a:cubicBezTo>
-                  <a:cubicBezTo>
-                    <a:pt x="8200" y="12200"/>
-                    <a:pt x="8800" y="13000"/>
-                    <a:pt x="9000" y="14000"/>
-                  </a:cubicBezTo>
-                </a:path>
-                <a:path w="24000" h="24000" fill="none">
-                  <a:moveTo>
-                    <a:pt x="9000" y="18000"/>
-                  </a:moveTo>
-                  <a:lnTo>
-                    <a:pt x="15000" y="18000"/>
-                  </a:lnTo>
-                </a:path>
-                <a:path w="24000" h="24000" fill="none">
-                  <a:moveTo>
-                    <a:pt x="10000" y="22000"/>
-                  </a:moveTo>
-                  <a:lnTo>
-                    <a:pt x="14000" y="22000"/>
-                  </a:lnTo>
-                </a:path>
-              </a:pathLst>
-            </a:custGeom>
-            <a:noFill/>
-            <a:ln w="23698" cap="rnd">
-              <a:solidFill>
-                <a:srgbClr val="FFFFFF"/>
-              </a:solidFill>
-              <a:round/>
-            </a:ln>
-          </p:spPr>
-          <p:txBody>
-            <a:bodyPr rtlCol="0" anchor="ctr"/>
-            <a:lstStyle/>
-            <a:p>
-              <a:pPr algn="ctr"/>
-            </a:p>
-          </p:txBody>
-        </p:sp>
-        <p:sp>
-          <p:nvSpPr>
-            <p:cNvPr id="15" name="BrandDeck Diagram Text 3"/>
-            <p:cNvSpPr txBox="1"/>
-            <p:nvPr/>
-          </p:nvSpPr>
-          <p:spPr>
-            <a:xfrm>
-              <a:off x="4729028" y="3330808"/>
-              <a:ext cx="1692449" cy="1016899"/>
-            </a:xfrm>
-            <a:prstGeom prst="rect">
-              <a:avLst/>
-            </a:prstGeom>
-            <a:noFill/>
-          </p:spPr>
-          <p:txBody>
-            <a:bodyPr wrap="square" anchor="t" lIns="36576" tIns="18288" rIns="36576" bIns="18288">
-              <a:noAutofit/>
-            </a:bodyPr>
-            <a:lstStyle/>
-            <a:p>
-              <a:pPr algn="l">
-                <a:lnSpc>
-                  <a:spcPct val="110000"/>
-                </a:lnSpc>
-              </a:pPr>
-              <a:r>
-                <a:rPr sz="1170" b="0">
-                  <a:solidFill>
-                    <a:srgbClr val="FFFFFF"/>
-                  </a:solidFill>
-                  <a:latin typeface="Play"/>
-                </a:rPr>
-                <a:t>Это замедляет решение рабочих задач и снижает эффективность.</a:t>
+                <a:t>Время поиска напрямую влияет на общую эффективность отдела.</a:t>
               </a:r>
             </a:p>
           </p:txBody>
@@ -8566,7 +9297,7 @@
       </p:sp>
       <p:grpSp>
         <p:nvGrpSpPr>
-          <p:cNvPr id="3" name="BrandDeck Diagram icon_grid" descr="icon_grid: Треть всех обращений в поддержку — повторяющиеся вопросы.; Эти запросы касаются стандартных регламентов и инструкций.; ИИ-помощник позволит закрыть их без участия специалиста."/>
+          <p:cNvPr id="3" name="BrandDeck Diagram icon_grid" descr="icon_grid: Треть всех обращений в поддержку — повторяющиеся вопросы.; Эти запросы требуют времени на поиск инструкций.; Рутинные вопросы отвлекают специалистов от сложных задач."/>
           <p:cNvGrpSpPr/>
           <p:nvPr/>
         </p:nvGrpSpPr>
@@ -8877,7 +9608,7 @@
         </p:sp>
         <p:sp>
           <p:nvSpPr>
-            <p:cNvPr id="10" name="BrandDeck Icon file-text"/>
+            <p:cNvPr id="10" name="BrandDeck Icon clock"/>
             <p:cNvSpPr/>
             <p:nvPr/>
           </p:nvSpPr>
@@ -8895,75 +9626,39 @@
               <a:pathLst>
                 <a:path w="24000" h="24000" fill="none">
                   <a:moveTo>
-                    <a:pt x="15000" y="2000"/>
+                    <a:pt x="22000" y="12000"/>
                   </a:moveTo>
-                  <a:lnTo>
-                    <a:pt x="6000" y="2000"/>
-                  </a:lnTo>
                   <a:cubicBezTo>
-                    <a:pt x="4895" y="2000"/>
-                    <a:pt x="4000" y="2895"/>
-                    <a:pt x="4000" y="4000"/>
+                    <a:pt x="22000" y="17523"/>
+                    <a:pt x="17523" y="22000"/>
+                    <a:pt x="12000" y="22000"/>
                   </a:cubicBezTo>
-                  <a:lnTo>
-                    <a:pt x="4000" y="20000"/>
-                  </a:lnTo>
                   <a:cubicBezTo>
-                    <a:pt x="4000" y="21105"/>
-                    <a:pt x="4895" y="22000"/>
-                    <a:pt x="6000" y="22000"/>
+                    <a:pt x="6477" y="22000"/>
+                    <a:pt x="2000" y="17523"/>
+                    <a:pt x="2000" y="12000"/>
                   </a:cubicBezTo>
-                  <a:lnTo>
-                    <a:pt x="18000" y="22000"/>
-                  </a:lnTo>
                   <a:cubicBezTo>
-                    <a:pt x="19105" y="22000"/>
-                    <a:pt x="20000" y="21105"/>
-                    <a:pt x="20000" y="20000"/>
+                    <a:pt x="2000" y="6477"/>
+                    <a:pt x="6477" y="2000"/>
+                    <a:pt x="12000" y="2000"/>
                   </a:cubicBezTo>
-                  <a:lnTo>
-                    <a:pt x="20000" y="7000"/>
-                  </a:lnTo>
+                  <a:cubicBezTo>
+                    <a:pt x="17523" y="2000"/>
+                    <a:pt x="22000" y="6477"/>
+                    <a:pt x="22000" y="12000"/>
+                  </a:cubicBezTo>
                   <a:close/>
                 </a:path>
                 <a:path w="24000" h="24000" fill="none">
                   <a:moveTo>
-                    <a:pt x="14000" y="2000"/>
+                    <a:pt x="12000" y="6000"/>
                   </a:moveTo>
                   <a:lnTo>
-                    <a:pt x="14000" y="6000"/>
+                    <a:pt x="12000" y="12000"/>
                   </a:lnTo>
-                  <a:cubicBezTo>
-                    <a:pt x="14000" y="7105"/>
-                    <a:pt x="14895" y="8000"/>
-                    <a:pt x="16000" y="8000"/>
-                  </a:cubicBezTo>
                   <a:lnTo>
-                    <a:pt x="20000" y="8000"/>
-                  </a:lnTo>
-                </a:path>
-                <a:path w="24000" h="24000" fill="none">
-                  <a:moveTo>
-                    <a:pt x="10000" y="9000"/>
-                  </a:moveTo>
-                  <a:lnTo>
-                    <a:pt x="8000" y="9000"/>
-                  </a:lnTo>
-                </a:path>
-                <a:path w="24000" h="24000" fill="none">
-                  <a:moveTo>
-                    <a:pt x="16000" y="13000"/>
-                  </a:moveTo>
-                  <a:lnTo>
-                    <a:pt x="8000" y="13000"/>
-                  </a:lnTo>
-                </a:path>
-                <a:path w="24000" h="24000" fill="none">
-                  <a:moveTo>
-                    <a:pt x="16000" y="17000"/>
-                  </a:moveTo>
-                  <a:lnTo>
-                    <a:pt x="8000" y="17000"/>
+                    <a:pt x="16000" y="14000"/>
                   </a:lnTo>
                 </a:path>
               </a:pathLst>
@@ -9018,7 +9713,7 @@
                   </a:solidFill>
                   <a:latin typeface="Play"/>
                 </a:rPr>
-                <a:t>Эти запросы касаются стандартных регламентов и инструкций.</a:t>
+                <a:t>Эти запросы требуют времени на поиск инструкций.</a:t>
               </a:r>
             </a:p>
           </p:txBody>
@@ -9085,7 +9780,7 @@
         </p:sp>
         <p:sp>
           <p:nvSpPr>
-            <p:cNvPr id="14" name="BrandDeck Icon lock"/>
+            <p:cNvPr id="14" name="BrandDeck Icon circle-help"/>
             <p:cNvSpPr/>
             <p:nvPr/>
           </p:nvSpPr>
@@ -9103,61 +9798,56 @@
               <a:pathLst>
                 <a:path w="24000" h="24000" fill="none">
                   <a:moveTo>
-                    <a:pt x="5000" y="11000"/>
+                    <a:pt x="22000" y="12000"/>
                   </a:moveTo>
-                  <a:lnTo>
-                    <a:pt x="19000" y="11000"/>
-                  </a:lnTo>
                   <a:cubicBezTo>
-                    <a:pt x="20105" y="11000"/>
-                    <a:pt x="21000" y="11895"/>
-                    <a:pt x="21000" y="13000"/>
+                    <a:pt x="22000" y="17523"/>
+                    <a:pt x="17523" y="22000"/>
+                    <a:pt x="12000" y="22000"/>
                   </a:cubicBezTo>
-                  <a:lnTo>
-                    <a:pt x="21000" y="20000"/>
-                  </a:lnTo>
                   <a:cubicBezTo>
-                    <a:pt x="21000" y="21105"/>
-                    <a:pt x="20105" y="22000"/>
-                    <a:pt x="19000" y="22000"/>
+                    <a:pt x="6477" y="22000"/>
+                    <a:pt x="2000" y="17523"/>
+                    <a:pt x="2000" y="12000"/>
                   </a:cubicBezTo>
-                  <a:lnTo>
-                    <a:pt x="5000" y="22000"/>
-                  </a:lnTo>
                   <a:cubicBezTo>
-                    <a:pt x="3895" y="22000"/>
-                    <a:pt x="3000" y="21105"/>
-                    <a:pt x="3000" y="20000"/>
+                    <a:pt x="2000" y="6477"/>
+                    <a:pt x="6477" y="2000"/>
+                    <a:pt x="12000" y="2000"/>
                   </a:cubicBezTo>
-                  <a:lnTo>
-                    <a:pt x="3000" y="13000"/>
-                  </a:lnTo>
                   <a:cubicBezTo>
-                    <a:pt x="3000" y="11895"/>
-                    <a:pt x="3895" y="11000"/>
-                    <a:pt x="5000" y="11000"/>
+                    <a:pt x="17523" y="2000"/>
+                    <a:pt x="22000" y="6477"/>
+                    <a:pt x="22000" y="12000"/>
                   </a:cubicBezTo>
                   <a:close/>
                 </a:path>
                 <a:path w="24000" h="24000" fill="none">
                   <a:moveTo>
-                    <a:pt x="7000" y="11000"/>
+                    <a:pt x="9090" y="9000"/>
+                  </a:moveTo>
+                  <a:cubicBezTo>
+                    <a:pt x="9575" y="7620"/>
+                    <a:pt x="10985" y="6791"/>
+                    <a:pt x="12427" y="7039"/>
+                  </a:cubicBezTo>
+                  <a:cubicBezTo>
+                    <a:pt x="13869" y="7286"/>
+                    <a:pt x="14922" y="8537"/>
+                    <a:pt x="14920" y="10000"/>
+                  </a:cubicBezTo>
+                  <a:cubicBezTo>
+                    <a:pt x="14920" y="12000"/>
+                    <a:pt x="11920" y="13000"/>
+                    <a:pt x="11920" y="13000"/>
+                  </a:cubicBezTo>
+                </a:path>
+                <a:path w="24000" h="24000" fill="none">
+                  <a:moveTo>
+                    <a:pt x="12000" y="17000"/>
                   </a:moveTo>
                   <a:lnTo>
-                    <a:pt x="7000" y="7000"/>
-                  </a:lnTo>
-                  <a:cubicBezTo>
-                    <a:pt x="7000" y="4239"/>
-                    <a:pt x="9239" y="2000"/>
-                    <a:pt x="12000" y="2000"/>
-                  </a:cubicBezTo>
-                  <a:cubicBezTo>
-                    <a:pt x="14761" y="2000"/>
-                    <a:pt x="17000" y="4239"/>
-                    <a:pt x="17000" y="7000"/>
-                  </a:cubicBezTo>
-                  <a:lnTo>
-                    <a:pt x="17000" y="11000"/>
+                    <a:pt x="12010" y="17000"/>
                   </a:lnTo>
                 </a:path>
               </a:pathLst>
@@ -9212,7 +9902,7 @@
                   </a:solidFill>
                   <a:latin typeface="Play"/>
                 </a:rPr>
-                <a:t>ИИ-помощник позволит закрыть их без участия специалиста.</a:t>
+                <a:t>Рутинные вопросы отвлекают специалистов от сложных задач.</a:t>
               </a:r>
             </a:p>
           </p:txBody>
@@ -9238,22 +9928,287 @@
       <p:grpSpPr/>
       <p:sp>
         <p:nvSpPr>
-          <p:cNvPr id="2" name="BrandDeck Text 2"/>
-          <p:cNvSpPr>
-            <a:spLocks noGrp="1"/>
-          </p:cNvSpPr>
+          <p:cNvPr id="1119" name="Google Shape;1119;p69"/>
+          <p:cNvSpPr/>
+          <p:nvPr/>
+        </p:nvSpPr>
+        <p:spPr>
+          <a:xfrm>
+            <a:off x="285748" y="286047"/>
+            <a:ext cx="8572456" cy="4176169"/>
+          </a:xfrm>
+          <a:prstGeom prst="rect">
+            <a:avLst/>
+          </a:prstGeom>
+          <a:noFill/>
+          <a:ln>
+            <a:noFill/>
+          </a:ln>
+        </p:spPr>
+        <p:txBody>
+          <a:bodyPr anchorCtr="0" anchor="ctr" bIns="91425" lIns="91425" spcFirstLastPara="1" rIns="91425" wrap="square" tIns="91425">
+            <a:noAutofit/>
+          </a:bodyPr>
+          <a:lstStyle/>
+          <a:p>
+            <a:pPr indent="0" lvl="0" marL="0" rtl="0" algn="l">
+              <a:spcBef>
+                <a:spcPts val="0"/>
+              </a:spcBef>
+              <a:spcAft>
+                <a:spcPts val="0"/>
+              </a:spcAft>
+              <a:buNone/>
+            </a:pPr>
+            <a:r>
+              <a:t/>
+            </a:r>
+            <a:endParaRPr/>
+          </a:p>
+        </p:txBody>
+      </p:sp>
+      <p:sp>
+        <p:nvSpPr>
+          <p:cNvPr id="1120" name="Google Shape;1120;p69"/>
+          <p:cNvSpPr/>
+          <p:nvPr/>
+        </p:nvSpPr>
+        <p:spPr>
+          <a:xfrm>
+            <a:off x="285748" y="1209852"/>
+            <a:ext cx="8572456" cy="3252364"/>
+          </a:xfrm>
+          <a:prstGeom prst="rect">
+            <a:avLst/>
+          </a:prstGeom>
+          <a:noFill/>
+          <a:ln>
+            <a:noFill/>
+          </a:ln>
+        </p:spPr>
+        <p:txBody>
+          <a:bodyPr anchorCtr="0" anchor="ctr" bIns="91425" lIns="91425" spcFirstLastPara="1" rIns="91425" wrap="square" tIns="91425">
+            <a:noAutofit/>
+          </a:bodyPr>
+          <a:lstStyle/>
+          <a:p>
+            <a:pPr indent="0" lvl="0" marL="0" rtl="0" algn="l">
+              <a:spcBef>
+                <a:spcPts val="0"/>
+              </a:spcBef>
+              <a:spcAft>
+                <a:spcPts val="0"/>
+              </a:spcAft>
+              <a:buNone/>
+            </a:pPr>
+            <a:r>
+              <a:t/>
+            </a:r>
+            <a:endParaRPr/>
+          </a:p>
+        </p:txBody>
+      </p:sp>
+      <p:sp>
+        <p:nvSpPr>
+          <p:cNvPr id="1121" name="Google Shape;1121;p69"/>
+          <p:cNvSpPr/>
+          <p:nvPr/>
+        </p:nvSpPr>
+        <p:spPr>
+          <a:xfrm>
+            <a:off x="285748" y="1209852"/>
+            <a:ext cx="8572456" cy="3252364"/>
+          </a:xfrm>
+          <a:prstGeom prst="rect">
+            <a:avLst/>
+          </a:prstGeom>
+          <a:noFill/>
+          <a:ln>
+            <a:noFill/>
+          </a:ln>
+        </p:spPr>
+        <p:txBody>
+          <a:bodyPr anchorCtr="0" anchor="ctr" bIns="91425" lIns="91425" spcFirstLastPara="1" rIns="91425" wrap="square" tIns="91425">
+            <a:noAutofit/>
+          </a:bodyPr>
+          <a:lstStyle/>
+          <a:p>
+            <a:pPr indent="0" lvl="0" marL="0" rtl="0" algn="l">
+              <a:spcBef>
+                <a:spcPts val="0"/>
+              </a:spcBef>
+              <a:spcAft>
+                <a:spcPts val="0"/>
+              </a:spcAft>
+              <a:buNone/>
+            </a:pPr>
+            <a:r>
+              <a:t/>
+            </a:r>
+            <a:endParaRPr/>
+          </a:p>
+        </p:txBody>
+      </p:sp>
+      <p:sp>
+        <p:nvSpPr>
+          <p:cNvPr id="1123" name="Google Shape;1123;p69"/>
+          <p:cNvSpPr/>
+          <p:nvPr/>
+        </p:nvSpPr>
+        <p:spPr>
+          <a:xfrm>
+            <a:off x="500061" y="1424137"/>
+            <a:ext cx="2919397" cy="2895223"/>
+          </a:xfrm>
+          <a:prstGeom prst="rect">
+            <a:avLst/>
+          </a:prstGeom>
+          <a:noFill/>
+          <a:ln>
+            <a:noFill/>
+          </a:ln>
+        </p:spPr>
+        <p:txBody>
+          <a:bodyPr anchorCtr="0" anchor="t" bIns="0" lIns="0" spcFirstLastPara="1" rIns="0" wrap="square" tIns="0">
+            <a:normAutofit/>
+          </a:bodyPr>
+          <a:lstStyle/>
+          <a:p>
+            <a:pPr indent="0" lvl="0" marL="0" marR="0" rtl="0" algn="l">
+              <a:lnSpc>
+                <a:spcPct val="139988"/>
+              </a:lnSpc>
+              <a:spcBef>
+                <a:spcPts val="0"/>
+              </a:spcBef>
+              <a:spcAft>
+                <a:spcPts val="0"/>
+              </a:spcAft>
+              <a:buNone/>
+            </a:pPr>
+            <a:endParaRPr b="0" i="0" sz="1688" u="none" cap="none" strike="noStrike">
+              <a:solidFill>
+                <a:schemeClr val="dk1"/>
+              </a:solidFill>
+              <a:latin typeface="Calibri"/>
+              <a:ea typeface="Calibri"/>
+              <a:cs typeface="Calibri"/>
+              <a:sym typeface="Calibri"/>
+            </a:endParaRPr>
+          </a:p>
+        </p:txBody>
+      </p:sp>
+      <p:sp>
+        <p:nvSpPr>
+          <p:cNvPr id="1124" name="Google Shape;1124;p69"/>
+          <p:cNvSpPr/>
+          <p:nvPr/>
+        </p:nvSpPr>
+        <p:spPr>
+          <a:xfrm>
+            <a:off x="3657581" y="1209852"/>
+            <a:ext cx="5200623" cy="3252364"/>
+          </a:xfrm>
+          <a:prstGeom prst="rect">
+            <a:avLst/>
+          </a:prstGeom>
+          <a:noFill/>
+          <a:ln>
+            <a:noFill/>
+          </a:ln>
+        </p:spPr>
+        <p:txBody>
+          <a:bodyPr anchorCtr="0" anchor="ctr" bIns="91425" lIns="91425" spcFirstLastPara="1" rIns="91425" wrap="square" tIns="91425">
+            <a:noAutofit/>
+          </a:bodyPr>
+          <a:lstStyle/>
+          <a:p>
+            <a:pPr indent="0" lvl="0" marL="0" rtl="0" algn="l">
+              <a:spcBef>
+                <a:spcPts val="0"/>
+              </a:spcBef>
+              <a:spcAft>
+                <a:spcPts val="0"/>
+              </a:spcAft>
+              <a:buNone/>
+            </a:pPr>
+            <a:r>
+              <a:t/>
+            </a:r>
+            <a:endParaRPr/>
+          </a:p>
+        </p:txBody>
+      </p:sp>
+      <p:sp>
+        <p:nvSpPr>
+          <p:cNvPr id="1132" name="BrandDeck Text 1132"/>
+          <p:cNvSpPr txBox="1"/>
           <p:nvPr>
             <p:ph type="title"/>
           </p:nvPr>
         </p:nvSpPr>
         <p:spPr>
           <a:xfrm>
-            <a:off x="430360" y="338829"/>
-            <a:ext cx="3945697" cy="753371"/>
+            <a:off x="177970" y="282949"/>
+            <a:ext cx="6792985" cy="724203"/>
           </a:xfrm>
+          <a:prstGeom prst="rect">
+            <a:avLst/>
+          </a:prstGeom>
+          <a:noFill/>
+          <a:ln>
+            <a:noFill/>
+          </a:ln>
         </p:spPr>
         <p:txBody>
-          <a:bodyPr wrap="square" anchor="t">
+          <a:bodyPr anchorCtr="0" anchor="t" bIns="45700" lIns="91425" spcFirstLastPara="1" rIns="91425" wrap="square" tIns="45700">
+            <a:normAutofit/>
+          </a:bodyPr>
+          <a:lstStyle/>
+          <a:p>
+            <a:pPr indent="0" marL="0" rtl="0" algn="l">
+              <a:lnSpc>
+                <a:spcPct val="115000"/>
+              </a:lnSpc>
+              <a:spcBef>
+                <a:spcPts val="0"/>
+              </a:spcBef>
+              <a:spcAft>
+                <a:spcPts val="270"/>
+              </a:spcAft>
+              <a:buClr>
+                <a:schemeClr val="dk1"/>
+              </a:buClr>
+              <a:buSzPts val="2400"/>
+              <a:buFont typeface="Play"/>
+              <a:buNone/>
+            </a:pPr>
+            <a:r>
+              <a:rPr sz="1800"/>
+              <a:t>Влияет на всех сотрудников и специалистов поддержки</a:t>
+            </a:r>
+            <a:endParaRPr/>
+          </a:p>
+        </p:txBody>
+      </p:sp>
+      <p:sp>
+        <p:nvSpPr>
+          <p:cNvPr id="1133" name="BrandDeck Body"/>
+          <p:cNvSpPr txBox="1"/>
+          <p:nvPr/>
+        </p:nvSpPr>
+        <p:spPr>
+          <a:xfrm>
+            <a:off x="500060" y="1424137"/>
+            <a:ext cx="2558400" cy="2895223"/>
+          </a:xfrm>
+          <a:prstGeom prst="rect">
+            <a:avLst/>
+          </a:prstGeom>
+          <a:noFill/>
+        </p:spPr>
+        <p:txBody>
+          <a:bodyPr wrap="square" anchor="t" lIns="36576" rIns="36576" tIns="18288" bIns="18288">
             <a:normAutofit/>
           </a:bodyPr>
           <a:lstStyle/>
@@ -9266,650 +10221,90 @@
                 <a:spcPts val="0"/>
               </a:spcBef>
               <a:spcAft>
-                <a:spcPts val="270"/>
+                <a:spcPts val="253"/>
               </a:spcAft>
             </a:pPr>
             <a:r>
-              <a:rPr sz="1800"/>
-              <a:t>Затраты времени и ресурсов на рутину</a:t>
+              <a:rPr sz="1689">
+                <a:solidFill>
+                  <a:srgbClr val="000000"/>
+                </a:solidFill>
+                <a:latin typeface="Play"/>
+              </a:rPr>
+              <a:t>• Сокращает время поиска инструкций для сотрудников.</a:t>
+            </a:r>
+          </a:p>
+          <a:p>
+            <a:pPr algn="l">
+              <a:lnSpc>
+                <a:spcPct val="115000"/>
+              </a:lnSpc>
+              <a:spcBef>
+                <a:spcPts val="0"/>
+              </a:spcBef>
+              <a:spcAft>
+                <a:spcPts val="253"/>
+              </a:spcAft>
+            </a:pPr>
+            <a:r>
+              <a:rPr sz="1689">
+                <a:solidFill>
+                  <a:srgbClr val="000000"/>
+                </a:solidFill>
+                <a:latin typeface="Play"/>
+              </a:rPr>
+              <a:t>• Снижает нагрузку на специалистов поддержки.</a:t>
+            </a:r>
+          </a:p>
+          <a:p>
+            <a:pPr algn="l">
+              <a:lnSpc>
+                <a:spcPct val="115000"/>
+              </a:lnSpc>
+              <a:spcBef>
+                <a:spcPts val="0"/>
+              </a:spcBef>
+              <a:spcAft>
+                <a:spcPts val="253"/>
+              </a:spcAft>
+            </a:pPr>
+            <a:r>
+              <a:rPr sz="1689">
+                <a:solidFill>
+                  <a:srgbClr val="000000"/>
+                </a:solidFill>
+                <a:latin typeface="Play"/>
+              </a:rPr>
+              <a:t>• Обеспечивает быстрый доступ к актуальным регламентам.</a:t>
             </a:r>
           </a:p>
         </p:txBody>
       </p:sp>
-      <p:grpSp>
-        <p:nvGrpSpPr>
-          <p:cNvPr id="3" name="BrandDeck Diagram icon_grid" descr="icon_grid: Поиск инструкции занимает до 30 минут.; Треть обращений — повторяющиеся вопросы.; Сотрудники тратят время на рутинные задачи."/>
-          <p:cNvGrpSpPr/>
+      <p:pic>
+        <p:nvPicPr>
+          <p:cNvPr id="1134" name="BrandDeck Image" descr="сотрудник специалист поддержки"/>
+          <p:cNvPicPr>
+            <a:picLocks noChangeAspect="1"/>
+          </p:cNvPicPr>
           <p:nvPr/>
-        </p:nvGrpSpPr>
-        <p:grpSpPr>
+        </p:nvPicPr>
+        <p:blipFill>
+          <a:blip r:embed="rId7"/>
+          <a:srcRect l="18013" r="18013"/>
+          <a:stretch>
+            <a:fillRect/>
+          </a:stretch>
+        </p:blipFill>
+        <p:spPr>
           <a:xfrm>
-            <a:off x="4637088" y="676278"/>
-            <a:ext cx="3862386" cy="3737102"/>
-            <a:chOff x="4637088" y="676278"/>
-            <a:chExt cx="3862386" cy="3737102"/>
+            <a:off x="3314493" y="1424137"/>
+            <a:ext cx="3291060" cy="2895223"/>
           </a:xfrm>
-        </p:grpSpPr>
-        <p:sp>
-          <p:nvSpPr>
-            <p:cNvPr id="4" name="BrandDeck Diagram Card 1"/>
-            <p:cNvSpPr/>
-            <p:nvPr/>
-          </p:nvSpPr>
-          <p:spPr>
-            <a:xfrm>
-              <a:off x="4637088" y="676278"/>
-              <a:ext cx="1876329" cy="1813687"/>
-            </a:xfrm>
-            <a:prstGeom prst="roundRect">
-              <a:avLst>
-                <a:gd name="adj" fmla="val 8000"/>
-              </a:avLst>
-            </a:prstGeom>
-            <a:solidFill>
-              <a:srgbClr val="1A1A1A"/>
-            </a:solidFill>
-            <a:ln>
-              <a:noFill/>
-            </a:ln>
-          </p:spPr>
-          <p:txBody>
-            <a:bodyPr rtlCol="0" anchor="ctr"/>
-            <a:lstStyle/>
-            <a:p>
-              <a:pPr algn="ctr"/>
-            </a:p>
-          </p:txBody>
-        </p:sp>
-        <p:sp>
-          <p:nvSpPr>
-            <p:cNvPr id="5" name="BrandDeck Diagram Icon 1 Badge"/>
-            <p:cNvSpPr/>
-            <p:nvPr/>
-          </p:nvSpPr>
-          <p:spPr>
-            <a:xfrm>
-              <a:off x="4768431" y="807621"/>
-              <a:ext cx="507832" cy="507832"/>
-            </a:xfrm>
-            <a:prstGeom prst="ellipse">
-              <a:avLst/>
-            </a:prstGeom>
-            <a:solidFill>
-              <a:srgbClr val="006DEB"/>
-            </a:solidFill>
-            <a:ln>
-              <a:noFill/>
-            </a:ln>
-          </p:spPr>
-          <p:txBody>
-            <a:bodyPr rtlCol="0" anchor="ctr"/>
-            <a:lstStyle/>
-            <a:p>
-              <a:pPr algn="ctr"/>
-            </a:p>
-          </p:txBody>
-        </p:sp>
-        <p:sp>
-          <p:nvSpPr>
-            <p:cNvPr id="6" name="BrandDeck Icon search"/>
-            <p:cNvSpPr/>
-            <p:nvPr/>
-          </p:nvSpPr>
-          <p:spPr>
-            <a:xfrm>
-              <a:off x="4880154" y="919344"/>
-              <a:ext cx="284386" cy="284386"/>
-            </a:xfrm>
-            <a:custGeom>
-              <a:avLst/>
-              <a:gdLst/>
-              <a:ahLst/>
-              <a:cxnLst/>
-              <a:rect l="l" t="t" r="r" b="b"/>
-              <a:pathLst>
-                <a:path w="24000" h="24000" fill="none">
-                  <a:moveTo>
-                    <a:pt x="19000" y="11000"/>
-                  </a:moveTo>
-                  <a:cubicBezTo>
-                    <a:pt x="19000" y="15418"/>
-                    <a:pt x="15418" y="19000"/>
-                    <a:pt x="11000" y="19000"/>
-                  </a:cubicBezTo>
-                  <a:cubicBezTo>
-                    <a:pt x="6582" y="19000"/>
-                    <a:pt x="3000" y="15418"/>
-                    <a:pt x="3000" y="11000"/>
-                  </a:cubicBezTo>
-                  <a:cubicBezTo>
-                    <a:pt x="3000" y="6582"/>
-                    <a:pt x="6582" y="3000"/>
-                    <a:pt x="11000" y="3000"/>
-                  </a:cubicBezTo>
-                  <a:cubicBezTo>
-                    <a:pt x="15418" y="3000"/>
-                    <a:pt x="19000" y="6582"/>
-                    <a:pt x="19000" y="11000"/>
-                  </a:cubicBezTo>
-                  <a:close/>
-                </a:path>
-                <a:path w="24000" h="24000" fill="none">
-                  <a:moveTo>
-                    <a:pt x="21000" y="21000"/>
-                  </a:moveTo>
-                  <a:lnTo>
-                    <a:pt x="16700" y="16700"/>
-                  </a:lnTo>
-                </a:path>
-              </a:pathLst>
-            </a:custGeom>
-            <a:noFill/>
-            <a:ln w="23698" cap="rnd">
-              <a:solidFill>
-                <a:srgbClr val="FFFFFF"/>
-              </a:solidFill>
-              <a:round/>
-            </a:ln>
-          </p:spPr>
-          <p:txBody>
-            <a:bodyPr rtlCol="0" anchor="ctr"/>
-            <a:lstStyle/>
-            <a:p>
-              <a:pPr algn="ctr"/>
-            </a:p>
-          </p:txBody>
-        </p:sp>
-        <p:sp>
-          <p:nvSpPr>
-            <p:cNvPr id="7" name="BrandDeck Diagram Text 1"/>
-            <p:cNvSpPr txBox="1"/>
-            <p:nvPr/>
-          </p:nvSpPr>
-          <p:spPr>
-            <a:xfrm>
-              <a:off x="4729028" y="1407393"/>
-              <a:ext cx="1692449" cy="1016899"/>
-            </a:xfrm>
-            <a:prstGeom prst="rect">
-              <a:avLst/>
-            </a:prstGeom>
-            <a:noFill/>
-          </p:spPr>
-          <p:txBody>
-            <a:bodyPr wrap="square" anchor="t" lIns="36576" tIns="18288" rIns="36576" bIns="18288">
-              <a:noAutofit/>
-            </a:bodyPr>
-            <a:lstStyle/>
-            <a:p>
-              <a:pPr algn="l">
-                <a:lnSpc>
-                  <a:spcPct val="110000"/>
-                </a:lnSpc>
-              </a:pPr>
-              <a:r>
-                <a:rPr sz="1410" b="0">
-                  <a:solidFill>
-                    <a:srgbClr val="FFFFFF"/>
-                  </a:solidFill>
-                  <a:latin typeface="Play"/>
-                </a:rPr>
-                <a:t>Поиск инструкции занимает до 30 минут.</a:t>
-              </a:r>
-            </a:p>
-          </p:txBody>
-        </p:sp>
-        <p:sp>
-          <p:nvSpPr>
-            <p:cNvPr id="8" name="BrandDeck Diagram Card 2"/>
-            <p:cNvSpPr/>
-            <p:nvPr/>
-          </p:nvSpPr>
-          <p:spPr>
-            <a:xfrm>
-              <a:off x="6623145" y="676278"/>
-              <a:ext cx="1876329" cy="1813687"/>
-            </a:xfrm>
-            <a:prstGeom prst="roundRect">
-              <a:avLst>
-                <a:gd name="adj" fmla="val 8000"/>
-              </a:avLst>
-            </a:prstGeom>
-            <a:solidFill>
-              <a:srgbClr val="1A1A1A"/>
-            </a:solidFill>
-            <a:ln>
-              <a:noFill/>
-            </a:ln>
-          </p:spPr>
-          <p:txBody>
-            <a:bodyPr rtlCol="0" anchor="ctr"/>
-            <a:lstStyle/>
-            <a:p>
-              <a:pPr algn="ctr"/>
-            </a:p>
-          </p:txBody>
-        </p:sp>
-        <p:sp>
-          <p:nvSpPr>
-            <p:cNvPr id="9" name="BrandDeck Diagram Icon 2 Badge"/>
-            <p:cNvSpPr/>
-            <p:nvPr/>
-          </p:nvSpPr>
-          <p:spPr>
-            <a:xfrm>
-              <a:off x="6754488" y="807621"/>
-              <a:ext cx="507832" cy="507832"/>
-            </a:xfrm>
-            <a:prstGeom prst="ellipse">
-              <a:avLst/>
-            </a:prstGeom>
-            <a:solidFill>
-              <a:srgbClr val="006DEB"/>
-            </a:solidFill>
-            <a:ln>
-              <a:noFill/>
-            </a:ln>
-          </p:spPr>
-          <p:txBody>
-            <a:bodyPr rtlCol="0" anchor="ctr"/>
-            <a:lstStyle/>
-            <a:p>
-              <a:pPr algn="ctr"/>
-            </a:p>
-          </p:txBody>
-        </p:sp>
-        <p:sp>
-          <p:nvSpPr>
-            <p:cNvPr id="10" name="BrandDeck Icon headset"/>
-            <p:cNvSpPr/>
-            <p:nvPr/>
-          </p:nvSpPr>
-          <p:spPr>
-            <a:xfrm>
-              <a:off x="6866211" y="919344"/>
-              <a:ext cx="284386" cy="284386"/>
-            </a:xfrm>
-            <a:custGeom>
-              <a:avLst/>
-              <a:gdLst/>
-              <a:ahLst/>
-              <a:cxnLst/>
-              <a:rect l="l" t="t" r="r" b="b"/>
-              <a:pathLst>
-                <a:path w="24000" h="24000" fill="none">
-                  <a:moveTo>
-                    <a:pt x="3000" y="11000"/>
-                  </a:moveTo>
-                  <a:lnTo>
-                    <a:pt x="6000" y="11000"/>
-                  </a:lnTo>
-                  <a:cubicBezTo>
-                    <a:pt x="7105" y="11000"/>
-                    <a:pt x="8000" y="11895"/>
-                    <a:pt x="8000" y="13000"/>
-                  </a:cubicBezTo>
-                  <a:lnTo>
-                    <a:pt x="8000" y="16000"/>
-                  </a:lnTo>
-                  <a:cubicBezTo>
-                    <a:pt x="8000" y="17105"/>
-                    <a:pt x="7105" y="18000"/>
-                    <a:pt x="6000" y="18000"/>
-                  </a:cubicBezTo>
-                  <a:lnTo>
-                    <a:pt x="5000" y="18000"/>
-                  </a:lnTo>
-                  <a:cubicBezTo>
-                    <a:pt x="3895" y="18000"/>
-                    <a:pt x="3000" y="17105"/>
-                    <a:pt x="3000" y="16000"/>
-                  </a:cubicBezTo>
-                  <a:lnTo>
-                    <a:pt x="3000" y="11000"/>
-                  </a:lnTo>
-                  <a:close/>
-                  <a:moveTo>
-                    <a:pt x="3000" y="11000"/>
-                  </a:moveTo>
-                  <a:cubicBezTo>
-                    <a:pt x="3000" y="6029"/>
-                    <a:pt x="7029" y="2000"/>
-                    <a:pt x="12000" y="2000"/>
-                  </a:cubicBezTo>
-                  <a:cubicBezTo>
-                    <a:pt x="16971" y="2000"/>
-                    <a:pt x="21000" y="6029"/>
-                    <a:pt x="21000" y="11000"/>
-                  </a:cubicBezTo>
-                  <a:moveTo>
-                    <a:pt x="21000" y="11000"/>
-                  </a:moveTo>
-                  <a:lnTo>
-                    <a:pt x="21000" y="16000"/>
-                  </a:lnTo>
-                  <a:cubicBezTo>
-                    <a:pt x="21000" y="17105"/>
-                    <a:pt x="20105" y="18000"/>
-                    <a:pt x="19000" y="18000"/>
-                  </a:cubicBezTo>
-                  <a:lnTo>
-                    <a:pt x="18000" y="18000"/>
-                  </a:lnTo>
-                  <a:cubicBezTo>
-                    <a:pt x="16895" y="18000"/>
-                    <a:pt x="16000" y="17105"/>
-                    <a:pt x="16000" y="16000"/>
-                  </a:cubicBezTo>
-                  <a:lnTo>
-                    <a:pt x="16000" y="13000"/>
-                  </a:lnTo>
-                  <a:cubicBezTo>
-                    <a:pt x="16000" y="11895"/>
-                    <a:pt x="16895" y="11000"/>
-                    <a:pt x="18000" y="11000"/>
-                  </a:cubicBezTo>
-                  <a:lnTo>
-                    <a:pt x="21000" y="11000"/>
-                  </a:lnTo>
-                  <a:close/>
-                </a:path>
-                <a:path w="24000" h="24000" fill="none">
-                  <a:moveTo>
-                    <a:pt x="21000" y="16000"/>
-                  </a:moveTo>
-                  <a:lnTo>
-                    <a:pt x="21000" y="18000"/>
-                  </a:lnTo>
-                  <a:cubicBezTo>
-                    <a:pt x="21000" y="20209"/>
-                    <a:pt x="19209" y="22000"/>
-                    <a:pt x="17000" y="22000"/>
-                  </a:cubicBezTo>
-                  <a:lnTo>
-                    <a:pt x="12000" y="22000"/>
-                  </a:lnTo>
-                </a:path>
-              </a:pathLst>
-            </a:custGeom>
-            <a:noFill/>
-            <a:ln w="23698" cap="rnd">
-              <a:solidFill>
-                <a:srgbClr val="FFFFFF"/>
-              </a:solidFill>
-              <a:round/>
-            </a:ln>
-          </p:spPr>
-          <p:txBody>
-            <a:bodyPr rtlCol="0" anchor="ctr"/>
-            <a:lstStyle/>
-            <a:p>
-              <a:pPr algn="ctr"/>
-            </a:p>
-          </p:txBody>
-        </p:sp>
-        <p:sp>
-          <p:nvSpPr>
-            <p:cNvPr id="11" name="BrandDeck Diagram Text 2"/>
-            <p:cNvSpPr txBox="1"/>
-            <p:nvPr/>
-          </p:nvSpPr>
-          <p:spPr>
-            <a:xfrm>
-              <a:off x="6715085" y="1407393"/>
-              <a:ext cx="1692449" cy="1016899"/>
-            </a:xfrm>
-            <a:prstGeom prst="rect">
-              <a:avLst/>
-            </a:prstGeom>
-            <a:noFill/>
-          </p:spPr>
-          <p:txBody>
-            <a:bodyPr wrap="square" anchor="t" lIns="36576" tIns="18288" rIns="36576" bIns="18288">
-              <a:noAutofit/>
-            </a:bodyPr>
-            <a:lstStyle/>
-            <a:p>
-              <a:pPr algn="l">
-                <a:lnSpc>
-                  <a:spcPct val="110000"/>
-                </a:lnSpc>
-              </a:pPr>
-              <a:r>
-                <a:rPr sz="1410" b="1">
-                  <a:solidFill>
-                    <a:srgbClr val="FFFFFF"/>
-                  </a:solidFill>
-                  <a:latin typeface="Play"/>
-                </a:rPr>
-                <a:t>Треть обращений —</a:t>
-              </a:r>
-              <a:r>
-                <a:rPr sz="1410" b="0">
-                  <a:solidFill>
-                    <a:srgbClr val="FFFFFF"/>
-                  </a:solidFill>
-                  <a:latin typeface="Play"/>
-                </a:rPr>
-                <a:t> повторяющиеся вопросы.</a:t>
-              </a:r>
-            </a:p>
-          </p:txBody>
-        </p:sp>
-        <p:sp>
-          <p:nvSpPr>
-            <p:cNvPr id="12" name="BrandDeck Diagram Card 3"/>
-            <p:cNvSpPr/>
-            <p:nvPr/>
-          </p:nvSpPr>
-          <p:spPr>
-            <a:xfrm>
-              <a:off x="4637088" y="2599693"/>
-              <a:ext cx="1876329" cy="1813687"/>
-            </a:xfrm>
-            <a:prstGeom prst="roundRect">
-              <a:avLst>
-                <a:gd name="adj" fmla="val 8000"/>
-              </a:avLst>
-            </a:prstGeom>
-            <a:solidFill>
-              <a:srgbClr val="1A1A1A"/>
-            </a:solidFill>
-            <a:ln>
-              <a:noFill/>
-            </a:ln>
-          </p:spPr>
-          <p:txBody>
-            <a:bodyPr rtlCol="0" anchor="ctr"/>
-            <a:lstStyle/>
-            <a:p>
-              <a:pPr algn="ctr"/>
-            </a:p>
-          </p:txBody>
-        </p:sp>
-        <p:sp>
-          <p:nvSpPr>
-            <p:cNvPr id="13" name="BrandDeck Diagram Icon 3 Badge"/>
-            <p:cNvSpPr/>
-            <p:nvPr/>
-          </p:nvSpPr>
-          <p:spPr>
-            <a:xfrm>
-              <a:off x="4768431" y="2731036"/>
-              <a:ext cx="507832" cy="507832"/>
-            </a:xfrm>
-            <a:prstGeom prst="ellipse">
-              <a:avLst/>
-            </a:prstGeom>
-            <a:solidFill>
-              <a:srgbClr val="006DEB"/>
-            </a:solidFill>
-            <a:ln>
-              <a:noFill/>
-            </a:ln>
-          </p:spPr>
-          <p:txBody>
-            <a:bodyPr rtlCol="0" anchor="ctr"/>
-            <a:lstStyle/>
-            <a:p>
-              <a:pPr algn="ctr"/>
-            </a:p>
-          </p:txBody>
-        </p:sp>
-        <p:sp>
-          <p:nvSpPr>
-            <p:cNvPr id="14" name="BrandDeck Icon users"/>
-            <p:cNvSpPr/>
-            <p:nvPr/>
-          </p:nvSpPr>
-          <p:spPr>
-            <a:xfrm>
-              <a:off x="4880154" y="2842759"/>
-              <a:ext cx="284386" cy="284386"/>
-            </a:xfrm>
-            <a:custGeom>
-              <a:avLst/>
-              <a:gdLst/>
-              <a:ahLst/>
-              <a:cxnLst/>
-              <a:rect l="l" t="t" r="r" b="b"/>
-              <a:pathLst>
-                <a:path w="24000" h="24000" fill="none">
-                  <a:moveTo>
-                    <a:pt x="16000" y="21000"/>
-                  </a:moveTo>
-                  <a:lnTo>
-                    <a:pt x="16000" y="19000"/>
-                  </a:lnTo>
-                  <a:cubicBezTo>
-                    <a:pt x="16000" y="16791"/>
-                    <a:pt x="14209" y="15000"/>
-                    <a:pt x="12000" y="15000"/>
-                  </a:cubicBezTo>
-                  <a:lnTo>
-                    <a:pt x="6000" y="15000"/>
-                  </a:lnTo>
-                  <a:cubicBezTo>
-                    <a:pt x="3791" y="15000"/>
-                    <a:pt x="2000" y="16791"/>
-                    <a:pt x="2000" y="19000"/>
-                  </a:cubicBezTo>
-                  <a:lnTo>
-                    <a:pt x="2000" y="21000"/>
-                  </a:lnTo>
-                </a:path>
-                <a:path w="24000" h="24000" fill="none">
-                  <a:moveTo>
-                    <a:pt x="13000" y="7000"/>
-                  </a:moveTo>
-                  <a:cubicBezTo>
-                    <a:pt x="13000" y="9209"/>
-                    <a:pt x="11209" y="11000"/>
-                    <a:pt x="9000" y="11000"/>
-                  </a:cubicBezTo>
-                  <a:cubicBezTo>
-                    <a:pt x="6791" y="11000"/>
-                    <a:pt x="5000" y="9209"/>
-                    <a:pt x="5000" y="7000"/>
-                  </a:cubicBezTo>
-                  <a:cubicBezTo>
-                    <a:pt x="5000" y="4791"/>
-                    <a:pt x="6791" y="3000"/>
-                    <a:pt x="9000" y="3000"/>
-                  </a:cubicBezTo>
-                  <a:cubicBezTo>
-                    <a:pt x="11209" y="3000"/>
-                    <a:pt x="13000" y="4791"/>
-                    <a:pt x="13000" y="7000"/>
-                  </a:cubicBezTo>
-                  <a:close/>
-                </a:path>
-                <a:path w="24000" h="24000" fill="none">
-                  <a:moveTo>
-                    <a:pt x="22000" y="21000"/>
-                  </a:moveTo>
-                  <a:lnTo>
-                    <a:pt x="22000" y="19000"/>
-                  </a:lnTo>
-                  <a:cubicBezTo>
-                    <a:pt x="21999" y="17177"/>
-                    <a:pt x="20765" y="15586"/>
-                    <a:pt x="19000" y="15130"/>
-                  </a:cubicBezTo>
-                </a:path>
-                <a:path w="24000" h="24000" fill="none">
-                  <a:moveTo>
-                    <a:pt x="16000" y="3130"/>
-                  </a:moveTo>
-                  <a:cubicBezTo>
-                    <a:pt x="17770" y="3583"/>
-                    <a:pt x="19008" y="5178"/>
-                    <a:pt x="19008" y="7005"/>
-                  </a:cubicBezTo>
-                  <a:cubicBezTo>
-                    <a:pt x="19008" y="8832"/>
-                    <a:pt x="17770" y="10427"/>
-                    <a:pt x="16000" y="10880"/>
-                  </a:cubicBezTo>
-                </a:path>
-              </a:pathLst>
-            </a:custGeom>
-            <a:noFill/>
-            <a:ln w="23698" cap="rnd">
-              <a:solidFill>
-                <a:srgbClr val="FFFFFF"/>
-              </a:solidFill>
-              <a:round/>
-            </a:ln>
-          </p:spPr>
-          <p:txBody>
-            <a:bodyPr rtlCol="0" anchor="ctr"/>
-            <a:lstStyle/>
-            <a:p>
-              <a:pPr algn="ctr"/>
-            </a:p>
-          </p:txBody>
-        </p:sp>
-        <p:sp>
-          <p:nvSpPr>
-            <p:cNvPr id="15" name="BrandDeck Diagram Text 3"/>
-            <p:cNvSpPr txBox="1"/>
-            <p:nvPr/>
-          </p:nvSpPr>
-          <p:spPr>
-            <a:xfrm>
-              <a:off x="4729028" y="3330808"/>
-              <a:ext cx="1692449" cy="1016899"/>
-            </a:xfrm>
-            <a:prstGeom prst="rect">
-              <a:avLst/>
-            </a:prstGeom>
-            <a:noFill/>
-          </p:spPr>
-          <p:txBody>
-            <a:bodyPr wrap="square" anchor="t" lIns="36576" tIns="18288" rIns="36576" bIns="18288">
-              <a:noAutofit/>
-            </a:bodyPr>
-            <a:lstStyle/>
-            <a:p>
-              <a:pPr algn="l">
-                <a:lnSpc>
-                  <a:spcPct val="110000"/>
-                </a:lnSpc>
-              </a:pPr>
-              <a:r>
-                <a:rPr sz="1410" b="0">
-                  <a:solidFill>
-                    <a:srgbClr val="FFFFFF"/>
-                  </a:solidFill>
-                  <a:latin typeface="Play"/>
-                </a:rPr>
-                <a:t>Сотрудники тратят время на рутинные задачи.</a:t>
-              </a:r>
-            </a:p>
-          </p:txBody>
-        </p:sp>
-      </p:grpSp>
+          <a:prstGeom prst="rect">
+            <a:avLst/>
+          </a:prstGeom>
+        </p:spPr>
+      </p:pic>
     </p:spTree>
   </p:cSld>
   <p:clrMapOvr>
@@ -9963,14 +10358,14 @@
             </a:pPr>
             <a:r>
               <a:rPr sz="1800"/>
-              <a:t>ИИ-помощник отвечает на вопросы по регламентам</a:t>
+              <a:t>ИИ отвечает на вопросы и дает ссылку на документ</a:t>
             </a:r>
           </a:p>
         </p:txBody>
       </p:sp>
       <p:grpSp>
         <p:nvGrpSpPr>
-          <p:cNvPr id="3" name="BrandDeck Diagram icon_grid" descr="icon_grid: ИИ-помощник отвечает на вопросы по регламентам и инструкциям.; Система автоматически формирует ответ и ссылку на документ-источник.; При отсутствии подтверждённого ответа вопрос передаётся специалисту."/>
+          <p:cNvPr id="3" name="BrandDeck Diagram icon_grid" descr="icon_grid: ИИ отвечает на вопросы по регламентам и инструкциям.; Система автоматически добавляет ссылку на документ-источник.; Ответ формируется на основе внутренних знаний компании."/>
           <p:cNvGrpSpPr/>
           <p:nvPr/>
         </p:nvGrpSpPr>
@@ -10185,7 +10580,7 @@
                   </a:solidFill>
                   <a:latin typeface="Play"/>
                 </a:rPr>
-                <a:t>ИИ-помощник отвечает на вопросы по регламентам и инструкциям.</a:t>
+                <a:t>ИИ отвечает на вопросы по регламентам и инструкциям.</a:t>
               </a:r>
             </a:p>
           </p:txBody>
@@ -10382,7 +10777,7 @@
                   </a:solidFill>
                   <a:latin typeface="Play"/>
                 </a:rPr>
-                <a:t>Система автоматически формирует ответ и ссылку на документ-источник.</a:t>
+                <a:t>Система автоматически добавляет ссылку на документ-источник.</a:t>
               </a:r>
             </a:p>
           </p:txBody>
@@ -10449,7 +10844,7 @@
         </p:sp>
         <p:sp>
           <p:nvSpPr>
-            <p:cNvPr id="14" name="BrandDeck Icon circle-check"/>
+            <p:cNvPr id="14" name="BrandDeck Icon book-open"/>
             <p:cNvSpPr/>
             <p:nvPr/>
           </p:nvSpPr>
@@ -10467,40 +10862,72 @@
               <a:pathLst>
                 <a:path w="24000" h="24000" fill="none">
                   <a:moveTo>
-                    <a:pt x="22000" y="12000"/>
+                    <a:pt x="12000" y="7000"/>
                   </a:moveTo>
-                  <a:cubicBezTo>
-                    <a:pt x="22000" y="17523"/>
-                    <a:pt x="17523" y="22000"/>
-                    <a:pt x="12000" y="22000"/>
-                  </a:cubicBezTo>
-                  <a:cubicBezTo>
-                    <a:pt x="6477" y="22000"/>
-                    <a:pt x="2000" y="17523"/>
-                    <a:pt x="2000" y="12000"/>
-                  </a:cubicBezTo>
-                  <a:cubicBezTo>
-                    <a:pt x="2000" y="6477"/>
-                    <a:pt x="6477" y="2000"/>
-                    <a:pt x="12000" y="2000"/>
-                  </a:cubicBezTo>
-                  <a:cubicBezTo>
-                    <a:pt x="17523" y="2000"/>
-                    <a:pt x="22000" y="6477"/>
-                    <a:pt x="22000" y="12000"/>
-                  </a:cubicBezTo>
-                  <a:close/>
+                  <a:lnTo>
+                    <a:pt x="12000" y="21000"/>
+                  </a:lnTo>
                 </a:path>
                 <a:path w="24000" h="24000" fill="none">
                   <a:moveTo>
-                    <a:pt x="9000" y="12000"/>
+                    <a:pt x="3000" y="18000"/>
                   </a:moveTo>
+                  <a:cubicBezTo>
+                    <a:pt x="2448" y="18000"/>
+                    <a:pt x="2000" y="17552"/>
+                    <a:pt x="2000" y="17000"/>
+                  </a:cubicBezTo>
                   <a:lnTo>
-                    <a:pt x="11000" y="14000"/>
+                    <a:pt x="2000" y="4000"/>
                   </a:lnTo>
+                  <a:cubicBezTo>
+                    <a:pt x="2000" y="3448"/>
+                    <a:pt x="2448" y="3000"/>
+                    <a:pt x="3000" y="3000"/>
+                  </a:cubicBezTo>
                   <a:lnTo>
-                    <a:pt x="15000" y="10000"/>
+                    <a:pt x="8000" y="3000"/>
                   </a:lnTo>
+                  <a:cubicBezTo>
+                    <a:pt x="10209" y="3000"/>
+                    <a:pt x="12000" y="4791"/>
+                    <a:pt x="12000" y="7000"/>
+                  </a:cubicBezTo>
+                  <a:cubicBezTo>
+                    <a:pt x="12000" y="4791"/>
+                    <a:pt x="13791" y="3000"/>
+                    <a:pt x="16000" y="3000"/>
+                  </a:cubicBezTo>
+                  <a:lnTo>
+                    <a:pt x="21000" y="3000"/>
+                  </a:lnTo>
+                  <a:cubicBezTo>
+                    <a:pt x="21552" y="3000"/>
+                    <a:pt x="22000" y="3448"/>
+                    <a:pt x="22000" y="4000"/>
+                  </a:cubicBezTo>
+                  <a:lnTo>
+                    <a:pt x="22000" y="17000"/>
+                  </a:lnTo>
+                  <a:cubicBezTo>
+                    <a:pt x="22000" y="17552"/>
+                    <a:pt x="21552" y="18000"/>
+                    <a:pt x="21000" y="18000"/>
+                  </a:cubicBezTo>
+                  <a:lnTo>
+                    <a:pt x="15000" y="18000"/>
+                  </a:lnTo>
+                  <a:cubicBezTo>
+                    <a:pt x="13343" y="18000"/>
+                    <a:pt x="12000" y="19343"/>
+                    <a:pt x="12000" y="21000"/>
+                  </a:cubicBezTo>
+                  <a:cubicBezTo>
+                    <a:pt x="12000" y="19343"/>
+                    <a:pt x="10657" y="18000"/>
+                    <a:pt x="9000" y="18000"/>
+                  </a:cubicBezTo>
+                  <a:close/>
                 </a:path>
               </a:pathLst>
             </a:custGeom>
@@ -10554,7 +10981,7 @@
                   </a:solidFill>
                   <a:latin typeface="Play"/>
                 </a:rPr>
-                <a:t>При отсутствии подтверждённого ответа вопрос передаётся специалисту.</a:t>
+                <a:t>Ответ формируется на основе внутренних знаний компании.</a:t>
               </a:r>
             </a:p>
           </p:txBody>
@@ -10580,14 +11007,14 @@
       <p:grpSpPr/>
       <p:sp>
         <p:nvSpPr>
-          <p:cNvPr id="1119" name="Google Shape;1119;p69"/>
+          <p:cNvPr id="987" name="Google Shape;987;p64"/>
           <p:cNvSpPr/>
           <p:nvPr/>
         </p:nvSpPr>
         <p:spPr>
           <a:xfrm>
-            <a:off x="285748" y="286047"/>
-            <a:ext cx="8572456" cy="4176169"/>
+            <a:off x="285748" y="286048"/>
+            <a:ext cx="8572456" cy="4152359"/>
           </a:xfrm>
           <a:prstGeom prst="rect">
             <a:avLst/>
@@ -10621,14 +11048,14 @@
       </p:sp>
       <p:sp>
         <p:nvSpPr>
-          <p:cNvPr id="1120" name="Google Shape;1120;p69"/>
+          <p:cNvPr id="988" name="Google Shape;988;p64"/>
           <p:cNvSpPr/>
           <p:nvPr/>
         </p:nvSpPr>
         <p:spPr>
           <a:xfrm>
             <a:off x="285748" y="1209852"/>
-            <a:ext cx="8572456" cy="3252364"/>
+            <a:ext cx="8572456" cy="3228555"/>
           </a:xfrm>
           <a:prstGeom prst="rect">
             <a:avLst/>
@@ -10662,14 +11089,14 @@
       </p:sp>
       <p:sp>
         <p:nvSpPr>
-          <p:cNvPr id="1121" name="Google Shape;1121;p69"/>
+          <p:cNvPr id="989" name="Google Shape;989;p64"/>
           <p:cNvSpPr/>
           <p:nvPr/>
         </p:nvSpPr>
         <p:spPr>
           <a:xfrm>
             <a:off x="285748" y="1209852"/>
-            <a:ext cx="8572456" cy="3252364"/>
+            <a:ext cx="8572456" cy="1795229"/>
           </a:xfrm>
           <a:prstGeom prst="rect">
             <a:avLst/>
@@ -10703,63 +11130,14 @@
       </p:sp>
       <p:sp>
         <p:nvSpPr>
-          <p:cNvPr id="1123" name="Google Shape;1123;p69"/>
+          <p:cNvPr id="1012" name="Google Shape;1012;p64"/>
           <p:cNvSpPr/>
           <p:nvPr/>
         </p:nvSpPr>
         <p:spPr>
           <a:xfrm>
-            <a:off x="500061" y="1424137"/>
-            <a:ext cx="2919397" cy="2895223"/>
-          </a:xfrm>
-          <a:prstGeom prst="rect">
-            <a:avLst/>
-          </a:prstGeom>
-          <a:noFill/>
-          <a:ln>
-            <a:noFill/>
-          </a:ln>
-        </p:spPr>
-        <p:txBody>
-          <a:bodyPr anchorCtr="0" anchor="t" bIns="0" lIns="0" spcFirstLastPara="1" rIns="0" wrap="square" tIns="0">
-            <a:normAutofit/>
-          </a:bodyPr>
-          <a:lstStyle/>
-          <a:p>
-            <a:pPr indent="0" lvl="0" marL="0" marR="0" rtl="0" algn="l">
-              <a:lnSpc>
-                <a:spcPct val="139988"/>
-              </a:lnSpc>
-              <a:spcBef>
-                <a:spcPts val="0"/>
-              </a:spcBef>
-              <a:spcAft>
-                <a:spcPts val="0"/>
-              </a:spcAft>
-              <a:buNone/>
-            </a:pPr>
-            <a:endParaRPr b="0" i="0" sz="1688" u="none" cap="none" strike="noStrike">
-              <a:solidFill>
-                <a:schemeClr val="dk1"/>
-              </a:solidFill>
-              <a:latin typeface="Calibri"/>
-              <a:ea typeface="Calibri"/>
-              <a:cs typeface="Calibri"/>
-              <a:sym typeface="Calibri"/>
-            </a:endParaRPr>
-          </a:p>
-        </p:txBody>
-      </p:sp>
-      <p:sp>
-        <p:nvSpPr>
-          <p:cNvPr id="1124" name="Google Shape;1124;p69"/>
-          <p:cNvSpPr/>
-          <p:nvPr/>
-        </p:nvSpPr>
-        <p:spPr>
-          <a:xfrm>
-            <a:off x="3657581" y="1209852"/>
-            <a:ext cx="5200623" cy="3252364"/>
+            <a:off x="285748" y="3176509"/>
+            <a:ext cx="8572456" cy="1261898"/>
           </a:xfrm>
           <a:prstGeom prst="rect">
             <a:avLst/>
@@ -10793,7 +11171,7 @@
       </p:sp>
       <p:sp>
         <p:nvSpPr>
-          <p:cNvPr id="1132" name="BrandDeck Text 1132"/>
+          <p:cNvPr id="1017" name="BrandDeck Text 1017"/>
           <p:cNvSpPr txBox="1"/>
           <p:nvPr>
             <p:ph type="title"/>
@@ -10837,7 +11215,7 @@
             </a:pPr>
             <a:r>
               <a:rPr sz="1800"/>
-              <a:t>Вопросы без ответа передаются специалисту</a:t>
+              <a:t>Модель с открытыми весами работает внутри контура</a:t>
             </a:r>
             <a:endParaRPr/>
           </a:p>
@@ -10845,14 +11223,14 @@
       </p:sp>
       <p:sp>
         <p:nvSpPr>
-          <p:cNvPr id="1133" name="BrandDeck Body"/>
+          <p:cNvPr id="1022" name="BrandDeck Body"/>
           <p:cNvSpPr txBox="1"/>
           <p:nvPr/>
         </p:nvSpPr>
         <p:spPr>
           <a:xfrm>
-            <a:off x="500060" y="1424137"/>
-            <a:ext cx="2558400" cy="2895223"/>
+            <a:off x="585216" y="1144312"/>
+            <a:ext cx="2129088" cy="3583136"/>
           </a:xfrm>
           <a:prstGeom prst="rect">
             <a:avLst/>
@@ -10873,17 +11251,17 @@
                 <a:spcPts val="0"/>
               </a:spcBef>
               <a:spcAft>
-                <a:spcPts val="253"/>
+                <a:spcPts val="179"/>
               </a:spcAft>
             </a:pPr>
             <a:r>
-              <a:rPr sz="1689">
+              <a:rPr sz="1200">
                 <a:solidFill>
-                  <a:srgbClr val="000000"/>
+                  <a:srgbClr val="001515"/>
                 </a:solidFill>
                 <a:latin typeface="Play"/>
               </a:rPr>
-              <a:t>• Отсутствующий ответ перенаправляет вопрос специалисту.</a:t>
+              <a:t>• Модель с открытыми весами работает внутри контура компании.</a:t>
             </a:r>
           </a:p>
           <a:p>
@@ -10895,62 +11273,40 @@
                 <a:spcPts val="0"/>
               </a:spcBef>
               <a:spcAft>
-                <a:spcPts val="253"/>
+                <a:spcPts val="179"/>
               </a:spcAft>
             </a:pPr>
             <a:r>
-              <a:rPr sz="1689">
+              <a:rPr sz="1200">
                 <a:solidFill>
-                  <a:srgbClr val="000000"/>
+                  <a:srgbClr val="001515"/>
                 </a:solidFill>
                 <a:latin typeface="Play"/>
               </a:rPr>
-              <a:t>• В запрос включается контекст предыдущих попыток.</a:t>
-            </a:r>
-          </a:p>
-          <a:p>
-            <a:pPr algn="l">
-              <a:lnSpc>
-                <a:spcPct val="115000"/>
-              </a:lnSpc>
-              <a:spcBef>
-                <a:spcPts val="0"/>
-              </a:spcBef>
-              <a:spcAft>
-                <a:spcPts val="253"/>
-              </a:spcAft>
-            </a:pPr>
-            <a:r>
-              <a:rPr sz="1689">
-                <a:solidFill>
-                  <a:srgbClr val="000000"/>
-                </a:solidFill>
-                <a:latin typeface="Play"/>
-              </a:rPr>
-              <a:t>• Сотрудник получает помощь без ожидания ответа.</a:t>
+              <a:t>• Документы не уходят наружу при обработке запросов.</a:t>
             </a:r>
           </a:p>
         </p:txBody>
       </p:sp>
       <p:pic>
         <p:nvPicPr>
-          <p:cNvPr id="1134" name="BrandDeck Image" descr="сотрудник специалист поддержки"/>
+          <p:cNvPr id="1023" name="BrandDeck Image" descr="внутренний контур серверная"/>
           <p:cNvPicPr>
             <a:picLocks noChangeAspect="1"/>
           </p:cNvPicPr>
           <p:nvPr/>
         </p:nvPicPr>
         <p:blipFill>
-          <a:blip r:embed="rId7"/>
-          <a:srcRect l="18013" r="18013"/>
+          <a:blip r:embed="rId9"/>
+          <a:srcRect l="28445" r="28445"/>
           <a:stretch>
             <a:fillRect/>
           </a:stretch>
         </p:blipFill>
         <p:spPr>
           <a:xfrm>
-            <a:off x="3314493" y="1424137"/>
-            <a:ext cx="3291060" cy="2895223"/>
+            <a:off x="2970336" y="1144312"/>
+            <a:ext cx="2744663" cy="3583136"/>
           </a:xfrm>
           <a:prstGeom prst="rect">
             <a:avLst/>
@@ -10966,403 +11322,6 @@
 </file>
 
 <file path=ppt/slides/slide7.xml><?xml version="1.0" encoding="utf-8"?>
-<p:sld xmlns:a="http://schemas.openxmlformats.org/drawingml/2006/main" xmlns:p="http://schemas.openxmlformats.org/presentationml/2006/main" xmlns:r="http://schemas.openxmlformats.org/officeDocument/2006/relationships">
-  <p:cSld>
-    <p:spTree>
-      <p:nvGrpSpPr>
-        <p:cNvPr id="1" name=""/>
-        <p:cNvGrpSpPr/>
-        <p:nvPr/>
-      </p:nvGrpSpPr>
-      <p:grpSpPr/>
-      <p:sp>
-        <p:nvSpPr>
-          <p:cNvPr id="1119" name="Google Shape;1119;p69"/>
-          <p:cNvSpPr/>
-          <p:nvPr/>
-        </p:nvSpPr>
-        <p:spPr>
-          <a:xfrm>
-            <a:off x="285748" y="286047"/>
-            <a:ext cx="8572456" cy="4176169"/>
-          </a:xfrm>
-          <a:prstGeom prst="rect">
-            <a:avLst/>
-          </a:prstGeom>
-          <a:noFill/>
-          <a:ln>
-            <a:noFill/>
-          </a:ln>
-        </p:spPr>
-        <p:txBody>
-          <a:bodyPr anchorCtr="0" anchor="ctr" bIns="91425" lIns="91425" spcFirstLastPara="1" rIns="91425" wrap="square" tIns="91425">
-            <a:noAutofit/>
-          </a:bodyPr>
-          <a:lstStyle/>
-          <a:p>
-            <a:pPr indent="0" lvl="0" marL="0" rtl="0" algn="l">
-              <a:spcBef>
-                <a:spcPts val="0"/>
-              </a:spcBef>
-              <a:spcAft>
-                <a:spcPts val="0"/>
-              </a:spcAft>
-              <a:buNone/>
-            </a:pPr>
-            <a:r>
-              <a:t/>
-            </a:r>
-            <a:endParaRPr/>
-          </a:p>
-        </p:txBody>
-      </p:sp>
-      <p:sp>
-        <p:nvSpPr>
-          <p:cNvPr id="1120" name="Google Shape;1120;p69"/>
-          <p:cNvSpPr/>
-          <p:nvPr/>
-        </p:nvSpPr>
-        <p:spPr>
-          <a:xfrm>
-            <a:off x="285748" y="1209852"/>
-            <a:ext cx="8572456" cy="3252364"/>
-          </a:xfrm>
-          <a:prstGeom prst="rect">
-            <a:avLst/>
-          </a:prstGeom>
-          <a:noFill/>
-          <a:ln>
-            <a:noFill/>
-          </a:ln>
-        </p:spPr>
-        <p:txBody>
-          <a:bodyPr anchorCtr="0" anchor="ctr" bIns="91425" lIns="91425" spcFirstLastPara="1" rIns="91425" wrap="square" tIns="91425">
-            <a:noAutofit/>
-          </a:bodyPr>
-          <a:lstStyle/>
-          <a:p>
-            <a:pPr indent="0" lvl="0" marL="0" rtl="0" algn="l">
-              <a:spcBef>
-                <a:spcPts val="0"/>
-              </a:spcBef>
-              <a:spcAft>
-                <a:spcPts val="0"/>
-              </a:spcAft>
-              <a:buNone/>
-            </a:pPr>
-            <a:r>
-              <a:t/>
-            </a:r>
-            <a:endParaRPr/>
-          </a:p>
-        </p:txBody>
-      </p:sp>
-      <p:sp>
-        <p:nvSpPr>
-          <p:cNvPr id="1121" name="Google Shape;1121;p69"/>
-          <p:cNvSpPr/>
-          <p:nvPr/>
-        </p:nvSpPr>
-        <p:spPr>
-          <a:xfrm>
-            <a:off x="285748" y="1209852"/>
-            <a:ext cx="8572456" cy="3252364"/>
-          </a:xfrm>
-          <a:prstGeom prst="rect">
-            <a:avLst/>
-          </a:prstGeom>
-          <a:noFill/>
-          <a:ln>
-            <a:noFill/>
-          </a:ln>
-        </p:spPr>
-        <p:txBody>
-          <a:bodyPr anchorCtr="0" anchor="ctr" bIns="91425" lIns="91425" spcFirstLastPara="1" rIns="91425" wrap="square" tIns="91425">
-            <a:noAutofit/>
-          </a:bodyPr>
-          <a:lstStyle/>
-          <a:p>
-            <a:pPr indent="0" lvl="0" marL="0" rtl="0" algn="l">
-              <a:spcBef>
-                <a:spcPts val="0"/>
-              </a:spcBef>
-              <a:spcAft>
-                <a:spcPts val="0"/>
-              </a:spcAft>
-              <a:buNone/>
-            </a:pPr>
-            <a:r>
-              <a:t/>
-            </a:r>
-            <a:endParaRPr/>
-          </a:p>
-        </p:txBody>
-      </p:sp>
-      <p:sp>
-        <p:nvSpPr>
-          <p:cNvPr id="1123" name="Google Shape;1123;p69"/>
-          <p:cNvSpPr/>
-          <p:nvPr/>
-        </p:nvSpPr>
-        <p:spPr>
-          <a:xfrm>
-            <a:off x="500061" y="1424137"/>
-            <a:ext cx="2919397" cy="2895223"/>
-          </a:xfrm>
-          <a:prstGeom prst="rect">
-            <a:avLst/>
-          </a:prstGeom>
-          <a:noFill/>
-          <a:ln>
-            <a:noFill/>
-          </a:ln>
-        </p:spPr>
-        <p:txBody>
-          <a:bodyPr anchorCtr="0" anchor="t" bIns="0" lIns="0" spcFirstLastPara="1" rIns="0" wrap="square" tIns="0">
-            <a:normAutofit/>
-          </a:bodyPr>
-          <a:lstStyle/>
-          <a:p>
-            <a:pPr indent="0" lvl="0" marL="0" marR="0" rtl="0" algn="l">
-              <a:lnSpc>
-                <a:spcPct val="139988"/>
-              </a:lnSpc>
-              <a:spcBef>
-                <a:spcPts val="0"/>
-              </a:spcBef>
-              <a:spcAft>
-                <a:spcPts val="0"/>
-              </a:spcAft>
-              <a:buNone/>
-            </a:pPr>
-            <a:endParaRPr b="0" i="0" sz="1688" u="none" cap="none" strike="noStrike">
-              <a:solidFill>
-                <a:schemeClr val="dk1"/>
-              </a:solidFill>
-              <a:latin typeface="Calibri"/>
-              <a:ea typeface="Calibri"/>
-              <a:cs typeface="Calibri"/>
-              <a:sym typeface="Calibri"/>
-            </a:endParaRPr>
-          </a:p>
-        </p:txBody>
-      </p:sp>
-      <p:sp>
-        <p:nvSpPr>
-          <p:cNvPr id="1124" name="Google Shape;1124;p69"/>
-          <p:cNvSpPr/>
-          <p:nvPr/>
-        </p:nvSpPr>
-        <p:spPr>
-          <a:xfrm>
-            <a:off x="3657581" y="1209852"/>
-            <a:ext cx="5200623" cy="3252364"/>
-          </a:xfrm>
-          <a:prstGeom prst="rect">
-            <a:avLst/>
-          </a:prstGeom>
-          <a:noFill/>
-          <a:ln>
-            <a:noFill/>
-          </a:ln>
-        </p:spPr>
-        <p:txBody>
-          <a:bodyPr anchorCtr="0" anchor="ctr" bIns="91425" lIns="91425" spcFirstLastPara="1" rIns="91425" wrap="square" tIns="91425">
-            <a:noAutofit/>
-          </a:bodyPr>
-          <a:lstStyle/>
-          <a:p>
-            <a:pPr indent="0" lvl="0" marL="0" rtl="0" algn="l">
-              <a:spcBef>
-                <a:spcPts val="0"/>
-              </a:spcBef>
-              <a:spcAft>
-                <a:spcPts val="0"/>
-              </a:spcAft>
-              <a:buNone/>
-            </a:pPr>
-            <a:r>
-              <a:t/>
-            </a:r>
-            <a:endParaRPr/>
-          </a:p>
-        </p:txBody>
-      </p:sp>
-      <p:sp>
-        <p:nvSpPr>
-          <p:cNvPr id="1132" name="BrandDeck Text 1132"/>
-          <p:cNvSpPr txBox="1"/>
-          <p:nvPr>
-            <p:ph type="title"/>
-          </p:nvPr>
-        </p:nvSpPr>
-        <p:spPr>
-          <a:xfrm>
-            <a:off x="177970" y="282949"/>
-            <a:ext cx="6792985" cy="724203"/>
-          </a:xfrm>
-          <a:prstGeom prst="rect">
-            <a:avLst/>
-          </a:prstGeom>
-          <a:noFill/>
-          <a:ln>
-            <a:noFill/>
-          </a:ln>
-        </p:spPr>
-        <p:txBody>
-          <a:bodyPr anchorCtr="0" anchor="t" bIns="45700" lIns="91425" spcFirstLastPara="1" rIns="91425" wrap="square" tIns="45700">
-            <a:normAutofit/>
-          </a:bodyPr>
-          <a:lstStyle/>
-          <a:p>
-            <a:pPr indent="0" marL="0" rtl="0" algn="l">
-              <a:lnSpc>
-                <a:spcPct val="115000"/>
-              </a:lnSpc>
-              <a:spcBef>
-                <a:spcPts val="0"/>
-              </a:spcBef>
-              <a:spcAft>
-                <a:spcPts val="270"/>
-              </a:spcAft>
-              <a:buClr>
-                <a:schemeClr val="dk1"/>
-              </a:buClr>
-              <a:buSzPts val="2400"/>
-              <a:buFont typeface="Play"/>
-              <a:buNone/>
-            </a:pPr>
-            <a:r>
-              <a:rPr sz="1800"/>
-              <a:t>Модель работает внутри контура компании</a:t>
-            </a:r>
-            <a:endParaRPr/>
-          </a:p>
-        </p:txBody>
-      </p:sp>
-      <p:sp>
-        <p:nvSpPr>
-          <p:cNvPr id="1133" name="BrandDeck Body"/>
-          <p:cNvSpPr txBox="1"/>
-          <p:nvPr/>
-        </p:nvSpPr>
-        <p:spPr>
-          <a:xfrm>
-            <a:off x="500060" y="1424137"/>
-            <a:ext cx="2558400" cy="2895223"/>
-          </a:xfrm>
-          <a:prstGeom prst="rect">
-            <a:avLst/>
-          </a:prstGeom>
-          <a:noFill/>
-        </p:spPr>
-        <p:txBody>
-          <a:bodyPr wrap="square" anchor="t" lIns="36576" rIns="36576" tIns="18288" bIns="18288">
-            <a:normAutofit/>
-          </a:bodyPr>
-          <a:lstStyle/>
-          <a:p>
-            <a:pPr algn="l">
-              <a:lnSpc>
-                <a:spcPct val="115000"/>
-              </a:lnSpc>
-              <a:spcBef>
-                <a:spcPts val="0"/>
-              </a:spcBef>
-              <a:spcAft>
-                <a:spcPts val="211"/>
-              </a:spcAft>
-            </a:pPr>
-            <a:r>
-              <a:rPr sz="1410">
-                <a:solidFill>
-                  <a:srgbClr val="000000"/>
-                </a:solidFill>
-                <a:latin typeface="Play"/>
-              </a:rPr>
-              <a:t>• Модель с открытыми весами работает внутри контура компании.</a:t>
-            </a:r>
-          </a:p>
-          <a:p>
-            <a:pPr algn="l">
-              <a:lnSpc>
-                <a:spcPct val="115000"/>
-              </a:lnSpc>
-              <a:spcBef>
-                <a:spcPts val="0"/>
-              </a:spcBef>
-              <a:spcAft>
-                <a:spcPts val="211"/>
-              </a:spcAft>
-            </a:pPr>
-            <a:r>
-              <a:rPr sz="1410">
-                <a:solidFill>
-                  <a:srgbClr val="000000"/>
-                </a:solidFill>
-                <a:latin typeface="Play"/>
-              </a:rPr>
-              <a:t>• Документы не покидают внутреннюю сеть и не уходят наружу.</a:t>
-            </a:r>
-          </a:p>
-          <a:p>
-            <a:pPr algn="l">
-              <a:lnSpc>
-                <a:spcPct val="115000"/>
-              </a:lnSpc>
-              <a:spcBef>
-                <a:spcPts val="0"/>
-              </a:spcBef>
-              <a:spcAft>
-                <a:spcPts val="211"/>
-              </a:spcAft>
-            </a:pPr>
-            <a:r>
-              <a:rPr sz="1410">
-                <a:solidFill>
-                  <a:srgbClr val="000000"/>
-                </a:solidFill>
-                <a:latin typeface="Play"/>
-              </a:rPr>
-              <a:t>• Обработка запросов происходит без передачи данных внешним сервисам.</a:t>
-            </a:r>
-          </a:p>
-        </p:txBody>
-      </p:sp>
-      <p:pic>
-        <p:nvPicPr>
-          <p:cNvPr id="1134" name="BrandDeck Image" descr="внутренний контур серверная"/>
-          <p:cNvPicPr>
-            <a:picLocks noChangeAspect="1"/>
-          </p:cNvPicPr>
-          <p:nvPr/>
-        </p:nvPicPr>
-        <p:blipFill>
-          <a:blip r:embed="rId7"/>
-          <a:srcRect l="18013" r="18013"/>
-          <a:stretch>
-            <a:fillRect/>
-          </a:stretch>
-        </p:blipFill>
-        <p:spPr>
-          <a:xfrm>
-            <a:off x="3314493" y="1424137"/>
-            <a:ext cx="3291060" cy="2895223"/>
-          </a:xfrm>
-          <a:prstGeom prst="rect">
-            <a:avLst/>
-          </a:prstGeom>
-        </p:spPr>
-      </p:pic>
-    </p:spTree>
-  </p:cSld>
-  <p:clrMapOvr>
-    <a:masterClrMapping/>
-  </p:clrMapOvr>
-</p:sld>
-</file>
-
-<file path=ppt/slides/slide8.xml><?xml version="1.0" encoding="utf-8"?>
 <p:sld xmlns:a="http://schemas.openxmlformats.org/drawingml/2006/main" xmlns:p="http://schemas.openxmlformats.org/presentationml/2006/main" xmlns:r="http://schemas.openxmlformats.org/officeDocument/2006/relationships">
   <p:cSld>
     <p:spTree>
@@ -11402,48 +11361,46 @@
                 <a:spcPts val="0"/>
               </a:spcBef>
               <a:spcAft>
-                <a:spcPts val="270"/>
+                <a:spcPts val="211"/>
               </a:spcAft>
             </a:pPr>
             <a:r>
-              <a:rPr sz="1800"/>
-              <a:t>Сотрудник получает мгновенный ответ и ссылку</a:t>
+              <a:rPr sz="1410"/>
+              <a:t>Отсутствие подтвержденного ответа перенаправляет вопрос специалисту</a:t>
             </a:r>
           </a:p>
         </p:txBody>
       </p:sp>
       <p:grpSp>
         <p:nvGrpSpPr>
-          <p:cNvPr id="3" name="BrandDeck Diagram icon_grid" descr="icon_grid: Модель отвечает на вопросы по регламентам и инструкциям.; При отсутствии ответа вопрос передаётся специалисту с контекстом.; Сотрудник сразу получает подтверждённый ответ и ссылку на документ."/>
+          <p:cNvPr id="3" name="BrandDeck Diagram process" descr="process: Вопрос сотрудника Отправлен ИИ-помощнику; Ответ не найден Перенаправляется специалисту"/>
           <p:cNvGrpSpPr/>
           <p:nvPr/>
         </p:nvGrpSpPr>
         <p:grpSpPr>
           <a:xfrm>
-            <a:off x="4637088" y="676278"/>
-            <a:ext cx="3862386" cy="3737102"/>
-            <a:chOff x="4637088" y="676278"/>
-            <a:chExt cx="3862386" cy="3737102"/>
+            <a:off x="4637088" y="703710"/>
+            <a:ext cx="3862387" cy="3682238"/>
+            <a:chOff x="4637088" y="703710"/>
+            <a:chExt cx="3862387" cy="3682238"/>
           </a:xfrm>
         </p:grpSpPr>
         <p:sp>
           <p:nvSpPr>
-            <p:cNvPr id="4" name="BrandDeck Diagram Card 1"/>
+            <p:cNvPr id="4" name="BrandDeck Diagram Connector"/>
             <p:cNvSpPr/>
             <p:nvPr/>
           </p:nvSpPr>
           <p:spPr>
             <a:xfrm>
-              <a:off x="4637088" y="676278"/>
-              <a:ext cx="1876329" cy="1813687"/>
+              <a:off x="4876660" y="1610553"/>
+              <a:ext cx="32918" cy="1868551"/>
             </a:xfrm>
-            <a:prstGeom prst="roundRect">
-              <a:avLst>
-                <a:gd name="adj" fmla="val 8000"/>
-              </a:avLst>
+            <a:prstGeom prst="rect">
+              <a:avLst/>
             </a:prstGeom>
             <a:solidFill>
-              <a:srgbClr val="1A1A1A"/>
+              <a:srgbClr val="58A6FF"/>
             </a:solidFill>
             <a:ln>
               <a:noFill/>
@@ -11459,14 +11416,14 @@
         </p:sp>
         <p:sp>
           <p:nvSpPr>
-            <p:cNvPr id="5" name="BrandDeck Diagram Icon 1 Badge"/>
+            <p:cNvPr id="5" name="BrandDeck Diagram Step 1 Badge"/>
             <p:cNvSpPr/>
             <p:nvPr/>
           </p:nvSpPr>
           <p:spPr>
             <a:xfrm>
-              <a:off x="4768431" y="807621"/>
-              <a:ext cx="507832" cy="507832"/>
+              <a:off x="4637088" y="1354521"/>
+              <a:ext cx="512064" cy="512064"/>
             </a:xfrm>
             <a:prstGeom prst="ellipse">
               <a:avLst/>
@@ -11479,112 +11436,49 @@
             </a:ln>
           </p:spPr>
           <p:txBody>
-            <a:bodyPr rtlCol="0" anchor="ctr"/>
+            <a:bodyPr rtlCol="0" anchor="ctr" wrap="square" lIns="0" tIns="0" rIns="0" bIns="0">
+              <a:noAutofit/>
+            </a:bodyPr>
             <a:lstStyle/>
             <a:p>
-              <a:pPr algn="ctr"/>
+              <a:pPr algn="ctr">
+                <a:lnSpc>
+                  <a:spcPct val="110000"/>
+                </a:lnSpc>
+              </a:pPr>
+              <a:r>
+                <a:rPr sz="1410" b="1">
+                  <a:solidFill>
+                    <a:srgbClr val="FFFFFF"/>
+                  </a:solidFill>
+                  <a:latin typeface="Play"/>
+                </a:rPr>
+                <a:t>01</a:t>
+              </a:r>
             </a:p>
           </p:txBody>
         </p:sp>
         <p:sp>
           <p:nvSpPr>
-            <p:cNvPr id="6" name="BrandDeck Icon file-text"/>
+            <p:cNvPr id="6" name="BrandDeck Diagram Detail Card 1"/>
             <p:cNvSpPr/>
             <p:nvPr/>
           </p:nvSpPr>
           <p:spPr>
             <a:xfrm>
-              <a:off x="4880154" y="919344"/>
-              <a:ext cx="284386" cy="284386"/>
+              <a:off x="5258880" y="703710"/>
+              <a:ext cx="3240595" cy="1813687"/>
             </a:xfrm>
-            <a:custGeom>
-              <a:avLst/>
-              <a:gdLst/>
-              <a:ahLst/>
-              <a:cxnLst/>
-              <a:rect l="l" t="t" r="r" b="b"/>
-              <a:pathLst>
-                <a:path w="24000" h="24000" fill="none">
-                  <a:moveTo>
-                    <a:pt x="15000" y="2000"/>
-                  </a:moveTo>
-                  <a:lnTo>
-                    <a:pt x="6000" y="2000"/>
-                  </a:lnTo>
-                  <a:cubicBezTo>
-                    <a:pt x="4895" y="2000"/>
-                    <a:pt x="4000" y="2895"/>
-                    <a:pt x="4000" y="4000"/>
-                  </a:cubicBezTo>
-                  <a:lnTo>
-                    <a:pt x="4000" y="20000"/>
-                  </a:lnTo>
-                  <a:cubicBezTo>
-                    <a:pt x="4000" y="21105"/>
-                    <a:pt x="4895" y="22000"/>
-                    <a:pt x="6000" y="22000"/>
-                  </a:cubicBezTo>
-                  <a:lnTo>
-                    <a:pt x="18000" y="22000"/>
-                  </a:lnTo>
-                  <a:cubicBezTo>
-                    <a:pt x="19105" y="22000"/>
-                    <a:pt x="20000" y="21105"/>
-                    <a:pt x="20000" y="20000"/>
-                  </a:cubicBezTo>
-                  <a:lnTo>
-                    <a:pt x="20000" y="7000"/>
-                  </a:lnTo>
-                  <a:close/>
-                </a:path>
-                <a:path w="24000" h="24000" fill="none">
-                  <a:moveTo>
-                    <a:pt x="14000" y="2000"/>
-                  </a:moveTo>
-                  <a:lnTo>
-                    <a:pt x="14000" y="6000"/>
-                  </a:lnTo>
-                  <a:cubicBezTo>
-                    <a:pt x="14000" y="7105"/>
-                    <a:pt x="14895" y="8000"/>
-                    <a:pt x="16000" y="8000"/>
-                  </a:cubicBezTo>
-                  <a:lnTo>
-                    <a:pt x="20000" y="8000"/>
-                  </a:lnTo>
-                </a:path>
-                <a:path w="24000" h="24000" fill="none">
-                  <a:moveTo>
-                    <a:pt x="10000" y="9000"/>
-                  </a:moveTo>
-                  <a:lnTo>
-                    <a:pt x="8000" y="9000"/>
-                  </a:lnTo>
-                </a:path>
-                <a:path w="24000" h="24000" fill="none">
-                  <a:moveTo>
-                    <a:pt x="16000" y="13000"/>
-                  </a:moveTo>
-                  <a:lnTo>
-                    <a:pt x="8000" y="13000"/>
-                  </a:lnTo>
-                </a:path>
-                <a:path w="24000" h="24000" fill="none">
-                  <a:moveTo>
-                    <a:pt x="16000" y="17000"/>
-                  </a:moveTo>
-                  <a:lnTo>
-                    <a:pt x="8000" y="17000"/>
-                  </a:lnTo>
-                </a:path>
-              </a:pathLst>
-            </a:custGeom>
-            <a:noFill/>
-            <a:ln w="23698" cap="rnd">
-              <a:solidFill>
-                <a:srgbClr val="FFFFFF"/>
-              </a:solidFill>
-              <a:round/>
+            <a:prstGeom prst="roundRect">
+              <a:avLst>
+                <a:gd name="adj" fmla="val 12000"/>
+              </a:avLst>
+            </a:prstGeom>
+            <a:solidFill>
+              <a:srgbClr val="E8F3FF"/>
+            </a:solidFill>
+            <a:ln>
+              <a:noFill/>
             </a:ln>
           </p:spPr>
           <p:txBody>
@@ -11603,8 +11497,8 @@
           </p:nvSpPr>
           <p:spPr>
             <a:xfrm>
-              <a:off x="4729028" y="1407393"/>
-              <a:ext cx="1692449" cy="1016899"/>
+              <a:off x="5350320" y="703710"/>
+              <a:ext cx="3149155" cy="1813687"/>
             </a:xfrm>
             <a:prstGeom prst="rect">
               <a:avLst/>
@@ -11612,7 +11506,7 @@
             <a:noFill/>
           </p:spPr>
           <p:txBody>
-            <a:bodyPr wrap="square" anchor="t" lIns="36576" tIns="18288" rIns="36576" bIns="18288">
+            <a:bodyPr wrap="square" anchor="ctr" lIns="36576" tIns="18288" rIns="36576" bIns="18288">
               <a:noAutofit/>
             </a:bodyPr>
             <a:lstStyle/>
@@ -11623,35 +11517,98 @@
                 </a:lnSpc>
               </a:pPr>
               <a:r>
-                <a:rPr sz="1170" b="0">
+                <a:rPr sz="1600" b="1">
                   <a:solidFill>
-                    <a:srgbClr val="FFFFFF"/>
+                    <a:srgbClr val="000000"/>
                   </a:solidFill>
                   <a:latin typeface="Play"/>
                 </a:rPr>
-                <a:t>Модель отвечает на вопросы по регламентам и инструкциям.</a:t>
+                <a:t>Вопрос сотрудника</a:t>
+              </a:r>
+            </a:p>
+            <a:p>
+              <a:pPr algn="l">
+                <a:lnSpc>
+                  <a:spcPct val="110000"/>
+                </a:lnSpc>
+                <a:spcBef>
+                  <a:spcPts val="400"/>
+                </a:spcBef>
+              </a:pPr>
+              <a:r>
+                <a:rPr sz="1600" b="0">
+                  <a:solidFill>
+                    <a:srgbClr val="000000"/>
+                  </a:solidFill>
+                  <a:latin typeface="Play"/>
+                </a:rPr>
+                <a:t>Отправлен ИИ-помощнику</a:t>
               </a:r>
             </a:p>
           </p:txBody>
         </p:sp>
         <p:sp>
           <p:nvSpPr>
-            <p:cNvPr id="8" name="BrandDeck Diagram Card 2"/>
+            <p:cNvPr id="8" name="BrandDeck Diagram Step 2 Badge"/>
             <p:cNvSpPr/>
             <p:nvPr/>
           </p:nvSpPr>
           <p:spPr>
             <a:xfrm>
-              <a:off x="6623145" y="676278"/>
-              <a:ext cx="1876329" cy="1813687"/>
+              <a:off x="4637088" y="3223072"/>
+              <a:ext cx="512064" cy="512064"/>
+            </a:xfrm>
+            <a:prstGeom prst="ellipse">
+              <a:avLst/>
+            </a:prstGeom>
+            <a:solidFill>
+              <a:srgbClr val="006DEB"/>
+            </a:solidFill>
+            <a:ln>
+              <a:noFill/>
+            </a:ln>
+          </p:spPr>
+          <p:txBody>
+            <a:bodyPr rtlCol="0" anchor="ctr" wrap="square" lIns="0" tIns="0" rIns="0" bIns="0">
+              <a:noAutofit/>
+            </a:bodyPr>
+            <a:lstStyle/>
+            <a:p>
+              <a:pPr algn="ctr">
+                <a:lnSpc>
+                  <a:spcPct val="110000"/>
+                </a:lnSpc>
+              </a:pPr>
+              <a:r>
+                <a:rPr sz="1410" b="1">
+                  <a:solidFill>
+                    <a:srgbClr val="FFFFFF"/>
+                  </a:solidFill>
+                  <a:latin typeface="Play"/>
+                </a:rPr>
+                <a:t>02</a:t>
+              </a:r>
+            </a:p>
+          </p:txBody>
+        </p:sp>
+        <p:sp>
+          <p:nvSpPr>
+            <p:cNvPr id="9" name="BrandDeck Diagram Detail Card 2"/>
+            <p:cNvSpPr/>
+            <p:nvPr/>
+          </p:nvSpPr>
+          <p:spPr>
+            <a:xfrm>
+              <a:off x="5258880" y="2572261"/>
+              <a:ext cx="3240595" cy="1813687"/>
             </a:xfrm>
             <a:prstGeom prst="roundRect">
               <a:avLst>
-                <a:gd name="adj" fmla="val 8000"/>
+                <a:gd name="adj" fmla="val 12000"/>
               </a:avLst>
             </a:prstGeom>
             <a:solidFill>
-              <a:srgbClr val="1A1A1A"/>
+              <a:srgbClr val="E8F3FF"/>
             </a:solidFill>
             <a:ln>
               <a:noFill/>
@@ -11667,133 +11624,14 @@
         </p:sp>
         <p:sp>
           <p:nvSpPr>
-            <p:cNvPr id="9" name="BrandDeck Diagram Icon 2 Badge"/>
-            <p:cNvSpPr/>
-            <p:nvPr/>
-          </p:nvSpPr>
-          <p:spPr>
-            <a:xfrm>
-              <a:off x="6754488" y="807621"/>
-              <a:ext cx="507832" cy="507832"/>
-            </a:xfrm>
-            <a:prstGeom prst="ellipse">
-              <a:avLst/>
-            </a:prstGeom>
-            <a:solidFill>
-              <a:srgbClr val="006DEB"/>
-            </a:solidFill>
-            <a:ln>
-              <a:noFill/>
-            </a:ln>
-          </p:spPr>
-          <p:txBody>
-            <a:bodyPr rtlCol="0" anchor="ctr"/>
-            <a:lstStyle/>
-            <a:p>
-              <a:pPr algn="ctr"/>
-            </a:p>
-          </p:txBody>
-        </p:sp>
-        <p:sp>
-          <p:nvSpPr>
-            <p:cNvPr id="10" name="BrandDeck Icon circle-help"/>
-            <p:cNvSpPr/>
-            <p:nvPr/>
-          </p:nvSpPr>
-          <p:spPr>
-            <a:xfrm>
-              <a:off x="6866211" y="919344"/>
-              <a:ext cx="284386" cy="284386"/>
-            </a:xfrm>
-            <a:custGeom>
-              <a:avLst/>
-              <a:gdLst/>
-              <a:ahLst/>
-              <a:cxnLst/>
-              <a:rect l="l" t="t" r="r" b="b"/>
-              <a:pathLst>
-                <a:path w="24000" h="24000" fill="none">
-                  <a:moveTo>
-                    <a:pt x="22000" y="12000"/>
-                  </a:moveTo>
-                  <a:cubicBezTo>
-                    <a:pt x="22000" y="17523"/>
-                    <a:pt x="17523" y="22000"/>
-                    <a:pt x="12000" y="22000"/>
-                  </a:cubicBezTo>
-                  <a:cubicBezTo>
-                    <a:pt x="6477" y="22000"/>
-                    <a:pt x="2000" y="17523"/>
-                    <a:pt x="2000" y="12000"/>
-                  </a:cubicBezTo>
-                  <a:cubicBezTo>
-                    <a:pt x="2000" y="6477"/>
-                    <a:pt x="6477" y="2000"/>
-                    <a:pt x="12000" y="2000"/>
-                  </a:cubicBezTo>
-                  <a:cubicBezTo>
-                    <a:pt x="17523" y="2000"/>
-                    <a:pt x="22000" y="6477"/>
-                    <a:pt x="22000" y="12000"/>
-                  </a:cubicBezTo>
-                  <a:close/>
-                </a:path>
-                <a:path w="24000" h="24000" fill="none">
-                  <a:moveTo>
-                    <a:pt x="9090" y="9000"/>
-                  </a:moveTo>
-                  <a:cubicBezTo>
-                    <a:pt x="9575" y="7620"/>
-                    <a:pt x="10985" y="6791"/>
-                    <a:pt x="12427" y="7039"/>
-                  </a:cubicBezTo>
-                  <a:cubicBezTo>
-                    <a:pt x="13869" y="7286"/>
-                    <a:pt x="14922" y="8537"/>
-                    <a:pt x="14920" y="10000"/>
-                  </a:cubicBezTo>
-                  <a:cubicBezTo>
-                    <a:pt x="14920" y="12000"/>
-                    <a:pt x="11920" y="13000"/>
-                    <a:pt x="11920" y="13000"/>
-                  </a:cubicBezTo>
-                </a:path>
-                <a:path w="24000" h="24000" fill="none">
-                  <a:moveTo>
-                    <a:pt x="12000" y="17000"/>
-                  </a:moveTo>
-                  <a:lnTo>
-                    <a:pt x="12010" y="17000"/>
-                  </a:lnTo>
-                </a:path>
-              </a:pathLst>
-            </a:custGeom>
-            <a:noFill/>
-            <a:ln w="23698" cap="rnd">
-              <a:solidFill>
-                <a:srgbClr val="FFFFFF"/>
-              </a:solidFill>
-              <a:round/>
-            </a:ln>
-          </p:spPr>
-          <p:txBody>
-            <a:bodyPr rtlCol="0" anchor="ctr"/>
-            <a:lstStyle/>
-            <a:p>
-              <a:pPr algn="ctr"/>
-            </a:p>
-          </p:txBody>
-        </p:sp>
-        <p:sp>
-          <p:nvSpPr>
-            <p:cNvPr id="11" name="BrandDeck Diagram Text 2"/>
+            <p:cNvPr id="10" name="BrandDeck Diagram Text 2"/>
             <p:cNvSpPr txBox="1"/>
             <p:nvPr/>
           </p:nvSpPr>
           <p:spPr>
             <a:xfrm>
-              <a:off x="6715085" y="1407393"/>
-              <a:ext cx="1692449" cy="1016899"/>
+              <a:off x="5350320" y="2572261"/>
+              <a:ext cx="3149155" cy="1813687"/>
             </a:xfrm>
             <a:prstGeom prst="rect">
               <a:avLst/>
@@ -11801,7 +11639,7 @@
             <a:noFill/>
           </p:spPr>
           <p:txBody>
-            <a:bodyPr wrap="square" anchor="t" lIns="36576" tIns="18288" rIns="36576" bIns="18288">
+            <a:bodyPr wrap="square" anchor="ctr" lIns="36576" tIns="18288" rIns="36576" bIns="18288">
               <a:noAutofit/>
             </a:bodyPr>
             <a:lstStyle/>
@@ -11812,87 +11650,131 @@
                 </a:lnSpc>
               </a:pPr>
               <a:r>
-                <a:rPr sz="1170" b="0">
+                <a:rPr sz="1600" b="1">
                   <a:solidFill>
-                    <a:srgbClr val="FFFFFF"/>
+                    <a:srgbClr val="000000"/>
                   </a:solidFill>
                   <a:latin typeface="Play"/>
                 </a:rPr>
-                <a:t>При отсутствии ответа вопрос передаётся специалисту с контекстом.</a:t>
+                <a:t>Ответ не найден</a:t>
+              </a:r>
+            </a:p>
+            <a:p>
+              <a:pPr algn="l">
+                <a:lnSpc>
+                  <a:spcPct val="110000"/>
+                </a:lnSpc>
+                <a:spcBef>
+                  <a:spcPts val="400"/>
+                </a:spcBef>
+              </a:pPr>
+              <a:r>
+                <a:rPr sz="1600" b="0">
+                  <a:solidFill>
+                    <a:srgbClr val="000000"/>
+                  </a:solidFill>
+                  <a:latin typeface="Play"/>
+                </a:rPr>
+                <a:t>Перенаправляется специалисту</a:t>
               </a:r>
             </a:p>
           </p:txBody>
         </p:sp>
+      </p:grpSp>
+    </p:spTree>
+  </p:cSld>
+  <p:clrMapOvr>
+    <a:masterClrMapping/>
+  </p:clrMapOvr>
+</p:sld>
+</file>
+
+<file path=ppt/slides/slide8.xml><?xml version="1.0" encoding="utf-8"?>
+<p:sld xmlns:a="http://schemas.openxmlformats.org/drawingml/2006/main" xmlns:p="http://schemas.openxmlformats.org/presentationml/2006/main" xmlns:r="http://schemas.openxmlformats.org/officeDocument/2006/relationships">
+  <p:cSld>
+    <p:spTree>
+      <p:nvGrpSpPr>
+        <p:cNvPr id="1" name=""/>
+        <p:cNvGrpSpPr/>
+        <p:nvPr/>
+      </p:nvGrpSpPr>
+      <p:grpSpPr/>
+      <p:sp>
+        <p:nvSpPr>
+          <p:cNvPr id="503" name="BrandDeck Text 503"/>
+          <p:cNvSpPr txBox="1"/>
+          <p:nvPr>
+            <p:ph type="title"/>
+          </p:nvPr>
+        </p:nvSpPr>
+        <p:spPr>
+          <a:xfrm>
+            <a:off x="430360" y="338829"/>
+            <a:ext cx="3945697" cy="753371"/>
+          </a:xfrm>
+          <a:prstGeom prst="rect">
+            <a:avLst/>
+          </a:prstGeom>
+          <a:noFill/>
+          <a:ln>
+            <a:noFill/>
+          </a:ln>
+        </p:spPr>
+        <p:txBody>
+          <a:bodyPr anchorCtr="0" anchor="t" bIns="45700" lIns="91425" spcFirstLastPara="1" rIns="91425" wrap="square" tIns="45700">
+            <a:normAutofit/>
+          </a:bodyPr>
+          <a:lstStyle/>
+          <a:p>
+            <a:pPr indent="0" marL="0" rtl="0" algn="l">
+              <a:lnSpc>
+                <a:spcPct val="115000"/>
+              </a:lnSpc>
+              <a:spcBef>
+                <a:spcPts val="0"/>
+              </a:spcBef>
+              <a:spcAft>
+                <a:spcPts val="211"/>
+              </a:spcAft>
+              <a:buClr>
+                <a:schemeClr val="dk1"/>
+              </a:buClr>
+              <a:buSzPts val="2400"/>
+              <a:buFont typeface="Play"/>
+              <a:buNone/>
+            </a:pPr>
+            <a:r>
+              <a:rPr sz="1410"/>
+              <a:t>Пилот охватывает 2 подразделения и 150 сотрудников</a:t>
+            </a:r>
+            <a:endParaRPr/>
+          </a:p>
+        </p:txBody>
+      </p:sp>
+      <p:grpSp>
+        <p:nvGrpSpPr>
+          <p:cNvPr id="2" name="BrandDeck Diagram pyramid" descr="pyramid: 2 подразделения География пилотного запуска; 150 сотрудников Общее число участников"/>
+          <p:cNvGrpSpPr/>
+          <p:nvPr/>
+        </p:nvGrpSpPr>
+        <p:grpSpPr>
+          <a:xfrm>
+            <a:off x="4645054" y="1011898"/>
+            <a:ext cx="3854420" cy="2871216"/>
+            <a:chOff x="4645054" y="1011898"/>
+            <a:chExt cx="3854420" cy="2871216"/>
+          </a:xfrm>
+        </p:grpSpPr>
         <p:sp>
           <p:nvSpPr>
-            <p:cNvPr id="12" name="BrandDeck Diagram Card 3"/>
+            <p:cNvPr id="508" name="BrandDeck Diagram Level 1"/>
             <p:cNvSpPr/>
             <p:nvPr/>
           </p:nvSpPr>
           <p:spPr>
             <a:xfrm>
-              <a:off x="4637088" y="2599693"/>
-              <a:ext cx="1876329" cy="1813687"/>
-            </a:xfrm>
-            <a:prstGeom prst="roundRect">
-              <a:avLst>
-                <a:gd name="adj" fmla="val 8000"/>
-              </a:avLst>
-            </a:prstGeom>
-            <a:solidFill>
-              <a:srgbClr val="1A1A1A"/>
-            </a:solidFill>
-            <a:ln>
-              <a:noFill/>
-            </a:ln>
-          </p:spPr>
-          <p:txBody>
-            <a:bodyPr rtlCol="0" anchor="ctr"/>
-            <a:lstStyle/>
-            <a:p>
-              <a:pPr algn="ctr"/>
-            </a:p>
-          </p:txBody>
-        </p:sp>
-        <p:sp>
-          <p:nvSpPr>
-            <p:cNvPr id="13" name="BrandDeck Diagram Icon 3 Badge"/>
-            <p:cNvSpPr/>
-            <p:nvPr/>
-          </p:nvSpPr>
-          <p:spPr>
-            <a:xfrm>
-              <a:off x="4768431" y="2731036"/>
-              <a:ext cx="507832" cy="507832"/>
-            </a:xfrm>
-            <a:prstGeom prst="ellipse">
-              <a:avLst/>
-            </a:prstGeom>
-            <a:solidFill>
-              <a:srgbClr val="006DEB"/>
-            </a:solidFill>
-            <a:ln>
-              <a:noFill/>
-            </a:ln>
-          </p:spPr>
-          <p:txBody>
-            <a:bodyPr rtlCol="0" anchor="ctr"/>
-            <a:lstStyle/>
-            <a:p>
-              <a:pPr algn="ctr"/>
-            </a:p>
-          </p:txBody>
-        </p:sp>
-        <p:sp>
-          <p:nvSpPr>
-            <p:cNvPr id="14" name="BrandDeck Icon users"/>
-            <p:cNvSpPr/>
-            <p:nvPr/>
-          </p:nvSpPr>
-          <p:spPr>
-            <a:xfrm>
-              <a:off x="4880154" y="2842759"/>
-              <a:ext cx="284386" cy="284386"/>
+              <a:off x="5069916" y="1011898"/>
+              <a:ext cx="833792" cy="1408176"/>
             </a:xfrm>
             <a:custGeom>
               <a:avLst/>
@@ -11901,112 +11783,63 @@
               <a:cxnLst/>
               <a:rect l="l" t="t" r="r" b="b"/>
               <a:pathLst>
-                <a:path w="24000" h="24000" fill="none">
+                <a:path w="912" h="1540" stroke="0">
                   <a:moveTo>
-                    <a:pt x="16000" y="21000"/>
+                    <a:pt x="431" y="0"/>
                   </a:moveTo>
                   <a:lnTo>
-                    <a:pt x="16000" y="19000"/>
+                    <a:pt x="481" y="0"/>
                   </a:lnTo>
-                  <a:cubicBezTo>
-                    <a:pt x="16000" y="16791"/>
-                    <a:pt x="14209" y="15000"/>
-                    <a:pt x="12000" y="15000"/>
-                  </a:cubicBezTo>
                   <a:lnTo>
-                    <a:pt x="6000" y="15000"/>
+                    <a:pt x="912" y="1540"/>
                   </a:lnTo>
-                  <a:cubicBezTo>
-                    <a:pt x="3791" y="15000"/>
-                    <a:pt x="2000" y="16791"/>
-                    <a:pt x="2000" y="19000"/>
-                  </a:cubicBezTo>
                   <a:lnTo>
-                    <a:pt x="2000" y="21000"/>
+                    <a:pt x="0" y="1540"/>
                   </a:lnTo>
-                </a:path>
-                <a:path w="24000" h="24000" fill="none">
-                  <a:moveTo>
-                    <a:pt x="13000" y="7000"/>
-                  </a:moveTo>
-                  <a:cubicBezTo>
-                    <a:pt x="13000" y="9209"/>
-                    <a:pt x="11209" y="11000"/>
-                    <a:pt x="9000" y="11000"/>
-                  </a:cubicBezTo>
-                  <a:cubicBezTo>
-                    <a:pt x="6791" y="11000"/>
-                    <a:pt x="5000" y="9209"/>
-                    <a:pt x="5000" y="7000"/>
-                  </a:cubicBezTo>
-                  <a:cubicBezTo>
-                    <a:pt x="5000" y="4791"/>
-                    <a:pt x="6791" y="3000"/>
-                    <a:pt x="9000" y="3000"/>
-                  </a:cubicBezTo>
-                  <a:cubicBezTo>
-                    <a:pt x="11209" y="3000"/>
-                    <a:pt x="13000" y="4791"/>
-                    <a:pt x="13000" y="7000"/>
-                  </a:cubicBezTo>
                   <a:close/>
-                </a:path>
-                <a:path w="24000" h="24000" fill="none">
-                  <a:moveTo>
-                    <a:pt x="22000" y="21000"/>
-                  </a:moveTo>
-                  <a:lnTo>
-                    <a:pt x="22000" y="19000"/>
-                  </a:lnTo>
-                  <a:cubicBezTo>
-                    <a:pt x="21999" y="17177"/>
-                    <a:pt x="20765" y="15586"/>
-                    <a:pt x="19000" y="15130"/>
-                  </a:cubicBezTo>
-                </a:path>
-                <a:path w="24000" h="24000" fill="none">
-                  <a:moveTo>
-                    <a:pt x="16000" y="3130"/>
-                  </a:moveTo>
-                  <a:cubicBezTo>
-                    <a:pt x="17770" y="3583"/>
-                    <a:pt x="19008" y="5178"/>
-                    <a:pt x="19008" y="7005"/>
-                  </a:cubicBezTo>
-                  <a:cubicBezTo>
-                    <a:pt x="19008" y="8832"/>
-                    <a:pt x="17770" y="10427"/>
-                    <a:pt x="16000" y="10880"/>
-                  </a:cubicBezTo>
                 </a:path>
               </a:pathLst>
             </a:custGeom>
-            <a:noFill/>
-            <a:ln w="23698" cap="rnd">
-              <a:solidFill>
-                <a:srgbClr val="FFFFFF"/>
-              </a:solidFill>
-              <a:round/>
+            <a:solidFill>
+              <a:srgbClr val="006DEB"/>
+            </a:solidFill>
+            <a:ln w="0">
+              <a:noFill/>
             </a:ln>
           </p:spPr>
           <p:txBody>
-            <a:bodyPr rtlCol="0" anchor="ctr"/>
+            <a:bodyPr rtlCol="0" anchor="b" wrap="square" lIns="18288" tIns="0" rIns="18288" bIns="73152">
+              <a:noAutofit/>
+            </a:bodyPr>
             <a:lstStyle/>
             <a:p>
-              <a:pPr algn="ctr"/>
+              <a:pPr algn="ctr">
+                <a:lnSpc>
+                  <a:spcPct val="110000"/>
+                </a:lnSpc>
+              </a:pPr>
+              <a:r>
+                <a:rPr sz="1410" b="1">
+                  <a:solidFill>
+                    <a:srgbClr val="FFFFFF"/>
+                  </a:solidFill>
+                  <a:latin typeface="Play"/>
+                </a:rPr>
+                <a:t>01</a:t>
+              </a:r>
             </a:p>
           </p:txBody>
         </p:sp>
         <p:sp>
           <p:nvSpPr>
-            <p:cNvPr id="15" name="BrandDeck Diagram Text 3"/>
+            <p:cNvPr id="509" name="BrandDeck Diagram Text 1"/>
             <p:cNvSpPr txBox="1"/>
             <p:nvPr/>
           </p:nvSpPr>
           <p:spPr>
             <a:xfrm>
-              <a:off x="4729028" y="3330808"/>
-              <a:ext cx="1692449" cy="1016899"/>
+              <a:off x="6610858" y="1011898"/>
+              <a:ext cx="1888616" cy="1408176"/>
             </a:xfrm>
             <a:prstGeom prst="rect">
               <a:avLst/>
@@ -12014,7 +11847,7 @@
             <a:noFill/>
           </p:spPr>
           <p:txBody>
-            <a:bodyPr wrap="square" anchor="t" lIns="36576" tIns="18288" rIns="36576" bIns="18288">
+            <a:bodyPr wrap="square" anchor="ctr" lIns="36576" tIns="18288" rIns="36576" bIns="18288">
               <a:noAutofit/>
             </a:bodyPr>
             <a:lstStyle/>
@@ -12025,13 +11858,155 @@
                 </a:lnSpc>
               </a:pPr>
               <a:r>
-                <a:rPr sz="1170" b="0">
+                <a:rPr sz="1600" b="1">
                   <a:solidFill>
-                    <a:srgbClr val="FFFFFF"/>
+                    <a:srgbClr val="000000"/>
                   </a:solidFill>
                   <a:latin typeface="Play"/>
                 </a:rPr>
-                <a:t>Сотрудник сразу получает подтверждённый ответ и ссылку на документ.</a:t>
+                <a:t>2 подразделения</a:t>
+              </a:r>
+            </a:p>
+            <a:p>
+              <a:pPr algn="l">
+                <a:lnSpc>
+                  <a:spcPct val="110000"/>
+                </a:lnSpc>
+                <a:spcBef>
+                  <a:spcPts val="400"/>
+                </a:spcBef>
+              </a:pPr>
+              <a:r>
+                <a:rPr sz="1600" b="0">
+                  <a:solidFill>
+                    <a:srgbClr val="000000"/>
+                  </a:solidFill>
+                  <a:latin typeface="Play"/>
+                </a:rPr>
+                <a:t>География пилотного запуска</a:t>
+              </a:r>
+            </a:p>
+          </p:txBody>
+        </p:sp>
+        <p:sp>
+          <p:nvSpPr>
+            <p:cNvPr id="510" name="BrandDeck Diagram Level 2"/>
+            <p:cNvSpPr/>
+            <p:nvPr/>
+          </p:nvSpPr>
+          <p:spPr>
+            <a:xfrm>
+              <a:off x="4645054" y="2474938"/>
+              <a:ext cx="1683517" cy="1408176"/>
+            </a:xfrm>
+            <a:custGeom>
+              <a:avLst/>
+              <a:gdLst/>
+              <a:ahLst/>
+              <a:cxnLst/>
+              <a:rect l="l" t="t" r="r" b="b"/>
+              <a:pathLst>
+                <a:path w="1841" h="1540" stroke="0">
+                  <a:moveTo>
+                    <a:pt x="447" y="0"/>
+                  </a:moveTo>
+                  <a:lnTo>
+                    <a:pt x="1394" y="0"/>
+                  </a:lnTo>
+                  <a:lnTo>
+                    <a:pt x="1841" y="1540"/>
+                  </a:lnTo>
+                  <a:lnTo>
+                    <a:pt x="0" y="1540"/>
+                  </a:lnTo>
+                  <a:close/>
+                </a:path>
+              </a:pathLst>
+            </a:custGeom>
+            <a:solidFill>
+              <a:srgbClr val="7DB4F5"/>
+            </a:solidFill>
+            <a:ln w="0">
+              <a:noFill/>
+            </a:ln>
+          </p:spPr>
+          <p:txBody>
+            <a:bodyPr rtlCol="0" anchor="ctr" wrap="square" lIns="18288" tIns="0" rIns="18288" bIns="0">
+              <a:noAutofit/>
+            </a:bodyPr>
+            <a:lstStyle/>
+            <a:p>
+              <a:pPr algn="ctr">
+                <a:lnSpc>
+                  <a:spcPct val="110000"/>
+                </a:lnSpc>
+              </a:pPr>
+              <a:r>
+                <a:rPr sz="1410" b="1">
+                  <a:solidFill>
+                    <a:srgbClr val="000000"/>
+                  </a:solidFill>
+                  <a:latin typeface="Play"/>
+                </a:rPr>
+                <a:t>02</a:t>
+              </a:r>
+            </a:p>
+          </p:txBody>
+        </p:sp>
+        <p:sp>
+          <p:nvSpPr>
+            <p:cNvPr id="511" name="BrandDeck Diagram Text 2"/>
+            <p:cNvSpPr txBox="1"/>
+            <p:nvPr/>
+          </p:nvSpPr>
+          <p:spPr>
+            <a:xfrm>
+              <a:off x="6610858" y="2474938"/>
+              <a:ext cx="1888616" cy="1408176"/>
+            </a:xfrm>
+            <a:prstGeom prst="rect">
+              <a:avLst/>
+            </a:prstGeom>
+            <a:noFill/>
+          </p:spPr>
+          <p:txBody>
+            <a:bodyPr wrap="square" anchor="ctr" lIns="36576" tIns="18288" rIns="36576" bIns="18288">
+              <a:noAutofit/>
+            </a:bodyPr>
+            <a:lstStyle/>
+            <a:p>
+              <a:pPr algn="l">
+                <a:lnSpc>
+                  <a:spcPct val="110000"/>
+                </a:lnSpc>
+              </a:pPr>
+              <a:r>
+                <a:rPr sz="1600" b="1">
+                  <a:solidFill>
+                    <a:srgbClr val="000000"/>
+                  </a:solidFill>
+                  <a:latin typeface="Play"/>
+                </a:rPr>
+                <a:t>150 сотрудников</a:t>
+              </a:r>
+            </a:p>
+            <a:p>
+              <a:pPr algn="l">
+                <a:lnSpc>
+                  <a:spcPct val="110000"/>
+                </a:lnSpc>
+                <a:spcBef>
+                  <a:spcPts val="400"/>
+                </a:spcBef>
+              </a:pPr>
+              <a:r>
+                <a:rPr sz="1600" b="0">
+                  <a:solidFill>
+                    <a:srgbClr val="000000"/>
+                  </a:solidFill>
+                  <a:latin typeface="Play"/>
+                </a:rPr>
+                <a:t>Общее число участников</a:t>
               </a:r>
             </a:p>
           </p:txBody>
@@ -12085,69 +12060,77 @@
                 <a:spcPts val="0"/>
               </a:spcBef>
               <a:spcAft>
-                <a:spcPts val="211"/>
+                <a:spcPts val="270"/>
               </a:spcAft>
             </a:pPr>
             <a:r>
-              <a:rPr sz="1410"/>
-              <a:t>Пилот охватывает 2 подразделения и 150 сотрудников</a:t>
+              <a:rPr sz="1800"/>
+              <a:t>Срок пилота составляет 6 недель</a:t>
             </a:r>
           </a:p>
         </p:txBody>
       </p:sp>
       <p:grpSp>
         <p:nvGrpSpPr>
-          <p:cNvPr id="3" name="BrandDeck Diagram pyramid" descr="pyramid: 150 сотрудников Пользователи пилотной группы; 2 подразделения Охват тестирования; 6 недель Срок проведения пилота"/>
+          <p:cNvPr id="3" name="BrandDeck Diagram cycle" descr="cycle: Старт Запуск в 2 подразделениях; Процесс Сбор данных 6 недель; Финал Анализ метрик эффективности"/>
           <p:cNvGrpSpPr/>
           <p:nvPr/>
         </p:nvGrpSpPr>
         <p:grpSpPr>
           <a:xfrm>
-            <a:off x="4643624" y="768667"/>
-            <a:ext cx="3855850" cy="3511296"/>
-            <a:chOff x="4643624" y="768667"/>
-            <a:chExt cx="3855850" cy="3511296"/>
+            <a:off x="4708141" y="711456"/>
+            <a:ext cx="3791333" cy="3666745"/>
+            <a:chOff x="4708141" y="711456"/>
+            <a:chExt cx="3791333" cy="3666745"/>
           </a:xfrm>
         </p:grpSpPr>
         <p:sp>
           <p:nvSpPr>
-            <p:cNvPr id="4" name="BrandDeck Diagram Level 1"/>
+            <p:cNvPr id="4" name="BrandDeck Diagram Ring"/>
             <p:cNvSpPr/>
             <p:nvPr/>
           </p:nvSpPr>
           <p:spPr>
             <a:xfrm>
-              <a:off x="5210107" y="768667"/>
-              <a:ext cx="553410" cy="1133856"/>
+              <a:off x="4838256" y="2014477"/>
+              <a:ext cx="1060704" cy="1060704"/>
             </a:xfrm>
-            <a:custGeom>
+            <a:prstGeom prst="ellipse">
               <a:avLst/>
-              <a:gdLst/>
-              <a:ahLst/>
-              <a:cxnLst/>
-              <a:rect l="l" t="t" r="r" b="b"/>
-              <a:pathLst>
-                <a:path w="605" h="1240" stroke="0">
-                  <a:moveTo>
-                    <a:pt x="278" y="0"/>
-                  </a:moveTo>
-                  <a:lnTo>
-                    <a:pt x="328" y="0"/>
-                  </a:lnTo>
-                  <a:lnTo>
-                    <a:pt x="605" y="1240"/>
-                  </a:lnTo>
-                  <a:lnTo>
-                    <a:pt x="0" y="1240"/>
-                  </a:lnTo>
-                  <a:close/>
-                </a:path>
-              </a:pathLst>
-            </a:custGeom>
+            </a:prstGeom>
+            <a:noFill/>
+            <a:ln w="28575">
+              <a:solidFill>
+                <a:srgbClr val="58A6FF"/>
+              </a:solidFill>
+            </a:ln>
+          </p:spPr>
+          <p:txBody>
+            <a:bodyPr rtlCol="0" anchor="ctr"/>
+            <a:lstStyle/>
+            <a:p>
+              <a:pPr algn="ctr"/>
+            </a:p>
+          </p:txBody>
+        </p:sp>
+        <p:sp>
+          <p:nvSpPr>
+            <p:cNvPr id="5" name="BrandDeck Diagram Arrow 1"/>
+            <p:cNvSpPr/>
+            <p:nvPr/>
+          </p:nvSpPr>
+          <p:spPr>
+            <a:xfrm rot="9000000">
+              <a:off x="5755485" y="2207232"/>
+              <a:ext cx="144840" cy="144840"/>
+            </a:xfrm>
+            <a:prstGeom prst="triangle">
+              <a:avLst/>
+            </a:prstGeom>
             <a:solidFill>
-              <a:srgbClr val="006DEB"/>
+              <a:srgbClr val="58A6FF"/>
             </a:solidFill>
-            <a:ln w="0">
+            <a:ln>
               <a:noFill/>
             </a:ln>
           </p:spPr>
@@ -12161,14 +12144,248 @@
         </p:sp>
         <p:sp>
           <p:nvSpPr>
-            <p:cNvPr id="5" name="BrandDeck Diagram Text 1"/>
+            <p:cNvPr id="6" name="BrandDeck Diagram Arrow 2"/>
+            <p:cNvSpPr/>
+            <p:nvPr/>
+          </p:nvSpPr>
+          <p:spPr>
+            <a:xfrm rot="16200000">
+              <a:off x="5296187" y="3002760"/>
+              <a:ext cx="144840" cy="144840"/>
+            </a:xfrm>
+            <a:prstGeom prst="triangle">
+              <a:avLst/>
+            </a:prstGeom>
+            <a:solidFill>
+              <a:srgbClr val="58A6FF"/>
+            </a:solidFill>
+            <a:ln>
+              <a:noFill/>
+            </a:ln>
+          </p:spPr>
+          <p:txBody>
+            <a:bodyPr rtlCol="0" anchor="ctr"/>
+            <a:lstStyle/>
+            <a:p>
+              <a:pPr algn="ctr"/>
+            </a:p>
+          </p:txBody>
+        </p:sp>
+        <p:sp>
+          <p:nvSpPr>
+            <p:cNvPr id="7" name="BrandDeck Diagram Arrow 3"/>
+            <p:cNvSpPr/>
+            <p:nvPr/>
+          </p:nvSpPr>
+          <p:spPr>
+            <a:xfrm rot="1800000">
+              <a:off x="4836889" y="2207232"/>
+              <a:ext cx="144840" cy="144840"/>
+            </a:xfrm>
+            <a:prstGeom prst="triangle">
+              <a:avLst/>
+            </a:prstGeom>
+            <a:solidFill>
+              <a:srgbClr val="58A6FF"/>
+            </a:solidFill>
+            <a:ln>
+              <a:noFill/>
+            </a:ln>
+          </p:spPr>
+          <p:txBody>
+            <a:bodyPr rtlCol="0" anchor="ctr"/>
+            <a:lstStyle/>
+            <a:p>
+              <a:pPr algn="ctr"/>
+            </a:p>
+          </p:txBody>
+        </p:sp>
+        <p:sp>
+          <p:nvSpPr>
+            <p:cNvPr id="8" name="BrandDeck Diagram Node 1 Badge"/>
+            <p:cNvSpPr/>
+            <p:nvPr/>
+          </p:nvSpPr>
+          <p:spPr>
+            <a:xfrm>
+              <a:off x="5167440" y="1813309"/>
+              <a:ext cx="402336" cy="402336"/>
+            </a:xfrm>
+            <a:prstGeom prst="ellipse">
+              <a:avLst/>
+            </a:prstGeom>
+            <a:solidFill>
+              <a:srgbClr val="006DEB"/>
+            </a:solidFill>
+            <a:ln>
+              <a:noFill/>
+            </a:ln>
+          </p:spPr>
+          <p:txBody>
+            <a:bodyPr rtlCol="0" anchor="ctr" wrap="square" lIns="0" tIns="0" rIns="0" bIns="0">
+              <a:noAutofit/>
+            </a:bodyPr>
+            <a:lstStyle/>
+            <a:p>
+              <a:pPr algn="ctr">
+                <a:lnSpc>
+                  <a:spcPct val="110000"/>
+                </a:lnSpc>
+              </a:pPr>
+              <a:r>
+                <a:rPr sz="1100" b="1">
+                  <a:solidFill>
+                    <a:srgbClr val="FFFFFF"/>
+                  </a:solidFill>
+                  <a:latin typeface="Play"/>
+                </a:rPr>
+                <a:t>01</a:t>
+              </a:r>
+            </a:p>
+          </p:txBody>
+        </p:sp>
+        <p:sp>
+          <p:nvSpPr>
+            <p:cNvPr id="9" name="BrandDeck Diagram Node 2 Badge"/>
+            <p:cNvSpPr/>
+            <p:nvPr/>
+          </p:nvSpPr>
+          <p:spPr>
+            <a:xfrm>
+              <a:off x="5626738" y="2608837"/>
+              <a:ext cx="402336" cy="402336"/>
+            </a:xfrm>
+            <a:prstGeom prst="ellipse">
+              <a:avLst/>
+            </a:prstGeom>
+            <a:solidFill>
+              <a:srgbClr val="006DEB"/>
+            </a:solidFill>
+            <a:ln>
+              <a:noFill/>
+            </a:ln>
+          </p:spPr>
+          <p:txBody>
+            <a:bodyPr rtlCol="0" anchor="ctr" wrap="square" lIns="0" tIns="0" rIns="0" bIns="0">
+              <a:noAutofit/>
+            </a:bodyPr>
+            <a:lstStyle/>
+            <a:p>
+              <a:pPr algn="ctr">
+                <a:lnSpc>
+                  <a:spcPct val="110000"/>
+                </a:lnSpc>
+              </a:pPr>
+              <a:r>
+                <a:rPr sz="1100" b="1">
+                  <a:solidFill>
+                    <a:srgbClr val="FFFFFF"/>
+                  </a:solidFill>
+                  <a:latin typeface="Play"/>
+                </a:rPr>
+                <a:t>02</a:t>
+              </a:r>
+            </a:p>
+          </p:txBody>
+        </p:sp>
+        <p:sp>
+          <p:nvSpPr>
+            <p:cNvPr id="10" name="BrandDeck Diagram Node 3 Badge"/>
+            <p:cNvSpPr/>
+            <p:nvPr/>
+          </p:nvSpPr>
+          <p:spPr>
+            <a:xfrm>
+              <a:off x="4708141" y="2608837"/>
+              <a:ext cx="402336" cy="402336"/>
+            </a:xfrm>
+            <a:prstGeom prst="ellipse">
+              <a:avLst/>
+            </a:prstGeom>
+            <a:solidFill>
+              <a:srgbClr val="006DEB"/>
+            </a:solidFill>
+            <a:ln>
+              <a:noFill/>
+            </a:ln>
+          </p:spPr>
+          <p:txBody>
+            <a:bodyPr rtlCol="0" anchor="ctr" wrap="square" lIns="0" tIns="0" rIns="0" bIns="0">
+              <a:noAutofit/>
+            </a:bodyPr>
+            <a:lstStyle/>
+            <a:p>
+              <a:pPr algn="ctr">
+                <a:lnSpc>
+                  <a:spcPct val="110000"/>
+                </a:lnSpc>
+              </a:pPr>
+              <a:r>
+                <a:rPr sz="1100" b="1">
+                  <a:solidFill>
+                    <a:srgbClr val="FFFFFF"/>
+                  </a:solidFill>
+                  <a:latin typeface="Play"/>
+                </a:rPr>
+                <a:t>03</a:t>
+              </a:r>
+            </a:p>
+          </p:txBody>
+        </p:sp>
+        <p:sp>
+          <p:nvSpPr>
+            <p:cNvPr id="11" name="BrandDeck Diagram Legend 1 Badge"/>
+            <p:cNvSpPr/>
+            <p:nvPr/>
+          </p:nvSpPr>
+          <p:spPr>
+            <a:xfrm>
+              <a:off x="6420168" y="1154941"/>
+              <a:ext cx="310896" cy="310896"/>
+            </a:xfrm>
+            <a:prstGeom prst="ellipse">
+              <a:avLst/>
+            </a:prstGeom>
+            <a:solidFill>
+              <a:srgbClr val="006DEB"/>
+            </a:solidFill>
+            <a:ln>
+              <a:noFill/>
+            </a:ln>
+          </p:spPr>
+          <p:txBody>
+            <a:bodyPr rtlCol="0" anchor="ctr" wrap="square" lIns="0" tIns="0" rIns="0" bIns="0">
+              <a:noAutofit/>
+            </a:bodyPr>
+            <a:lstStyle/>
+            <a:p>
+              <a:pPr algn="ctr">
+                <a:lnSpc>
+                  <a:spcPct val="110000"/>
+                </a:lnSpc>
+              </a:pPr>
+              <a:r>
+                <a:rPr sz="1000" b="1">
+                  <a:solidFill>
+                    <a:srgbClr val="FFFFFF"/>
+                  </a:solidFill>
+                  <a:latin typeface="Play"/>
+                </a:rPr>
+                <a:t>01</a:t>
+              </a:r>
+            </a:p>
+          </p:txBody>
+        </p:sp>
+        <p:sp>
+          <p:nvSpPr>
+            <p:cNvPr id="12" name="BrandDeck Diagram Text 1"/>
             <p:cNvSpPr txBox="1"/>
             <p:nvPr/>
           </p:nvSpPr>
           <p:spPr>
             <a:xfrm>
-              <a:off x="6610858" y="768667"/>
-              <a:ext cx="1888616" cy="1133856"/>
+              <a:off x="6877368" y="711456"/>
+              <a:ext cx="1622106" cy="1197864"/>
             </a:xfrm>
             <a:prstGeom prst="rect">
               <a:avLst/>
@@ -12193,7 +12410,7 @@
                   </a:solidFill>
                   <a:latin typeface="Play"/>
                 </a:rPr>
-                <a:t>150 сотрудников</a:t>
+                <a:t>Старт</a:t>
               </a:r>
             </a:p>
             <a:p>
@@ -12212,55 +12429,34 @@
                   </a:solidFill>
                   <a:latin typeface="Play"/>
                 </a:rPr>
-                <a:t>Пользователи пилотной группы</a:t>
+                <a:t>Запуск в 2 подразделениях</a:t>
               </a:r>
             </a:p>
           </p:txBody>
         </p:sp>
         <p:sp>
           <p:nvSpPr>
-            <p:cNvPr id="6" name="BrandDeck Diagram Level 2"/>
+            <p:cNvPr id="13" name="BrandDeck Diagram Legend 2 Badge"/>
             <p:cNvSpPr/>
             <p:nvPr/>
           </p:nvSpPr>
           <p:spPr>
             <a:xfrm>
-              <a:off x="4926866" y="1957387"/>
-              <a:ext cx="1119894" cy="1133856"/>
+              <a:off x="6420168" y="2389381"/>
+              <a:ext cx="310896" cy="310896"/>
             </a:xfrm>
-            <a:custGeom>
+            <a:prstGeom prst="ellipse">
               <a:avLst/>
-              <a:gdLst/>
-              <a:ahLst/>
-              <a:cxnLst/>
-              <a:rect l="l" t="t" r="r" b="b"/>
-              <a:pathLst>
-                <a:path w="1225" h="1240" stroke="0">
-                  <a:moveTo>
-                    <a:pt x="295" y="0"/>
-                  </a:moveTo>
-                  <a:lnTo>
-                    <a:pt x="929" y="0"/>
-                  </a:lnTo>
-                  <a:lnTo>
-                    <a:pt x="1225" y="1240"/>
-                  </a:lnTo>
-                  <a:lnTo>
-                    <a:pt x="0" y="1240"/>
-                  </a:lnTo>
-                  <a:close/>
-                </a:path>
-              </a:pathLst>
-            </a:custGeom>
+            </a:prstGeom>
             <a:solidFill>
-              <a:srgbClr val="3E91F0"/>
+              <a:srgbClr val="006DEB"/>
             </a:solidFill>
-            <a:ln w="0">
+            <a:ln>
               <a:noFill/>
             </a:ln>
           </p:spPr>
           <p:txBody>
-            <a:bodyPr rtlCol="0" anchor="ctr" wrap="square" lIns="18288" tIns="0" rIns="18288" bIns="0">
+            <a:bodyPr rtlCol="0" anchor="ctr" wrap="square" lIns="0" tIns="0" rIns="0" bIns="0">
               <a:noAutofit/>
             </a:bodyPr>
             <a:lstStyle/>
@@ -12271,9 +12467,9 @@
                 </a:lnSpc>
               </a:pPr>
               <a:r>
-                <a:rPr sz="1410" b="1">
+                <a:rPr sz="1000" b="1">
                   <a:solidFill>
-                    <a:srgbClr val="000000"/>
+                    <a:srgbClr val="FFFFFF"/>
                   </a:solidFill>
                   <a:latin typeface="Play"/>
                 </a:rPr>
@@ -12284,14 +12480,14 @@
         </p:sp>
         <p:sp>
           <p:nvSpPr>
-            <p:cNvPr id="7" name="BrandDeck Diagram Text 2"/>
+            <p:cNvPr id="14" name="BrandDeck Diagram Text 2"/>
             <p:cNvSpPr txBox="1"/>
             <p:nvPr/>
           </p:nvSpPr>
           <p:spPr>
             <a:xfrm>
-              <a:off x="6610858" y="1957387"/>
-              <a:ext cx="1888616" cy="1133856"/>
+              <a:off x="6877368" y="1945897"/>
+              <a:ext cx="1622106" cy="1197864"/>
             </a:xfrm>
             <a:prstGeom prst="rect">
               <a:avLst/>
@@ -12316,7 +12512,7 @@
                   </a:solidFill>
                   <a:latin typeface="Play"/>
                 </a:rPr>
-                <a:t>2 подразделения</a:t>
+                <a:t>Процесс</a:t>
               </a:r>
             </a:p>
             <a:p>
@@ -12335,55 +12531,34 @@
                   </a:solidFill>
                   <a:latin typeface="Play"/>
                 </a:rPr>
-                <a:t>Охват тестирования</a:t>
+                <a:t>Сбор данных 6 недель</a:t>
               </a:r>
             </a:p>
           </p:txBody>
         </p:sp>
         <p:sp>
           <p:nvSpPr>
-            <p:cNvPr id="8" name="BrandDeck Diagram Level 3"/>
+            <p:cNvPr id="15" name="BrandDeck Diagram Legend 3 Badge"/>
             <p:cNvSpPr/>
             <p:nvPr/>
           </p:nvSpPr>
           <p:spPr>
             <a:xfrm>
-              <a:off x="4643624" y="3146107"/>
-              <a:ext cx="1686377" cy="1133856"/>
+              <a:off x="6420168" y="3623821"/>
+              <a:ext cx="310896" cy="310896"/>
             </a:xfrm>
-            <a:custGeom>
+            <a:prstGeom prst="ellipse">
               <a:avLst/>
-              <a:gdLst/>
-              <a:ahLst/>
-              <a:cxnLst/>
-              <a:rect l="l" t="t" r="r" b="b"/>
-              <a:pathLst>
-                <a:path w="1844" h="1240" stroke="0">
-                  <a:moveTo>
-                    <a:pt x="295" y="0"/>
-                  </a:moveTo>
-                  <a:lnTo>
-                    <a:pt x="1549" y="0"/>
-                  </a:lnTo>
-                  <a:lnTo>
-                    <a:pt x="1844" y="1240"/>
-                  </a:lnTo>
-                  <a:lnTo>
-                    <a:pt x="0" y="1240"/>
-                  </a:lnTo>
-                  <a:close/>
-                </a:path>
-              </a:pathLst>
-            </a:custGeom>
+            </a:prstGeom>
             <a:solidFill>
-              <a:srgbClr val="7DB4F5"/>
+              <a:srgbClr val="006DEB"/>
             </a:solidFill>
-            <a:ln w="0">
+            <a:ln>
               <a:noFill/>
             </a:ln>
           </p:spPr>
           <p:txBody>
-            <a:bodyPr rtlCol="0" anchor="ctr" wrap="square" lIns="18288" tIns="0" rIns="18288" bIns="0">
+            <a:bodyPr rtlCol="0" anchor="ctr" wrap="square" lIns="0" tIns="0" rIns="0" bIns="0">
               <a:noAutofit/>
             </a:bodyPr>
             <a:lstStyle/>
@@ -12394,9 +12569,9 @@
                 </a:lnSpc>
               </a:pPr>
               <a:r>
-                <a:rPr sz="1410" b="1">
+                <a:rPr sz="1000" b="1">
                   <a:solidFill>
-                    <a:srgbClr val="000000"/>
+                    <a:srgbClr val="FFFFFF"/>
                   </a:solidFill>
                   <a:latin typeface="Play"/>
                 </a:rPr>
@@ -12407,14 +12582,14 @@
         </p:sp>
         <p:sp>
           <p:nvSpPr>
-            <p:cNvPr id="9" name="BrandDeck Diagram Text 3"/>
+            <p:cNvPr id="16" name="BrandDeck Diagram Text 3"/>
             <p:cNvSpPr txBox="1"/>
             <p:nvPr/>
           </p:nvSpPr>
           <p:spPr>
             <a:xfrm>
-              <a:off x="6610858" y="3146107"/>
-              <a:ext cx="1888616" cy="1133856"/>
+              <a:off x="6877368" y="3180337"/>
+              <a:ext cx="1622106" cy="1197864"/>
             </a:xfrm>
             <a:prstGeom prst="rect">
               <a:avLst/>
@@ -12439,7 +12614,7 @@
                   </a:solidFill>
                   <a:latin typeface="Play"/>
                 </a:rPr>
-                <a:t>6 недель</a:t>
+                <a:t>Финал</a:t>
               </a:r>
             </a:p>
             <a:p>
@@ -12458,7 +12633,7 @@
                   </a:solidFill>
                   <a:latin typeface="Play"/>
                 </a:rPr>
-                <a:t>Срок проведения пилота</a:t>
+                <a:t>Анализ метрик эффективности</a:t>
               </a:r>
             </a:p>
           </p:txBody>

--- a/deliverables/vk-tech-balanced.pptx
+++ b/deliverables/vk-tech-balanced.pptx
@@ -19,8 +19,6 @@
     <p:sldId id="317" r:id="rId69"/>
     <p:sldId id="318" r:id="rId70"/>
     <p:sldId id="319" r:id="rId71"/>
-    <p:sldId id="320" r:id="rId72"/>
-    <p:sldId id="321" r:id="rId73"/>
   </p:sldIdLst>
   <p:sldSz cy="5143500" cx="9144000"/>
   <p:notesSz cx="6858000" cy="9144000"/>
@@ -1476,7 +1474,7 @@
           <a:lstStyle/>
           <a:p>
             <a:r>
-              <a:t>Слайд представляет инициативу по внедрению ИИ-помощника для ускорения работы сотрудников и снижения нагрузки на поддержку.</a:t>
+              <a:t>Слайд вводит тему проекта по внедрению ИИ-помощника во внутренний портал.</a:t>
             </a:r>
           </a:p>
         </p:txBody>
@@ -1546,7 +1544,7 @@
           <a:lstStyle/>
           <a:p>
             <a:r>
-              <a:t>Сейчас сотрудникам требуется до 30 минут, чтобы найти нужную инструкцию, что замедляет их работу и снижает общую эффективность отдела.</a:t>
+              <a:t>Треть обращений в поддержку приходится на повторяющиеся вопросы, что перегружает команду специалистов.</a:t>
             </a:r>
           </a:p>
         </p:txBody>
@@ -1616,7 +1614,7 @@
           <a:lstStyle/>
           <a:p>
             <a:r>
-              <a:t>Сейчас треть обращений в поддержку — это повторяющиеся вопросы, которые занимают время и ресурсы.</a:t>
+              <a:t>Сейчас поиск инструкции занимает до 30 минут, что тормозит работу. Мы будем измерять сокращение этого времени в ходе пилота.</a:t>
             </a:r>
           </a:p>
         </p:txBody>
@@ -1686,7 +1684,7 @@
           <a:lstStyle/>
           <a:p>
             <a:r>
-              <a:t>ИИ-помощник одновременно ускоряет работу сотрудников и разгружает команду поддержки за счет автоматизации типовых запросов.</a:t>
+              <a:t>ИИ-помощник автоматически отвечает на вопросы сотрудников по регламентам и предоставляет ссылку на исходный документ.</a:t>
             </a:r>
           </a:p>
         </p:txBody>
@@ -1756,7 +1754,7 @@
           <a:lstStyle/>
           <a:p>
             <a:r>
-              <a:t>ИИ-помощник автоматически отвечает на вопросы сотрудников и предоставляет ссылку на исходный документ.</a:t>
+              <a:t>Модель функционирует внутри корпоративного контура, обеспечивая локальность работы и не выводя документы наружу.</a:t>
             </a:r>
           </a:p>
         </p:txBody>
@@ -1826,7 +1824,7 @@
           <a:lstStyle/>
           <a:p>
             <a:r>
-              <a:t>Модель работает внутри корпоративного контура, поэтому документы не покидают сеть компании, что исключает утечку данных при обучении или обработке запросов. Это обеспечивает безопасность внутренней информации сотрудников и регламентов. Мы используем только факты из брифа, чтобы избежать необоснованных заявлений о безопасности, так как в исходных данных сделан акцент именно на том, что документы не</a:t>
+              <a:t>Если ИИ не находит ответ, вопрос автоматически передаётся специалисту вместе с контекстом.</a:t>
             </a:r>
           </a:p>
         </p:txBody>
@@ -1896,7 +1894,7 @@
           <a:lstStyle/>
           <a:p>
             <a:r>
-              <a:t>Если ИИ не находит подтверждённый ответ, вопрос автоматически перенаправляется специалисту с полным контекстом.</a:t>
+              <a:t>В рамках пилота модель будет тестироваться на двух подразделениях с общим числом сотрудников 150 человек.</a:t>
             </a:r>
           </a:p>
         </p:txBody>
@@ -1966,7 +1964,7 @@
           <a:lstStyle/>
           <a:p>
             <a:r>
-              <a:t>Пилотный запуск охватывает два подразделения с общим количеством сотрудников 150 человек.</a:t>
+              <a:t>Для оценки эффективности пилота мы будем отслеживать время поиска ответа и долю обращений, закрытых без участия специалиста.</a:t>
             </a:r>
           </a:p>
         </p:txBody>
@@ -2036,7 +2034,7 @@
           <a:lstStyle/>
           <a:p>
             <a:r>
-              <a:t>Срок пилота фиксирован на шесть недель для сбора достаточной статистики.</a:t>
+              <a:t>Пилот пройдет в течение 6 недель с командой из трех человек, оценивая время поиска и долю закрытых обращений.</a:t>
             </a:r>
           </a:p>
         </p:txBody>
@@ -2106,147 +2104,7 @@
           <a:lstStyle/>
           <a:p>
             <a:r>
-              <a:t>Для оценки успеха пилота мы будем измерять время поиска ответа и долю обращений, закрытых без участия специалиста.</a:t>
-            </a:r>
-          </a:p>
-        </p:txBody>
-      </p:sp>
-      <p:sp>
-        <p:nvSpPr>
-          <p:cNvPr id="4" name="Slide Number Placeholder 3"/>
-          <p:cNvSpPr>
-            <a:spLocks noGrp="1"/>
-          </p:cNvSpPr>
-          <p:nvPr>
-            <p:ph type="sldNum" idx="12"/>
-          </p:nvPr>
-        </p:nvSpPr>
-        <p:spPr/>
-      </p:sp>
-    </p:spTree>
-  </p:cSld>
-  <p:clrMapOvr>
-    <a:masterClrMapping/>
-  </p:clrMapOvr>
-</p:notes>
-</file>
-
-<file path=ppt/notesSlides/notesSlide65.xml><?xml version="1.0" encoding="utf-8"?>
-<p:notes xmlns:a="http://schemas.openxmlformats.org/drawingml/2006/main" xmlns:p="http://schemas.openxmlformats.org/presentationml/2006/main" xmlns:r="http://schemas.openxmlformats.org/officeDocument/2006/relationships">
-  <p:cSld>
-    <p:spTree>
-      <p:nvGrpSpPr>
-        <p:cNvPr id="1" name=""/>
-        <p:cNvGrpSpPr/>
-        <p:nvPr/>
-      </p:nvGrpSpPr>
-      <p:grpSpPr>
-        <a:xfrm>
-          <a:off x="0" y="0"/>
-          <a:ext cx="0" cy="0"/>
-          <a:chOff x="0" y="0"/>
-          <a:chExt cx="0" cy="0"/>
-        </a:xfrm>
-      </p:grpSpPr>
-      <p:sp>
-        <p:nvSpPr>
-          <p:cNvPr id="2" name="Slide Image Placeholder 1"/>
-          <p:cNvSpPr>
-            <a:spLocks noGrp="1"/>
-          </p:cNvSpPr>
-          <p:nvPr>
-            <p:ph type="sldImg" idx="3"/>
-          </p:nvPr>
-        </p:nvSpPr>
-        <p:spPr/>
-      </p:sp>
-      <p:sp>
-        <p:nvSpPr>
-          <p:cNvPr id="3" name="Notes Placeholder 2"/>
-          <p:cNvSpPr>
-            <a:spLocks noGrp="1"/>
-          </p:cNvSpPr>
-          <p:nvPr>
-            <p:ph type="body" idx="1"/>
-          </p:nvPr>
-        </p:nvSpPr>
-        <p:spPr/>
-        <p:txBody>
-          <a:bodyPr/>
-          <a:lstStyle/>
-          <a:p>
-            <a:r>
-              <a:t>Для реализации пилота необходимо выделить команду из трех человек.</a:t>
-            </a:r>
-          </a:p>
-        </p:txBody>
-      </p:sp>
-      <p:sp>
-        <p:nvSpPr>
-          <p:cNvPr id="4" name="Slide Number Placeholder 3"/>
-          <p:cNvSpPr>
-            <a:spLocks noGrp="1"/>
-          </p:cNvSpPr>
-          <p:nvPr>
-            <p:ph type="sldNum" idx="12"/>
-          </p:nvPr>
-        </p:nvSpPr>
-        <p:spPr/>
-      </p:sp>
-    </p:spTree>
-  </p:cSld>
-  <p:clrMapOvr>
-    <a:masterClrMapping/>
-  </p:clrMapOvr>
-</p:notes>
-</file>
-
-<file path=ppt/notesSlides/notesSlide66.xml><?xml version="1.0" encoding="utf-8"?>
-<p:notes xmlns:a="http://schemas.openxmlformats.org/drawingml/2006/main" xmlns:p="http://schemas.openxmlformats.org/presentationml/2006/main" xmlns:r="http://schemas.openxmlformats.org/officeDocument/2006/relationships">
-  <p:cSld>
-    <p:spTree>
-      <p:nvGrpSpPr>
-        <p:cNvPr id="1" name=""/>
-        <p:cNvGrpSpPr/>
-        <p:nvPr/>
-      </p:nvGrpSpPr>
-      <p:grpSpPr>
-        <a:xfrm>
-          <a:off x="0" y="0"/>
-          <a:ext cx="0" cy="0"/>
-          <a:chOff x="0" y="0"/>
-          <a:chExt cx="0" cy="0"/>
-        </a:xfrm>
-      </p:grpSpPr>
-      <p:sp>
-        <p:nvSpPr>
-          <p:cNvPr id="2" name="Slide Image Placeholder 1"/>
-          <p:cNvSpPr>
-            <a:spLocks noGrp="1"/>
-          </p:cNvSpPr>
-          <p:nvPr>
-            <p:ph type="sldImg" idx="3"/>
-          </p:nvPr>
-        </p:nvSpPr>
-        <p:spPr/>
-      </p:sp>
-      <p:sp>
-        <p:nvSpPr>
-          <p:cNvPr id="3" name="Notes Placeholder 2"/>
-          <p:cNvSpPr>
-            <a:spLocks noGrp="1"/>
-          </p:cNvSpPr>
-          <p:nvPr>
-            <p:ph type="body" idx="1"/>
-          </p:nvPr>
-        </p:nvSpPr>
-        <p:spPr/>
-        <p:txBody>
-          <a:bodyPr/>
-          <a:lstStyle/>
-          <a:p>
-            <a:r>
-              <a:t>После одобрения мы сразу начнем работу с двумя подразделениями и сформируем команду для реализации пилота.</a:t>
+              <a:t>Для реализации пилота необходимо одобрить команду из трёх человек и запустить проект на шесть недель.</a:t>
             </a:r>
           </a:p>
         </p:txBody>
@@ -5131,1152 +4989,6 @@
 </p:sldLayout>
 </file>
 
-<file path=ppt/slideLayouts/slideLayout9.xml><?xml version="1.0" encoding="utf-8"?>
-<p:sldLayout xmlns:a="http://schemas.openxmlformats.org/drawingml/2006/main" xmlns:r="http://schemas.openxmlformats.org/officeDocument/2006/relationships" xmlns:mc="http://schemas.openxmlformats.org/markup-compatibility/2006" xmlns:mv="urn:schemas-microsoft-com:mac:vml" xmlns:p="http://schemas.openxmlformats.org/presentationml/2006/main" xmlns:c="http://schemas.openxmlformats.org/drawingml/2006/chart" xmlns:dgm="http://schemas.openxmlformats.org/drawingml/2006/diagram" xmlns:o="urn:schemas-microsoft-com:office:office" xmlns:v="urn:schemas-microsoft-com:vml" xmlns:pvml="urn:schemas-microsoft-com:office:powerpoint" xmlns:com="http://schemas.openxmlformats.org/drawingml/2006/compatibility" xmlns:p14="http://schemas.microsoft.com/office/powerpoint/2010/main" xmlns:p15="http://schemas.microsoft.com/office/powerpoint/2012/main" xmlns:ahyp="http://schemas.microsoft.com/office/drawing/2018/hyperlinkcolor" matchingName="1_Визитка">
-  <p:cSld name="1_Визитка">
-    <p:bg>
-      <p:bgPr>
-        <a:solidFill>
-          <a:schemeClr val="lt1"/>
-        </a:solidFill>
-      </p:bgPr>
-    </p:bg>
-    <p:spTree>
-      <p:nvGrpSpPr>
-        <p:cNvPr id="109" name="Shape 109"/>
-        <p:cNvGrpSpPr/>
-        <p:nvPr/>
-      </p:nvGrpSpPr>
-      <p:grpSpPr>
-        <a:xfrm>
-          <a:off x="0" y="0"/>
-          <a:ext cx="0" cy="0"/>
-          <a:chOff x="0" y="0"/>
-          <a:chExt cx="0" cy="0"/>
-        </a:xfrm>
-      </p:grpSpPr>
-      <p:pic>
-        <p:nvPicPr>
-          <p:cNvPr id="110" name="Google Shape;110;p11"/>
-          <p:cNvPicPr preferRelativeResize="0"/>
-          <p:nvPr/>
-        </p:nvPicPr>
-        <p:blipFill rotWithShape="1">
-          <a:blip r:embed="rId2">
-            <a:alphaModFix/>
-          </a:blip>
-          <a:srcRect b="0" l="0" r="0" t="0"/>
-          <a:stretch/>
-        </p:blipFill>
-        <p:spPr>
-          <a:xfrm>
-            <a:off x="0" y="0"/>
-            <a:ext cx="9144000" cy="5143500"/>
-          </a:xfrm>
-          <a:prstGeom prst="rect">
-            <a:avLst/>
-          </a:prstGeom>
-          <a:noFill/>
-          <a:ln>
-            <a:noFill/>
-          </a:ln>
-        </p:spPr>
-      </p:pic>
-      <p:grpSp>
-        <p:nvGrpSpPr>
-          <p:cNvPr id="111" name="Google Shape;111;p11"/>
-          <p:cNvGrpSpPr/>
-          <p:nvPr/>
-        </p:nvGrpSpPr>
-        <p:grpSpPr>
-          <a:xfrm>
-            <a:off x="283721" y="4713930"/>
-            <a:ext cx="474349" cy="146621"/>
-            <a:chOff x="762095" y="12573000"/>
-            <a:chExt cx="1232613" cy="381000"/>
-          </a:xfrm>
-        </p:grpSpPr>
-        <p:sp>
-          <p:nvSpPr>
-            <p:cNvPr id="112" name="Google Shape;112;p11"/>
-            <p:cNvSpPr/>
-            <p:nvPr/>
-          </p:nvSpPr>
-          <p:spPr>
-            <a:xfrm>
-              <a:off x="762095" y="12573000"/>
-              <a:ext cx="1232613" cy="381000"/>
-            </a:xfrm>
-            <a:prstGeom prst="rect">
-              <a:avLst/>
-            </a:prstGeom>
-            <a:noFill/>
-            <a:ln>
-              <a:noFill/>
-            </a:ln>
-          </p:spPr>
-          <p:txBody>
-            <a:bodyPr anchorCtr="0" anchor="ctr" bIns="91425" lIns="91425" spcFirstLastPara="1" rIns="91425" wrap="square" tIns="91425">
-              <a:noAutofit/>
-            </a:bodyPr>
-            <a:lstStyle/>
-            <a:p>
-              <a:pPr indent="0" lvl="0" marL="0" rtl="0" algn="l">
-                <a:spcBef>
-                  <a:spcPts val="0"/>
-                </a:spcBef>
-                <a:spcAft>
-                  <a:spcPts val="0"/>
-                </a:spcAft>
-                <a:buNone/>
-              </a:pPr>
-              <a:r>
-                <a:t/>
-              </a:r>
-              <a:endParaRPr/>
-            </a:p>
-          </p:txBody>
-        </p:sp>
-        <p:pic>
-          <p:nvPicPr>
-            <p:cNvPr descr=" " id="113" name="Google Shape;113;p11"/>
-            <p:cNvPicPr preferRelativeResize="0"/>
-            <p:nvPr/>
-          </p:nvPicPr>
-          <p:blipFill rotWithShape="1">
-            <a:blip r:embed="rId3">
-              <a:alphaModFix/>
-            </a:blip>
-            <a:srcRect b="0" l="0" r="0" t="0"/>
-            <a:stretch/>
-          </p:blipFill>
-          <p:spPr>
-            <a:xfrm>
-              <a:off x="1270270" y="12621921"/>
-              <a:ext cx="700659" cy="240190"/>
-            </a:xfrm>
-            <a:prstGeom prst="rect">
-              <a:avLst/>
-            </a:prstGeom>
-            <a:noFill/>
-            <a:ln>
-              <a:noFill/>
-            </a:ln>
-          </p:spPr>
-        </p:pic>
-        <p:pic>
-          <p:nvPicPr>
-            <p:cNvPr descr=" " id="114" name="Google Shape;114;p11"/>
-            <p:cNvPicPr preferRelativeResize="0"/>
-            <p:nvPr/>
-          </p:nvPicPr>
-          <p:blipFill rotWithShape="1">
-            <a:blip r:embed="rId4">
-              <a:alphaModFix/>
-            </a:blip>
-            <a:srcRect b="0" l="0" r="0" t="0"/>
-            <a:stretch/>
-          </p:blipFill>
-          <p:spPr>
-            <a:xfrm>
-              <a:off x="762095" y="12573000"/>
-              <a:ext cx="381048" cy="381000"/>
-            </a:xfrm>
-            <a:prstGeom prst="rect">
-              <a:avLst/>
-            </a:prstGeom>
-            <a:noFill/>
-            <a:ln>
-              <a:noFill/>
-            </a:ln>
-          </p:spPr>
-        </p:pic>
-      </p:grpSp>
-      <p:sp>
-        <p:nvSpPr>
-          <p:cNvPr id="115" name="Google Shape;115;p11"/>
-          <p:cNvSpPr/>
-          <p:nvPr/>
-        </p:nvSpPr>
-        <p:spPr>
-          <a:xfrm>
-            <a:off x="1270160" y="1092200"/>
-            <a:ext cx="2781410" cy="257153"/>
-          </a:xfrm>
-          <a:prstGeom prst="rect">
-            <a:avLst/>
-          </a:prstGeom>
-          <a:noFill/>
-          <a:ln>
-            <a:noFill/>
-          </a:ln>
-        </p:spPr>
-        <p:txBody>
-          <a:bodyPr anchorCtr="0" anchor="ctr" bIns="91425" lIns="91425" spcFirstLastPara="1" rIns="91425" wrap="square" tIns="91425">
-            <a:noAutofit/>
-          </a:bodyPr>
-          <a:lstStyle/>
-          <a:p>
-            <a:pPr indent="0" lvl="0" marL="0" rtl="0" algn="l">
-              <a:spcBef>
-                <a:spcPts val="0"/>
-              </a:spcBef>
-              <a:spcAft>
-                <a:spcPts val="0"/>
-              </a:spcAft>
-              <a:buNone/>
-            </a:pPr>
-            <a:r>
-              <a:t/>
-            </a:r>
-            <a:endParaRPr/>
-          </a:p>
-        </p:txBody>
-      </p:sp>
-      <p:sp>
-        <p:nvSpPr>
-          <p:cNvPr id="116" name="Google Shape;116;p11"/>
-          <p:cNvSpPr txBox="1"/>
-          <p:nvPr>
-            <p:ph idx="1" type="body"/>
-          </p:nvPr>
-        </p:nvSpPr>
-        <p:spPr>
-          <a:xfrm>
-            <a:off x="4861023" y="1806008"/>
-            <a:ext cx="3862387" cy="1531483"/>
-          </a:xfrm>
-          <a:prstGeom prst="rect">
-            <a:avLst/>
-          </a:prstGeom>
-          <a:noFill/>
-          <a:ln>
-            <a:noFill/>
-          </a:ln>
-        </p:spPr>
-        <p:txBody>
-          <a:bodyPr anchorCtr="0" anchor="t" bIns="45700" lIns="91425" spcFirstLastPara="1" rIns="91425" wrap="square" tIns="45700">
-            <a:noAutofit/>
-          </a:bodyPr>
-          <a:lstStyle>
-            <a:lvl1pPr indent="-228600" lvl="0" marL="457200" marR="0" rtl="0" algn="l">
-              <a:lnSpc>
-                <a:spcPct val="90000"/>
-              </a:lnSpc>
-              <a:spcBef>
-                <a:spcPts val="750"/>
-              </a:spcBef>
-              <a:spcAft>
-                <a:spcPts val="0"/>
-              </a:spcAft>
-              <a:buClr>
-                <a:schemeClr val="dk1"/>
-              </a:buClr>
-              <a:buSzPts val="1400"/>
-              <a:buFont typeface="Arial"/>
-              <a:buNone/>
-              <a:defRPr b="0" i="0" sz="1400" u="none" cap="none" strike="noStrike">
-                <a:solidFill>
-                  <a:schemeClr val="dk1"/>
-                </a:solidFill>
-                <a:latin typeface="Play"/>
-                <a:ea typeface="Play"/>
-                <a:cs typeface="Play"/>
-                <a:sym typeface="Play"/>
-              </a:defRPr>
-            </a:lvl1pPr>
-            <a:lvl2pPr indent="-342900" lvl="1" marL="914400" marR="0" rtl="0" algn="l">
-              <a:lnSpc>
-                <a:spcPct val="90000"/>
-              </a:lnSpc>
-              <a:spcBef>
-                <a:spcPts val="375"/>
-              </a:spcBef>
-              <a:spcAft>
-                <a:spcPts val="0"/>
-              </a:spcAft>
-              <a:buClr>
-                <a:schemeClr val="dk1"/>
-              </a:buClr>
-              <a:buSzPts val="1800"/>
-              <a:buFont typeface="Arial"/>
-              <a:buChar char="•"/>
-              <a:defRPr b="0" i="0" sz="1800" u="none" cap="none" strike="noStrike">
-                <a:solidFill>
-                  <a:schemeClr val="dk1"/>
-                </a:solidFill>
-                <a:latin typeface="Calibri"/>
-                <a:ea typeface="Calibri"/>
-                <a:cs typeface="Calibri"/>
-                <a:sym typeface="Calibri"/>
-              </a:defRPr>
-            </a:lvl2pPr>
-            <a:lvl3pPr indent="-323850" lvl="2" marL="1371600" marR="0" rtl="0" algn="l">
-              <a:lnSpc>
-                <a:spcPct val="90000"/>
-              </a:lnSpc>
-              <a:spcBef>
-                <a:spcPts val="375"/>
-              </a:spcBef>
-              <a:spcAft>
-                <a:spcPts val="0"/>
-              </a:spcAft>
-              <a:buClr>
-                <a:schemeClr val="dk1"/>
-              </a:buClr>
-              <a:buSzPts val="1500"/>
-              <a:buFont typeface="Arial"/>
-              <a:buChar char="•"/>
-              <a:defRPr b="0" i="0" sz="1500" u="none" cap="none" strike="noStrike">
-                <a:solidFill>
-                  <a:schemeClr val="dk1"/>
-                </a:solidFill>
-                <a:latin typeface="Calibri"/>
-                <a:ea typeface="Calibri"/>
-                <a:cs typeface="Calibri"/>
-                <a:sym typeface="Calibri"/>
-              </a:defRPr>
-            </a:lvl3pPr>
-            <a:lvl4pPr indent="-314325" lvl="3" marL="1828800" marR="0" rtl="0" algn="l">
-              <a:lnSpc>
-                <a:spcPct val="90000"/>
-              </a:lnSpc>
-              <a:spcBef>
-                <a:spcPts val="375"/>
-              </a:spcBef>
-              <a:spcAft>
-                <a:spcPts val="0"/>
-              </a:spcAft>
-              <a:buClr>
-                <a:schemeClr val="dk1"/>
-              </a:buClr>
-              <a:buSzPts val="1350"/>
-              <a:buFont typeface="Arial"/>
-              <a:buChar char="•"/>
-              <a:defRPr b="0" i="0" sz="1350" u="none" cap="none" strike="noStrike">
-                <a:solidFill>
-                  <a:schemeClr val="dk1"/>
-                </a:solidFill>
-                <a:latin typeface="Calibri"/>
-                <a:ea typeface="Calibri"/>
-                <a:cs typeface="Calibri"/>
-                <a:sym typeface="Calibri"/>
-              </a:defRPr>
-            </a:lvl4pPr>
-            <a:lvl5pPr indent="-314325" lvl="4" marL="2286000" marR="0" rtl="0" algn="l">
-              <a:lnSpc>
-                <a:spcPct val="90000"/>
-              </a:lnSpc>
-              <a:spcBef>
-                <a:spcPts val="375"/>
-              </a:spcBef>
-              <a:spcAft>
-                <a:spcPts val="0"/>
-              </a:spcAft>
-              <a:buClr>
-                <a:schemeClr val="dk1"/>
-              </a:buClr>
-              <a:buSzPts val="1350"/>
-              <a:buFont typeface="Arial"/>
-              <a:buChar char="•"/>
-              <a:defRPr b="0" i="0" sz="1350" u="none" cap="none" strike="noStrike">
-                <a:solidFill>
-                  <a:schemeClr val="dk1"/>
-                </a:solidFill>
-                <a:latin typeface="Calibri"/>
-                <a:ea typeface="Calibri"/>
-                <a:cs typeface="Calibri"/>
-                <a:sym typeface="Calibri"/>
-              </a:defRPr>
-            </a:lvl5pPr>
-            <a:lvl6pPr indent="-314325" lvl="5" marL="2743200" marR="0" rtl="0" algn="l">
-              <a:lnSpc>
-                <a:spcPct val="90000"/>
-              </a:lnSpc>
-              <a:spcBef>
-                <a:spcPts val="375"/>
-              </a:spcBef>
-              <a:spcAft>
-                <a:spcPts val="0"/>
-              </a:spcAft>
-              <a:buClr>
-                <a:schemeClr val="dk1"/>
-              </a:buClr>
-              <a:buSzPts val="1350"/>
-              <a:buFont typeface="Arial"/>
-              <a:buChar char="•"/>
-              <a:defRPr b="0" i="0" sz="1350" u="none" cap="none" strike="noStrike">
-                <a:solidFill>
-                  <a:schemeClr val="dk1"/>
-                </a:solidFill>
-                <a:latin typeface="Calibri"/>
-                <a:ea typeface="Calibri"/>
-                <a:cs typeface="Calibri"/>
-                <a:sym typeface="Calibri"/>
-              </a:defRPr>
-            </a:lvl6pPr>
-            <a:lvl7pPr indent="-314325" lvl="6" marL="3200400" marR="0" rtl="0" algn="l">
-              <a:lnSpc>
-                <a:spcPct val="90000"/>
-              </a:lnSpc>
-              <a:spcBef>
-                <a:spcPts val="375"/>
-              </a:spcBef>
-              <a:spcAft>
-                <a:spcPts val="0"/>
-              </a:spcAft>
-              <a:buClr>
-                <a:schemeClr val="dk1"/>
-              </a:buClr>
-              <a:buSzPts val="1350"/>
-              <a:buFont typeface="Arial"/>
-              <a:buChar char="•"/>
-              <a:defRPr b="0" i="0" sz="1350" u="none" cap="none" strike="noStrike">
-                <a:solidFill>
-                  <a:schemeClr val="dk1"/>
-                </a:solidFill>
-                <a:latin typeface="Calibri"/>
-                <a:ea typeface="Calibri"/>
-                <a:cs typeface="Calibri"/>
-                <a:sym typeface="Calibri"/>
-              </a:defRPr>
-            </a:lvl7pPr>
-            <a:lvl8pPr indent="-314325" lvl="7" marL="3657600" marR="0" rtl="0" algn="l">
-              <a:lnSpc>
-                <a:spcPct val="90000"/>
-              </a:lnSpc>
-              <a:spcBef>
-                <a:spcPts val="375"/>
-              </a:spcBef>
-              <a:spcAft>
-                <a:spcPts val="0"/>
-              </a:spcAft>
-              <a:buClr>
-                <a:schemeClr val="dk1"/>
-              </a:buClr>
-              <a:buSzPts val="1350"/>
-              <a:buFont typeface="Arial"/>
-              <a:buChar char="•"/>
-              <a:defRPr b="0" i="0" sz="1350" u="none" cap="none" strike="noStrike">
-                <a:solidFill>
-                  <a:schemeClr val="dk1"/>
-                </a:solidFill>
-                <a:latin typeface="Calibri"/>
-                <a:ea typeface="Calibri"/>
-                <a:cs typeface="Calibri"/>
-                <a:sym typeface="Calibri"/>
-              </a:defRPr>
-            </a:lvl8pPr>
-            <a:lvl9pPr indent="-314325" lvl="8" marL="4114800" marR="0" rtl="0" algn="l">
-              <a:lnSpc>
-                <a:spcPct val="90000"/>
-              </a:lnSpc>
-              <a:spcBef>
-                <a:spcPts val="375"/>
-              </a:spcBef>
-              <a:spcAft>
-                <a:spcPts val="0"/>
-              </a:spcAft>
-              <a:buClr>
-                <a:schemeClr val="dk1"/>
-              </a:buClr>
-              <a:buSzPts val="1350"/>
-              <a:buFont typeface="Arial"/>
-              <a:buChar char="•"/>
-              <a:defRPr b="0" i="0" sz="1350" u="none" cap="none" strike="noStrike">
-                <a:solidFill>
-                  <a:schemeClr val="dk1"/>
-                </a:solidFill>
-                <a:latin typeface="Calibri"/>
-                <a:ea typeface="Calibri"/>
-                <a:cs typeface="Calibri"/>
-                <a:sym typeface="Calibri"/>
-              </a:defRPr>
-            </a:lvl9pPr>
-          </a:lstStyle>
-          <a:p/>
-        </p:txBody>
-      </p:sp>
-      <p:sp>
-        <p:nvSpPr>
-          <p:cNvPr id="117" name="Google Shape;117;p11"/>
-          <p:cNvSpPr txBox="1"/>
-          <p:nvPr>
-            <p:ph idx="2" type="body"/>
-          </p:nvPr>
-        </p:nvSpPr>
-        <p:spPr>
-          <a:xfrm>
-            <a:off x="283720" y="3472980"/>
-            <a:ext cx="4288279" cy="285750"/>
-          </a:xfrm>
-          <a:prstGeom prst="rect">
-            <a:avLst/>
-          </a:prstGeom>
-          <a:noFill/>
-          <a:ln>
-            <a:noFill/>
-          </a:ln>
-        </p:spPr>
-        <p:txBody>
-          <a:bodyPr anchorCtr="0" anchor="t" bIns="45700" lIns="91425" spcFirstLastPara="1" rIns="91425" wrap="square" tIns="45700">
-            <a:noAutofit/>
-          </a:bodyPr>
-          <a:lstStyle>
-            <a:lvl1pPr indent="-228600" lvl="0" marL="457200" marR="0" rtl="0" algn="l">
-              <a:lnSpc>
-                <a:spcPct val="90000"/>
-              </a:lnSpc>
-              <a:spcBef>
-                <a:spcPts val="750"/>
-              </a:spcBef>
-              <a:spcAft>
-                <a:spcPts val="0"/>
-              </a:spcAft>
-              <a:buClr>
-                <a:schemeClr val="dk1"/>
-              </a:buClr>
-              <a:buSzPts val="2000"/>
-              <a:buFont typeface="Arial"/>
-              <a:buNone/>
-              <a:defRPr b="0" i="0" sz="2000" u="none" cap="none" strike="noStrike">
-                <a:solidFill>
-                  <a:schemeClr val="dk1"/>
-                </a:solidFill>
-                <a:latin typeface="Play"/>
-                <a:ea typeface="Play"/>
-                <a:cs typeface="Play"/>
-                <a:sym typeface="Play"/>
-              </a:defRPr>
-            </a:lvl1pPr>
-            <a:lvl2pPr indent="-342900" lvl="1" marL="914400" marR="0" rtl="0" algn="l">
-              <a:lnSpc>
-                <a:spcPct val="90000"/>
-              </a:lnSpc>
-              <a:spcBef>
-                <a:spcPts val="375"/>
-              </a:spcBef>
-              <a:spcAft>
-                <a:spcPts val="0"/>
-              </a:spcAft>
-              <a:buClr>
-                <a:schemeClr val="dk1"/>
-              </a:buClr>
-              <a:buSzPts val="1800"/>
-              <a:buFont typeface="Arial"/>
-              <a:buChar char="•"/>
-              <a:defRPr b="0" i="0" sz="1800" u="none" cap="none" strike="noStrike">
-                <a:solidFill>
-                  <a:schemeClr val="dk1"/>
-                </a:solidFill>
-                <a:latin typeface="Calibri"/>
-                <a:ea typeface="Calibri"/>
-                <a:cs typeface="Calibri"/>
-                <a:sym typeface="Calibri"/>
-              </a:defRPr>
-            </a:lvl2pPr>
-            <a:lvl3pPr indent="-323850" lvl="2" marL="1371600" marR="0" rtl="0" algn="l">
-              <a:lnSpc>
-                <a:spcPct val="90000"/>
-              </a:lnSpc>
-              <a:spcBef>
-                <a:spcPts val="375"/>
-              </a:spcBef>
-              <a:spcAft>
-                <a:spcPts val="0"/>
-              </a:spcAft>
-              <a:buClr>
-                <a:schemeClr val="dk1"/>
-              </a:buClr>
-              <a:buSzPts val="1500"/>
-              <a:buFont typeface="Arial"/>
-              <a:buChar char="•"/>
-              <a:defRPr b="0" i="0" sz="1500" u="none" cap="none" strike="noStrike">
-                <a:solidFill>
-                  <a:schemeClr val="dk1"/>
-                </a:solidFill>
-                <a:latin typeface="Calibri"/>
-                <a:ea typeface="Calibri"/>
-                <a:cs typeface="Calibri"/>
-                <a:sym typeface="Calibri"/>
-              </a:defRPr>
-            </a:lvl3pPr>
-            <a:lvl4pPr indent="-314325" lvl="3" marL="1828800" marR="0" rtl="0" algn="l">
-              <a:lnSpc>
-                <a:spcPct val="90000"/>
-              </a:lnSpc>
-              <a:spcBef>
-                <a:spcPts val="375"/>
-              </a:spcBef>
-              <a:spcAft>
-                <a:spcPts val="0"/>
-              </a:spcAft>
-              <a:buClr>
-                <a:schemeClr val="dk1"/>
-              </a:buClr>
-              <a:buSzPts val="1350"/>
-              <a:buFont typeface="Arial"/>
-              <a:buChar char="•"/>
-              <a:defRPr b="0" i="0" sz="1350" u="none" cap="none" strike="noStrike">
-                <a:solidFill>
-                  <a:schemeClr val="dk1"/>
-                </a:solidFill>
-                <a:latin typeface="Calibri"/>
-                <a:ea typeface="Calibri"/>
-                <a:cs typeface="Calibri"/>
-                <a:sym typeface="Calibri"/>
-              </a:defRPr>
-            </a:lvl4pPr>
-            <a:lvl5pPr indent="-314325" lvl="4" marL="2286000" marR="0" rtl="0" algn="l">
-              <a:lnSpc>
-                <a:spcPct val="90000"/>
-              </a:lnSpc>
-              <a:spcBef>
-                <a:spcPts val="375"/>
-              </a:spcBef>
-              <a:spcAft>
-                <a:spcPts val="0"/>
-              </a:spcAft>
-              <a:buClr>
-                <a:schemeClr val="dk1"/>
-              </a:buClr>
-              <a:buSzPts val="1350"/>
-              <a:buFont typeface="Arial"/>
-              <a:buChar char="•"/>
-              <a:defRPr b="0" i="0" sz="1350" u="none" cap="none" strike="noStrike">
-                <a:solidFill>
-                  <a:schemeClr val="dk1"/>
-                </a:solidFill>
-                <a:latin typeface="Calibri"/>
-                <a:ea typeface="Calibri"/>
-                <a:cs typeface="Calibri"/>
-                <a:sym typeface="Calibri"/>
-              </a:defRPr>
-            </a:lvl5pPr>
-            <a:lvl6pPr indent="-314325" lvl="5" marL="2743200" marR="0" rtl="0" algn="l">
-              <a:lnSpc>
-                <a:spcPct val="90000"/>
-              </a:lnSpc>
-              <a:spcBef>
-                <a:spcPts val="375"/>
-              </a:spcBef>
-              <a:spcAft>
-                <a:spcPts val="0"/>
-              </a:spcAft>
-              <a:buClr>
-                <a:schemeClr val="dk1"/>
-              </a:buClr>
-              <a:buSzPts val="1350"/>
-              <a:buFont typeface="Arial"/>
-              <a:buChar char="•"/>
-              <a:defRPr b="0" i="0" sz="1350" u="none" cap="none" strike="noStrike">
-                <a:solidFill>
-                  <a:schemeClr val="dk1"/>
-                </a:solidFill>
-                <a:latin typeface="Calibri"/>
-                <a:ea typeface="Calibri"/>
-                <a:cs typeface="Calibri"/>
-                <a:sym typeface="Calibri"/>
-              </a:defRPr>
-            </a:lvl6pPr>
-            <a:lvl7pPr indent="-314325" lvl="6" marL="3200400" marR="0" rtl="0" algn="l">
-              <a:lnSpc>
-                <a:spcPct val="90000"/>
-              </a:lnSpc>
-              <a:spcBef>
-                <a:spcPts val="375"/>
-              </a:spcBef>
-              <a:spcAft>
-                <a:spcPts val="0"/>
-              </a:spcAft>
-              <a:buClr>
-                <a:schemeClr val="dk1"/>
-              </a:buClr>
-              <a:buSzPts val="1350"/>
-              <a:buFont typeface="Arial"/>
-              <a:buChar char="•"/>
-              <a:defRPr b="0" i="0" sz="1350" u="none" cap="none" strike="noStrike">
-                <a:solidFill>
-                  <a:schemeClr val="dk1"/>
-                </a:solidFill>
-                <a:latin typeface="Calibri"/>
-                <a:ea typeface="Calibri"/>
-                <a:cs typeface="Calibri"/>
-                <a:sym typeface="Calibri"/>
-              </a:defRPr>
-            </a:lvl7pPr>
-            <a:lvl8pPr indent="-314325" lvl="7" marL="3657600" marR="0" rtl="0" algn="l">
-              <a:lnSpc>
-                <a:spcPct val="90000"/>
-              </a:lnSpc>
-              <a:spcBef>
-                <a:spcPts val="375"/>
-              </a:spcBef>
-              <a:spcAft>
-                <a:spcPts val="0"/>
-              </a:spcAft>
-              <a:buClr>
-                <a:schemeClr val="dk1"/>
-              </a:buClr>
-              <a:buSzPts val="1350"/>
-              <a:buFont typeface="Arial"/>
-              <a:buChar char="•"/>
-              <a:defRPr b="0" i="0" sz="1350" u="none" cap="none" strike="noStrike">
-                <a:solidFill>
-                  <a:schemeClr val="dk1"/>
-                </a:solidFill>
-                <a:latin typeface="Calibri"/>
-                <a:ea typeface="Calibri"/>
-                <a:cs typeface="Calibri"/>
-                <a:sym typeface="Calibri"/>
-              </a:defRPr>
-            </a:lvl8pPr>
-            <a:lvl9pPr indent="-314325" lvl="8" marL="4114800" marR="0" rtl="0" algn="l">
-              <a:lnSpc>
-                <a:spcPct val="90000"/>
-              </a:lnSpc>
-              <a:spcBef>
-                <a:spcPts val="375"/>
-              </a:spcBef>
-              <a:spcAft>
-                <a:spcPts val="0"/>
-              </a:spcAft>
-              <a:buClr>
-                <a:schemeClr val="dk1"/>
-              </a:buClr>
-              <a:buSzPts val="1350"/>
-              <a:buFont typeface="Arial"/>
-              <a:buChar char="•"/>
-              <a:defRPr b="0" i="0" sz="1350" u="none" cap="none" strike="noStrike">
-                <a:solidFill>
-                  <a:schemeClr val="dk1"/>
-                </a:solidFill>
-                <a:latin typeface="Calibri"/>
-                <a:ea typeface="Calibri"/>
-                <a:cs typeface="Calibri"/>
-                <a:sym typeface="Calibri"/>
-              </a:defRPr>
-            </a:lvl9pPr>
-          </a:lstStyle>
-          <a:p/>
-        </p:txBody>
-      </p:sp>
-      <p:sp>
-        <p:nvSpPr>
-          <p:cNvPr id="118" name="Google Shape;118;p11"/>
-          <p:cNvSpPr txBox="1"/>
-          <p:nvPr>
-            <p:ph idx="3" type="body"/>
-          </p:nvPr>
-        </p:nvSpPr>
-        <p:spPr>
-          <a:xfrm>
-            <a:off x="283720" y="3908425"/>
-            <a:ext cx="4288279" cy="285750"/>
-          </a:xfrm>
-          <a:prstGeom prst="rect">
-            <a:avLst/>
-          </a:prstGeom>
-          <a:noFill/>
-          <a:ln>
-            <a:noFill/>
-          </a:ln>
-        </p:spPr>
-        <p:txBody>
-          <a:bodyPr anchorCtr="0" anchor="t" bIns="45700" lIns="91425" spcFirstLastPara="1" rIns="91425" wrap="square" tIns="45700">
-            <a:noAutofit/>
-          </a:bodyPr>
-          <a:lstStyle>
-            <a:lvl1pPr indent="-228600" lvl="0" marL="457200" marR="0" rtl="0" algn="l">
-              <a:lnSpc>
-                <a:spcPct val="90000"/>
-              </a:lnSpc>
-              <a:spcBef>
-                <a:spcPts val="750"/>
-              </a:spcBef>
-              <a:spcAft>
-                <a:spcPts val="0"/>
-              </a:spcAft>
-              <a:buClr>
-                <a:schemeClr val="lt2"/>
-              </a:buClr>
-              <a:buSzPts val="1200"/>
-              <a:buFont typeface="Arial"/>
-              <a:buNone/>
-              <a:defRPr b="0" i="0" sz="1200" u="none" cap="none" strike="noStrike">
-                <a:solidFill>
-                  <a:schemeClr val="lt2"/>
-                </a:solidFill>
-                <a:latin typeface="Play"/>
-                <a:ea typeface="Play"/>
-                <a:cs typeface="Play"/>
-                <a:sym typeface="Play"/>
-              </a:defRPr>
-            </a:lvl1pPr>
-            <a:lvl2pPr indent="-342900" lvl="1" marL="914400" marR="0" rtl="0" algn="l">
-              <a:lnSpc>
-                <a:spcPct val="90000"/>
-              </a:lnSpc>
-              <a:spcBef>
-                <a:spcPts val="375"/>
-              </a:spcBef>
-              <a:spcAft>
-                <a:spcPts val="0"/>
-              </a:spcAft>
-              <a:buClr>
-                <a:schemeClr val="dk1"/>
-              </a:buClr>
-              <a:buSzPts val="1800"/>
-              <a:buFont typeface="Arial"/>
-              <a:buChar char="•"/>
-              <a:defRPr b="0" i="0" sz="1800" u="none" cap="none" strike="noStrike">
-                <a:solidFill>
-                  <a:schemeClr val="dk1"/>
-                </a:solidFill>
-                <a:latin typeface="Calibri"/>
-                <a:ea typeface="Calibri"/>
-                <a:cs typeface="Calibri"/>
-                <a:sym typeface="Calibri"/>
-              </a:defRPr>
-            </a:lvl2pPr>
-            <a:lvl3pPr indent="-323850" lvl="2" marL="1371600" marR="0" rtl="0" algn="l">
-              <a:lnSpc>
-                <a:spcPct val="90000"/>
-              </a:lnSpc>
-              <a:spcBef>
-                <a:spcPts val="375"/>
-              </a:spcBef>
-              <a:spcAft>
-                <a:spcPts val="0"/>
-              </a:spcAft>
-              <a:buClr>
-                <a:schemeClr val="dk1"/>
-              </a:buClr>
-              <a:buSzPts val="1500"/>
-              <a:buFont typeface="Arial"/>
-              <a:buChar char="•"/>
-              <a:defRPr b="0" i="0" sz="1500" u="none" cap="none" strike="noStrike">
-                <a:solidFill>
-                  <a:schemeClr val="dk1"/>
-                </a:solidFill>
-                <a:latin typeface="Calibri"/>
-                <a:ea typeface="Calibri"/>
-                <a:cs typeface="Calibri"/>
-                <a:sym typeface="Calibri"/>
-              </a:defRPr>
-            </a:lvl3pPr>
-            <a:lvl4pPr indent="-314325" lvl="3" marL="1828800" marR="0" rtl="0" algn="l">
-              <a:lnSpc>
-                <a:spcPct val="90000"/>
-              </a:lnSpc>
-              <a:spcBef>
-                <a:spcPts val="375"/>
-              </a:spcBef>
-              <a:spcAft>
-                <a:spcPts val="0"/>
-              </a:spcAft>
-              <a:buClr>
-                <a:schemeClr val="dk1"/>
-              </a:buClr>
-              <a:buSzPts val="1350"/>
-              <a:buFont typeface="Arial"/>
-              <a:buChar char="•"/>
-              <a:defRPr b="0" i="0" sz="1350" u="none" cap="none" strike="noStrike">
-                <a:solidFill>
-                  <a:schemeClr val="dk1"/>
-                </a:solidFill>
-                <a:latin typeface="Calibri"/>
-                <a:ea typeface="Calibri"/>
-                <a:cs typeface="Calibri"/>
-                <a:sym typeface="Calibri"/>
-              </a:defRPr>
-            </a:lvl4pPr>
-            <a:lvl5pPr indent="-314325" lvl="4" marL="2286000" marR="0" rtl="0" algn="l">
-              <a:lnSpc>
-                <a:spcPct val="90000"/>
-              </a:lnSpc>
-              <a:spcBef>
-                <a:spcPts val="375"/>
-              </a:spcBef>
-              <a:spcAft>
-                <a:spcPts val="0"/>
-              </a:spcAft>
-              <a:buClr>
-                <a:schemeClr val="dk1"/>
-              </a:buClr>
-              <a:buSzPts val="1350"/>
-              <a:buFont typeface="Arial"/>
-              <a:buChar char="•"/>
-              <a:defRPr b="0" i="0" sz="1350" u="none" cap="none" strike="noStrike">
-                <a:solidFill>
-                  <a:schemeClr val="dk1"/>
-                </a:solidFill>
-                <a:latin typeface="Calibri"/>
-                <a:ea typeface="Calibri"/>
-                <a:cs typeface="Calibri"/>
-                <a:sym typeface="Calibri"/>
-              </a:defRPr>
-            </a:lvl5pPr>
-            <a:lvl6pPr indent="-314325" lvl="5" marL="2743200" marR="0" rtl="0" algn="l">
-              <a:lnSpc>
-                <a:spcPct val="90000"/>
-              </a:lnSpc>
-              <a:spcBef>
-                <a:spcPts val="375"/>
-              </a:spcBef>
-              <a:spcAft>
-                <a:spcPts val="0"/>
-              </a:spcAft>
-              <a:buClr>
-                <a:schemeClr val="dk1"/>
-              </a:buClr>
-              <a:buSzPts val="1350"/>
-              <a:buFont typeface="Arial"/>
-              <a:buChar char="•"/>
-              <a:defRPr b="0" i="0" sz="1350" u="none" cap="none" strike="noStrike">
-                <a:solidFill>
-                  <a:schemeClr val="dk1"/>
-                </a:solidFill>
-                <a:latin typeface="Calibri"/>
-                <a:ea typeface="Calibri"/>
-                <a:cs typeface="Calibri"/>
-                <a:sym typeface="Calibri"/>
-              </a:defRPr>
-            </a:lvl6pPr>
-            <a:lvl7pPr indent="-314325" lvl="6" marL="3200400" marR="0" rtl="0" algn="l">
-              <a:lnSpc>
-                <a:spcPct val="90000"/>
-              </a:lnSpc>
-              <a:spcBef>
-                <a:spcPts val="375"/>
-              </a:spcBef>
-              <a:spcAft>
-                <a:spcPts val="0"/>
-              </a:spcAft>
-              <a:buClr>
-                <a:schemeClr val="dk1"/>
-              </a:buClr>
-              <a:buSzPts val="1350"/>
-              <a:buFont typeface="Arial"/>
-              <a:buChar char="•"/>
-              <a:defRPr b="0" i="0" sz="1350" u="none" cap="none" strike="noStrike">
-                <a:solidFill>
-                  <a:schemeClr val="dk1"/>
-                </a:solidFill>
-                <a:latin typeface="Calibri"/>
-                <a:ea typeface="Calibri"/>
-                <a:cs typeface="Calibri"/>
-                <a:sym typeface="Calibri"/>
-              </a:defRPr>
-            </a:lvl7pPr>
-            <a:lvl8pPr indent="-314325" lvl="7" marL="3657600" marR="0" rtl="0" algn="l">
-              <a:lnSpc>
-                <a:spcPct val="90000"/>
-              </a:lnSpc>
-              <a:spcBef>
-                <a:spcPts val="375"/>
-              </a:spcBef>
-              <a:spcAft>
-                <a:spcPts val="0"/>
-              </a:spcAft>
-              <a:buClr>
-                <a:schemeClr val="dk1"/>
-              </a:buClr>
-              <a:buSzPts val="1350"/>
-              <a:buFont typeface="Arial"/>
-              <a:buChar char="•"/>
-              <a:defRPr b="0" i="0" sz="1350" u="none" cap="none" strike="noStrike">
-                <a:solidFill>
-                  <a:schemeClr val="dk1"/>
-                </a:solidFill>
-                <a:latin typeface="Calibri"/>
-                <a:ea typeface="Calibri"/>
-                <a:cs typeface="Calibri"/>
-                <a:sym typeface="Calibri"/>
-              </a:defRPr>
-            </a:lvl8pPr>
-            <a:lvl9pPr indent="-314325" lvl="8" marL="4114800" marR="0" rtl="0" algn="l">
-              <a:lnSpc>
-                <a:spcPct val="90000"/>
-              </a:lnSpc>
-              <a:spcBef>
-                <a:spcPts val="375"/>
-              </a:spcBef>
-              <a:spcAft>
-                <a:spcPts val="0"/>
-              </a:spcAft>
-              <a:buClr>
-                <a:schemeClr val="dk1"/>
-              </a:buClr>
-              <a:buSzPts val="1350"/>
-              <a:buFont typeface="Arial"/>
-              <a:buChar char="•"/>
-              <a:defRPr b="0" i="0" sz="1350" u="none" cap="none" strike="noStrike">
-                <a:solidFill>
-                  <a:schemeClr val="dk1"/>
-                </a:solidFill>
-                <a:latin typeface="Calibri"/>
-                <a:ea typeface="Calibri"/>
-                <a:cs typeface="Calibri"/>
-                <a:sym typeface="Calibri"/>
-              </a:defRPr>
-            </a:lvl9pPr>
-          </a:lstStyle>
-          <a:p/>
-        </p:txBody>
-      </p:sp>
-      <p:sp>
-        <p:nvSpPr>
-          <p:cNvPr id="119" name="Google Shape;119;p11"/>
-          <p:cNvSpPr txBox="1"/>
-          <p:nvPr>
-            <p:ph type="title"/>
-          </p:nvPr>
-        </p:nvSpPr>
-        <p:spPr>
-          <a:xfrm>
-            <a:off x="177971" y="282949"/>
-            <a:ext cx="4058749" cy="753371"/>
-          </a:xfrm>
-          <a:prstGeom prst="rect">
-            <a:avLst/>
-          </a:prstGeom>
-          <a:noFill/>
-          <a:ln>
-            <a:noFill/>
-          </a:ln>
-        </p:spPr>
-        <p:txBody>
-          <a:bodyPr anchorCtr="0" anchor="t" bIns="45700" lIns="91425" spcFirstLastPara="1" rIns="91425" wrap="square" tIns="45700">
-            <a:noAutofit/>
-          </a:bodyPr>
-          <a:lstStyle>
-            <a:lvl1pPr lvl="0" marR="0" rtl="0" algn="l">
-              <a:lnSpc>
-                <a:spcPct val="90000"/>
-              </a:lnSpc>
-              <a:spcBef>
-                <a:spcPts val="0"/>
-              </a:spcBef>
-              <a:spcAft>
-                <a:spcPts val="0"/>
-              </a:spcAft>
-              <a:buClr>
-                <a:schemeClr val="dk1"/>
-              </a:buClr>
-              <a:buSzPts val="2400"/>
-              <a:buFont typeface="Play"/>
-              <a:buNone/>
-              <a:defRPr b="0" i="0" sz="2400" u="none" cap="none" strike="noStrike">
-                <a:solidFill>
-                  <a:schemeClr val="dk1"/>
-                </a:solidFill>
-                <a:latin typeface="Play"/>
-                <a:ea typeface="Play"/>
-                <a:cs typeface="Play"/>
-                <a:sym typeface="Play"/>
-              </a:defRPr>
-            </a:lvl1pPr>
-            <a:lvl2pPr lvl="1">
-              <a:spcBef>
-                <a:spcPts val="0"/>
-              </a:spcBef>
-              <a:spcAft>
-                <a:spcPts val="0"/>
-              </a:spcAft>
-              <a:buSzPts val="1400"/>
-              <a:buNone/>
-              <a:defRPr sz="1800"/>
-            </a:lvl2pPr>
-            <a:lvl3pPr lvl="2">
-              <a:spcBef>
-                <a:spcPts val="0"/>
-              </a:spcBef>
-              <a:spcAft>
-                <a:spcPts val="0"/>
-              </a:spcAft>
-              <a:buSzPts val="1400"/>
-              <a:buNone/>
-              <a:defRPr sz="1800"/>
-            </a:lvl3pPr>
-            <a:lvl4pPr lvl="3">
-              <a:spcBef>
-                <a:spcPts val="0"/>
-              </a:spcBef>
-              <a:spcAft>
-                <a:spcPts val="0"/>
-              </a:spcAft>
-              <a:buSzPts val="1400"/>
-              <a:buNone/>
-              <a:defRPr sz="1800"/>
-            </a:lvl4pPr>
-            <a:lvl5pPr lvl="4">
-              <a:spcBef>
-                <a:spcPts val="0"/>
-              </a:spcBef>
-              <a:spcAft>
-                <a:spcPts val="0"/>
-              </a:spcAft>
-              <a:buSzPts val="1400"/>
-              <a:buNone/>
-              <a:defRPr sz="1800"/>
-            </a:lvl5pPr>
-            <a:lvl6pPr lvl="5">
-              <a:spcBef>
-                <a:spcPts val="0"/>
-              </a:spcBef>
-              <a:spcAft>
-                <a:spcPts val="0"/>
-              </a:spcAft>
-              <a:buSzPts val="1400"/>
-              <a:buNone/>
-              <a:defRPr sz="1800"/>
-            </a:lvl6pPr>
-            <a:lvl7pPr lvl="6">
-              <a:spcBef>
-                <a:spcPts val="0"/>
-              </a:spcBef>
-              <a:spcAft>
-                <a:spcPts val="0"/>
-              </a:spcAft>
-              <a:buSzPts val="1400"/>
-              <a:buNone/>
-              <a:defRPr sz="1800"/>
-            </a:lvl7pPr>
-            <a:lvl8pPr lvl="7">
-              <a:spcBef>
-                <a:spcPts val="0"/>
-              </a:spcBef>
-              <a:spcAft>
-                <a:spcPts val="0"/>
-              </a:spcAft>
-              <a:buSzPts val="1400"/>
-              <a:buNone/>
-              <a:defRPr sz="1800"/>
-            </a:lvl8pPr>
-            <a:lvl9pPr lvl="8">
-              <a:spcBef>
-                <a:spcPts val="0"/>
-              </a:spcBef>
-              <a:spcAft>
-                <a:spcPts val="0"/>
-              </a:spcAft>
-              <a:buSzPts val="1400"/>
-              <a:buNone/>
-              <a:defRPr sz="1800"/>
-            </a:lvl9pPr>
-          </a:lstStyle>
-          <a:p/>
-        </p:txBody>
-      </p:sp>
-    </p:spTree>
-  </p:cSld>
-  <p:clrMapOvr>
-    <a:masterClrMapping/>
-  </p:clrMapOvr>
-</p:sldLayout>
-</file>
-
 <file path=ppt/slideMasters/slideMaster1.xml><?xml version="1.0" encoding="utf-8"?>
 <p:sldMaster xmlns:a="http://schemas.openxmlformats.org/drawingml/2006/main" xmlns:r="http://schemas.openxmlformats.org/officeDocument/2006/relationships" xmlns:mc="http://schemas.openxmlformats.org/markup-compatibility/2006" xmlns:mv="urn:schemas-microsoft-com:mac:vml" xmlns:p="http://schemas.openxmlformats.org/presentationml/2006/main" xmlns:c="http://schemas.openxmlformats.org/drawingml/2006/chart" xmlns:dgm="http://schemas.openxmlformats.org/drawingml/2006/diagram" xmlns:o="urn:schemas-microsoft-com:office:office" xmlns:v="urn:schemas-microsoft-com:vml" xmlns:pvml="urn:schemas-microsoft-com:office:powerpoint" xmlns:com="http://schemas.openxmlformats.org/drawingml/2006/compatibility" xmlns:p14="http://schemas.microsoft.com/office/powerpoint/2010/main" xmlns:p15="http://schemas.microsoft.com/office/powerpoint/2012/main" xmlns:ahyp="http://schemas.microsoft.com/office/drawing/2018/hyperlinkcolor">
   <p:cSld>
@@ -7029,7 +5741,6 @@
   <p:clrMap accent1="accent1" accent2="accent2" accent3="accent3" accent4="accent4" accent5="accent5" accent6="accent6" bg1="lt1" bg2="dk2" tx1="dk1" tx2="lt2" folHlink="folHlink" hlink="hlink"/>
   <p:sldLayoutIdLst>
     <p:sldLayoutId id="2147483655" r:id="rId5"/>
-    <p:sldLayoutId id="2147483656" r:id="rId6"/>
     <p:sldLayoutId id="2147483658" r:id="rId8"/>
     <p:sldLayoutId id="2147483675" r:id="rId25"/>
   </p:sldLayoutIdLst>
@@ -7746,8 +6457,8 @@
         </p:nvSpPr>
         <p:spPr>
           <a:xfrm>
-            <a:off x="2473771" y="1370481"/>
-            <a:ext cx="4288279" cy="800046"/>
+            <a:off x="1143190" y="1190618"/>
+            <a:ext cx="6949440" cy="544950"/>
           </a:xfrm>
           <a:prstGeom prst="rect">
             <a:avLst/>
@@ -7758,7 +6469,7 @@
           </a:ln>
         </p:spPr>
         <p:txBody>
-          <a:bodyPr anchorCtr="0" anchor="t" bIns="45700" lIns="91425" spcFirstLastPara="1" rIns="91425" wrap="square" tIns="45700">
+          <a:bodyPr anchorCtr="0" anchor="t" bIns="45700" lIns="91425" spcFirstLastPara="1" rIns="91425" wrap="square" tIns="45700" vert="horz">
             <a:normAutofit/>
           </a:bodyPr>
           <a:lstStyle/>
@@ -7771,7 +6482,7 @@
                 <a:spcPts val="0"/>
               </a:spcBef>
               <a:spcAft>
-                <a:spcPts val="270"/>
+                <a:spcPts val="359"/>
               </a:spcAft>
               <a:buClr>
                 <a:schemeClr val="lt1"/>
@@ -7781,8 +6492,8 @@
               <a:buNone/>
             </a:pPr>
             <a:r>
-              <a:rPr sz="1800"/>
-              <a:t>Ускорение работы сотрудников через ИИ</a:t>
+              <a:rPr sz="2400"/>
+              <a:t>Поиск инструкции занимает до 30 минут</a:t>
             </a:r>
             <a:endParaRPr/>
           </a:p>
@@ -7798,8 +6509,8 @@
         </p:nvSpPr>
         <p:spPr>
           <a:xfrm>
-            <a:off x="2473770" y="2199720"/>
-            <a:ext cx="4288279" cy="502920"/>
+            <a:off x="1143190" y="1836152"/>
+            <a:ext cx="6949440" cy="384048"/>
           </a:xfrm>
           <a:prstGeom prst="rect">
             <a:avLst/>
@@ -7810,7 +6521,7 @@
           </a:ln>
         </p:spPr>
         <p:txBody>
-          <a:bodyPr anchorCtr="0" anchor="t" bIns="45700" lIns="91425" spcFirstLastPara="1" rIns="91425" wrap="square" tIns="45700">
+          <a:bodyPr anchorCtr="0" anchor="t" bIns="45700" lIns="91425" spcFirstLastPara="1" rIns="91425" wrap="square" tIns="45700" vert="horz">
             <a:normAutofit/>
           </a:bodyPr>
           <a:lstStyle/>
@@ -7823,7 +6534,7 @@
                 <a:spcPts val="0"/>
               </a:spcBef>
               <a:spcAft>
-                <a:spcPts val="165"/>
+                <a:spcPts val="182"/>
               </a:spcAft>
               <a:buClr>
                 <a:schemeClr val="lt1"/>
@@ -7832,8 +6543,8 @@
               <a:buNone/>
             </a:pPr>
             <a:r>
-              <a:rPr sz="1100"/>
-              <a:t>Инициатива по внедрению ИИ-помощника во внутренний портал</a:t>
+              <a:rPr sz="1220"/>
+              <a:t>Инициатива по внедрению ИИ-помощника для ускорения работы сотрудников</a:t>
             </a:r>
             <a:endParaRPr/>
           </a:p>
@@ -7848,753 +6559,6 @@
 </file>
 
 <file path=ppt/slides/slide10.xml><?xml version="1.0" encoding="utf-8"?>
-<p:sld xmlns:a="http://schemas.openxmlformats.org/drawingml/2006/main" xmlns:p="http://schemas.openxmlformats.org/presentationml/2006/main" xmlns:r="http://schemas.openxmlformats.org/officeDocument/2006/relationships">
-  <p:cSld>
-    <p:spTree>
-      <p:nvGrpSpPr>
-        <p:cNvPr id="1" name=""/>
-        <p:cNvGrpSpPr/>
-        <p:nvPr/>
-      </p:nvGrpSpPr>
-      <p:grpSpPr/>
-      <p:sp>
-        <p:nvSpPr>
-          <p:cNvPr id="515" name="BrandDeck Text 515"/>
-          <p:cNvSpPr txBox="1"/>
-          <p:nvPr>
-            <p:ph type="title"/>
-          </p:nvPr>
-        </p:nvSpPr>
-        <p:spPr>
-          <a:xfrm>
-            <a:off x="177971" y="282949"/>
-            <a:ext cx="4058749" cy="753371"/>
-          </a:xfrm>
-          <a:prstGeom prst="rect">
-            <a:avLst/>
-          </a:prstGeom>
-          <a:noFill/>
-          <a:ln>
-            <a:noFill/>
-          </a:ln>
-        </p:spPr>
-        <p:txBody>
-          <a:bodyPr anchorCtr="0" anchor="t" bIns="45700" lIns="91425" spcFirstLastPara="1" rIns="91425" wrap="square" tIns="45700">
-            <a:normAutofit/>
-          </a:bodyPr>
-          <a:lstStyle/>
-          <a:p>
-            <a:pPr indent="0" marL="0" rtl="0" algn="l">
-              <a:lnSpc>
-                <a:spcPct val="115000"/>
-              </a:lnSpc>
-              <a:spcBef>
-                <a:spcPts val="0"/>
-              </a:spcBef>
-              <a:spcAft>
-                <a:spcPts val="211"/>
-              </a:spcAft>
-              <a:buClr>
-                <a:schemeClr val="dk1"/>
-              </a:buClr>
-              <a:buSzPts val="2400"/>
-              <a:buFont typeface="Play"/>
-              <a:buNone/>
-            </a:pPr>
-            <a:r>
-              <a:rPr sz="1410"/>
-              <a:t>Измеряем время поиска и долю закрытых обращений без специалиста</a:t>
-            </a:r>
-            <a:endParaRPr/>
-          </a:p>
-        </p:txBody>
-      </p:sp>
-      <p:graphicFrame>
-        <p:nvGraphicFramePr>
-          <p:cNvPr id="518" name="BrandDeck Table"/>
-          <p:cNvGraphicFramePr>
-            <a:graphicFrameLocks noGrp="1"/>
-          </p:cNvGraphicFramePr>
-          <p:nvPr/>
-        </p:nvGraphicFramePr>
-        <p:xfrm>
-          <a:off x="585216" y="1173480"/>
-          <a:ext cx="5129783" cy="3553968"/>
-        </p:xfrm>
-        <a:graphic>
-          <a:graphicData uri="http://schemas.openxmlformats.org/drawingml/2006/table">
-            <a:tbl>
-              <a:tblPr firstRow="1" bandRow="1">
-                <a:tableStyleId>{5C22544A-7EE6-4342-B048-85BDC9FD1C3A}</a:tableStyleId>
-              </a:tblPr>
-              <a:tblGrid>
-                <a:gridCol w="2564891"/>
-                <a:gridCol w="2564892"/>
-              </a:tblGrid>
-              <a:tr h="1039368">
-                <a:tc>
-                  <a:txBody>
-                    <a:bodyPr/>
-                    <a:lstStyle/>
-                    <a:p>
-                      <a:pPr algn="l"/>
-                      <a:r>
-                        <a:rPr sz="1320" b="1">
-                          <a:solidFill>
-                            <a:srgbClr val="FFFFFF"/>
-                          </a:solidFill>
-                          <a:latin typeface="Play"/>
-                        </a:rPr>
-                        <a:t>Метрика</a:t>
-                      </a:r>
-                    </a:p>
-                  </a:txBody>
-                  <a:tcPr marL="54864" marR="54864" anchor="ctr">
-                    <a:solidFill>
-                      <a:srgbClr val="006DEB"/>
-                    </a:solidFill>
-                  </a:tcPr>
-                </a:tc>
-                <a:tc>
-                  <a:txBody>
-                    <a:bodyPr/>
-                    <a:lstStyle/>
-                    <a:p>
-                      <a:pPr algn="l"/>
-                      <a:r>
-                        <a:rPr sz="1320" b="1">
-                          <a:solidFill>
-                            <a:srgbClr val="FFFFFF"/>
-                          </a:solidFill>
-                          <a:latin typeface="Play"/>
-                        </a:rPr>
-                        <a:t>Что измеряем</a:t>
-                      </a:r>
-                    </a:p>
-                  </a:txBody>
-                  <a:tcPr marL="54864" marR="54864" anchor="ctr">
-                    <a:solidFill>
-                      <a:srgbClr val="006DEB"/>
-                    </a:solidFill>
-                  </a:tcPr>
-                </a:tc>
-              </a:tr>
-              <a:tr h="1257300">
-                <a:tc>
-                  <a:txBody>
-                    <a:bodyPr/>
-                    <a:lstStyle/>
-                    <a:p>
-                      <a:pPr algn="l"/>
-                      <a:r>
-                        <a:rPr sz="1320" b="0">
-                          <a:solidFill>
-                            <a:srgbClr val="111111"/>
-                          </a:solidFill>
-                          <a:latin typeface="Play"/>
-                        </a:rPr>
-                        <a:t>Время поиска ответа</a:t>
-                      </a:r>
-                    </a:p>
-                  </a:txBody>
-                  <a:tcPr marL="54864" marR="54864" anchor="ctr">
-                    <a:solidFill>
-                      <a:srgbClr val="FEFFFF"/>
-                    </a:solidFill>
-                  </a:tcPr>
-                </a:tc>
-                <a:tc>
-                  <a:txBody>
-                    <a:bodyPr/>
-                    <a:lstStyle/>
-                    <a:p>
-                      <a:pPr algn="l"/>
-                      <a:r>
-                        <a:rPr sz="1320" b="0">
-                          <a:solidFill>
-                            <a:srgbClr val="111111"/>
-                          </a:solidFill>
-                          <a:latin typeface="Play"/>
-                        </a:rPr>
-                        <a:t>Сколько минут тратит сотрудник на инструкцию</a:t>
-                      </a:r>
-                    </a:p>
-                  </a:txBody>
-                  <a:tcPr marL="54864" marR="54864" anchor="ctr">
-                    <a:solidFill>
-                      <a:srgbClr val="FEFFFF"/>
-                    </a:solidFill>
-                  </a:tcPr>
-                </a:tc>
-              </a:tr>
-              <a:tr h="1257300">
-                <a:tc>
-                  <a:txBody>
-                    <a:bodyPr/>
-                    <a:lstStyle/>
-                    <a:p>
-                      <a:pPr algn="l"/>
-                      <a:r>
-                        <a:rPr sz="1320" b="0">
-                          <a:solidFill>
-                            <a:srgbClr val="111111"/>
-                          </a:solidFill>
-                          <a:latin typeface="Play"/>
-                        </a:rPr>
-                        <a:t>Доля закрытых обращений</a:t>
-                      </a:r>
-                    </a:p>
-                  </a:txBody>
-                  <a:tcPr marL="54864" marR="54864" anchor="ctr">
-                    <a:solidFill>
-                      <a:srgbClr val="FEFFFF"/>
-                    </a:solidFill>
-                  </a:tcPr>
-                </a:tc>
-                <a:tc>
-                  <a:txBody>
-                    <a:bodyPr/>
-                    <a:lstStyle/>
-                    <a:p>
-                      <a:pPr algn="l"/>
-                      <a:r>
-                        <a:rPr sz="1320" b="0">
-                          <a:solidFill>
-                            <a:srgbClr val="111111"/>
-                          </a:solidFill>
-                          <a:latin typeface="Play"/>
-                        </a:rPr>
-                        <a:t>Процент вопросов, решенных без специалиста</a:t>
-                      </a:r>
-                    </a:p>
-                  </a:txBody>
-                  <a:tcPr marL="54864" marR="54864" anchor="ctr">
-                    <a:solidFill>
-                      <a:srgbClr val="FEFFFF"/>
-                    </a:solidFill>
-                  </a:tcPr>
-                </a:tc>
-              </a:tr>
-            </a:tbl>
-          </a:graphicData>
-        </a:graphic>
-      </p:graphicFrame>
-    </p:spTree>
-  </p:cSld>
-  <p:clrMapOvr>
-    <a:masterClrMapping/>
-  </p:clrMapOvr>
-</p:sld>
-</file>
-
-<file path=ppt/slides/slide11.xml><?xml version="1.0" encoding="utf-8"?>
-<p:sld xmlns:a="http://schemas.openxmlformats.org/drawingml/2006/main" xmlns:p="http://schemas.openxmlformats.org/presentationml/2006/main" xmlns:r="http://schemas.openxmlformats.org/officeDocument/2006/relationships">
-  <p:cSld>
-    <p:spTree>
-      <p:nvGrpSpPr>
-        <p:cNvPr id="1" name=""/>
-        <p:cNvGrpSpPr/>
-        <p:nvPr/>
-      </p:nvGrpSpPr>
-      <p:grpSpPr/>
-      <p:sp>
-        <p:nvSpPr>
-          <p:cNvPr id="503" name="BrandDeck Text 503"/>
-          <p:cNvSpPr txBox="1"/>
-          <p:nvPr>
-            <p:ph type="title"/>
-          </p:nvPr>
-        </p:nvSpPr>
-        <p:spPr>
-          <a:xfrm>
-            <a:off x="430360" y="338829"/>
-            <a:ext cx="3945697" cy="753371"/>
-          </a:xfrm>
-          <a:prstGeom prst="rect">
-            <a:avLst/>
-          </a:prstGeom>
-          <a:noFill/>
-          <a:ln>
-            <a:noFill/>
-          </a:ln>
-        </p:spPr>
-        <p:txBody>
-          <a:bodyPr anchorCtr="0" anchor="t" bIns="45700" lIns="91425" spcFirstLastPara="1" rIns="91425" wrap="square" tIns="45700">
-            <a:normAutofit/>
-          </a:bodyPr>
-          <a:lstStyle/>
-          <a:p>
-            <a:pPr indent="0" marL="0" rtl="0" algn="l">
-              <a:lnSpc>
-                <a:spcPct val="115000"/>
-              </a:lnSpc>
-              <a:spcBef>
-                <a:spcPts val="0"/>
-              </a:spcBef>
-              <a:spcAft>
-                <a:spcPts val="270"/>
-              </a:spcAft>
-              <a:buClr>
-                <a:schemeClr val="dk1"/>
-              </a:buClr>
-              <a:buSzPts val="2400"/>
-              <a:buFont typeface="Play"/>
-              <a:buNone/>
-            </a:pPr>
-            <a:r>
-              <a:rPr sz="1800"/>
-              <a:t>Требуется команда из 3 человек для реализации</a:t>
-            </a:r>
-            <a:endParaRPr/>
-          </a:p>
-        </p:txBody>
-      </p:sp>
-      <p:grpSp>
-        <p:nvGrpSpPr>
-          <p:cNvPr id="2" name="BrandDeck Diagram hierarchy" descr="hierarchy: Команда 3 специалиста для реализации пилота; Задача Выделение ресурсов для запуска проекта"/>
-          <p:cNvGrpSpPr/>
-          <p:nvPr/>
-        </p:nvGrpSpPr>
-        <p:grpSpPr>
-          <a:xfrm>
-            <a:off x="4637088" y="955527"/>
-            <a:ext cx="3862386" cy="3002234"/>
-            <a:chOff x="4637088" y="955527"/>
-            <a:chExt cx="3862386" cy="3002234"/>
-          </a:xfrm>
-        </p:grpSpPr>
-        <p:sp>
-          <p:nvSpPr>
-            <p:cNvPr id="508" name="BrandDeck Diagram Root"/>
-            <p:cNvSpPr/>
-            <p:nvPr/>
-          </p:nvSpPr>
-          <p:spPr>
-            <a:xfrm>
-              <a:off x="5757180" y="955527"/>
-              <a:ext cx="1622202" cy="731520"/>
-            </a:xfrm>
-            <a:prstGeom prst="roundRect">
-              <a:avLst>
-                <a:gd name="adj" fmla="val 18000"/>
-              </a:avLst>
-            </a:prstGeom>
-            <a:solidFill>
-              <a:srgbClr val="006DEB"/>
-            </a:solidFill>
-            <a:ln>
-              <a:noFill/>
-            </a:ln>
-          </p:spPr>
-          <p:txBody>
-            <a:bodyPr rtlCol="0" anchor="ctr" wrap="square" lIns="109728" tIns="36576" rIns="109728" bIns="36576">
-              <a:noAutofit/>
-            </a:bodyPr>
-            <a:lstStyle/>
-            <a:p>
-              <a:pPr algn="ctr">
-                <a:lnSpc>
-                  <a:spcPct val="110000"/>
-                </a:lnSpc>
-              </a:pPr>
-              <a:r>
-                <a:rPr sz="1600" b="1">
-                  <a:solidFill>
-                    <a:srgbClr val="FFFFFF"/>
-                  </a:solidFill>
-                  <a:latin typeface="Play"/>
-                </a:rPr>
-                <a:t>Команда из 3 человек</a:t>
-              </a:r>
-            </a:p>
-          </p:txBody>
-        </p:sp>
-        <p:cxnSp>
-          <p:nvCxnSpPr>
-            <p:cNvPr id="509" name="BrandDeck Diagram Link Root"/>
-            <p:cNvCxnSpPr/>
-            <p:nvPr/>
-          </p:nvCxnSpPr>
-          <p:spPr>
-            <a:xfrm>
-              <a:off x="6568281" y="1687047"/>
-              <a:ext cx="0" cy="261597"/>
-            </a:xfrm>
-            <a:prstGeom prst="line">
-              <a:avLst/>
-            </a:prstGeom>
-            <a:ln w="19050">
-              <a:solidFill>
-                <a:srgbClr val="58A6FF"/>
-              </a:solidFill>
-            </a:ln>
-          </p:spPr>
-          <p:style>
-            <a:lnRef idx="2">
-              <a:schemeClr val="accent1"/>
-            </a:lnRef>
-            <a:fillRef idx="0">
-              <a:schemeClr val="accent1"/>
-            </a:fillRef>
-            <a:effectRef idx="1">
-              <a:schemeClr val="accent1"/>
-            </a:effectRef>
-            <a:fontRef idx="minor">
-              <a:schemeClr val="tx1"/>
-            </a:fontRef>
-          </p:style>
-        </p:cxnSp>
-        <p:cxnSp>
-          <p:nvCxnSpPr>
-            <p:cNvPr id="510" name="BrandDeck Diagram Link Bus"/>
-            <p:cNvCxnSpPr/>
-            <p:nvPr/>
-          </p:nvCxnSpPr>
-          <p:spPr>
-            <a:xfrm>
-              <a:off x="5575252" y="1948644"/>
-              <a:ext cx="1986058" cy="0"/>
-            </a:xfrm>
-            <a:prstGeom prst="line">
-              <a:avLst/>
-            </a:prstGeom>
-            <a:ln w="19050">
-              <a:solidFill>
-                <a:srgbClr val="58A6FF"/>
-              </a:solidFill>
-            </a:ln>
-          </p:spPr>
-          <p:style>
-            <a:lnRef idx="2">
-              <a:schemeClr val="accent1"/>
-            </a:lnRef>
-            <a:fillRef idx="0">
-              <a:schemeClr val="accent1"/>
-            </a:fillRef>
-            <a:effectRef idx="1">
-              <a:schemeClr val="accent1"/>
-            </a:effectRef>
-            <a:fontRef idx="minor">
-              <a:schemeClr val="tx1"/>
-            </a:fontRef>
-          </p:style>
-        </p:cxnSp>
-        <p:cxnSp>
-          <p:nvCxnSpPr>
-            <p:cNvPr id="511" name="BrandDeck Diagram Link 1"/>
-            <p:cNvCxnSpPr/>
-            <p:nvPr/>
-          </p:nvCxnSpPr>
-          <p:spPr>
-            <a:xfrm>
-              <a:off x="5575252" y="1948644"/>
-              <a:ext cx="0" cy="261598"/>
-            </a:xfrm>
-            <a:prstGeom prst="line">
-              <a:avLst/>
-            </a:prstGeom>
-            <a:ln w="19050">
-              <a:solidFill>
-                <a:srgbClr val="58A6FF"/>
-              </a:solidFill>
-            </a:ln>
-          </p:spPr>
-          <p:style>
-            <a:lnRef idx="2">
-              <a:schemeClr val="accent1"/>
-            </a:lnRef>
-            <a:fillRef idx="0">
-              <a:schemeClr val="accent1"/>
-            </a:fillRef>
-            <a:effectRef idx="1">
-              <a:schemeClr val="accent1"/>
-            </a:effectRef>
-            <a:fontRef idx="minor">
-              <a:schemeClr val="tx1"/>
-            </a:fontRef>
-          </p:style>
-        </p:cxnSp>
-        <p:sp>
-          <p:nvSpPr>
-            <p:cNvPr id="512" name="BrandDeck Diagram Card 1"/>
-            <p:cNvSpPr/>
-            <p:nvPr/>
-          </p:nvSpPr>
-          <p:spPr>
-            <a:xfrm>
-              <a:off x="4637088" y="2210242"/>
-              <a:ext cx="1876329" cy="1747519"/>
-            </a:xfrm>
-            <a:prstGeom prst="roundRect">
-              <a:avLst>
-                <a:gd name="adj" fmla="val 6000"/>
-              </a:avLst>
-            </a:prstGeom>
-            <a:solidFill>
-              <a:srgbClr val="E8F3FF"/>
-            </a:solidFill>
-            <a:ln>
-              <a:noFill/>
-            </a:ln>
-          </p:spPr>
-          <p:txBody>
-            <a:bodyPr rtlCol="0" anchor="ctr"/>
-            <a:lstStyle/>
-            <a:p>
-              <a:pPr algn="ctr"/>
-            </a:p>
-          </p:txBody>
-        </p:sp>
-        <p:sp>
-          <p:nvSpPr>
-            <p:cNvPr id="513" name="BrandDeck Diagram Marker 1"/>
-            <p:cNvSpPr/>
-            <p:nvPr/>
-          </p:nvSpPr>
-          <p:spPr>
-            <a:xfrm>
-              <a:off x="4765104" y="2319970"/>
-              <a:ext cx="548640" cy="45720"/>
-            </a:xfrm>
-            <a:prstGeom prst="rect">
-              <a:avLst/>
-            </a:prstGeom>
-            <a:solidFill>
-              <a:srgbClr val="0077FF"/>
-            </a:solidFill>
-            <a:ln>
-              <a:noFill/>
-            </a:ln>
-          </p:spPr>
-          <p:txBody>
-            <a:bodyPr rtlCol="0" anchor="ctr"/>
-            <a:lstStyle/>
-            <a:p>
-              <a:pPr algn="ctr"/>
-            </a:p>
-          </p:txBody>
-        </p:sp>
-        <p:sp>
-          <p:nvSpPr>
-            <p:cNvPr id="514" name="BrandDeck Diagram Text 1"/>
-            <p:cNvSpPr txBox="1"/>
-            <p:nvPr/>
-          </p:nvSpPr>
-          <p:spPr>
-            <a:xfrm>
-              <a:off x="4728528" y="2447986"/>
-              <a:ext cx="1693449" cy="1418336"/>
-            </a:xfrm>
-            <a:prstGeom prst="rect">
-              <a:avLst/>
-            </a:prstGeom>
-            <a:noFill/>
-          </p:spPr>
-          <p:txBody>
-            <a:bodyPr wrap="square" anchor="t" lIns="36576" tIns="18288" rIns="36576" bIns="18288">
-              <a:noAutofit/>
-            </a:bodyPr>
-            <a:lstStyle/>
-            <a:p>
-              <a:pPr algn="l">
-                <a:lnSpc>
-                  <a:spcPct val="110000"/>
-                </a:lnSpc>
-              </a:pPr>
-              <a:r>
-                <a:rPr sz="1600" b="1">
-                  <a:solidFill>
-                    <a:srgbClr val="000000"/>
-                  </a:solidFill>
-                  <a:latin typeface="Play"/>
-                </a:rPr>
-                <a:t>Команда</a:t>
-              </a:r>
-            </a:p>
-            <a:p>
-              <a:pPr algn="l">
-                <a:lnSpc>
-                  <a:spcPct val="110000"/>
-                </a:lnSpc>
-                <a:spcBef>
-                  <a:spcPts val="400"/>
-                </a:spcBef>
-              </a:pPr>
-              <a:r>
-                <a:rPr sz="1600" b="0">
-                  <a:solidFill>
-                    <a:srgbClr val="000000"/>
-                  </a:solidFill>
-                  <a:latin typeface="Play"/>
-                </a:rPr>
-                <a:t>3 специалиста для реализации пилота</a:t>
-              </a:r>
-            </a:p>
-          </p:txBody>
-        </p:sp>
-        <p:cxnSp>
-          <p:nvCxnSpPr>
-            <p:cNvPr id="515" name="BrandDeck Diagram Link 2"/>
-            <p:cNvCxnSpPr/>
-            <p:nvPr/>
-          </p:nvCxnSpPr>
-          <p:spPr>
-            <a:xfrm>
-              <a:off x="7561310" y="1948644"/>
-              <a:ext cx="0" cy="261598"/>
-            </a:xfrm>
-            <a:prstGeom prst="line">
-              <a:avLst/>
-            </a:prstGeom>
-            <a:ln w="19050">
-              <a:solidFill>
-                <a:srgbClr val="58A6FF"/>
-              </a:solidFill>
-            </a:ln>
-          </p:spPr>
-          <p:style>
-            <a:lnRef idx="2">
-              <a:schemeClr val="accent1"/>
-            </a:lnRef>
-            <a:fillRef idx="0">
-              <a:schemeClr val="accent1"/>
-            </a:fillRef>
-            <a:effectRef idx="1">
-              <a:schemeClr val="accent1"/>
-            </a:effectRef>
-            <a:fontRef idx="minor">
-              <a:schemeClr val="tx1"/>
-            </a:fontRef>
-          </p:style>
-        </p:cxnSp>
-        <p:sp>
-          <p:nvSpPr>
-            <p:cNvPr id="516" name="BrandDeck Diagram Card 2"/>
-            <p:cNvSpPr/>
-            <p:nvPr/>
-          </p:nvSpPr>
-          <p:spPr>
-            <a:xfrm>
-              <a:off x="6623145" y="2210242"/>
-              <a:ext cx="1876329" cy="1747519"/>
-            </a:xfrm>
-            <a:prstGeom prst="roundRect">
-              <a:avLst>
-                <a:gd name="adj" fmla="val 6000"/>
-              </a:avLst>
-            </a:prstGeom>
-            <a:solidFill>
-              <a:srgbClr val="E8F3FF"/>
-            </a:solidFill>
-            <a:ln>
-              <a:noFill/>
-            </a:ln>
-          </p:spPr>
-          <p:txBody>
-            <a:bodyPr rtlCol="0" anchor="ctr"/>
-            <a:lstStyle/>
-            <a:p>
-              <a:pPr algn="ctr"/>
-            </a:p>
-          </p:txBody>
-        </p:sp>
-        <p:sp>
-          <p:nvSpPr>
-            <p:cNvPr id="517" name="BrandDeck Diagram Marker 2"/>
-            <p:cNvSpPr/>
-            <p:nvPr/>
-          </p:nvSpPr>
-          <p:spPr>
-            <a:xfrm>
-              <a:off x="6751161" y="2319970"/>
-              <a:ext cx="548640" cy="45720"/>
-            </a:xfrm>
-            <a:prstGeom prst="rect">
-              <a:avLst/>
-            </a:prstGeom>
-            <a:solidFill>
-              <a:srgbClr val="0077FF"/>
-            </a:solidFill>
-            <a:ln>
-              <a:noFill/>
-            </a:ln>
-          </p:spPr>
-          <p:txBody>
-            <a:bodyPr rtlCol="0" anchor="ctr"/>
-            <a:lstStyle/>
-            <a:p>
-              <a:pPr algn="ctr"/>
-            </a:p>
-          </p:txBody>
-        </p:sp>
-        <p:sp>
-          <p:nvSpPr>
-            <p:cNvPr id="518" name="BrandDeck Diagram Text 2"/>
-            <p:cNvSpPr txBox="1"/>
-            <p:nvPr/>
-          </p:nvSpPr>
-          <p:spPr>
-            <a:xfrm>
-              <a:off x="6714585" y="2447986"/>
-              <a:ext cx="1693449" cy="1418336"/>
-            </a:xfrm>
-            <a:prstGeom prst="rect">
-              <a:avLst/>
-            </a:prstGeom>
-            <a:noFill/>
-          </p:spPr>
-          <p:txBody>
-            <a:bodyPr wrap="square" anchor="t" lIns="36576" tIns="18288" rIns="36576" bIns="18288">
-              <a:noAutofit/>
-            </a:bodyPr>
-            <a:lstStyle/>
-            <a:p>
-              <a:pPr algn="l">
-                <a:lnSpc>
-                  <a:spcPct val="110000"/>
-                </a:lnSpc>
-              </a:pPr>
-              <a:r>
-                <a:rPr sz="1600" b="1">
-                  <a:solidFill>
-                    <a:srgbClr val="000000"/>
-                  </a:solidFill>
-                  <a:latin typeface="Play"/>
-                </a:rPr>
-                <a:t>Задача</a:t>
-              </a:r>
-            </a:p>
-            <a:p>
-              <a:pPr algn="l">
-                <a:lnSpc>
-                  <a:spcPct val="110000"/>
-                </a:lnSpc>
-                <a:spcBef>
-                  <a:spcPts val="400"/>
-                </a:spcBef>
-              </a:pPr>
-              <a:r>
-                <a:rPr sz="1600" b="0">
-                  <a:solidFill>
-                    <a:srgbClr val="000000"/>
-                  </a:solidFill>
-                  <a:latin typeface="Play"/>
-                </a:rPr>
-                <a:t>Выделение ресурсов для запуска проекта</a:t>
-              </a:r>
-            </a:p>
-          </p:txBody>
-        </p:sp>
-      </p:grpSp>
-    </p:spTree>
-  </p:cSld>
-  <p:clrMapOvr>
-    <a:masterClrMapping/>
-  </p:clrMapOvr>
-</p:sld>
-</file>
-
-<file path=ppt/slides/slide12.xml><?xml version="1.0" encoding="utf-8"?>
 <p:sld xmlns:a="http://schemas.openxmlformats.org/drawingml/2006/main" xmlns:p="http://schemas.openxmlformats.org/presentationml/2006/main" xmlns:r="http://schemas.openxmlformats.org/officeDocument/2006/relationships">
   <p:cSld>
     <p:spTree>
@@ -8621,7 +6585,7 @@
           </a:xfrm>
         </p:spPr>
         <p:txBody>
-          <a:bodyPr wrap="square" anchor="t">
+          <a:bodyPr vert="horz" wrap="square" anchor="t">
             <a:normAutofit/>
           </a:bodyPr>
           <a:lstStyle/>
@@ -8634,12 +6598,12 @@
                 <a:spcPts val="0"/>
               </a:spcBef>
               <a:spcAft>
-                <a:spcPts val="270"/>
+                <a:spcPts val="253"/>
               </a:spcAft>
             </a:pPr>
             <a:r>
-              <a:rPr sz="1800"/>
-              <a:t>Одобрить пилот и выделить команду из 3 человек</a:t>
+              <a:rPr sz="1689"/>
+              <a:t>Просим одобрить пилот и выделить команду из 3 человек</a:t>
             </a:r>
           </a:p>
         </p:txBody>
@@ -8677,7 +6641,7 @@
         </p:nvSpPr>
         <p:spPr/>
         <p:txBody>
-          <a:bodyPr wrap="square" anchor="t">
+          <a:bodyPr vert="horz" wrap="square" anchor="t">
             <a:normAutofit/>
           </a:bodyPr>
           <a:lstStyle/>
@@ -8695,7 +6659,7 @@
             </a:pPr>
             <a:r>
               <a:rPr sz="1600"/>
-              <a:t>Запустить пилот в двух подразделениях.</a:t>
+              <a:t>Одобрить запуск пилота с 2 подразделениями и 150 сотрудниками.</a:t>
             </a:r>
           </a:p>
           <a:p>
@@ -8712,7 +6676,7 @@
             </a:pPr>
             <a:r>
               <a:rPr sz="1600"/>
-              <a:t>Назначить команду из трех человек.</a:t>
+              <a:t>Выделить команду из 3 человек для работы в течение 6 недель.</a:t>
             </a:r>
           </a:p>
           <a:p>
@@ -8729,7 +6693,7 @@
             </a:pPr>
             <a:r>
               <a:rPr sz="1600"/>
-              <a:t>Измерить время поиска и долю закрытых обращений.</a:t>
+              <a:t>Зафиксировать метрики успеха: время поиска и долю закрытых обращений.</a:t>
             </a:r>
           </a:p>
         </p:txBody>
@@ -8751,7 +6715,7 @@
           <a:noFill/>
         </p:spPr>
         <p:txBody>
-          <a:bodyPr wrap="square" anchor="t" lIns="36576" rIns="36576" tIns="18288" bIns="18288">
+          <a:bodyPr wrap="square" vert="horz" anchor="t" lIns="36576" rIns="36576" tIns="18288" bIns="18288">
             <a:normAutofit/>
           </a:bodyPr>
           <a:lstStyle/>
@@ -8764,17 +6728,17 @@
                 <a:spcPts val="0"/>
               </a:spcBef>
               <a:spcAft>
-                <a:spcPts val="211"/>
+                <a:spcPts val="165"/>
               </a:spcAft>
             </a:pPr>
             <a:r>
-              <a:rPr sz="1410">
+              <a:rPr sz="1100">
                 <a:solidFill>
                   <a:srgbClr val="FAFCFF"/>
                 </a:solidFill>
                 <a:latin typeface="Play"/>
               </a:rPr>
-              <a:t>Следующие шаги после утверждения</a:t>
+              <a:t>Решение о старте пилота и выделении команды</a:t>
             </a:r>
           </a:p>
         </p:txBody>
@@ -8788,6 +6752,332 @@
 </file>
 
 <file path=ppt/slides/slide2.xml><?xml version="1.0" encoding="utf-8"?>
+<p:sld xmlns:a="http://schemas.openxmlformats.org/drawingml/2006/main" xmlns:p="http://schemas.openxmlformats.org/presentationml/2006/main" xmlns:r="http://schemas.openxmlformats.org/officeDocument/2006/relationships">
+  <p:cSld>
+    <p:spTree>
+      <p:nvGrpSpPr>
+        <p:cNvPr id="1" name=""/>
+        <p:cNvGrpSpPr/>
+        <p:nvPr/>
+      </p:nvGrpSpPr>
+      <p:grpSpPr/>
+      <p:sp>
+        <p:nvSpPr>
+          <p:cNvPr id="987" name="Google Shape;987;p64"/>
+          <p:cNvSpPr/>
+          <p:nvPr/>
+        </p:nvSpPr>
+        <p:spPr>
+          <a:xfrm>
+            <a:off x="285748" y="286048"/>
+            <a:ext cx="8572456" cy="4152359"/>
+          </a:xfrm>
+          <a:prstGeom prst="rect">
+            <a:avLst/>
+          </a:prstGeom>
+          <a:noFill/>
+          <a:ln>
+            <a:noFill/>
+          </a:ln>
+        </p:spPr>
+        <p:txBody>
+          <a:bodyPr anchorCtr="0" anchor="ctr" bIns="91425" lIns="91425" spcFirstLastPara="1" rIns="91425" wrap="square" tIns="91425">
+            <a:noAutofit/>
+          </a:bodyPr>
+          <a:lstStyle/>
+          <a:p>
+            <a:pPr indent="0" lvl="0" marL="0" rtl="0" algn="l">
+              <a:spcBef>
+                <a:spcPts val="0"/>
+              </a:spcBef>
+              <a:spcAft>
+                <a:spcPts val="0"/>
+              </a:spcAft>
+              <a:buNone/>
+            </a:pPr>
+            <a:r>
+              <a:t/>
+            </a:r>
+            <a:endParaRPr/>
+          </a:p>
+        </p:txBody>
+      </p:sp>
+      <p:sp>
+        <p:nvSpPr>
+          <p:cNvPr id="988" name="Google Shape;988;p64"/>
+          <p:cNvSpPr/>
+          <p:nvPr/>
+        </p:nvSpPr>
+        <p:spPr>
+          <a:xfrm>
+            <a:off x="285748" y="1209852"/>
+            <a:ext cx="8572456" cy="3228555"/>
+          </a:xfrm>
+          <a:prstGeom prst="rect">
+            <a:avLst/>
+          </a:prstGeom>
+          <a:noFill/>
+          <a:ln>
+            <a:noFill/>
+          </a:ln>
+        </p:spPr>
+        <p:txBody>
+          <a:bodyPr anchorCtr="0" anchor="ctr" bIns="91425" lIns="91425" spcFirstLastPara="1" rIns="91425" wrap="square" tIns="91425">
+            <a:noAutofit/>
+          </a:bodyPr>
+          <a:lstStyle/>
+          <a:p>
+            <a:pPr indent="0" lvl="0" marL="0" rtl="0" algn="l">
+              <a:spcBef>
+                <a:spcPts val="0"/>
+              </a:spcBef>
+              <a:spcAft>
+                <a:spcPts val="0"/>
+              </a:spcAft>
+              <a:buNone/>
+            </a:pPr>
+            <a:r>
+              <a:t/>
+            </a:r>
+            <a:endParaRPr/>
+          </a:p>
+        </p:txBody>
+      </p:sp>
+      <p:sp>
+        <p:nvSpPr>
+          <p:cNvPr id="989" name="Google Shape;989;p64"/>
+          <p:cNvSpPr/>
+          <p:nvPr/>
+        </p:nvSpPr>
+        <p:spPr>
+          <a:xfrm>
+            <a:off x="285748" y="1209852"/>
+            <a:ext cx="8572456" cy="1795229"/>
+          </a:xfrm>
+          <a:prstGeom prst="rect">
+            <a:avLst/>
+          </a:prstGeom>
+          <a:noFill/>
+          <a:ln>
+            <a:noFill/>
+          </a:ln>
+        </p:spPr>
+        <p:txBody>
+          <a:bodyPr anchorCtr="0" anchor="ctr" bIns="91425" lIns="91425" spcFirstLastPara="1" rIns="91425" wrap="square" tIns="91425">
+            <a:noAutofit/>
+          </a:bodyPr>
+          <a:lstStyle/>
+          <a:p>
+            <a:pPr indent="0" lvl="0" marL="0" rtl="0" algn="l">
+              <a:spcBef>
+                <a:spcPts val="0"/>
+              </a:spcBef>
+              <a:spcAft>
+                <a:spcPts val="0"/>
+              </a:spcAft>
+              <a:buNone/>
+            </a:pPr>
+            <a:r>
+              <a:t/>
+            </a:r>
+            <a:endParaRPr/>
+          </a:p>
+        </p:txBody>
+      </p:sp>
+      <p:sp>
+        <p:nvSpPr>
+          <p:cNvPr id="1012" name="Google Shape;1012;p64"/>
+          <p:cNvSpPr/>
+          <p:nvPr/>
+        </p:nvSpPr>
+        <p:spPr>
+          <a:xfrm>
+            <a:off x="285748" y="3176509"/>
+            <a:ext cx="8572456" cy="1261898"/>
+          </a:xfrm>
+          <a:prstGeom prst="rect">
+            <a:avLst/>
+          </a:prstGeom>
+          <a:noFill/>
+          <a:ln>
+            <a:noFill/>
+          </a:ln>
+        </p:spPr>
+        <p:txBody>
+          <a:bodyPr anchorCtr="0" anchor="ctr" bIns="91425" lIns="91425" spcFirstLastPara="1" rIns="91425" wrap="square" tIns="91425">
+            <a:noAutofit/>
+          </a:bodyPr>
+          <a:lstStyle/>
+          <a:p>
+            <a:pPr indent="0" lvl="0" marL="0" rtl="0" algn="l">
+              <a:spcBef>
+                <a:spcPts val="0"/>
+              </a:spcBef>
+              <a:spcAft>
+                <a:spcPts val="0"/>
+              </a:spcAft>
+              <a:buNone/>
+            </a:pPr>
+            <a:r>
+              <a:t/>
+            </a:r>
+            <a:endParaRPr/>
+          </a:p>
+        </p:txBody>
+      </p:sp>
+      <p:sp>
+        <p:nvSpPr>
+          <p:cNvPr id="1017" name="BrandDeck Text 1017"/>
+          <p:cNvSpPr txBox="1"/>
+          <p:nvPr>
+            <p:ph type="title"/>
+          </p:nvPr>
+        </p:nvSpPr>
+        <p:spPr>
+          <a:xfrm>
+            <a:off x="177970" y="282949"/>
+            <a:ext cx="6792985" cy="724203"/>
+          </a:xfrm>
+          <a:prstGeom prst="rect">
+            <a:avLst/>
+          </a:prstGeom>
+          <a:noFill/>
+          <a:ln>
+            <a:noFill/>
+          </a:ln>
+        </p:spPr>
+        <p:txBody>
+          <a:bodyPr anchorCtr="0" anchor="t" bIns="45700" lIns="91425" spcFirstLastPara="1" rIns="91425" wrap="square" tIns="45700" vert="horz">
+            <a:normAutofit/>
+          </a:bodyPr>
+          <a:lstStyle/>
+          <a:p>
+            <a:pPr indent="0" marL="0" rtl="0" algn="l">
+              <a:lnSpc>
+                <a:spcPct val="115000"/>
+              </a:lnSpc>
+              <a:spcBef>
+                <a:spcPts val="0"/>
+              </a:spcBef>
+              <a:spcAft>
+                <a:spcPts val="270"/>
+              </a:spcAft>
+              <a:buClr>
+                <a:schemeClr val="dk1"/>
+              </a:buClr>
+              <a:buSzPts val="2400"/>
+              <a:buFont typeface="Play"/>
+              <a:buNone/>
+            </a:pPr>
+            <a:r>
+              <a:rPr sz="1800"/>
+              <a:t>Треть обращений в поддержку — повторяющиеся вопросы</a:t>
+            </a:r>
+            <a:endParaRPr/>
+          </a:p>
+        </p:txBody>
+      </p:sp>
+      <p:sp>
+        <p:nvSpPr>
+          <p:cNvPr id="1022" name="BrandDeck Body"/>
+          <p:cNvSpPr txBox="1"/>
+          <p:nvPr/>
+        </p:nvSpPr>
+        <p:spPr>
+          <a:xfrm>
+            <a:off x="585216" y="1144312"/>
+            <a:ext cx="2129088" cy="3583136"/>
+          </a:xfrm>
+          <a:prstGeom prst="rect">
+            <a:avLst/>
+          </a:prstGeom>
+          <a:noFill/>
+        </p:spPr>
+        <p:txBody>
+          <a:bodyPr wrap="square" vert="horz" anchor="t" lIns="36576" rIns="36576" tIns="18288" bIns="18288">
+            <a:normAutofit/>
+          </a:bodyPr>
+          <a:lstStyle/>
+          <a:p>
+            <a:pPr algn="l">
+              <a:lnSpc>
+                <a:spcPct val="115000"/>
+              </a:lnSpc>
+              <a:spcBef>
+                <a:spcPts val="0"/>
+              </a:spcBef>
+              <a:spcAft>
+                <a:spcPts val="179"/>
+              </a:spcAft>
+            </a:pPr>
+            <a:r>
+              <a:rPr sz="1200">
+                <a:solidFill>
+                  <a:srgbClr val="001515"/>
+                </a:solidFill>
+                <a:latin typeface="Play"/>
+              </a:rPr>
+              <a:t>• Треть обращений в поддержку — повторяющиеся вопросы.</a:t>
+            </a:r>
+          </a:p>
+          <a:p>
+            <a:pPr algn="l">
+              <a:lnSpc>
+                <a:spcPct val="115000"/>
+              </a:lnSpc>
+              <a:spcBef>
+                <a:spcPts val="0"/>
+              </a:spcBef>
+              <a:spcAft>
+                <a:spcPts val="179"/>
+              </a:spcAft>
+            </a:pPr>
+            <a:r>
+              <a:rPr sz="1200">
+                <a:solidFill>
+                  <a:srgbClr val="001515"/>
+                </a:solidFill>
+                <a:latin typeface="Play"/>
+              </a:rPr>
+              <a:t>• Это создает лишнюю нагрузку на службу поддержки.</a:t>
+            </a:r>
+          </a:p>
+        </p:txBody>
+      </p:sp>
+      <p:pic>
+        <p:nvPicPr>
+          <p:cNvPr id="1023" name="BrandDeck Image" descr="сотрудник специалист поддержки"/>
+          <p:cNvPicPr>
+            <a:picLocks noChangeAspect="1"/>
+          </p:cNvPicPr>
+          <p:nvPr/>
+        </p:nvPicPr>
+        <p:blipFill>
+          <a:blip r:embed="rId9"/>
+          <a:srcRect l="39445" r="17445"/>
+          <a:stretch>
+            <a:fillRect/>
+          </a:stretch>
+        </p:blipFill>
+        <p:spPr>
+          <a:xfrm>
+            <a:off x="2970336" y="1144312"/>
+            <a:ext cx="2744663" cy="3583136"/>
+          </a:xfrm>
+          <a:prstGeom prst="rect">
+            <a:avLst/>
+          </a:prstGeom>
+        </p:spPr>
+      </p:pic>
+    </p:spTree>
+  </p:cSld>
+  <p:clrMapOvr>
+    <a:masterClrMapping/>
+  </p:clrMapOvr>
+</p:sld>
+</file>
+
+<file path=ppt/slides/slide3.xml><?xml version="1.0" encoding="utf-8"?>
 <p:sld xmlns:a="http://schemas.openxmlformats.org/drawingml/2006/main" xmlns:p="http://schemas.openxmlformats.org/presentationml/2006/main" xmlns:r="http://schemas.openxmlformats.org/officeDocument/2006/relationships">
   <p:cSld>
     <p:spTree>
@@ -8814,7 +7104,7 @@
           </a:xfrm>
         </p:spPr>
         <p:txBody>
-          <a:bodyPr wrap="square" anchor="t">
+          <a:bodyPr vert="horz" wrap="square" anchor="t">
             <a:normAutofit/>
           </a:bodyPr>
           <a:lstStyle/>
@@ -8827,28 +7117,28 @@
                 <a:spcPts val="0"/>
               </a:spcBef>
               <a:spcAft>
-                <a:spcPts val="270"/>
+                <a:spcPts val="253"/>
               </a:spcAft>
             </a:pPr>
             <a:r>
-              <a:rPr sz="1800"/>
-              <a:t>Поиск инструкции занимает до 30 минут</a:t>
+              <a:rPr sz="1689"/>
+              <a:t>Сотрудники тратят до 30 минут на поиск нужной инструкции</a:t>
             </a:r>
           </a:p>
         </p:txBody>
       </p:sp>
       <p:grpSp>
         <p:nvGrpSpPr>
-          <p:cNvPr id="3" name="BrandDeck Diagram icon_grid" descr="icon_grid: Сотрудники тратят до 30 минут на поиск нужной инструкции.; Время поиска напрямую влияет на общую эффективность отдела."/>
+          <p:cNvPr id="3" name="BrandDeck Diagram icon_grid" descr="icon_grid: Сотрудник тратит до 30 минут на поиск нужной инструкции.; Долгий поиск снижает продуктивность при работе с регламентами.; Текущее время поиска является базой для оценки эффекта пилота."/>
           <p:cNvGrpSpPr/>
           <p:nvPr/>
         </p:nvGrpSpPr>
         <p:grpSpPr>
           <a:xfrm>
             <a:off x="4637088" y="676278"/>
-            <a:ext cx="3862387" cy="3737102"/>
+            <a:ext cx="3862387" cy="3737101"/>
             <a:chOff x="4637088" y="676278"/>
-            <a:chExt cx="3862387" cy="3737102"/>
+            <a:chExt cx="3862387" cy="3737101"/>
           </a:xfrm>
         </p:grpSpPr>
         <p:sp>
@@ -8860,7 +7150,7 @@
           <p:spPr>
             <a:xfrm>
               <a:off x="4637088" y="676278"/>
-              <a:ext cx="3862387" cy="1813687"/>
+              <a:ext cx="3862387" cy="1172548"/>
             </a:xfrm>
             <a:prstGeom prst="roundRect">
               <a:avLst>
@@ -8890,8 +7180,8 @@
           </p:nvSpPr>
           <p:spPr>
             <a:xfrm>
-              <a:off x="4856544" y="1329205"/>
-              <a:ext cx="507832" cy="507832"/>
+              <a:off x="4856544" y="1079672"/>
+              <a:ext cx="365760" cy="365760"/>
             </a:xfrm>
             <a:prstGeom prst="ellipse">
               <a:avLst/>
@@ -8919,8 +7209,8 @@
           </p:nvSpPr>
           <p:spPr>
             <a:xfrm>
-              <a:off x="4968267" y="1440928"/>
-              <a:ext cx="284386" cy="284386"/>
+              <a:off x="4937011" y="1160139"/>
+              <a:ext cx="204825" cy="204825"/>
             </a:xfrm>
             <a:custGeom>
               <a:avLst/>
@@ -9010,7 +7300,7 @@
               </a:pathLst>
             </a:custGeom>
             <a:noFill/>
-            <a:ln w="23698" cap="rnd">
+            <a:ln w="17068" cap="rnd">
               <a:solidFill>
                 <a:srgbClr val="FFFFFF"/>
               </a:solidFill>
@@ -9033,8 +7323,8 @@
           </p:nvSpPr>
           <p:spPr>
             <a:xfrm>
-              <a:off x="5496049" y="807951"/>
-              <a:ext cx="2783969" cy="1550339"/>
+              <a:off x="5353977" y="807951"/>
+              <a:ext cx="2926041" cy="909201"/>
             </a:xfrm>
             <a:prstGeom prst="rect">
               <a:avLst/>
@@ -9053,13 +7343,13 @@
                 </a:lnSpc>
               </a:pPr>
               <a:r>
-                <a:rPr sz="1800" b="0">
+                <a:rPr sz="1689" b="0">
                   <a:solidFill>
                     <a:srgbClr val="FFFFFF"/>
                   </a:solidFill>
                   <a:latin typeface="Play"/>
                 </a:rPr>
-                <a:t>Сотрудники тратят до 30 минут на поиск нужной инструкции.</a:t>
+                <a:t>Сотрудник тратит до 30 минут на поиск нужной инструкции.</a:t>
               </a:r>
             </a:p>
           </p:txBody>
@@ -9072,8 +7362,8 @@
           </p:nvSpPr>
           <p:spPr>
             <a:xfrm>
-              <a:off x="4637088" y="2599693"/>
-              <a:ext cx="3862387" cy="1813687"/>
+              <a:off x="4637088" y="1958554"/>
+              <a:ext cx="3862387" cy="1172548"/>
             </a:xfrm>
             <a:prstGeom prst="roundRect">
               <a:avLst>
@@ -9103,8 +7393,8 @@
           </p:nvSpPr>
           <p:spPr>
             <a:xfrm>
-              <a:off x="4856544" y="3252620"/>
-              <a:ext cx="507832" cy="507832"/>
+              <a:off x="4856544" y="2361949"/>
+              <a:ext cx="365760" cy="365760"/>
             </a:xfrm>
             <a:prstGeom prst="ellipse">
               <a:avLst/>
@@ -9126,14 +7416,183 @@
         </p:sp>
         <p:sp>
           <p:nvSpPr>
-            <p:cNvPr id="10" name="BrandDeck Icon clock"/>
+            <p:cNvPr id="10" name="BrandDeck Icon search"/>
             <p:cNvSpPr/>
             <p:nvPr/>
           </p:nvSpPr>
           <p:spPr>
             <a:xfrm>
-              <a:off x="4968267" y="3364343"/>
-              <a:ext cx="284386" cy="284386"/>
+              <a:off x="4937011" y="2442416"/>
+              <a:ext cx="204825" cy="204825"/>
+            </a:xfrm>
+            <a:custGeom>
+              <a:avLst/>
+              <a:gdLst/>
+              <a:ahLst/>
+              <a:cxnLst/>
+              <a:rect l="l" t="t" r="r" b="b"/>
+              <a:pathLst>
+                <a:path w="24000" h="24000" fill="none">
+                  <a:moveTo>
+                    <a:pt x="19000" y="11000"/>
+                  </a:moveTo>
+                  <a:cubicBezTo>
+                    <a:pt x="19000" y="15418"/>
+                    <a:pt x="15418" y="19000"/>
+                    <a:pt x="11000" y="19000"/>
+                  </a:cubicBezTo>
+                  <a:cubicBezTo>
+                    <a:pt x="6582" y="19000"/>
+                    <a:pt x="3000" y="15418"/>
+                    <a:pt x="3000" y="11000"/>
+                  </a:cubicBezTo>
+                  <a:cubicBezTo>
+                    <a:pt x="3000" y="6582"/>
+                    <a:pt x="6582" y="3000"/>
+                    <a:pt x="11000" y="3000"/>
+                  </a:cubicBezTo>
+                  <a:cubicBezTo>
+                    <a:pt x="15418" y="3000"/>
+                    <a:pt x="19000" y="6582"/>
+                    <a:pt x="19000" y="11000"/>
+                  </a:cubicBezTo>
+                  <a:close/>
+                </a:path>
+                <a:path w="24000" h="24000" fill="none">
+                  <a:moveTo>
+                    <a:pt x="21000" y="21000"/>
+                  </a:moveTo>
+                  <a:lnTo>
+                    <a:pt x="16700" y="16700"/>
+                  </a:lnTo>
+                </a:path>
+              </a:pathLst>
+            </a:custGeom>
+            <a:noFill/>
+            <a:ln w="17068" cap="rnd">
+              <a:solidFill>
+                <a:srgbClr val="FFFFFF"/>
+              </a:solidFill>
+              <a:round/>
+            </a:ln>
+          </p:spPr>
+          <p:txBody>
+            <a:bodyPr rtlCol="0" anchor="ctr"/>
+            <a:lstStyle/>
+            <a:p>
+              <a:pPr algn="ctr"/>
+            </a:p>
+          </p:txBody>
+        </p:sp>
+        <p:sp>
+          <p:nvSpPr>
+            <p:cNvPr id="11" name="BrandDeck Diagram Text 2"/>
+            <p:cNvSpPr txBox="1"/>
+            <p:nvPr/>
+          </p:nvSpPr>
+          <p:spPr>
+            <a:xfrm>
+              <a:off x="5353977" y="2090228"/>
+              <a:ext cx="2926041" cy="909201"/>
+            </a:xfrm>
+            <a:prstGeom prst="rect">
+              <a:avLst/>
+            </a:prstGeom>
+            <a:noFill/>
+          </p:spPr>
+          <p:txBody>
+            <a:bodyPr wrap="square" anchor="ctr" lIns="36576" tIns="18288" rIns="36576" bIns="18288">
+              <a:noAutofit/>
+            </a:bodyPr>
+            <a:lstStyle/>
+            <a:p>
+              <a:pPr algn="l">
+                <a:lnSpc>
+                  <a:spcPct val="110000"/>
+                </a:lnSpc>
+              </a:pPr>
+              <a:r>
+                <a:rPr sz="1689" b="0">
+                  <a:solidFill>
+                    <a:srgbClr val="FFFFFF"/>
+                  </a:solidFill>
+                  <a:latin typeface="Play"/>
+                </a:rPr>
+                <a:t>Долгий поиск снижает продуктивность при работе с регламентами.</a:t>
+              </a:r>
+            </a:p>
+          </p:txBody>
+        </p:sp>
+        <p:sp>
+          <p:nvSpPr>
+            <p:cNvPr id="12" name="BrandDeck Diagram Card 3"/>
+            <p:cNvSpPr/>
+            <p:nvPr/>
+          </p:nvSpPr>
+          <p:spPr>
+            <a:xfrm>
+              <a:off x="4637088" y="3240831"/>
+              <a:ext cx="3862387" cy="1172548"/>
+            </a:xfrm>
+            <a:prstGeom prst="roundRect">
+              <a:avLst>
+                <a:gd name="adj" fmla="val 8000"/>
+              </a:avLst>
+            </a:prstGeom>
+            <a:solidFill>
+              <a:srgbClr val="1A1A1A"/>
+            </a:solidFill>
+            <a:ln>
+              <a:noFill/>
+            </a:ln>
+          </p:spPr>
+          <p:txBody>
+            <a:bodyPr rtlCol="0" anchor="ctr"/>
+            <a:lstStyle/>
+            <a:p>
+              <a:pPr algn="ctr"/>
+            </a:p>
+          </p:txBody>
+        </p:sp>
+        <p:sp>
+          <p:nvSpPr>
+            <p:cNvPr id="13" name="BrandDeck Diagram Icon 3 Badge"/>
+            <p:cNvSpPr/>
+            <p:nvPr/>
+          </p:nvSpPr>
+          <p:spPr>
+            <a:xfrm>
+              <a:off x="4856544" y="3644225"/>
+              <a:ext cx="365760" cy="365760"/>
+            </a:xfrm>
+            <a:prstGeom prst="ellipse">
+              <a:avLst/>
+            </a:prstGeom>
+            <a:solidFill>
+              <a:srgbClr val="006DEB"/>
+            </a:solidFill>
+            <a:ln>
+              <a:noFill/>
+            </a:ln>
+          </p:spPr>
+          <p:txBody>
+            <a:bodyPr rtlCol="0" anchor="ctr"/>
+            <a:lstStyle/>
+            <a:p>
+              <a:pPr algn="ctr"/>
+            </a:p>
+          </p:txBody>
+        </p:sp>
+        <p:sp>
+          <p:nvSpPr>
+            <p:cNvPr id="14" name="BrandDeck Icon clock"/>
+            <p:cNvSpPr/>
+            <p:nvPr/>
+          </p:nvSpPr>
+          <p:spPr>
+            <a:xfrm>
+              <a:off x="4937011" y="3724692"/>
+              <a:ext cx="204825" cy="204825"/>
             </a:xfrm>
             <a:custGeom>
               <a:avLst/>
@@ -9182,7 +7641,7 @@
               </a:pathLst>
             </a:custGeom>
             <a:noFill/>
-            <a:ln w="23698" cap="rnd">
+            <a:ln w="17068" cap="rnd">
               <a:solidFill>
                 <a:srgbClr val="FFFFFF"/>
               </a:solidFill>
@@ -9199,14 +7658,14 @@
         </p:sp>
         <p:sp>
           <p:nvSpPr>
-            <p:cNvPr id="11" name="BrandDeck Diagram Text 2"/>
+            <p:cNvPr id="15" name="BrandDeck Diagram Text 3"/>
             <p:cNvSpPr txBox="1"/>
             <p:nvPr/>
           </p:nvSpPr>
           <p:spPr>
             <a:xfrm>
-              <a:off x="5496049" y="2731366"/>
-              <a:ext cx="2783969" cy="1550339"/>
+              <a:off x="5353977" y="3372504"/>
+              <a:ext cx="2926041" cy="909201"/>
             </a:xfrm>
             <a:prstGeom prst="rect">
               <a:avLst/>
@@ -9225,13 +7684,13 @@
                 </a:lnSpc>
               </a:pPr>
               <a:r>
-                <a:rPr sz="1800" b="0">
+                <a:rPr sz="1689" b="0">
                   <a:solidFill>
                     <a:srgbClr val="FFFFFF"/>
                   </a:solidFill>
                   <a:latin typeface="Play"/>
                 </a:rPr>
-                <a:t>Время поиска напрямую влияет на общую эффективность отдела.</a:t>
+                <a:t>Текущее время поиска является базой для оценки эффекта пилота.</a:t>
               </a:r>
             </a:p>
           </p:txBody>
@@ -9245,7 +7704,7 @@
 </p:sld>
 </file>
 
-<file path=ppt/slides/slide3.xml><?xml version="1.0" encoding="utf-8"?>
+<file path=ppt/slides/slide4.xml><?xml version="1.0" encoding="utf-8"?>
 <p:sld xmlns:a="http://schemas.openxmlformats.org/drawingml/2006/main" xmlns:p="http://schemas.openxmlformats.org/presentationml/2006/main" xmlns:r="http://schemas.openxmlformats.org/officeDocument/2006/relationships">
   <p:cSld>
     <p:spTree>
@@ -9272,7 +7731,7 @@
           </a:xfrm>
         </p:spPr>
         <p:txBody>
-          <a:bodyPr wrap="square" anchor="t">
+          <a:bodyPr vert="horz" wrap="square" anchor="t">
             <a:normAutofit/>
           </a:bodyPr>
           <a:lstStyle/>
@@ -9285,28 +7744,28 @@
                 <a:spcPts val="0"/>
               </a:spcBef>
               <a:spcAft>
-                <a:spcPts val="270"/>
+                <a:spcPts val="182"/>
               </a:spcAft>
             </a:pPr>
             <a:r>
-              <a:rPr sz="1800"/>
-              <a:t>Треть обращений — повторяющиеся вопросы</a:t>
+              <a:rPr sz="1220"/>
+              <a:t>ИИ-помощник отвечает на вопросы по регламентам и дает ссылку на документ</a:t>
             </a:r>
           </a:p>
         </p:txBody>
       </p:sp>
       <p:grpSp>
         <p:nvGrpSpPr>
-          <p:cNvPr id="3" name="BrandDeck Diagram icon_grid" descr="icon_grid: Треть всех обращений в поддержку — повторяющиеся вопросы.; Эти запросы требуют времени на поиск инструкций.; Рутинные вопросы отвлекают специалистов от сложных задач."/>
+          <p:cNvPr id="3" name="BrandDeck Diagram icon_grid" descr="icon_grid: ИИ-помощник отвечает на вопросы по регламентам и инструкциям.; Система автоматически дает ссылку на документ-источник.; Ответ формируется на основе внутренних правил компании."/>
           <p:cNvGrpSpPr/>
           <p:nvPr/>
         </p:nvGrpSpPr>
         <p:grpSpPr>
           <a:xfrm>
             <a:off x="4637088" y="676278"/>
-            <a:ext cx="3862386" cy="3737102"/>
+            <a:ext cx="3862387" cy="3737101"/>
             <a:chOff x="4637088" y="676278"/>
-            <a:chExt cx="3862386" cy="3737102"/>
+            <a:chExt cx="3862387" cy="3737101"/>
           </a:xfrm>
         </p:grpSpPr>
         <p:sp>
@@ -9318,7 +7777,7 @@
           <p:spPr>
             <a:xfrm>
               <a:off x="4637088" y="676278"/>
-              <a:ext cx="1876329" cy="1813687"/>
+              <a:ext cx="3862387" cy="1172548"/>
             </a:xfrm>
             <a:prstGeom prst="roundRect">
               <a:avLst>
@@ -9348,1076 +7807,8 @@
           </p:nvSpPr>
           <p:spPr>
             <a:xfrm>
-              <a:off x="4768431" y="807621"/>
-              <a:ext cx="507832" cy="507832"/>
-            </a:xfrm>
-            <a:prstGeom prst="ellipse">
-              <a:avLst/>
-            </a:prstGeom>
-            <a:solidFill>
-              <a:srgbClr val="006DEB"/>
-            </a:solidFill>
-            <a:ln>
-              <a:noFill/>
-            </a:ln>
-          </p:spPr>
-          <p:txBody>
-            <a:bodyPr rtlCol="0" anchor="ctr"/>
-            <a:lstStyle/>
-            <a:p>
-              <a:pPr algn="ctr"/>
-            </a:p>
-          </p:txBody>
-        </p:sp>
-        <p:sp>
-          <p:nvSpPr>
-            <p:cNvPr id="6" name="BrandDeck Icon headset"/>
-            <p:cNvSpPr/>
-            <p:nvPr/>
-          </p:nvSpPr>
-          <p:spPr>
-            <a:xfrm>
-              <a:off x="4880154" y="919344"/>
-              <a:ext cx="284386" cy="284386"/>
-            </a:xfrm>
-            <a:custGeom>
-              <a:avLst/>
-              <a:gdLst/>
-              <a:ahLst/>
-              <a:cxnLst/>
-              <a:rect l="l" t="t" r="r" b="b"/>
-              <a:pathLst>
-                <a:path w="24000" h="24000" fill="none">
-                  <a:moveTo>
-                    <a:pt x="3000" y="11000"/>
-                  </a:moveTo>
-                  <a:lnTo>
-                    <a:pt x="6000" y="11000"/>
-                  </a:lnTo>
-                  <a:cubicBezTo>
-                    <a:pt x="7105" y="11000"/>
-                    <a:pt x="8000" y="11895"/>
-                    <a:pt x="8000" y="13000"/>
-                  </a:cubicBezTo>
-                  <a:lnTo>
-                    <a:pt x="8000" y="16000"/>
-                  </a:lnTo>
-                  <a:cubicBezTo>
-                    <a:pt x="8000" y="17105"/>
-                    <a:pt x="7105" y="18000"/>
-                    <a:pt x="6000" y="18000"/>
-                  </a:cubicBezTo>
-                  <a:lnTo>
-                    <a:pt x="5000" y="18000"/>
-                  </a:lnTo>
-                  <a:cubicBezTo>
-                    <a:pt x="3895" y="18000"/>
-                    <a:pt x="3000" y="17105"/>
-                    <a:pt x="3000" y="16000"/>
-                  </a:cubicBezTo>
-                  <a:lnTo>
-                    <a:pt x="3000" y="11000"/>
-                  </a:lnTo>
-                  <a:close/>
-                  <a:moveTo>
-                    <a:pt x="3000" y="11000"/>
-                  </a:moveTo>
-                  <a:cubicBezTo>
-                    <a:pt x="3000" y="6029"/>
-                    <a:pt x="7029" y="2000"/>
-                    <a:pt x="12000" y="2000"/>
-                  </a:cubicBezTo>
-                  <a:cubicBezTo>
-                    <a:pt x="16971" y="2000"/>
-                    <a:pt x="21000" y="6029"/>
-                    <a:pt x="21000" y="11000"/>
-                  </a:cubicBezTo>
-                  <a:moveTo>
-                    <a:pt x="21000" y="11000"/>
-                  </a:moveTo>
-                  <a:lnTo>
-                    <a:pt x="21000" y="16000"/>
-                  </a:lnTo>
-                  <a:cubicBezTo>
-                    <a:pt x="21000" y="17105"/>
-                    <a:pt x="20105" y="18000"/>
-                    <a:pt x="19000" y="18000"/>
-                  </a:cubicBezTo>
-                  <a:lnTo>
-                    <a:pt x="18000" y="18000"/>
-                  </a:lnTo>
-                  <a:cubicBezTo>
-                    <a:pt x="16895" y="18000"/>
-                    <a:pt x="16000" y="17105"/>
-                    <a:pt x="16000" y="16000"/>
-                  </a:cubicBezTo>
-                  <a:lnTo>
-                    <a:pt x="16000" y="13000"/>
-                  </a:lnTo>
-                  <a:cubicBezTo>
-                    <a:pt x="16000" y="11895"/>
-                    <a:pt x="16895" y="11000"/>
-                    <a:pt x="18000" y="11000"/>
-                  </a:cubicBezTo>
-                  <a:lnTo>
-                    <a:pt x="21000" y="11000"/>
-                  </a:lnTo>
-                  <a:close/>
-                </a:path>
-                <a:path w="24000" h="24000" fill="none">
-                  <a:moveTo>
-                    <a:pt x="21000" y="16000"/>
-                  </a:moveTo>
-                  <a:lnTo>
-                    <a:pt x="21000" y="18000"/>
-                  </a:lnTo>
-                  <a:cubicBezTo>
-                    <a:pt x="21000" y="20209"/>
-                    <a:pt x="19209" y="22000"/>
-                    <a:pt x="17000" y="22000"/>
-                  </a:cubicBezTo>
-                  <a:lnTo>
-                    <a:pt x="12000" y="22000"/>
-                  </a:lnTo>
-                </a:path>
-              </a:pathLst>
-            </a:custGeom>
-            <a:noFill/>
-            <a:ln w="23698" cap="rnd">
-              <a:solidFill>
-                <a:srgbClr val="FFFFFF"/>
-              </a:solidFill>
-              <a:round/>
-            </a:ln>
-          </p:spPr>
-          <p:txBody>
-            <a:bodyPr rtlCol="0" anchor="ctr"/>
-            <a:lstStyle/>
-            <a:p>
-              <a:pPr algn="ctr"/>
-            </a:p>
-          </p:txBody>
-        </p:sp>
-        <p:sp>
-          <p:nvSpPr>
-            <p:cNvPr id="7" name="BrandDeck Diagram Text 1"/>
-            <p:cNvSpPr txBox="1"/>
-            <p:nvPr/>
-          </p:nvSpPr>
-          <p:spPr>
-            <a:xfrm>
-              <a:off x="4729028" y="1407393"/>
-              <a:ext cx="1692449" cy="1016899"/>
-            </a:xfrm>
-            <a:prstGeom prst="rect">
-              <a:avLst/>
-            </a:prstGeom>
-            <a:noFill/>
-          </p:spPr>
-          <p:txBody>
-            <a:bodyPr wrap="square" anchor="t" lIns="36576" tIns="18288" rIns="36576" bIns="18288">
-              <a:noAutofit/>
-            </a:bodyPr>
-            <a:lstStyle/>
-            <a:p>
-              <a:pPr algn="l">
-                <a:lnSpc>
-                  <a:spcPct val="110000"/>
-                </a:lnSpc>
-              </a:pPr>
-              <a:r>
-                <a:rPr sz="1170" b="1">
-                  <a:solidFill>
-                    <a:srgbClr val="FFFFFF"/>
-                  </a:solidFill>
-                  <a:latin typeface="Play"/>
-                </a:rPr>
-                <a:t>Треть всех обращений в поддержку —</a:t>
-              </a:r>
-              <a:r>
-                <a:rPr sz="1170" b="0">
-                  <a:solidFill>
-                    <a:srgbClr val="FFFFFF"/>
-                  </a:solidFill>
-                  <a:latin typeface="Play"/>
-                </a:rPr>
-                <a:t> повторяющиеся вопросы.</a:t>
-              </a:r>
-            </a:p>
-          </p:txBody>
-        </p:sp>
-        <p:sp>
-          <p:nvSpPr>
-            <p:cNvPr id="8" name="BrandDeck Diagram Card 2"/>
-            <p:cNvSpPr/>
-            <p:nvPr/>
-          </p:nvSpPr>
-          <p:spPr>
-            <a:xfrm>
-              <a:off x="6623145" y="676278"/>
-              <a:ext cx="1876329" cy="1813687"/>
-            </a:xfrm>
-            <a:prstGeom prst="roundRect">
-              <a:avLst>
-                <a:gd name="adj" fmla="val 8000"/>
-              </a:avLst>
-            </a:prstGeom>
-            <a:solidFill>
-              <a:srgbClr val="1A1A1A"/>
-            </a:solidFill>
-            <a:ln>
-              <a:noFill/>
-            </a:ln>
-          </p:spPr>
-          <p:txBody>
-            <a:bodyPr rtlCol="0" anchor="ctr"/>
-            <a:lstStyle/>
-            <a:p>
-              <a:pPr algn="ctr"/>
-            </a:p>
-          </p:txBody>
-        </p:sp>
-        <p:sp>
-          <p:nvSpPr>
-            <p:cNvPr id="9" name="BrandDeck Diagram Icon 2 Badge"/>
-            <p:cNvSpPr/>
-            <p:nvPr/>
-          </p:nvSpPr>
-          <p:spPr>
-            <a:xfrm>
-              <a:off x="6754488" y="807621"/>
-              <a:ext cx="507832" cy="507832"/>
-            </a:xfrm>
-            <a:prstGeom prst="ellipse">
-              <a:avLst/>
-            </a:prstGeom>
-            <a:solidFill>
-              <a:srgbClr val="006DEB"/>
-            </a:solidFill>
-            <a:ln>
-              <a:noFill/>
-            </a:ln>
-          </p:spPr>
-          <p:txBody>
-            <a:bodyPr rtlCol="0" anchor="ctr"/>
-            <a:lstStyle/>
-            <a:p>
-              <a:pPr algn="ctr"/>
-            </a:p>
-          </p:txBody>
-        </p:sp>
-        <p:sp>
-          <p:nvSpPr>
-            <p:cNvPr id="10" name="BrandDeck Icon clock"/>
-            <p:cNvSpPr/>
-            <p:nvPr/>
-          </p:nvSpPr>
-          <p:spPr>
-            <a:xfrm>
-              <a:off x="6866211" y="919344"/>
-              <a:ext cx="284386" cy="284386"/>
-            </a:xfrm>
-            <a:custGeom>
-              <a:avLst/>
-              <a:gdLst/>
-              <a:ahLst/>
-              <a:cxnLst/>
-              <a:rect l="l" t="t" r="r" b="b"/>
-              <a:pathLst>
-                <a:path w="24000" h="24000" fill="none">
-                  <a:moveTo>
-                    <a:pt x="22000" y="12000"/>
-                  </a:moveTo>
-                  <a:cubicBezTo>
-                    <a:pt x="22000" y="17523"/>
-                    <a:pt x="17523" y="22000"/>
-                    <a:pt x="12000" y="22000"/>
-                  </a:cubicBezTo>
-                  <a:cubicBezTo>
-                    <a:pt x="6477" y="22000"/>
-                    <a:pt x="2000" y="17523"/>
-                    <a:pt x="2000" y="12000"/>
-                  </a:cubicBezTo>
-                  <a:cubicBezTo>
-                    <a:pt x="2000" y="6477"/>
-                    <a:pt x="6477" y="2000"/>
-                    <a:pt x="12000" y="2000"/>
-                  </a:cubicBezTo>
-                  <a:cubicBezTo>
-                    <a:pt x="17523" y="2000"/>
-                    <a:pt x="22000" y="6477"/>
-                    <a:pt x="22000" y="12000"/>
-                  </a:cubicBezTo>
-                  <a:close/>
-                </a:path>
-                <a:path w="24000" h="24000" fill="none">
-                  <a:moveTo>
-                    <a:pt x="12000" y="6000"/>
-                  </a:moveTo>
-                  <a:lnTo>
-                    <a:pt x="12000" y="12000"/>
-                  </a:lnTo>
-                  <a:lnTo>
-                    <a:pt x="16000" y="14000"/>
-                  </a:lnTo>
-                </a:path>
-              </a:pathLst>
-            </a:custGeom>
-            <a:noFill/>
-            <a:ln w="23698" cap="rnd">
-              <a:solidFill>
-                <a:srgbClr val="FFFFFF"/>
-              </a:solidFill>
-              <a:round/>
-            </a:ln>
-          </p:spPr>
-          <p:txBody>
-            <a:bodyPr rtlCol="0" anchor="ctr"/>
-            <a:lstStyle/>
-            <a:p>
-              <a:pPr algn="ctr"/>
-            </a:p>
-          </p:txBody>
-        </p:sp>
-        <p:sp>
-          <p:nvSpPr>
-            <p:cNvPr id="11" name="BrandDeck Diagram Text 2"/>
-            <p:cNvSpPr txBox="1"/>
-            <p:nvPr/>
-          </p:nvSpPr>
-          <p:spPr>
-            <a:xfrm>
-              <a:off x="6715085" y="1407393"/>
-              <a:ext cx="1692449" cy="1016899"/>
-            </a:xfrm>
-            <a:prstGeom prst="rect">
-              <a:avLst/>
-            </a:prstGeom>
-            <a:noFill/>
-          </p:spPr>
-          <p:txBody>
-            <a:bodyPr wrap="square" anchor="t" lIns="36576" tIns="18288" rIns="36576" bIns="18288">
-              <a:noAutofit/>
-            </a:bodyPr>
-            <a:lstStyle/>
-            <a:p>
-              <a:pPr algn="l">
-                <a:lnSpc>
-                  <a:spcPct val="110000"/>
-                </a:lnSpc>
-              </a:pPr>
-              <a:r>
-                <a:rPr sz="1170" b="0">
-                  <a:solidFill>
-                    <a:srgbClr val="FFFFFF"/>
-                  </a:solidFill>
-                  <a:latin typeface="Play"/>
-                </a:rPr>
-                <a:t>Эти запросы требуют времени на поиск инструкций.</a:t>
-              </a:r>
-            </a:p>
-          </p:txBody>
-        </p:sp>
-        <p:sp>
-          <p:nvSpPr>
-            <p:cNvPr id="12" name="BrandDeck Diagram Card 3"/>
-            <p:cNvSpPr/>
-            <p:nvPr/>
-          </p:nvSpPr>
-          <p:spPr>
-            <a:xfrm>
-              <a:off x="4637088" y="2599693"/>
-              <a:ext cx="1876329" cy="1813687"/>
-            </a:xfrm>
-            <a:prstGeom prst="roundRect">
-              <a:avLst>
-                <a:gd name="adj" fmla="val 8000"/>
-              </a:avLst>
-            </a:prstGeom>
-            <a:solidFill>
-              <a:srgbClr val="1A1A1A"/>
-            </a:solidFill>
-            <a:ln>
-              <a:noFill/>
-            </a:ln>
-          </p:spPr>
-          <p:txBody>
-            <a:bodyPr rtlCol="0" anchor="ctr"/>
-            <a:lstStyle/>
-            <a:p>
-              <a:pPr algn="ctr"/>
-            </a:p>
-          </p:txBody>
-        </p:sp>
-        <p:sp>
-          <p:nvSpPr>
-            <p:cNvPr id="13" name="BrandDeck Diagram Icon 3 Badge"/>
-            <p:cNvSpPr/>
-            <p:nvPr/>
-          </p:nvSpPr>
-          <p:spPr>
-            <a:xfrm>
-              <a:off x="4768431" y="2731036"/>
-              <a:ext cx="507832" cy="507832"/>
-            </a:xfrm>
-            <a:prstGeom prst="ellipse">
-              <a:avLst/>
-            </a:prstGeom>
-            <a:solidFill>
-              <a:srgbClr val="006DEB"/>
-            </a:solidFill>
-            <a:ln>
-              <a:noFill/>
-            </a:ln>
-          </p:spPr>
-          <p:txBody>
-            <a:bodyPr rtlCol="0" anchor="ctr"/>
-            <a:lstStyle/>
-            <a:p>
-              <a:pPr algn="ctr"/>
-            </a:p>
-          </p:txBody>
-        </p:sp>
-        <p:sp>
-          <p:nvSpPr>
-            <p:cNvPr id="14" name="BrandDeck Icon circle-help"/>
-            <p:cNvSpPr/>
-            <p:nvPr/>
-          </p:nvSpPr>
-          <p:spPr>
-            <a:xfrm>
-              <a:off x="4880154" y="2842759"/>
-              <a:ext cx="284386" cy="284386"/>
-            </a:xfrm>
-            <a:custGeom>
-              <a:avLst/>
-              <a:gdLst/>
-              <a:ahLst/>
-              <a:cxnLst/>
-              <a:rect l="l" t="t" r="r" b="b"/>
-              <a:pathLst>
-                <a:path w="24000" h="24000" fill="none">
-                  <a:moveTo>
-                    <a:pt x="22000" y="12000"/>
-                  </a:moveTo>
-                  <a:cubicBezTo>
-                    <a:pt x="22000" y="17523"/>
-                    <a:pt x="17523" y="22000"/>
-                    <a:pt x="12000" y="22000"/>
-                  </a:cubicBezTo>
-                  <a:cubicBezTo>
-                    <a:pt x="6477" y="22000"/>
-                    <a:pt x="2000" y="17523"/>
-                    <a:pt x="2000" y="12000"/>
-                  </a:cubicBezTo>
-                  <a:cubicBezTo>
-                    <a:pt x="2000" y="6477"/>
-                    <a:pt x="6477" y="2000"/>
-                    <a:pt x="12000" y="2000"/>
-                  </a:cubicBezTo>
-                  <a:cubicBezTo>
-                    <a:pt x="17523" y="2000"/>
-                    <a:pt x="22000" y="6477"/>
-                    <a:pt x="22000" y="12000"/>
-                  </a:cubicBezTo>
-                  <a:close/>
-                </a:path>
-                <a:path w="24000" h="24000" fill="none">
-                  <a:moveTo>
-                    <a:pt x="9090" y="9000"/>
-                  </a:moveTo>
-                  <a:cubicBezTo>
-                    <a:pt x="9575" y="7620"/>
-                    <a:pt x="10985" y="6791"/>
-                    <a:pt x="12427" y="7039"/>
-                  </a:cubicBezTo>
-                  <a:cubicBezTo>
-                    <a:pt x="13869" y="7286"/>
-                    <a:pt x="14922" y="8537"/>
-                    <a:pt x="14920" y="10000"/>
-                  </a:cubicBezTo>
-                  <a:cubicBezTo>
-                    <a:pt x="14920" y="12000"/>
-                    <a:pt x="11920" y="13000"/>
-                    <a:pt x="11920" y="13000"/>
-                  </a:cubicBezTo>
-                </a:path>
-                <a:path w="24000" h="24000" fill="none">
-                  <a:moveTo>
-                    <a:pt x="12000" y="17000"/>
-                  </a:moveTo>
-                  <a:lnTo>
-                    <a:pt x="12010" y="17000"/>
-                  </a:lnTo>
-                </a:path>
-              </a:pathLst>
-            </a:custGeom>
-            <a:noFill/>
-            <a:ln w="23698" cap="rnd">
-              <a:solidFill>
-                <a:srgbClr val="FFFFFF"/>
-              </a:solidFill>
-              <a:round/>
-            </a:ln>
-          </p:spPr>
-          <p:txBody>
-            <a:bodyPr rtlCol="0" anchor="ctr"/>
-            <a:lstStyle/>
-            <a:p>
-              <a:pPr algn="ctr"/>
-            </a:p>
-          </p:txBody>
-        </p:sp>
-        <p:sp>
-          <p:nvSpPr>
-            <p:cNvPr id="15" name="BrandDeck Diagram Text 3"/>
-            <p:cNvSpPr txBox="1"/>
-            <p:nvPr/>
-          </p:nvSpPr>
-          <p:spPr>
-            <a:xfrm>
-              <a:off x="4729028" y="3330808"/>
-              <a:ext cx="1692449" cy="1016899"/>
-            </a:xfrm>
-            <a:prstGeom prst="rect">
-              <a:avLst/>
-            </a:prstGeom>
-            <a:noFill/>
-          </p:spPr>
-          <p:txBody>
-            <a:bodyPr wrap="square" anchor="t" lIns="36576" tIns="18288" rIns="36576" bIns="18288">
-              <a:noAutofit/>
-            </a:bodyPr>
-            <a:lstStyle/>
-            <a:p>
-              <a:pPr algn="l">
-                <a:lnSpc>
-                  <a:spcPct val="110000"/>
-                </a:lnSpc>
-              </a:pPr>
-              <a:r>
-                <a:rPr sz="1170" b="0">
-                  <a:solidFill>
-                    <a:srgbClr val="FFFFFF"/>
-                  </a:solidFill>
-                  <a:latin typeface="Play"/>
-                </a:rPr>
-                <a:t>Рутинные вопросы отвлекают специалистов от сложных задач.</a:t>
-              </a:r>
-            </a:p>
-          </p:txBody>
-        </p:sp>
-      </p:grpSp>
-    </p:spTree>
-  </p:cSld>
-  <p:clrMapOvr>
-    <a:masterClrMapping/>
-  </p:clrMapOvr>
-</p:sld>
-</file>
-
-<file path=ppt/slides/slide4.xml><?xml version="1.0" encoding="utf-8"?>
-<p:sld xmlns:a="http://schemas.openxmlformats.org/drawingml/2006/main" xmlns:p="http://schemas.openxmlformats.org/presentationml/2006/main" xmlns:r="http://schemas.openxmlformats.org/officeDocument/2006/relationships">
-  <p:cSld>
-    <p:spTree>
-      <p:nvGrpSpPr>
-        <p:cNvPr id="1" name=""/>
-        <p:cNvGrpSpPr/>
-        <p:nvPr/>
-      </p:nvGrpSpPr>
-      <p:grpSpPr/>
-      <p:sp>
-        <p:nvSpPr>
-          <p:cNvPr id="1119" name="Google Shape;1119;p69"/>
-          <p:cNvSpPr/>
-          <p:nvPr/>
-        </p:nvSpPr>
-        <p:spPr>
-          <a:xfrm>
-            <a:off x="285748" y="286047"/>
-            <a:ext cx="8572456" cy="4176169"/>
-          </a:xfrm>
-          <a:prstGeom prst="rect">
-            <a:avLst/>
-          </a:prstGeom>
-          <a:noFill/>
-          <a:ln>
-            <a:noFill/>
-          </a:ln>
-        </p:spPr>
-        <p:txBody>
-          <a:bodyPr anchorCtr="0" anchor="ctr" bIns="91425" lIns="91425" spcFirstLastPara="1" rIns="91425" wrap="square" tIns="91425">
-            <a:noAutofit/>
-          </a:bodyPr>
-          <a:lstStyle/>
-          <a:p>
-            <a:pPr indent="0" lvl="0" marL="0" rtl="0" algn="l">
-              <a:spcBef>
-                <a:spcPts val="0"/>
-              </a:spcBef>
-              <a:spcAft>
-                <a:spcPts val="0"/>
-              </a:spcAft>
-              <a:buNone/>
-            </a:pPr>
-            <a:r>
-              <a:t/>
-            </a:r>
-            <a:endParaRPr/>
-          </a:p>
-        </p:txBody>
-      </p:sp>
-      <p:sp>
-        <p:nvSpPr>
-          <p:cNvPr id="1120" name="Google Shape;1120;p69"/>
-          <p:cNvSpPr/>
-          <p:nvPr/>
-        </p:nvSpPr>
-        <p:spPr>
-          <a:xfrm>
-            <a:off x="285748" y="1209852"/>
-            <a:ext cx="8572456" cy="3252364"/>
-          </a:xfrm>
-          <a:prstGeom prst="rect">
-            <a:avLst/>
-          </a:prstGeom>
-          <a:noFill/>
-          <a:ln>
-            <a:noFill/>
-          </a:ln>
-        </p:spPr>
-        <p:txBody>
-          <a:bodyPr anchorCtr="0" anchor="ctr" bIns="91425" lIns="91425" spcFirstLastPara="1" rIns="91425" wrap="square" tIns="91425">
-            <a:noAutofit/>
-          </a:bodyPr>
-          <a:lstStyle/>
-          <a:p>
-            <a:pPr indent="0" lvl="0" marL="0" rtl="0" algn="l">
-              <a:spcBef>
-                <a:spcPts val="0"/>
-              </a:spcBef>
-              <a:spcAft>
-                <a:spcPts val="0"/>
-              </a:spcAft>
-              <a:buNone/>
-            </a:pPr>
-            <a:r>
-              <a:t/>
-            </a:r>
-            <a:endParaRPr/>
-          </a:p>
-        </p:txBody>
-      </p:sp>
-      <p:sp>
-        <p:nvSpPr>
-          <p:cNvPr id="1121" name="Google Shape;1121;p69"/>
-          <p:cNvSpPr/>
-          <p:nvPr/>
-        </p:nvSpPr>
-        <p:spPr>
-          <a:xfrm>
-            <a:off x="285748" y="1209852"/>
-            <a:ext cx="8572456" cy="3252364"/>
-          </a:xfrm>
-          <a:prstGeom prst="rect">
-            <a:avLst/>
-          </a:prstGeom>
-          <a:noFill/>
-          <a:ln>
-            <a:noFill/>
-          </a:ln>
-        </p:spPr>
-        <p:txBody>
-          <a:bodyPr anchorCtr="0" anchor="ctr" bIns="91425" lIns="91425" spcFirstLastPara="1" rIns="91425" wrap="square" tIns="91425">
-            <a:noAutofit/>
-          </a:bodyPr>
-          <a:lstStyle/>
-          <a:p>
-            <a:pPr indent="0" lvl="0" marL="0" rtl="0" algn="l">
-              <a:spcBef>
-                <a:spcPts val="0"/>
-              </a:spcBef>
-              <a:spcAft>
-                <a:spcPts val="0"/>
-              </a:spcAft>
-              <a:buNone/>
-            </a:pPr>
-            <a:r>
-              <a:t/>
-            </a:r>
-            <a:endParaRPr/>
-          </a:p>
-        </p:txBody>
-      </p:sp>
-      <p:sp>
-        <p:nvSpPr>
-          <p:cNvPr id="1123" name="Google Shape;1123;p69"/>
-          <p:cNvSpPr/>
-          <p:nvPr/>
-        </p:nvSpPr>
-        <p:spPr>
-          <a:xfrm>
-            <a:off x="500061" y="1424137"/>
-            <a:ext cx="2919397" cy="2895223"/>
-          </a:xfrm>
-          <a:prstGeom prst="rect">
-            <a:avLst/>
-          </a:prstGeom>
-          <a:noFill/>
-          <a:ln>
-            <a:noFill/>
-          </a:ln>
-        </p:spPr>
-        <p:txBody>
-          <a:bodyPr anchorCtr="0" anchor="t" bIns="0" lIns="0" spcFirstLastPara="1" rIns="0" wrap="square" tIns="0">
-            <a:normAutofit/>
-          </a:bodyPr>
-          <a:lstStyle/>
-          <a:p>
-            <a:pPr indent="0" lvl="0" marL="0" marR="0" rtl="0" algn="l">
-              <a:lnSpc>
-                <a:spcPct val="139988"/>
-              </a:lnSpc>
-              <a:spcBef>
-                <a:spcPts val="0"/>
-              </a:spcBef>
-              <a:spcAft>
-                <a:spcPts val="0"/>
-              </a:spcAft>
-              <a:buNone/>
-            </a:pPr>
-            <a:endParaRPr b="0" i="0" sz="1688" u="none" cap="none" strike="noStrike">
-              <a:solidFill>
-                <a:schemeClr val="dk1"/>
-              </a:solidFill>
-              <a:latin typeface="Calibri"/>
-              <a:ea typeface="Calibri"/>
-              <a:cs typeface="Calibri"/>
-              <a:sym typeface="Calibri"/>
-            </a:endParaRPr>
-          </a:p>
-        </p:txBody>
-      </p:sp>
-      <p:sp>
-        <p:nvSpPr>
-          <p:cNvPr id="1124" name="Google Shape;1124;p69"/>
-          <p:cNvSpPr/>
-          <p:nvPr/>
-        </p:nvSpPr>
-        <p:spPr>
-          <a:xfrm>
-            <a:off x="3657581" y="1209852"/>
-            <a:ext cx="5200623" cy="3252364"/>
-          </a:xfrm>
-          <a:prstGeom prst="rect">
-            <a:avLst/>
-          </a:prstGeom>
-          <a:noFill/>
-          <a:ln>
-            <a:noFill/>
-          </a:ln>
-        </p:spPr>
-        <p:txBody>
-          <a:bodyPr anchorCtr="0" anchor="ctr" bIns="91425" lIns="91425" spcFirstLastPara="1" rIns="91425" wrap="square" tIns="91425">
-            <a:noAutofit/>
-          </a:bodyPr>
-          <a:lstStyle/>
-          <a:p>
-            <a:pPr indent="0" lvl="0" marL="0" rtl="0" algn="l">
-              <a:spcBef>
-                <a:spcPts val="0"/>
-              </a:spcBef>
-              <a:spcAft>
-                <a:spcPts val="0"/>
-              </a:spcAft>
-              <a:buNone/>
-            </a:pPr>
-            <a:r>
-              <a:t/>
-            </a:r>
-            <a:endParaRPr/>
-          </a:p>
-        </p:txBody>
-      </p:sp>
-      <p:sp>
-        <p:nvSpPr>
-          <p:cNvPr id="1132" name="BrandDeck Text 1132"/>
-          <p:cNvSpPr txBox="1"/>
-          <p:nvPr>
-            <p:ph type="title"/>
-          </p:nvPr>
-        </p:nvSpPr>
-        <p:spPr>
-          <a:xfrm>
-            <a:off x="177970" y="282949"/>
-            <a:ext cx="6792985" cy="724203"/>
-          </a:xfrm>
-          <a:prstGeom prst="rect">
-            <a:avLst/>
-          </a:prstGeom>
-          <a:noFill/>
-          <a:ln>
-            <a:noFill/>
-          </a:ln>
-        </p:spPr>
-        <p:txBody>
-          <a:bodyPr anchorCtr="0" anchor="t" bIns="45700" lIns="91425" spcFirstLastPara="1" rIns="91425" wrap="square" tIns="45700">
-            <a:normAutofit/>
-          </a:bodyPr>
-          <a:lstStyle/>
-          <a:p>
-            <a:pPr indent="0" marL="0" rtl="0" algn="l">
-              <a:lnSpc>
-                <a:spcPct val="115000"/>
-              </a:lnSpc>
-              <a:spcBef>
-                <a:spcPts val="0"/>
-              </a:spcBef>
-              <a:spcAft>
-                <a:spcPts val="270"/>
-              </a:spcAft>
-              <a:buClr>
-                <a:schemeClr val="dk1"/>
-              </a:buClr>
-              <a:buSzPts val="2400"/>
-              <a:buFont typeface="Play"/>
-              <a:buNone/>
-            </a:pPr>
-            <a:r>
-              <a:rPr sz="1800"/>
-              <a:t>Влияет на всех сотрудников и специалистов поддержки</a:t>
-            </a:r>
-            <a:endParaRPr/>
-          </a:p>
-        </p:txBody>
-      </p:sp>
-      <p:sp>
-        <p:nvSpPr>
-          <p:cNvPr id="1133" name="BrandDeck Body"/>
-          <p:cNvSpPr txBox="1"/>
-          <p:nvPr/>
-        </p:nvSpPr>
-        <p:spPr>
-          <a:xfrm>
-            <a:off x="500060" y="1424137"/>
-            <a:ext cx="2558400" cy="2895223"/>
-          </a:xfrm>
-          <a:prstGeom prst="rect">
-            <a:avLst/>
-          </a:prstGeom>
-          <a:noFill/>
-        </p:spPr>
-        <p:txBody>
-          <a:bodyPr wrap="square" anchor="t" lIns="36576" rIns="36576" tIns="18288" bIns="18288">
-            <a:normAutofit/>
-          </a:bodyPr>
-          <a:lstStyle/>
-          <a:p>
-            <a:pPr algn="l">
-              <a:lnSpc>
-                <a:spcPct val="115000"/>
-              </a:lnSpc>
-              <a:spcBef>
-                <a:spcPts val="0"/>
-              </a:spcBef>
-              <a:spcAft>
-                <a:spcPts val="253"/>
-              </a:spcAft>
-            </a:pPr>
-            <a:r>
-              <a:rPr sz="1689">
-                <a:solidFill>
-                  <a:srgbClr val="000000"/>
-                </a:solidFill>
-                <a:latin typeface="Play"/>
-              </a:rPr>
-              <a:t>• Сокращает время поиска инструкций для сотрудников.</a:t>
-            </a:r>
-          </a:p>
-          <a:p>
-            <a:pPr algn="l">
-              <a:lnSpc>
-                <a:spcPct val="115000"/>
-              </a:lnSpc>
-              <a:spcBef>
-                <a:spcPts val="0"/>
-              </a:spcBef>
-              <a:spcAft>
-                <a:spcPts val="253"/>
-              </a:spcAft>
-            </a:pPr>
-            <a:r>
-              <a:rPr sz="1689">
-                <a:solidFill>
-                  <a:srgbClr val="000000"/>
-                </a:solidFill>
-                <a:latin typeface="Play"/>
-              </a:rPr>
-              <a:t>• Снижает нагрузку на специалистов поддержки.</a:t>
-            </a:r>
-          </a:p>
-          <a:p>
-            <a:pPr algn="l">
-              <a:lnSpc>
-                <a:spcPct val="115000"/>
-              </a:lnSpc>
-              <a:spcBef>
-                <a:spcPts val="0"/>
-              </a:spcBef>
-              <a:spcAft>
-                <a:spcPts val="253"/>
-              </a:spcAft>
-            </a:pPr>
-            <a:r>
-              <a:rPr sz="1689">
-                <a:solidFill>
-                  <a:srgbClr val="000000"/>
-                </a:solidFill>
-                <a:latin typeface="Play"/>
-              </a:rPr>
-              <a:t>• Обеспечивает быстрый доступ к актуальным регламентам.</a:t>
-            </a:r>
-          </a:p>
-        </p:txBody>
-      </p:sp>
-      <p:pic>
-        <p:nvPicPr>
-          <p:cNvPr id="1134" name="BrandDeck Image" descr="сотрудник специалист поддержки"/>
-          <p:cNvPicPr>
-            <a:picLocks noChangeAspect="1"/>
-          </p:cNvPicPr>
-          <p:nvPr/>
-        </p:nvPicPr>
-        <p:blipFill>
-          <a:blip r:embed="rId7"/>
-          <a:srcRect l="18013" r="18013"/>
-          <a:stretch>
-            <a:fillRect/>
-          </a:stretch>
-        </p:blipFill>
-        <p:spPr>
-          <a:xfrm>
-            <a:off x="3314493" y="1424137"/>
-            <a:ext cx="3291060" cy="2895223"/>
-          </a:xfrm>
-          <a:prstGeom prst="rect">
-            <a:avLst/>
-          </a:prstGeom>
-        </p:spPr>
-      </p:pic>
-    </p:spTree>
-  </p:cSld>
-  <p:clrMapOvr>
-    <a:masterClrMapping/>
-  </p:clrMapOvr>
-</p:sld>
-</file>
-
-<file path=ppt/slides/slide5.xml><?xml version="1.0" encoding="utf-8"?>
-<p:sld xmlns:a="http://schemas.openxmlformats.org/drawingml/2006/main" xmlns:p="http://schemas.openxmlformats.org/presentationml/2006/main" xmlns:r="http://schemas.openxmlformats.org/officeDocument/2006/relationships">
-  <p:cSld>
-    <p:spTree>
-      <p:nvGrpSpPr>
-        <p:cNvPr id="1" name=""/>
-        <p:cNvGrpSpPr/>
-        <p:nvPr/>
-      </p:nvGrpSpPr>
-      <p:grpSpPr/>
-      <p:sp>
-        <p:nvSpPr>
-          <p:cNvPr id="2" name="BrandDeck Text 2"/>
-          <p:cNvSpPr>
-            <a:spLocks noGrp="1"/>
-          </p:cNvSpPr>
-          <p:nvPr>
-            <p:ph type="title"/>
-          </p:nvPr>
-        </p:nvSpPr>
-        <p:spPr>
-          <a:xfrm>
-            <a:off x="430360" y="338829"/>
-            <a:ext cx="3945697" cy="753371"/>
-          </a:xfrm>
-        </p:spPr>
-        <p:txBody>
-          <a:bodyPr wrap="square" anchor="t">
-            <a:normAutofit/>
-          </a:bodyPr>
-          <a:lstStyle/>
-          <a:p>
-            <a:pPr algn="l">
-              <a:lnSpc>
-                <a:spcPct val="115000"/>
-              </a:lnSpc>
-              <a:spcBef>
-                <a:spcPts val="0"/>
-              </a:spcBef>
-              <a:spcAft>
-                <a:spcPts val="270"/>
-              </a:spcAft>
-            </a:pPr>
-            <a:r>
-              <a:rPr sz="1800"/>
-              <a:t>ИИ отвечает на вопросы и дает ссылку на документ</a:t>
-            </a:r>
-          </a:p>
-        </p:txBody>
-      </p:sp>
-      <p:grpSp>
-        <p:nvGrpSpPr>
-          <p:cNvPr id="3" name="BrandDeck Diagram icon_grid" descr="icon_grid: ИИ отвечает на вопросы по регламентам и инструкциям.; Система автоматически добавляет ссылку на документ-источник.; Ответ формируется на основе внутренних знаний компании."/>
-          <p:cNvGrpSpPr/>
-          <p:nvPr/>
-        </p:nvGrpSpPr>
-        <p:grpSpPr>
-          <a:xfrm>
-            <a:off x="4637088" y="676278"/>
-            <a:ext cx="3862386" cy="3737102"/>
-            <a:chOff x="4637088" y="676278"/>
-            <a:chExt cx="3862386" cy="3737102"/>
-          </a:xfrm>
-        </p:grpSpPr>
-        <p:sp>
-          <p:nvSpPr>
-            <p:cNvPr id="4" name="BrandDeck Diagram Card 1"/>
-            <p:cNvSpPr/>
-            <p:nvPr/>
-          </p:nvSpPr>
-          <p:spPr>
-            <a:xfrm>
-              <a:off x="4637088" y="676278"/>
-              <a:ext cx="1876329" cy="1813687"/>
-            </a:xfrm>
-            <a:prstGeom prst="roundRect">
-              <a:avLst>
-                <a:gd name="adj" fmla="val 8000"/>
-              </a:avLst>
-            </a:prstGeom>
-            <a:solidFill>
-              <a:srgbClr val="1A1A1A"/>
-            </a:solidFill>
-            <a:ln>
-              <a:noFill/>
-            </a:ln>
-          </p:spPr>
-          <p:txBody>
-            <a:bodyPr rtlCol="0" anchor="ctr"/>
-            <a:lstStyle/>
-            <a:p>
-              <a:pPr algn="ctr"/>
-            </a:p>
-          </p:txBody>
-        </p:sp>
-        <p:sp>
-          <p:nvSpPr>
-            <p:cNvPr id="5" name="BrandDeck Diagram Icon 1 Badge"/>
-            <p:cNvSpPr/>
-            <p:nvPr/>
-          </p:nvSpPr>
-          <p:spPr>
-            <a:xfrm>
-              <a:off x="4768431" y="807621"/>
-              <a:ext cx="507832" cy="507832"/>
+              <a:off x="4856544" y="1079672"/>
+              <a:ext cx="365760" cy="365760"/>
             </a:xfrm>
             <a:prstGeom prst="ellipse">
               <a:avLst/>
@@ -10445,8 +7836,8 @@
           </p:nvSpPr>
           <p:spPr>
             <a:xfrm>
-              <a:off x="4880154" y="919344"/>
-              <a:ext cx="284386" cy="284386"/>
+              <a:off x="4937011" y="1160139"/>
+              <a:ext cx="204825" cy="204825"/>
             </a:xfrm>
             <a:custGeom>
               <a:avLst/>
@@ -10531,7 +7922,7 @@
               </a:pathLst>
             </a:custGeom>
             <a:noFill/>
-            <a:ln w="23698" cap="rnd">
+            <a:ln w="17068" cap="rnd">
               <a:solidFill>
                 <a:srgbClr val="FFFFFF"/>
               </a:solidFill>
@@ -10554,8 +7945,8 @@
           </p:nvSpPr>
           <p:spPr>
             <a:xfrm>
-              <a:off x="4729028" y="1407393"/>
-              <a:ext cx="1692449" cy="1016899"/>
+              <a:off x="5353977" y="807951"/>
+              <a:ext cx="2926041" cy="909201"/>
             </a:xfrm>
             <a:prstGeom prst="rect">
               <a:avLst/>
@@ -10563,7 +7954,7 @@
             <a:noFill/>
           </p:spPr>
           <p:txBody>
-            <a:bodyPr wrap="square" anchor="t" lIns="36576" tIns="18288" rIns="36576" bIns="18288">
+            <a:bodyPr wrap="square" anchor="ctr" lIns="36576" tIns="18288" rIns="36576" bIns="18288">
               <a:noAutofit/>
             </a:bodyPr>
             <a:lstStyle/>
@@ -10574,13 +7965,13 @@
                 </a:lnSpc>
               </a:pPr>
               <a:r>
-                <a:rPr sz="1170" b="0">
+                <a:rPr sz="1600" b="0">
                   <a:solidFill>
                     <a:srgbClr val="FFFFFF"/>
                   </a:solidFill>
                   <a:latin typeface="Play"/>
                 </a:rPr>
-                <a:t>ИИ отвечает на вопросы по регламентам и инструкциям.</a:t>
+                <a:t>ИИ-помощник отвечает на вопросы по регламентам и инструкциям.</a:t>
               </a:r>
             </a:p>
           </p:txBody>
@@ -10593,8 +7984,8 @@
           </p:nvSpPr>
           <p:spPr>
             <a:xfrm>
-              <a:off x="6623145" y="676278"/>
-              <a:ext cx="1876329" cy="1813687"/>
+              <a:off x="4637088" y="1958554"/>
+              <a:ext cx="3862387" cy="1172548"/>
             </a:xfrm>
             <a:prstGeom prst="roundRect">
               <a:avLst>
@@ -10624,8 +8015,8 @@
           </p:nvSpPr>
           <p:spPr>
             <a:xfrm>
-              <a:off x="6754488" y="807621"/>
-              <a:ext cx="507832" cy="507832"/>
+              <a:off x="4856544" y="2361949"/>
+              <a:ext cx="365760" cy="365760"/>
             </a:xfrm>
             <a:prstGeom prst="ellipse">
               <a:avLst/>
@@ -10653,8 +8044,8 @@
           </p:nvSpPr>
           <p:spPr>
             <a:xfrm>
-              <a:off x="6866211" y="919344"/>
-              <a:ext cx="284386" cy="284386"/>
+              <a:off x="4937011" y="2442416"/>
+              <a:ext cx="204825" cy="204825"/>
             </a:xfrm>
             <a:custGeom>
               <a:avLst/>
@@ -10728,7 +8119,7 @@
               </a:pathLst>
             </a:custGeom>
             <a:noFill/>
-            <a:ln w="23698" cap="rnd">
+            <a:ln w="17068" cap="rnd">
               <a:solidFill>
                 <a:srgbClr val="FFFFFF"/>
               </a:solidFill>
@@ -10751,8 +8142,8 @@
           </p:nvSpPr>
           <p:spPr>
             <a:xfrm>
-              <a:off x="6715085" y="1407393"/>
-              <a:ext cx="1692449" cy="1016899"/>
+              <a:off x="5353977" y="2090228"/>
+              <a:ext cx="2926041" cy="909201"/>
             </a:xfrm>
             <a:prstGeom prst="rect">
               <a:avLst/>
@@ -10760,7 +8151,7 @@
             <a:noFill/>
           </p:spPr>
           <p:txBody>
-            <a:bodyPr wrap="square" anchor="t" lIns="36576" tIns="18288" rIns="36576" bIns="18288">
+            <a:bodyPr wrap="square" anchor="ctr" lIns="36576" tIns="18288" rIns="36576" bIns="18288">
               <a:noAutofit/>
             </a:bodyPr>
             <a:lstStyle/>
@@ -10771,13 +8162,13 @@
                 </a:lnSpc>
               </a:pPr>
               <a:r>
-                <a:rPr sz="1170" b="0">
+                <a:rPr sz="1600" b="0">
                   <a:solidFill>
                     <a:srgbClr val="FFFFFF"/>
                   </a:solidFill>
                   <a:latin typeface="Play"/>
                 </a:rPr>
-                <a:t>Система автоматически добавляет ссылку на документ-источник.</a:t>
+                <a:t>Система автоматически дает ссылку на документ-источник.</a:t>
               </a:r>
             </a:p>
           </p:txBody>
@@ -10790,8 +8181,8 @@
           </p:nvSpPr>
           <p:spPr>
             <a:xfrm>
-              <a:off x="4637088" y="2599693"/>
-              <a:ext cx="1876329" cy="1813687"/>
+              <a:off x="4637088" y="3240831"/>
+              <a:ext cx="3862387" cy="1172548"/>
             </a:xfrm>
             <a:prstGeom prst="roundRect">
               <a:avLst>
@@ -10821,8 +8212,8 @@
           </p:nvSpPr>
           <p:spPr>
             <a:xfrm>
-              <a:off x="4768431" y="2731036"/>
-              <a:ext cx="507832" cy="507832"/>
+              <a:off x="4856544" y="3644225"/>
+              <a:ext cx="365760" cy="365760"/>
             </a:xfrm>
             <a:prstGeom prst="ellipse">
               <a:avLst/>
@@ -10844,14 +8235,14 @@
         </p:sp>
         <p:sp>
           <p:nvSpPr>
-            <p:cNvPr id="14" name="BrandDeck Icon book-open"/>
+            <p:cNvPr id="14" name="BrandDeck Icon scroll-text"/>
             <p:cNvSpPr/>
             <p:nvPr/>
           </p:nvSpPr>
           <p:spPr>
             <a:xfrm>
-              <a:off x="4880154" y="2842759"/>
-              <a:ext cx="284386" cy="284386"/>
+              <a:off x="4937011" y="3724692"/>
+              <a:ext cx="204825" cy="204825"/>
             </a:xfrm>
             <a:custGeom>
               <a:avLst/>
@@ -10862,77 +8253,106 @@
               <a:pathLst>
                 <a:path w="24000" h="24000" fill="none">
                   <a:moveTo>
-                    <a:pt x="12000" y="7000"/>
+                    <a:pt x="15000" y="12000"/>
                   </a:moveTo>
                   <a:lnTo>
-                    <a:pt x="12000" y="21000"/>
+                    <a:pt x="10000" y="12000"/>
                   </a:lnTo>
                 </a:path>
                 <a:path w="24000" h="24000" fill="none">
                   <a:moveTo>
-                    <a:pt x="3000" y="18000"/>
+                    <a:pt x="15000" y="8000"/>
                   </a:moveTo>
+                  <a:lnTo>
+                    <a:pt x="10000" y="8000"/>
+                  </a:lnTo>
+                </a:path>
+                <a:path w="24000" h="24000" fill="none">
+                  <a:moveTo>
+                    <a:pt x="19000" y="17000"/>
+                  </a:moveTo>
+                  <a:lnTo>
+                    <a:pt x="19000" y="5000"/>
+                  </a:lnTo>
                   <a:cubicBezTo>
-                    <a:pt x="2448" y="18000"/>
-                    <a:pt x="2000" y="17552"/>
-                    <a:pt x="2000" y="17000"/>
+                    <a:pt x="19000" y="3895"/>
+                    <a:pt x="18105" y="3000"/>
+                    <a:pt x="17000" y="3000"/>
                   </a:cubicBezTo>
                   <a:lnTo>
-                    <a:pt x="2000" y="4000"/>
+                    <a:pt x="4000" y="3000"/>
+                  </a:lnTo>
+                </a:path>
+                <a:path w="24000" h="24000" fill="none">
+                  <a:moveTo>
+                    <a:pt x="8000" y="21000"/>
+                  </a:moveTo>
+                  <a:lnTo>
+                    <a:pt x="20000" y="21000"/>
                   </a:lnTo>
                   <a:cubicBezTo>
-                    <a:pt x="2000" y="3448"/>
-                    <a:pt x="2448" y="3000"/>
-                    <a:pt x="3000" y="3000"/>
+                    <a:pt x="21105" y="21000"/>
+                    <a:pt x="22000" y="20105"/>
+                    <a:pt x="22000" y="19000"/>
                   </a:cubicBezTo>
                   <a:lnTo>
-                    <a:pt x="8000" y="3000"/>
+                    <a:pt x="22000" y="18000"/>
                   </a:lnTo>
                   <a:cubicBezTo>
-                    <a:pt x="10209" y="3000"/>
-                    <a:pt x="12000" y="4791"/>
-                    <a:pt x="12000" y="7000"/>
+                    <a:pt x="22000" y="17448"/>
+                    <a:pt x="21552" y="17000"/>
+                    <a:pt x="21000" y="17000"/>
+                  </a:cubicBezTo>
+                  <a:lnTo>
+                    <a:pt x="11000" y="17000"/>
+                  </a:lnTo>
+                  <a:cubicBezTo>
+                    <a:pt x="10448" y="17000"/>
+                    <a:pt x="10000" y="17448"/>
+                    <a:pt x="10000" y="18000"/>
+                  </a:cubicBezTo>
+                  <a:lnTo>
+                    <a:pt x="10000" y="19000"/>
+                  </a:lnTo>
+                  <a:cubicBezTo>
+                    <a:pt x="10000" y="20105"/>
+                    <a:pt x="9105" y="21000"/>
+                    <a:pt x="8000" y="21000"/>
                   </a:cubicBezTo>
                   <a:cubicBezTo>
-                    <a:pt x="12000" y="4791"/>
-                    <a:pt x="13791" y="3000"/>
-                    <a:pt x="16000" y="3000"/>
+                    <a:pt x="6895" y="21000"/>
+                    <a:pt x="6000" y="20105"/>
+                    <a:pt x="6000" y="19000"/>
                   </a:cubicBezTo>
                   <a:lnTo>
-                    <a:pt x="21000" y="3000"/>
+                    <a:pt x="6000" y="5000"/>
                   </a:lnTo>
                   <a:cubicBezTo>
-                    <a:pt x="21552" y="3000"/>
-                    <a:pt x="22000" y="3448"/>
-                    <a:pt x="22000" y="4000"/>
+                    <a:pt x="6000" y="3895"/>
+                    <a:pt x="5105" y="3000"/>
+                    <a:pt x="4000" y="3000"/>
+                  </a:cubicBezTo>
+                  <a:cubicBezTo>
+                    <a:pt x="2895" y="3000"/>
+                    <a:pt x="2000" y="3895"/>
+                    <a:pt x="2000" y="5000"/>
                   </a:cubicBezTo>
                   <a:lnTo>
-                    <a:pt x="22000" y="17000"/>
+                    <a:pt x="2000" y="7000"/>
                   </a:lnTo>
                   <a:cubicBezTo>
-                    <a:pt x="22000" y="17552"/>
-                    <a:pt x="21552" y="18000"/>
-                    <a:pt x="21000" y="18000"/>
+                    <a:pt x="2000" y="7552"/>
+                    <a:pt x="2448" y="8000"/>
+                    <a:pt x="3000" y="8000"/>
                   </a:cubicBezTo>
                   <a:lnTo>
-                    <a:pt x="15000" y="18000"/>
+                    <a:pt x="6000" y="8000"/>
                   </a:lnTo>
-                  <a:cubicBezTo>
-                    <a:pt x="13343" y="18000"/>
-                    <a:pt x="12000" y="19343"/>
-                    <a:pt x="12000" y="21000"/>
-                  </a:cubicBezTo>
-                  <a:cubicBezTo>
-                    <a:pt x="12000" y="19343"/>
-                    <a:pt x="10657" y="18000"/>
-                    <a:pt x="9000" y="18000"/>
-                  </a:cubicBezTo>
-                  <a:close/>
                 </a:path>
               </a:pathLst>
             </a:custGeom>
             <a:noFill/>
-            <a:ln w="23698" cap="rnd">
+            <a:ln w="17068" cap="rnd">
               <a:solidFill>
                 <a:srgbClr val="FFFFFF"/>
               </a:solidFill>
@@ -10955,8 +8375,8 @@
           </p:nvSpPr>
           <p:spPr>
             <a:xfrm>
-              <a:off x="4729028" y="3330808"/>
-              <a:ext cx="1692449" cy="1016899"/>
+              <a:off x="5353977" y="3372504"/>
+              <a:ext cx="2926041" cy="909201"/>
             </a:xfrm>
             <a:prstGeom prst="rect">
               <a:avLst/>
@@ -10964,7 +8384,7 @@
             <a:noFill/>
           </p:spPr>
           <p:txBody>
-            <a:bodyPr wrap="square" anchor="t" lIns="36576" tIns="18288" rIns="36576" bIns="18288">
+            <a:bodyPr wrap="square" anchor="ctr" lIns="36576" tIns="18288" rIns="36576" bIns="18288">
               <a:noAutofit/>
             </a:bodyPr>
             <a:lstStyle/>
@@ -10975,13 +8395,13 @@
                 </a:lnSpc>
               </a:pPr>
               <a:r>
-                <a:rPr sz="1170" b="0">
+                <a:rPr sz="1600" b="0">
                   <a:solidFill>
                     <a:srgbClr val="FFFFFF"/>
                   </a:solidFill>
                   <a:latin typeface="Play"/>
                 </a:rPr>
-                <a:t>Ответ формируется на основе внутренних знаний компании.</a:t>
+                <a:t>Ответ формируется на основе внутренних правил компании.</a:t>
               </a:r>
             </a:p>
           </p:txBody>
@@ -10995,7 +8415,7 @@
 </p:sld>
 </file>
 
-<file path=ppt/slides/slide6.xml><?xml version="1.0" encoding="utf-8"?>
+<file path=ppt/slides/slide5.xml><?xml version="1.0" encoding="utf-8"?>
 <p:sld xmlns:a="http://schemas.openxmlformats.org/drawingml/2006/main" xmlns:p="http://schemas.openxmlformats.org/presentationml/2006/main" xmlns:r="http://schemas.openxmlformats.org/officeDocument/2006/relationships">
   <p:cSld>
     <p:spTree>
@@ -11007,14 +8427,14 @@
       <p:grpSpPr/>
       <p:sp>
         <p:nvSpPr>
-          <p:cNvPr id="987" name="Google Shape;987;p64"/>
+          <p:cNvPr id="1119" name="Google Shape;1119;p69"/>
           <p:cNvSpPr/>
           <p:nvPr/>
         </p:nvSpPr>
         <p:spPr>
           <a:xfrm>
-            <a:off x="285748" y="286048"/>
-            <a:ext cx="8572456" cy="4152359"/>
+            <a:off x="285748" y="286047"/>
+            <a:ext cx="8572456" cy="4176169"/>
           </a:xfrm>
           <a:prstGeom prst="rect">
             <a:avLst/>
@@ -11048,14 +8468,14 @@
       </p:sp>
       <p:sp>
         <p:nvSpPr>
-          <p:cNvPr id="988" name="Google Shape;988;p64"/>
+          <p:cNvPr id="1120" name="Google Shape;1120;p69"/>
           <p:cNvSpPr/>
           <p:nvPr/>
         </p:nvSpPr>
         <p:spPr>
           <a:xfrm>
             <a:off x="285748" y="1209852"/>
-            <a:ext cx="8572456" cy="3228555"/>
+            <a:ext cx="8572456" cy="3252364"/>
           </a:xfrm>
           <a:prstGeom prst="rect">
             <a:avLst/>
@@ -11089,14 +8509,14 @@
       </p:sp>
       <p:sp>
         <p:nvSpPr>
-          <p:cNvPr id="989" name="Google Shape;989;p64"/>
+          <p:cNvPr id="1121" name="Google Shape;1121;p69"/>
           <p:cNvSpPr/>
           <p:nvPr/>
         </p:nvSpPr>
         <p:spPr>
           <a:xfrm>
             <a:off x="285748" y="1209852"/>
-            <a:ext cx="8572456" cy="1795229"/>
+            <a:ext cx="8572456" cy="3252364"/>
           </a:xfrm>
           <a:prstGeom prst="rect">
             <a:avLst/>
@@ -11130,14 +8550,63 @@
       </p:sp>
       <p:sp>
         <p:nvSpPr>
-          <p:cNvPr id="1012" name="Google Shape;1012;p64"/>
+          <p:cNvPr id="1123" name="Google Shape;1123;p69"/>
           <p:cNvSpPr/>
           <p:nvPr/>
         </p:nvSpPr>
         <p:spPr>
           <a:xfrm>
-            <a:off x="285748" y="3176509"/>
-            <a:ext cx="8572456" cy="1261898"/>
+            <a:off x="500061" y="1424137"/>
+            <a:ext cx="2919397" cy="2895223"/>
+          </a:xfrm>
+          <a:prstGeom prst="rect">
+            <a:avLst/>
+          </a:prstGeom>
+          <a:noFill/>
+          <a:ln>
+            <a:noFill/>
+          </a:ln>
+        </p:spPr>
+        <p:txBody>
+          <a:bodyPr anchorCtr="0" anchor="t" bIns="0" lIns="0" spcFirstLastPara="1" rIns="0" wrap="square" tIns="0">
+            <a:normAutofit/>
+          </a:bodyPr>
+          <a:lstStyle/>
+          <a:p>
+            <a:pPr indent="0" lvl="0" marL="0" marR="0" rtl="0" algn="l">
+              <a:lnSpc>
+                <a:spcPct val="139988"/>
+              </a:lnSpc>
+              <a:spcBef>
+                <a:spcPts val="0"/>
+              </a:spcBef>
+              <a:spcAft>
+                <a:spcPts val="0"/>
+              </a:spcAft>
+              <a:buNone/>
+            </a:pPr>
+            <a:endParaRPr b="0" i="0" sz="1688" u="none" cap="none" strike="noStrike">
+              <a:solidFill>
+                <a:schemeClr val="dk1"/>
+              </a:solidFill>
+              <a:latin typeface="Calibri"/>
+              <a:ea typeface="Calibri"/>
+              <a:cs typeface="Calibri"/>
+              <a:sym typeface="Calibri"/>
+            </a:endParaRPr>
+          </a:p>
+        </p:txBody>
+      </p:sp>
+      <p:sp>
+        <p:nvSpPr>
+          <p:cNvPr id="1124" name="Google Shape;1124;p69"/>
+          <p:cNvSpPr/>
+          <p:nvPr/>
+        </p:nvSpPr>
+        <p:spPr>
+          <a:xfrm>
+            <a:off x="3657581" y="1209852"/>
+            <a:ext cx="5200623" cy="3252364"/>
           </a:xfrm>
           <a:prstGeom prst="rect">
             <a:avLst/>
@@ -11171,7 +8640,7 @@
       </p:sp>
       <p:sp>
         <p:nvSpPr>
-          <p:cNvPr id="1017" name="BrandDeck Text 1017"/>
+          <p:cNvPr id="1132" name="BrandDeck Text 1132"/>
           <p:cNvSpPr txBox="1"/>
           <p:nvPr>
             <p:ph type="title"/>
@@ -11191,7 +8660,7 @@
           </a:ln>
         </p:spPr>
         <p:txBody>
-          <a:bodyPr anchorCtr="0" anchor="t" bIns="45700" lIns="91425" spcFirstLastPara="1" rIns="91425" wrap="square" tIns="45700">
+          <a:bodyPr anchorCtr="0" anchor="t" bIns="45700" lIns="91425" spcFirstLastPara="1" rIns="91425" wrap="square" tIns="45700" vert="horz">
             <a:normAutofit/>
           </a:bodyPr>
           <a:lstStyle/>
@@ -11215,7 +8684,7 @@
             </a:pPr>
             <a:r>
               <a:rPr sz="1800"/>
-              <a:t>Модель с открытыми весами работает внутри контура</a:t>
+              <a:t>Модель работает внутри контура компании, документы не уходят наружу</a:t>
             </a:r>
             <a:endParaRPr/>
           </a:p>
@@ -11223,14 +8692,14 @@
       </p:sp>
       <p:sp>
         <p:nvSpPr>
-          <p:cNvPr id="1022" name="BrandDeck Body"/>
+          <p:cNvPr id="1133" name="BrandDeck Body"/>
           <p:cNvSpPr txBox="1"/>
           <p:nvPr/>
         </p:nvSpPr>
         <p:spPr>
           <a:xfrm>
-            <a:off x="585216" y="1144312"/>
-            <a:ext cx="2129088" cy="3583136"/>
+            <a:off x="500060" y="1424137"/>
+            <a:ext cx="2558400" cy="2895223"/>
           </a:xfrm>
           <a:prstGeom prst="rect">
             <a:avLst/>
@@ -11238,7 +8707,7 @@
           <a:noFill/>
         </p:spPr>
         <p:txBody>
-          <a:bodyPr wrap="square" anchor="t" lIns="36576" rIns="36576" tIns="18288" bIns="18288">
+          <a:bodyPr wrap="square" vert="horz" anchor="t" lIns="36576" rIns="36576" tIns="18288" bIns="18288">
             <a:normAutofit/>
           </a:bodyPr>
           <a:lstStyle/>
@@ -11251,13 +8720,13 @@
                 <a:spcPts val="0"/>
               </a:spcBef>
               <a:spcAft>
-                <a:spcPts val="179"/>
+                <a:spcPts val="211"/>
               </a:spcAft>
             </a:pPr>
             <a:r>
-              <a:rPr sz="1200">
+              <a:rPr sz="1410">
                 <a:solidFill>
-                  <a:srgbClr val="001515"/>
+                  <a:srgbClr val="000000"/>
                 </a:solidFill>
                 <a:latin typeface="Play"/>
               </a:rPr>
@@ -11273,40 +8742,62 @@
                 <a:spcPts val="0"/>
               </a:spcBef>
               <a:spcAft>
-                <a:spcPts val="179"/>
+                <a:spcPts val="211"/>
               </a:spcAft>
             </a:pPr>
             <a:r>
-              <a:rPr sz="1200">
+              <a:rPr sz="1410">
                 <a:solidFill>
-                  <a:srgbClr val="001515"/>
+                  <a:srgbClr val="000000"/>
                 </a:solidFill>
                 <a:latin typeface="Play"/>
               </a:rPr>
               <a:t>• Документы не уходят наружу при обработке запросов.</a:t>
             </a:r>
           </a:p>
+          <a:p>
+            <a:pPr algn="l">
+              <a:lnSpc>
+                <a:spcPct val="115000"/>
+              </a:lnSpc>
+              <a:spcBef>
+                <a:spcPts val="0"/>
+              </a:spcBef>
+              <a:spcAft>
+                <a:spcPts val="211"/>
+              </a:spcAft>
+            </a:pPr>
+            <a:r>
+              <a:rPr sz="1410">
+                <a:solidFill>
+                  <a:srgbClr val="000000"/>
+                </a:solidFill>
+                <a:latin typeface="Play"/>
+              </a:rPr>
+              <a:t>• Если подтверждённого ответа нет, вопрос уходит специалисту.</a:t>
+            </a:r>
+          </a:p>
         </p:txBody>
       </p:sp>
       <p:pic>
         <p:nvPicPr>
-          <p:cNvPr id="1023" name="BrandDeck Image" descr="внутренний контур серверная"/>
+          <p:cNvPr id="1134" name="BrandDeck Image" descr="внутренний контур серверная"/>
           <p:cNvPicPr>
             <a:picLocks noChangeAspect="1"/>
           </p:cNvPicPr>
           <p:nvPr/>
         </p:nvPicPr>
         <p:blipFill>
-          <a:blip r:embed="rId9"/>
-          <a:srcRect l="28445" r="28445"/>
+          <a:blip r:embed="rId7"/>
+          <a:srcRect l="18013" r="18013"/>
           <a:stretch>
             <a:fillRect/>
           </a:stretch>
         </p:blipFill>
         <p:spPr>
           <a:xfrm>
-            <a:off x="2970336" y="1144312"/>
-            <a:ext cx="2744663" cy="3583136"/>
+            <a:off x="3314493" y="1424137"/>
+            <a:ext cx="3291060" cy="2895223"/>
           </a:xfrm>
           <a:prstGeom prst="rect">
             <a:avLst/>
@@ -11321,7 +8812,7 @@
 </p:sld>
 </file>
 
-<file path=ppt/slides/slide7.xml><?xml version="1.0" encoding="utf-8"?>
+<file path=ppt/slides/slide6.xml><?xml version="1.0" encoding="utf-8"?>
 <p:sld xmlns:a="http://schemas.openxmlformats.org/drawingml/2006/main" xmlns:p="http://schemas.openxmlformats.org/presentationml/2006/main" xmlns:r="http://schemas.openxmlformats.org/officeDocument/2006/relationships">
   <p:cSld>
     <p:spTree>
@@ -11348,7 +8839,7 @@
           </a:xfrm>
         </p:spPr>
         <p:txBody>
-          <a:bodyPr wrap="square" anchor="t">
+          <a:bodyPr vert="horz" wrap="square" anchor="t">
             <a:normAutofit/>
           </a:bodyPr>
           <a:lstStyle/>
@@ -11361,28 +8852,28 @@
                 <a:spcPts val="0"/>
               </a:spcBef>
               <a:spcAft>
-                <a:spcPts val="211"/>
+                <a:spcPts val="182"/>
               </a:spcAft>
             </a:pPr>
             <a:r>
-              <a:rPr sz="1410"/>
-              <a:t>Отсутствие подтвержденного ответа перенаправляет вопрос специалисту</a:t>
+              <a:rPr sz="1220"/>
+              <a:t>Если подтвержденного ответа нет, вопрос уходит специалисту с контекстом</a:t>
             </a:r>
           </a:p>
         </p:txBody>
       </p:sp>
       <p:grpSp>
         <p:nvGrpSpPr>
-          <p:cNvPr id="3" name="BrandDeck Diagram process" descr="process: Вопрос сотрудника Отправлен ИИ-помощнику; Ответ не найден Перенаправляется специалисту"/>
+          <p:cNvPr id="3" name="BrandDeck Diagram process" descr="process: Нет ответа Система не нашла подтверждённый ответ; Передача Вопрос уходит специалисту с деталями; Решение Сотрудник отвечает вручную"/>
           <p:cNvGrpSpPr/>
           <p:nvPr/>
         </p:nvGrpSpPr>
         <p:grpSpPr>
           <a:xfrm>
             <a:off x="4637088" y="703710"/>
-            <a:ext cx="3862387" cy="3682238"/>
+            <a:ext cx="3862387" cy="3682237"/>
             <a:chOff x="4637088" y="703710"/>
-            <a:chExt cx="3862387" cy="3682238"/>
+            <a:chExt cx="3862387" cy="3682237"/>
           </a:xfrm>
         </p:grpSpPr>
         <p:sp>
@@ -11393,8 +8884,8 @@
           </p:nvSpPr>
           <p:spPr>
             <a:xfrm>
-              <a:off x="4876660" y="1610553"/>
-              <a:ext cx="32918" cy="1868551"/>
+              <a:off x="4876660" y="1299128"/>
+              <a:ext cx="32918" cy="2491401"/>
             </a:xfrm>
             <a:prstGeom prst="rect">
               <a:avLst/>
@@ -11422,7 +8913,7 @@
           </p:nvSpPr>
           <p:spPr>
             <a:xfrm>
-              <a:off x="4637088" y="1354521"/>
+              <a:off x="4637088" y="1043096"/>
               <a:ext cx="512064" cy="512064"/>
             </a:xfrm>
             <a:prstGeom prst="ellipse">
@@ -11467,7 +8958,7 @@
           <p:spPr>
             <a:xfrm>
               <a:off x="5258880" y="703710"/>
-              <a:ext cx="3240595" cy="1813687"/>
+              <a:ext cx="3240595" cy="1190836"/>
             </a:xfrm>
             <a:prstGeom prst="roundRect">
               <a:avLst>
@@ -11498,7 +8989,7 @@
           <p:spPr>
             <a:xfrm>
               <a:off x="5350320" y="703710"/>
-              <a:ext cx="3149155" cy="1813687"/>
+              <a:ext cx="3149155" cy="1190836"/>
             </a:xfrm>
             <a:prstGeom prst="rect">
               <a:avLst/>
@@ -11523,7 +9014,7 @@
                   </a:solidFill>
                   <a:latin typeface="Play"/>
                 </a:rPr>
-                <a:t>Вопрос сотрудника</a:t>
+                <a:t>Нет ответа</a:t>
               </a:r>
             </a:p>
             <a:p>
@@ -11542,7 +9033,7 @@
                   </a:solidFill>
                   <a:latin typeface="Play"/>
                 </a:rPr>
-                <a:t>Отправлен ИИ-помощнику</a:t>
+                <a:t>Система не нашла подтверждённый ответ</a:t>
               </a:r>
             </a:p>
           </p:txBody>
@@ -11555,7 +9046,7 @@
           </p:nvSpPr>
           <p:spPr>
             <a:xfrm>
-              <a:off x="4637088" y="3223072"/>
+              <a:off x="4637088" y="2288797"/>
               <a:ext cx="512064" cy="512064"/>
             </a:xfrm>
             <a:prstGeom prst="ellipse">
@@ -11599,8 +9090,8 @@
           </p:nvSpPr>
           <p:spPr>
             <a:xfrm>
-              <a:off x="5258880" y="2572261"/>
-              <a:ext cx="3240595" cy="1813687"/>
+              <a:off x="5258880" y="1949410"/>
+              <a:ext cx="3240595" cy="1190836"/>
             </a:xfrm>
             <a:prstGeom prst="roundRect">
               <a:avLst>
@@ -11630,8 +9121,8 @@
           </p:nvSpPr>
           <p:spPr>
             <a:xfrm>
-              <a:off x="5350320" y="2572261"/>
-              <a:ext cx="3149155" cy="1813687"/>
+              <a:off x="5350320" y="1949410"/>
+              <a:ext cx="3149155" cy="1190836"/>
             </a:xfrm>
             <a:prstGeom prst="rect">
               <a:avLst/>
@@ -11656,7 +9147,7 @@
                   </a:solidFill>
                   <a:latin typeface="Play"/>
                 </a:rPr>
-                <a:t>Ответ не найден</a:t>
+                <a:t>Передача</a:t>
               </a:r>
             </a:p>
             <a:p>
@@ -11675,7 +9166,140 @@
                   </a:solidFill>
                   <a:latin typeface="Play"/>
                 </a:rPr>
-                <a:t>Перенаправляется специалисту</a:t>
+                <a:t>Вопрос уходит специалисту с деталями</a:t>
+              </a:r>
+            </a:p>
+          </p:txBody>
+        </p:sp>
+        <p:sp>
+          <p:nvSpPr>
+            <p:cNvPr id="11" name="BrandDeck Diagram Step 3 Badge"/>
+            <p:cNvSpPr/>
+            <p:nvPr/>
+          </p:nvSpPr>
+          <p:spPr>
+            <a:xfrm>
+              <a:off x="4637088" y="3534497"/>
+              <a:ext cx="512064" cy="512064"/>
+            </a:xfrm>
+            <a:prstGeom prst="ellipse">
+              <a:avLst/>
+            </a:prstGeom>
+            <a:solidFill>
+              <a:srgbClr val="006DEB"/>
+            </a:solidFill>
+            <a:ln>
+              <a:noFill/>
+            </a:ln>
+          </p:spPr>
+          <p:txBody>
+            <a:bodyPr rtlCol="0" anchor="ctr" wrap="square" lIns="0" tIns="0" rIns="0" bIns="0">
+              <a:noAutofit/>
+            </a:bodyPr>
+            <a:lstStyle/>
+            <a:p>
+              <a:pPr algn="ctr">
+                <a:lnSpc>
+                  <a:spcPct val="110000"/>
+                </a:lnSpc>
+              </a:pPr>
+              <a:r>
+                <a:rPr sz="1410" b="1">
+                  <a:solidFill>
+                    <a:srgbClr val="FFFFFF"/>
+                  </a:solidFill>
+                  <a:latin typeface="Play"/>
+                </a:rPr>
+                <a:t>03</a:t>
+              </a:r>
+            </a:p>
+          </p:txBody>
+        </p:sp>
+        <p:sp>
+          <p:nvSpPr>
+            <p:cNvPr id="12" name="BrandDeck Diagram Detail Card 3"/>
+            <p:cNvSpPr/>
+            <p:nvPr/>
+          </p:nvSpPr>
+          <p:spPr>
+            <a:xfrm>
+              <a:off x="5258880" y="3195111"/>
+              <a:ext cx="3240595" cy="1190836"/>
+            </a:xfrm>
+            <a:prstGeom prst="roundRect">
+              <a:avLst>
+                <a:gd name="adj" fmla="val 12000"/>
+              </a:avLst>
+            </a:prstGeom>
+            <a:solidFill>
+              <a:srgbClr val="E8F3FF"/>
+            </a:solidFill>
+            <a:ln>
+              <a:noFill/>
+            </a:ln>
+          </p:spPr>
+          <p:txBody>
+            <a:bodyPr rtlCol="0" anchor="ctr"/>
+            <a:lstStyle/>
+            <a:p>
+              <a:pPr algn="ctr"/>
+            </a:p>
+          </p:txBody>
+        </p:sp>
+        <p:sp>
+          <p:nvSpPr>
+            <p:cNvPr id="13" name="BrandDeck Diagram Text 3"/>
+            <p:cNvSpPr txBox="1"/>
+            <p:nvPr/>
+          </p:nvSpPr>
+          <p:spPr>
+            <a:xfrm>
+              <a:off x="5350320" y="3195111"/>
+              <a:ext cx="3149155" cy="1190836"/>
+            </a:xfrm>
+            <a:prstGeom prst="rect">
+              <a:avLst/>
+            </a:prstGeom>
+            <a:noFill/>
+          </p:spPr>
+          <p:txBody>
+            <a:bodyPr wrap="square" anchor="ctr" lIns="36576" tIns="18288" rIns="36576" bIns="18288">
+              <a:noAutofit/>
+            </a:bodyPr>
+            <a:lstStyle/>
+            <a:p>
+              <a:pPr algn="l">
+                <a:lnSpc>
+                  <a:spcPct val="110000"/>
+                </a:lnSpc>
+              </a:pPr>
+              <a:r>
+                <a:rPr sz="1600" b="1">
+                  <a:solidFill>
+                    <a:srgbClr val="000000"/>
+                  </a:solidFill>
+                  <a:latin typeface="Play"/>
+                </a:rPr>
+                <a:t>Решение</a:t>
+              </a:r>
+            </a:p>
+            <a:p>
+              <a:pPr algn="l">
+                <a:lnSpc>
+                  <a:spcPct val="110000"/>
+                </a:lnSpc>
+                <a:spcBef>
+                  <a:spcPts val="400"/>
+                </a:spcBef>
+              </a:pPr>
+              <a:r>
+                <a:rPr sz="1600" b="0">
+                  <a:solidFill>
+                    <a:srgbClr val="000000"/>
+                  </a:solidFill>
+                  <a:latin typeface="Play"/>
+                </a:rPr>
+                <a:t>Сотрудник отвечает вручную</a:t>
               </a:r>
             </a:p>
           </p:txBody>
@@ -11689,7 +9313,7 @@
 </p:sld>
 </file>
 
-<file path=ppt/slides/slide8.xml><?xml version="1.0" encoding="utf-8"?>
+<file path=ppt/slides/slide7.xml><?xml version="1.0" encoding="utf-8"?>
 <p:sld xmlns:a="http://schemas.openxmlformats.org/drawingml/2006/main" xmlns:p="http://schemas.openxmlformats.org/presentationml/2006/main" xmlns:r="http://schemas.openxmlformats.org/officeDocument/2006/relationships">
   <p:cSld>
     <p:spTree>
@@ -11721,7 +9345,7 @@
           </a:ln>
         </p:spPr>
         <p:txBody>
-          <a:bodyPr anchorCtr="0" anchor="t" bIns="45700" lIns="91425" spcFirstLastPara="1" rIns="91425" wrap="square" tIns="45700">
+          <a:bodyPr anchorCtr="0" anchor="t" bIns="45700" lIns="91425" spcFirstLastPara="1" rIns="91425" wrap="square" tIns="45700" vert="horz">
             <a:normAutofit/>
           </a:bodyPr>
           <a:lstStyle/>
@@ -11753,28 +9377,88 @@
       </p:sp>
       <p:grpSp>
         <p:nvGrpSpPr>
-          <p:cNvPr id="2" name="BrandDeck Diagram pyramid" descr="pyramid: 2 подразделения География пилотного запуска; 150 сотрудников Общее число участников"/>
+          <p:cNvPr id="2" name="BrandDeck Diagram icon_grid" descr="icon_grid: Охват 2 подразделения, 150 сотрудников; Длительность 6 недель пилотного запуска"/>
           <p:cNvGrpSpPr/>
           <p:nvPr/>
         </p:nvGrpSpPr>
         <p:grpSpPr>
           <a:xfrm>
-            <a:off x="4645054" y="1011898"/>
-            <a:ext cx="3854420" cy="2871216"/>
-            <a:chOff x="4645054" y="1011898"/>
-            <a:chExt cx="3854420" cy="2871216"/>
+            <a:off x="4637088" y="676278"/>
+            <a:ext cx="3862387" cy="3737102"/>
+            <a:chOff x="4637088" y="676278"/>
+            <a:chExt cx="3862387" cy="3737102"/>
           </a:xfrm>
         </p:grpSpPr>
         <p:sp>
           <p:nvSpPr>
-            <p:cNvPr id="508" name="BrandDeck Diagram Level 1"/>
+            <p:cNvPr id="508" name="BrandDeck Diagram Card 1"/>
             <p:cNvSpPr/>
             <p:nvPr/>
           </p:nvSpPr>
           <p:spPr>
             <a:xfrm>
-              <a:off x="5069916" y="1011898"/>
-              <a:ext cx="833792" cy="1408176"/>
+              <a:off x="4637088" y="676278"/>
+              <a:ext cx="3862387" cy="1813687"/>
+            </a:xfrm>
+            <a:prstGeom prst="roundRect">
+              <a:avLst>
+                <a:gd name="adj" fmla="val 8000"/>
+              </a:avLst>
+            </a:prstGeom>
+            <a:solidFill>
+              <a:srgbClr val="E8F3FF"/>
+            </a:solidFill>
+            <a:ln>
+              <a:noFill/>
+            </a:ln>
+          </p:spPr>
+          <p:txBody>
+            <a:bodyPr rtlCol="0" anchor="ctr"/>
+            <a:lstStyle/>
+            <a:p>
+              <a:pPr algn="ctr"/>
+            </a:p>
+          </p:txBody>
+        </p:sp>
+        <p:sp>
+          <p:nvSpPr>
+            <p:cNvPr id="509" name="BrandDeck Diagram Icon 1 Badge"/>
+            <p:cNvSpPr/>
+            <p:nvPr/>
+          </p:nvSpPr>
+          <p:spPr>
+            <a:xfrm>
+              <a:off x="4856544" y="1329205"/>
+              <a:ext cx="507832" cy="507832"/>
+            </a:xfrm>
+            <a:prstGeom prst="ellipse">
+              <a:avLst/>
+            </a:prstGeom>
+            <a:solidFill>
+              <a:srgbClr val="006DEB"/>
+            </a:solidFill>
+            <a:ln>
+              <a:noFill/>
+            </a:ln>
+          </p:spPr>
+          <p:txBody>
+            <a:bodyPr rtlCol="0" anchor="ctr"/>
+            <a:lstStyle/>
+            <a:p>
+              <a:pPr algn="ctr"/>
+            </a:p>
+          </p:txBody>
+        </p:sp>
+        <p:sp>
+          <p:nvSpPr>
+            <p:cNvPr id="510" name="BrandDeck Icon building-2"/>
+            <p:cNvSpPr/>
+            <p:nvPr/>
+          </p:nvSpPr>
+          <p:spPr>
+            <a:xfrm>
+              <a:off x="4968267" y="1440928"/>
+              <a:ext cx="284386" cy="284386"/>
             </a:xfrm>
             <a:custGeom>
               <a:avLst/>
@@ -11783,63 +9467,139 @@
               <a:cxnLst/>
               <a:rect l="l" t="t" r="r" b="b"/>
               <a:pathLst>
-                <a:path w="912" h="1540" stroke="0">
+                <a:path w="24000" h="24000" fill="none">
                   <a:moveTo>
-                    <a:pt x="431" y="0"/>
+                    <a:pt x="6000" y="22000"/>
                   </a:moveTo>
                   <a:lnTo>
-                    <a:pt x="481" y="0"/>
+                    <a:pt x="6000" y="4000"/>
                   </a:lnTo>
+                  <a:cubicBezTo>
+                    <a:pt x="6000" y="2895"/>
+                    <a:pt x="6895" y="2000"/>
+                    <a:pt x="8000" y="2000"/>
+                  </a:cubicBezTo>
                   <a:lnTo>
-                    <a:pt x="912" y="1540"/>
+                    <a:pt x="16000" y="2000"/>
                   </a:lnTo>
+                  <a:cubicBezTo>
+                    <a:pt x="17105" y="2000"/>
+                    <a:pt x="18000" y="2895"/>
+                    <a:pt x="18000" y="4000"/>
+                  </a:cubicBezTo>
                   <a:lnTo>
-                    <a:pt x="0" y="1540"/>
+                    <a:pt x="18000" y="22000"/>
                   </a:lnTo>
                   <a:close/>
                 </a:path>
+                <a:path w="24000" h="24000" fill="none">
+                  <a:moveTo>
+                    <a:pt x="6000" y="12000"/>
+                  </a:moveTo>
+                  <a:lnTo>
+                    <a:pt x="4000" y="12000"/>
+                  </a:lnTo>
+                  <a:cubicBezTo>
+                    <a:pt x="2895" y="12000"/>
+                    <a:pt x="2000" y="12895"/>
+                    <a:pt x="2000" y="14000"/>
+                  </a:cubicBezTo>
+                  <a:lnTo>
+                    <a:pt x="2000" y="20000"/>
+                  </a:lnTo>
+                  <a:cubicBezTo>
+                    <a:pt x="2000" y="21105"/>
+                    <a:pt x="2895" y="22000"/>
+                    <a:pt x="4000" y="22000"/>
+                  </a:cubicBezTo>
+                  <a:lnTo>
+                    <a:pt x="6000" y="22000"/>
+                  </a:lnTo>
+                </a:path>
+                <a:path w="24000" h="24000" fill="none">
+                  <a:moveTo>
+                    <a:pt x="18000" y="9000"/>
+                  </a:moveTo>
+                  <a:lnTo>
+                    <a:pt x="20000" y="9000"/>
+                  </a:lnTo>
+                  <a:cubicBezTo>
+                    <a:pt x="21105" y="9000"/>
+                    <a:pt x="22000" y="9895"/>
+                    <a:pt x="22000" y="11000"/>
+                  </a:cubicBezTo>
+                  <a:lnTo>
+                    <a:pt x="22000" y="20000"/>
+                  </a:lnTo>
+                  <a:cubicBezTo>
+                    <a:pt x="22000" y="21105"/>
+                    <a:pt x="21105" y="22000"/>
+                    <a:pt x="20000" y="22000"/>
+                  </a:cubicBezTo>
+                  <a:lnTo>
+                    <a:pt x="18000" y="22000"/>
+                  </a:lnTo>
+                </a:path>
+                <a:path w="24000" h="24000" fill="none">
+                  <a:moveTo>
+                    <a:pt x="10000" y="6000"/>
+                  </a:moveTo>
+                  <a:lnTo>
+                    <a:pt x="14000" y="6000"/>
+                  </a:lnTo>
+                </a:path>
+                <a:path w="24000" h="24000" fill="none">
+                  <a:moveTo>
+                    <a:pt x="10000" y="10000"/>
+                  </a:moveTo>
+                  <a:lnTo>
+                    <a:pt x="14000" y="10000"/>
+                  </a:lnTo>
+                </a:path>
+                <a:path w="24000" h="24000" fill="none">
+                  <a:moveTo>
+                    <a:pt x="10000" y="14000"/>
+                  </a:moveTo>
+                  <a:lnTo>
+                    <a:pt x="14000" y="14000"/>
+                  </a:lnTo>
+                </a:path>
+                <a:path w="24000" h="24000" fill="none">
+                  <a:moveTo>
+                    <a:pt x="10000" y="18000"/>
+                  </a:moveTo>
+                  <a:lnTo>
+                    <a:pt x="14000" y="18000"/>
+                  </a:lnTo>
+                </a:path>
               </a:pathLst>
             </a:custGeom>
-            <a:solidFill>
-              <a:srgbClr val="006DEB"/>
-            </a:solidFill>
-            <a:ln w="0">
-              <a:noFill/>
+            <a:noFill/>
+            <a:ln w="23698" cap="rnd">
+              <a:solidFill>
+                <a:srgbClr val="FFFFFF"/>
+              </a:solidFill>
+              <a:round/>
             </a:ln>
           </p:spPr>
           <p:txBody>
-            <a:bodyPr rtlCol="0" anchor="b" wrap="square" lIns="18288" tIns="0" rIns="18288" bIns="73152">
-              <a:noAutofit/>
-            </a:bodyPr>
+            <a:bodyPr rtlCol="0" anchor="ctr"/>
             <a:lstStyle/>
             <a:p>
-              <a:pPr algn="ctr">
-                <a:lnSpc>
-                  <a:spcPct val="110000"/>
-                </a:lnSpc>
-              </a:pPr>
-              <a:r>
-                <a:rPr sz="1410" b="1">
-                  <a:solidFill>
-                    <a:srgbClr val="FFFFFF"/>
-                  </a:solidFill>
-                  <a:latin typeface="Play"/>
-                </a:rPr>
-                <a:t>01</a:t>
-              </a:r>
+              <a:pPr algn="ctr"/>
             </a:p>
           </p:txBody>
         </p:sp>
         <p:sp>
           <p:nvSpPr>
-            <p:cNvPr id="509" name="BrandDeck Diagram Text 1"/>
+            <p:cNvPr id="511" name="BrandDeck Diagram Text 1"/>
             <p:cNvSpPr txBox="1"/>
             <p:nvPr/>
           </p:nvSpPr>
           <p:spPr>
             <a:xfrm>
-              <a:off x="6610858" y="1011898"/>
-              <a:ext cx="1888616" cy="1408176"/>
+              <a:off x="5496049" y="807951"/>
+              <a:ext cx="2783969" cy="1550339"/>
             </a:xfrm>
             <a:prstGeom prst="rect">
               <a:avLst/>
@@ -11858,13 +9618,13 @@
                 </a:lnSpc>
               </a:pPr>
               <a:r>
-                <a:rPr sz="1600" b="1">
+                <a:rPr sz="1800" b="1">
                   <a:solidFill>
                     <a:srgbClr val="000000"/>
                   </a:solidFill>
                   <a:latin typeface="Play"/>
                 </a:rPr>
-                <a:t>2 подразделения</a:t>
+                <a:t>Охват</a:t>
               </a:r>
             </a:p>
             <a:p>
@@ -11873,31 +9633,91 @@
                   <a:spcPct val="110000"/>
                 </a:lnSpc>
                 <a:spcBef>
-                  <a:spcPts val="400"/>
+                  <a:spcPts val="450"/>
                 </a:spcBef>
               </a:pPr>
               <a:r>
-                <a:rPr sz="1600" b="0">
+                <a:rPr sz="1800" b="0">
                   <a:solidFill>
                     <a:srgbClr val="000000"/>
                   </a:solidFill>
                   <a:latin typeface="Play"/>
                 </a:rPr>
-                <a:t>География пилотного запуска</a:t>
+                <a:t>2 подразделения, 150 сотрудников</a:t>
               </a:r>
             </a:p>
           </p:txBody>
         </p:sp>
         <p:sp>
           <p:nvSpPr>
-            <p:cNvPr id="510" name="BrandDeck Diagram Level 2"/>
+            <p:cNvPr id="512" name="BrandDeck Diagram Card 2"/>
             <p:cNvSpPr/>
             <p:nvPr/>
           </p:nvSpPr>
           <p:spPr>
             <a:xfrm>
-              <a:off x="4645054" y="2474938"/>
-              <a:ext cx="1683517" cy="1408176"/>
+              <a:off x="4637088" y="2599693"/>
+              <a:ext cx="3862387" cy="1813687"/>
+            </a:xfrm>
+            <a:prstGeom prst="roundRect">
+              <a:avLst>
+                <a:gd name="adj" fmla="val 8000"/>
+              </a:avLst>
+            </a:prstGeom>
+            <a:solidFill>
+              <a:srgbClr val="E8F3FF"/>
+            </a:solidFill>
+            <a:ln>
+              <a:noFill/>
+            </a:ln>
+          </p:spPr>
+          <p:txBody>
+            <a:bodyPr rtlCol="0" anchor="ctr"/>
+            <a:lstStyle/>
+            <a:p>
+              <a:pPr algn="ctr"/>
+            </a:p>
+          </p:txBody>
+        </p:sp>
+        <p:sp>
+          <p:nvSpPr>
+            <p:cNvPr id="513" name="BrandDeck Diagram Icon 2 Badge"/>
+            <p:cNvSpPr/>
+            <p:nvPr/>
+          </p:nvSpPr>
+          <p:spPr>
+            <a:xfrm>
+              <a:off x="4856544" y="3252620"/>
+              <a:ext cx="507832" cy="507832"/>
+            </a:xfrm>
+            <a:prstGeom prst="ellipse">
+              <a:avLst/>
+            </a:prstGeom>
+            <a:solidFill>
+              <a:srgbClr val="006DEB"/>
+            </a:solidFill>
+            <a:ln>
+              <a:noFill/>
+            </a:ln>
+          </p:spPr>
+          <p:txBody>
+            <a:bodyPr rtlCol="0" anchor="ctr"/>
+            <a:lstStyle/>
+            <a:p>
+              <a:pPr algn="ctr"/>
+            </a:p>
+          </p:txBody>
+        </p:sp>
+        <p:sp>
+          <p:nvSpPr>
+            <p:cNvPr id="514" name="BrandDeck Icon rocket"/>
+            <p:cNvSpPr/>
+            <p:nvPr/>
+          </p:nvSpPr>
+          <p:spPr>
+            <a:xfrm>
+              <a:off x="4968267" y="3364343"/>
+              <a:ext cx="284386" cy="284386"/>
             </a:xfrm>
             <a:custGeom>
               <a:avLst/>
@@ -11906,63 +9726,125 @@
               <a:cxnLst/>
               <a:rect l="l" t="t" r="r" b="b"/>
               <a:pathLst>
-                <a:path w="1841" h="1540" stroke="0">
+                <a:path w="24000" h="24000" fill="none">
                   <a:moveTo>
-                    <a:pt x="447" y="0"/>
+                    <a:pt x="4500" y="16500"/>
+                  </a:moveTo>
+                  <a:cubicBezTo>
+                    <a:pt x="3000" y="17760"/>
+                    <a:pt x="2500" y="21500"/>
+                    <a:pt x="2500" y="21500"/>
+                  </a:cubicBezTo>
+                  <a:cubicBezTo>
+                    <a:pt x="2500" y="21500"/>
+                    <a:pt x="6240" y="21000"/>
+                    <a:pt x="7500" y="19500"/>
+                  </a:cubicBezTo>
+                  <a:cubicBezTo>
+                    <a:pt x="8210" y="18660"/>
+                    <a:pt x="8200" y="17370"/>
+                    <a:pt x="7410" y="16590"/>
+                  </a:cubicBezTo>
+                  <a:cubicBezTo>
+                    <a:pt x="6605" y="15822"/>
+                    <a:pt x="5351" y="15783"/>
+                    <a:pt x="4500" y="16500"/>
+                  </a:cubicBezTo>
+                  <a:close/>
+                </a:path>
+                <a:path w="24000" h="24000" fill="none">
+                  <a:moveTo>
+                    <a:pt x="12000" y="15000"/>
                   </a:moveTo>
                   <a:lnTo>
-                    <a:pt x="1394" y="0"/>
+                    <a:pt x="9000" y="12000"/>
                   </a:lnTo>
+                  <a:cubicBezTo>
+                    <a:pt x="9532" y="10619"/>
+                    <a:pt x="10202" y="9296"/>
+                    <a:pt x="11000" y="8050"/>
+                  </a:cubicBezTo>
+                  <a:cubicBezTo>
+                    <a:pt x="13369" y="4262"/>
+                    <a:pt x="17532" y="1972"/>
+                    <a:pt x="22000" y="2000"/>
+                  </a:cubicBezTo>
+                  <a:cubicBezTo>
+                    <a:pt x="22000" y="4720"/>
+                    <a:pt x="21220" y="9500"/>
+                    <a:pt x="16000" y="13000"/>
+                  </a:cubicBezTo>
+                  <a:cubicBezTo>
+                    <a:pt x="14737" y="13799"/>
+                    <a:pt x="13397" y="14469"/>
+                    <a:pt x="12000" y="15000"/>
+                  </a:cubicBezTo>
+                  <a:close/>
+                </a:path>
+                <a:path w="24000" h="24000" fill="none">
+                  <a:moveTo>
+                    <a:pt x="9000" y="12000"/>
+                  </a:moveTo>
                   <a:lnTo>
-                    <a:pt x="1841" y="1540"/>
+                    <a:pt x="4000" y="12000"/>
                   </a:lnTo>
+                  <a:cubicBezTo>
+                    <a:pt x="4000" y="12000"/>
+                    <a:pt x="4550" y="8970"/>
+                    <a:pt x="6000" y="8000"/>
+                  </a:cubicBezTo>
+                  <a:cubicBezTo>
+                    <a:pt x="7620" y="6920"/>
+                    <a:pt x="11000" y="8000"/>
+                    <a:pt x="11000" y="8000"/>
+                  </a:cubicBezTo>
+                </a:path>
+                <a:path w="24000" h="24000" fill="none">
+                  <a:moveTo>
+                    <a:pt x="12000" y="15000"/>
+                  </a:moveTo>
                   <a:lnTo>
-                    <a:pt x="0" y="1540"/>
+                    <a:pt x="12000" y="20000"/>
                   </a:lnTo>
-                  <a:close/>
+                  <a:cubicBezTo>
+                    <a:pt x="12000" y="20000"/>
+                    <a:pt x="15030" y="19450"/>
+                    <a:pt x="16000" y="18000"/>
+                  </a:cubicBezTo>
+                  <a:cubicBezTo>
+                    <a:pt x="17080" y="16380"/>
+                    <a:pt x="16000" y="13000"/>
+                    <a:pt x="16000" y="13000"/>
+                  </a:cubicBezTo>
                 </a:path>
               </a:pathLst>
             </a:custGeom>
-            <a:solidFill>
-              <a:srgbClr val="7DB4F5"/>
-            </a:solidFill>
-            <a:ln w="0">
-              <a:noFill/>
+            <a:noFill/>
+            <a:ln w="23698" cap="rnd">
+              <a:solidFill>
+                <a:srgbClr val="FFFFFF"/>
+              </a:solidFill>
+              <a:round/>
             </a:ln>
           </p:spPr>
           <p:txBody>
-            <a:bodyPr rtlCol="0" anchor="ctr" wrap="square" lIns="18288" tIns="0" rIns="18288" bIns="0">
-              <a:noAutofit/>
-            </a:bodyPr>
+            <a:bodyPr rtlCol="0" anchor="ctr"/>
             <a:lstStyle/>
             <a:p>
-              <a:pPr algn="ctr">
-                <a:lnSpc>
-                  <a:spcPct val="110000"/>
-                </a:lnSpc>
-              </a:pPr>
-              <a:r>
-                <a:rPr sz="1410" b="1">
-                  <a:solidFill>
-                    <a:srgbClr val="000000"/>
-                  </a:solidFill>
-                  <a:latin typeface="Play"/>
-                </a:rPr>
-                <a:t>02</a:t>
-              </a:r>
+              <a:pPr algn="ctr"/>
             </a:p>
           </p:txBody>
         </p:sp>
         <p:sp>
           <p:nvSpPr>
-            <p:cNvPr id="511" name="BrandDeck Diagram Text 2"/>
+            <p:cNvPr id="515" name="BrandDeck Diagram Text 2"/>
             <p:cNvSpPr txBox="1"/>
             <p:nvPr/>
           </p:nvSpPr>
           <p:spPr>
             <a:xfrm>
-              <a:off x="6610858" y="2474938"/>
-              <a:ext cx="1888616" cy="1408176"/>
+              <a:off x="5496049" y="2731366"/>
+              <a:ext cx="2783969" cy="1550339"/>
             </a:xfrm>
             <a:prstGeom prst="rect">
               <a:avLst/>
@@ -11981,13 +9863,13 @@
                 </a:lnSpc>
               </a:pPr>
               <a:r>
-                <a:rPr sz="1600" b="1">
+                <a:rPr sz="1800" b="1">
                   <a:solidFill>
                     <a:srgbClr val="000000"/>
                   </a:solidFill>
                   <a:latin typeface="Play"/>
                 </a:rPr>
-                <a:t>150 сотрудников</a:t>
+                <a:t>Длительность</a:t>
               </a:r>
             </a:p>
             <a:p>
@@ -11996,22 +9878,385 @@
                   <a:spcPct val="110000"/>
                 </a:lnSpc>
                 <a:spcBef>
-                  <a:spcPts val="400"/>
+                  <a:spcPts val="450"/>
                 </a:spcBef>
               </a:pPr>
               <a:r>
-                <a:rPr sz="1600" b="0">
+                <a:rPr sz="1800" b="0">
                   <a:solidFill>
                     <a:srgbClr val="000000"/>
                   </a:solidFill>
                   <a:latin typeface="Play"/>
                 </a:rPr>
-                <a:t>Общее число участников</a:t>
+                <a:t>6 недель пилотного запуска</a:t>
               </a:r>
             </a:p>
           </p:txBody>
         </p:sp>
       </p:grpSp>
+    </p:spTree>
+  </p:cSld>
+  <p:clrMapOvr>
+    <a:masterClrMapping/>
+  </p:clrMapOvr>
+</p:sld>
+</file>
+
+<file path=ppt/slides/slide8.xml><?xml version="1.0" encoding="utf-8"?>
+<p:sld xmlns:a="http://schemas.openxmlformats.org/drawingml/2006/main" xmlns:p="http://schemas.openxmlformats.org/presentationml/2006/main" xmlns:r="http://schemas.openxmlformats.org/officeDocument/2006/relationships">
+  <p:cSld>
+    <p:spTree>
+      <p:nvGrpSpPr>
+        <p:cNvPr id="1" name=""/>
+        <p:cNvGrpSpPr/>
+        <p:nvPr/>
+      </p:nvGrpSpPr>
+      <p:grpSpPr/>
+      <p:sp>
+        <p:nvSpPr>
+          <p:cNvPr id="662" name="Google Shape;662;p55"/>
+          <p:cNvSpPr/>
+          <p:nvPr/>
+        </p:nvSpPr>
+        <p:spPr>
+          <a:xfrm>
+            <a:off x="8667705" y="4666977"/>
+            <a:ext cx="190499" cy="190475"/>
+          </a:xfrm>
+          <a:prstGeom prst="rect">
+            <a:avLst/>
+          </a:prstGeom>
+          <a:noFill/>
+          <a:ln>
+            <a:noFill/>
+          </a:ln>
+        </p:spPr>
+        <p:txBody>
+          <a:bodyPr anchorCtr="0" anchor="ctr" bIns="91425" lIns="91425" spcFirstLastPara="1" rIns="91425" wrap="square" tIns="91425">
+            <a:noAutofit/>
+          </a:bodyPr>
+          <a:lstStyle/>
+          <a:p>
+            <a:pPr indent="0" lvl="0" marL="0" rtl="0" algn="l">
+              <a:spcBef>
+                <a:spcPts val="0"/>
+              </a:spcBef>
+              <a:spcAft>
+                <a:spcPts val="0"/>
+              </a:spcAft>
+              <a:buNone/>
+            </a:pPr>
+            <a:r>
+              <a:t/>
+            </a:r>
+            <a:endParaRPr/>
+          </a:p>
+        </p:txBody>
+      </p:sp>
+      <p:sp>
+        <p:nvSpPr>
+          <p:cNvPr id="663" name="Google Shape;663;p55"/>
+          <p:cNvSpPr/>
+          <p:nvPr/>
+        </p:nvSpPr>
+        <p:spPr>
+          <a:xfrm>
+            <a:off x="285748" y="286047"/>
+            <a:ext cx="8572456" cy="3938075"/>
+          </a:xfrm>
+          <a:prstGeom prst="rect">
+            <a:avLst/>
+          </a:prstGeom>
+          <a:noFill/>
+          <a:ln>
+            <a:noFill/>
+          </a:ln>
+        </p:spPr>
+        <p:txBody>
+          <a:bodyPr anchorCtr="0" anchor="ctr" bIns="91425" lIns="91425" spcFirstLastPara="1" rIns="91425" wrap="square" tIns="91425">
+            <a:noAutofit/>
+          </a:bodyPr>
+          <a:lstStyle/>
+          <a:p>
+            <a:pPr indent="0" lvl="0" marL="0" rtl="0" algn="l">
+              <a:spcBef>
+                <a:spcPts val="0"/>
+              </a:spcBef>
+              <a:spcAft>
+                <a:spcPts val="0"/>
+              </a:spcAft>
+              <a:buNone/>
+            </a:pPr>
+            <a:r>
+              <a:t/>
+            </a:r>
+            <a:endParaRPr/>
+          </a:p>
+        </p:txBody>
+      </p:sp>
+      <p:sp>
+        <p:nvSpPr>
+          <p:cNvPr id="664" name="Google Shape;664;p55"/>
+          <p:cNvSpPr/>
+          <p:nvPr/>
+        </p:nvSpPr>
+        <p:spPr>
+          <a:xfrm>
+            <a:off x="285748" y="1209852"/>
+            <a:ext cx="8572456" cy="3014270"/>
+          </a:xfrm>
+          <a:prstGeom prst="rect">
+            <a:avLst/>
+          </a:prstGeom>
+          <a:noFill/>
+          <a:ln>
+            <a:noFill/>
+          </a:ln>
+        </p:spPr>
+        <p:txBody>
+          <a:bodyPr anchorCtr="0" anchor="ctr" bIns="91425" lIns="91425" spcFirstLastPara="1" rIns="91425" wrap="square" tIns="91425">
+            <a:noAutofit/>
+          </a:bodyPr>
+          <a:lstStyle/>
+          <a:p>
+            <a:pPr indent="0" lvl="0" marL="0" rtl="0" algn="l">
+              <a:spcBef>
+                <a:spcPts val="0"/>
+              </a:spcBef>
+              <a:spcAft>
+                <a:spcPts val="0"/>
+              </a:spcAft>
+              <a:buNone/>
+            </a:pPr>
+            <a:r>
+              <a:t/>
+            </a:r>
+            <a:endParaRPr/>
+          </a:p>
+        </p:txBody>
+      </p:sp>
+      <p:sp>
+        <p:nvSpPr>
+          <p:cNvPr id="685" name="BrandDeck Text 685"/>
+          <p:cNvSpPr txBox="1"/>
+          <p:nvPr>
+            <p:ph type="title"/>
+          </p:nvPr>
+        </p:nvSpPr>
+        <p:spPr>
+          <a:xfrm>
+            <a:off x="177970" y="282949"/>
+            <a:ext cx="6792985" cy="724203"/>
+          </a:xfrm>
+          <a:prstGeom prst="rect">
+            <a:avLst/>
+          </a:prstGeom>
+          <a:noFill/>
+          <a:ln>
+            <a:noFill/>
+          </a:ln>
+        </p:spPr>
+        <p:txBody>
+          <a:bodyPr anchorCtr="0" anchor="t" bIns="45700" lIns="91425" spcFirstLastPara="1" rIns="91425" wrap="square" tIns="45700" vert="horz">
+            <a:normAutofit/>
+          </a:bodyPr>
+          <a:lstStyle/>
+          <a:p>
+            <a:pPr indent="0" marL="0" rtl="0" algn="l">
+              <a:lnSpc>
+                <a:spcPct val="115000"/>
+              </a:lnSpc>
+              <a:spcBef>
+                <a:spcPts val="0"/>
+              </a:spcBef>
+              <a:spcAft>
+                <a:spcPts val="270"/>
+              </a:spcAft>
+              <a:buClr>
+                <a:schemeClr val="dk1"/>
+              </a:buClr>
+              <a:buSzPts val="2400"/>
+              <a:buFont typeface="Play"/>
+              <a:buNone/>
+            </a:pPr>
+            <a:r>
+              <a:rPr sz="1800"/>
+              <a:t>Успех пилота измеряется временем поиска ответа и долей закрытых без специалиста обращений</a:t>
+            </a:r>
+            <a:endParaRPr/>
+          </a:p>
+        </p:txBody>
+      </p:sp>
+      <p:graphicFrame>
+        <p:nvGraphicFramePr>
+          <p:cNvPr id="686" name="BrandDeck Table"/>
+          <p:cNvGraphicFramePr>
+            <a:graphicFrameLocks noGrp="1"/>
+          </p:cNvGraphicFramePr>
+          <p:nvPr/>
+        </p:nvGraphicFramePr>
+        <p:xfrm>
+          <a:off x="438148" y="1819373"/>
+          <a:ext cx="8305757" cy="1528572"/>
+        </p:xfrm>
+        <a:graphic>
+          <a:graphicData uri="http://schemas.openxmlformats.org/drawingml/2006/table">
+            <a:tbl>
+              <a:tblPr firstRow="1" bandRow="1">
+                <a:tableStyleId>{5C22544A-7EE6-4342-B048-85BDC9FD1C3A}</a:tableStyleId>
+              </a:tblPr>
+              <a:tblGrid>
+                <a:gridCol w="4152878"/>
+                <a:gridCol w="4152879"/>
+              </a:tblGrid>
+              <a:tr h="364236">
+                <a:tc>
+                  <a:txBody>
+                    <a:bodyPr/>
+                    <a:lstStyle/>
+                    <a:p>
+                      <a:pPr algn="l"/>
+                      <a:r>
+                        <a:rPr sz="1320" b="1">
+                          <a:solidFill>
+                            <a:srgbClr val="FFFFFF"/>
+                          </a:solidFill>
+                          <a:latin typeface="Play"/>
+                        </a:rPr>
+                        <a:t>Метрика</a:t>
+                      </a:r>
+                    </a:p>
+                  </a:txBody>
+                  <a:tcPr marL="54864" marR="54864" anchor="ctr">
+                    <a:solidFill>
+                      <a:srgbClr val="006DEB"/>
+                    </a:solidFill>
+                  </a:tcPr>
+                </a:tc>
+                <a:tc>
+                  <a:txBody>
+                    <a:bodyPr/>
+                    <a:lstStyle/>
+                    <a:p>
+                      <a:pPr algn="l"/>
+                      <a:r>
+                        <a:rPr sz="1320" b="1">
+                          <a:solidFill>
+                            <a:srgbClr val="FFFFFF"/>
+                          </a:solidFill>
+                          <a:latin typeface="Play"/>
+                        </a:rPr>
+                        <a:t>Что измеряется</a:t>
+                      </a:r>
+                    </a:p>
+                  </a:txBody>
+                  <a:tcPr marL="54864" marR="54864" anchor="ctr">
+                    <a:solidFill>
+                      <a:srgbClr val="006DEB"/>
+                    </a:solidFill>
+                  </a:tcPr>
+                </a:tc>
+              </a:tr>
+              <a:tr h="582168">
+                <a:tc>
+                  <a:txBody>
+                    <a:bodyPr/>
+                    <a:lstStyle/>
+                    <a:p>
+                      <a:pPr algn="l"/>
+                      <a:r>
+                        <a:rPr sz="1320" b="0">
+                          <a:solidFill>
+                            <a:srgbClr val="111111"/>
+                          </a:solidFill>
+                          <a:latin typeface="Play"/>
+                        </a:rPr>
+                        <a:t>Время поиска ответа</a:t>
+                      </a:r>
+                    </a:p>
+                  </a:txBody>
+                  <a:tcPr marL="54864" marR="54864" anchor="ctr">
+                    <a:solidFill>
+                      <a:srgbClr val="FEFFFF"/>
+                    </a:solidFill>
+                  </a:tcPr>
+                </a:tc>
+                <a:tc>
+                  <a:txBody>
+                    <a:bodyPr/>
+                    <a:lstStyle/>
+                    <a:p>
+                      <a:pPr algn="l"/>
+                      <a:r>
+                        <a:rPr sz="1320" b="0">
+                          <a:solidFill>
+                            <a:srgbClr val="111111"/>
+                          </a:solidFill>
+                          <a:latin typeface="Play"/>
+                        </a:rPr>
+                        <a:t>Сколько времени сотрудник тратит на поиск нужной инструкции</a:t>
+                      </a:r>
+                    </a:p>
+                  </a:txBody>
+                  <a:tcPr marL="54864" marR="54864" anchor="ctr">
+                    <a:solidFill>
+                      <a:srgbClr val="FEFFFF"/>
+                    </a:solidFill>
+                  </a:tcPr>
+                </a:tc>
+              </a:tr>
+              <a:tr h="582168">
+                <a:tc>
+                  <a:txBody>
+                    <a:bodyPr/>
+                    <a:lstStyle/>
+                    <a:p>
+                      <a:pPr algn="l"/>
+                      <a:r>
+                        <a:rPr sz="1320" b="0">
+                          <a:solidFill>
+                            <a:srgbClr val="111111"/>
+                          </a:solidFill>
+                          <a:latin typeface="Play"/>
+                        </a:rPr>
+                        <a:t>Доля закрытых обращений</a:t>
+                      </a:r>
+                    </a:p>
+                  </a:txBody>
+                  <a:tcPr marL="54864" marR="54864" anchor="ctr">
+                    <a:solidFill>
+                      <a:srgbClr val="FEFFFF"/>
+                    </a:solidFill>
+                  </a:tcPr>
+                </a:tc>
+                <a:tc>
+                  <a:txBody>
+                    <a:bodyPr/>
+                    <a:lstStyle/>
+                    <a:p>
+                      <a:pPr algn="l"/>
+                      <a:r>
+                        <a:rPr sz="1320" b="0">
+                          <a:solidFill>
+                            <a:srgbClr val="111111"/>
+                          </a:solidFill>
+                          <a:latin typeface="Play"/>
+                        </a:rPr>
+                        <a:t>Процент вопросов, решённых ИИ без участия специалиста</a:t>
+                      </a:r>
+                    </a:p>
+                  </a:txBody>
+                  <a:tcPr marL="54864" marR="54864" anchor="ctr">
+                    <a:solidFill>
+                      <a:srgbClr val="FEFFFF"/>
+                    </a:solidFill>
+                  </a:tcPr>
+                </a:tc>
+              </a:tr>
+            </a:tbl>
+          </a:graphicData>
+        </a:graphic>
+      </p:graphicFrame>
     </p:spTree>
   </p:cSld>
   <p:clrMapOvr>
@@ -12047,7 +10292,7 @@
           </a:xfrm>
         </p:spPr>
         <p:txBody>
-          <a:bodyPr wrap="square" anchor="t">
+          <a:bodyPr vert="horz" wrap="square" anchor="t">
             <a:normAutofit/>
           </a:bodyPr>
           <a:lstStyle/>
@@ -12060,75 +10305,48 @@
                 <a:spcPts val="0"/>
               </a:spcBef>
               <a:spcAft>
-                <a:spcPts val="270"/>
+                <a:spcPts val="240"/>
               </a:spcAft>
             </a:pPr>
             <a:r>
-              <a:rPr sz="1800"/>
-              <a:t>Срок пилота составляет 6 недель</a:t>
+              <a:rPr sz="1600"/>
+              <a:t>Пилот длится 6 недель, требуется команда из 3 человек</a:t>
             </a:r>
           </a:p>
         </p:txBody>
       </p:sp>
       <p:grpSp>
         <p:nvGrpSpPr>
-          <p:cNvPr id="3" name="BrandDeck Diagram cycle" descr="cycle: Старт Запуск в 2 подразделениях; Процесс Сбор данных 6 недель; Финал Анализ метрик эффективности"/>
+          <p:cNvPr id="3" name="BrandDeck Diagram icon_grid" descr="icon_grid: Пилот длится 6 недель.; Требуется команда из 3 человек.; Успех измеряется временем поиска и долей закрытых обращений."/>
           <p:cNvGrpSpPr/>
           <p:nvPr/>
         </p:nvGrpSpPr>
         <p:grpSpPr>
           <a:xfrm>
-            <a:off x="4708141" y="711456"/>
-            <a:ext cx="3791333" cy="3666745"/>
-            <a:chOff x="4708141" y="711456"/>
-            <a:chExt cx="3791333" cy="3666745"/>
+            <a:off x="4637088" y="676278"/>
+            <a:ext cx="3862387" cy="3737101"/>
+            <a:chOff x="4637088" y="676278"/>
+            <a:chExt cx="3862387" cy="3737101"/>
           </a:xfrm>
         </p:grpSpPr>
         <p:sp>
           <p:nvSpPr>
-            <p:cNvPr id="4" name="BrandDeck Diagram Ring"/>
+            <p:cNvPr id="4" name="BrandDeck Diagram Card 1"/>
             <p:cNvSpPr/>
             <p:nvPr/>
           </p:nvSpPr>
           <p:spPr>
             <a:xfrm>
-              <a:off x="4838256" y="2014477"/>
-              <a:ext cx="1060704" cy="1060704"/>
+              <a:off x="4637088" y="676278"/>
+              <a:ext cx="3862387" cy="1172548"/>
             </a:xfrm>
-            <a:prstGeom prst="ellipse">
-              <a:avLst/>
-            </a:prstGeom>
-            <a:noFill/>
-            <a:ln w="28575">
-              <a:solidFill>
-                <a:srgbClr val="58A6FF"/>
-              </a:solidFill>
-            </a:ln>
-          </p:spPr>
-          <p:txBody>
-            <a:bodyPr rtlCol="0" anchor="ctr"/>
-            <a:lstStyle/>
-            <a:p>
-              <a:pPr algn="ctr"/>
-            </a:p>
-          </p:txBody>
-        </p:sp>
-        <p:sp>
-          <p:nvSpPr>
-            <p:cNvPr id="5" name="BrandDeck Diagram Arrow 1"/>
-            <p:cNvSpPr/>
-            <p:nvPr/>
-          </p:nvSpPr>
-          <p:spPr>
-            <a:xfrm rot="9000000">
-              <a:off x="5755485" y="2207232"/>
-              <a:ext cx="144840" cy="144840"/>
-            </a:xfrm>
-            <a:prstGeom prst="triangle">
-              <a:avLst/>
+            <a:prstGeom prst="roundRect">
+              <a:avLst>
+                <a:gd name="adj" fmla="val 8000"/>
+              </a:avLst>
             </a:prstGeom>
             <a:solidFill>
-              <a:srgbClr val="58A6FF"/>
+              <a:srgbClr val="1A1A1A"/>
             </a:solidFill>
             <a:ln>
               <a:noFill/>
@@ -12144,20 +10362,20 @@
         </p:sp>
         <p:sp>
           <p:nvSpPr>
-            <p:cNvPr id="6" name="BrandDeck Diagram Arrow 2"/>
+            <p:cNvPr id="5" name="BrandDeck Diagram Icon 1 Badge"/>
             <p:cNvSpPr/>
             <p:nvPr/>
           </p:nvSpPr>
           <p:spPr>
-            <a:xfrm rot="16200000">
-              <a:off x="5296187" y="3002760"/>
-              <a:ext cx="144840" cy="144840"/>
+            <a:xfrm>
+              <a:off x="4856544" y="1079672"/>
+              <a:ext cx="365760" cy="365760"/>
             </a:xfrm>
-            <a:prstGeom prst="triangle">
+            <a:prstGeom prst="ellipse">
               <a:avLst/>
             </a:prstGeom>
             <a:solidFill>
-              <a:srgbClr val="58A6FF"/>
+              <a:srgbClr val="006DEB"/>
             </a:solidFill>
             <a:ln>
               <a:noFill/>
@@ -12173,23 +10391,121 @@
         </p:sp>
         <p:sp>
           <p:nvSpPr>
-            <p:cNvPr id="7" name="BrandDeck Diagram Arrow 3"/>
+            <p:cNvPr id="6" name="BrandDeck Icon rocket"/>
             <p:cNvSpPr/>
             <p:nvPr/>
           </p:nvSpPr>
           <p:spPr>
-            <a:xfrm rot="1800000">
-              <a:off x="4836889" y="2207232"/>
-              <a:ext cx="144840" cy="144840"/>
+            <a:xfrm>
+              <a:off x="4937011" y="1160139"/>
+              <a:ext cx="204825" cy="204825"/>
             </a:xfrm>
-            <a:prstGeom prst="triangle">
+            <a:custGeom>
               <a:avLst/>
-            </a:prstGeom>
-            <a:solidFill>
-              <a:srgbClr val="58A6FF"/>
-            </a:solidFill>
-            <a:ln>
-              <a:noFill/>
+              <a:gdLst/>
+              <a:ahLst/>
+              <a:cxnLst/>
+              <a:rect l="l" t="t" r="r" b="b"/>
+              <a:pathLst>
+                <a:path w="24000" h="24000" fill="none">
+                  <a:moveTo>
+                    <a:pt x="4500" y="16500"/>
+                  </a:moveTo>
+                  <a:cubicBezTo>
+                    <a:pt x="3000" y="17760"/>
+                    <a:pt x="2500" y="21500"/>
+                    <a:pt x="2500" y="21500"/>
+                  </a:cubicBezTo>
+                  <a:cubicBezTo>
+                    <a:pt x="2500" y="21500"/>
+                    <a:pt x="6240" y="21000"/>
+                    <a:pt x="7500" y="19500"/>
+                  </a:cubicBezTo>
+                  <a:cubicBezTo>
+                    <a:pt x="8210" y="18660"/>
+                    <a:pt x="8200" y="17370"/>
+                    <a:pt x="7410" y="16590"/>
+                  </a:cubicBezTo>
+                  <a:cubicBezTo>
+                    <a:pt x="6605" y="15822"/>
+                    <a:pt x="5351" y="15783"/>
+                    <a:pt x="4500" y="16500"/>
+                  </a:cubicBezTo>
+                  <a:close/>
+                </a:path>
+                <a:path w="24000" h="24000" fill="none">
+                  <a:moveTo>
+                    <a:pt x="12000" y="15000"/>
+                  </a:moveTo>
+                  <a:lnTo>
+                    <a:pt x="9000" y="12000"/>
+                  </a:lnTo>
+                  <a:cubicBezTo>
+                    <a:pt x="9532" y="10619"/>
+                    <a:pt x="10202" y="9296"/>
+                    <a:pt x="11000" y="8050"/>
+                  </a:cubicBezTo>
+                  <a:cubicBezTo>
+                    <a:pt x="13369" y="4262"/>
+                    <a:pt x="17532" y="1972"/>
+                    <a:pt x="22000" y="2000"/>
+                  </a:cubicBezTo>
+                  <a:cubicBezTo>
+                    <a:pt x="22000" y="4720"/>
+                    <a:pt x="21220" y="9500"/>
+                    <a:pt x="16000" y="13000"/>
+                  </a:cubicBezTo>
+                  <a:cubicBezTo>
+                    <a:pt x="14737" y="13799"/>
+                    <a:pt x="13397" y="14469"/>
+                    <a:pt x="12000" y="15000"/>
+                  </a:cubicBezTo>
+                  <a:close/>
+                </a:path>
+                <a:path w="24000" h="24000" fill="none">
+                  <a:moveTo>
+                    <a:pt x="9000" y="12000"/>
+                  </a:moveTo>
+                  <a:lnTo>
+                    <a:pt x="4000" y="12000"/>
+                  </a:lnTo>
+                  <a:cubicBezTo>
+                    <a:pt x="4000" y="12000"/>
+                    <a:pt x="4550" y="8970"/>
+                    <a:pt x="6000" y="8000"/>
+                  </a:cubicBezTo>
+                  <a:cubicBezTo>
+                    <a:pt x="7620" y="6920"/>
+                    <a:pt x="11000" y="8000"/>
+                    <a:pt x="11000" y="8000"/>
+                  </a:cubicBezTo>
+                </a:path>
+                <a:path w="24000" h="24000" fill="none">
+                  <a:moveTo>
+                    <a:pt x="12000" y="15000"/>
+                  </a:moveTo>
+                  <a:lnTo>
+                    <a:pt x="12000" y="20000"/>
+                  </a:lnTo>
+                  <a:cubicBezTo>
+                    <a:pt x="12000" y="20000"/>
+                    <a:pt x="15030" y="19450"/>
+                    <a:pt x="16000" y="18000"/>
+                  </a:cubicBezTo>
+                  <a:cubicBezTo>
+                    <a:pt x="17080" y="16380"/>
+                    <a:pt x="16000" y="13000"/>
+                    <a:pt x="16000" y="13000"/>
+                  </a:cubicBezTo>
+                </a:path>
+              </a:pathLst>
+            </a:custGeom>
+            <a:noFill/>
+            <a:ln w="17068" cap="rnd">
+              <a:solidFill>
+                <a:srgbClr val="FFFFFF"/>
+              </a:solidFill>
+              <a:round/>
             </a:ln>
           </p:spPr>
           <p:txBody>
@@ -12202,190 +10518,14 @@
         </p:sp>
         <p:sp>
           <p:nvSpPr>
-            <p:cNvPr id="8" name="BrandDeck Diagram Node 1 Badge"/>
-            <p:cNvSpPr/>
-            <p:nvPr/>
-          </p:nvSpPr>
-          <p:spPr>
-            <a:xfrm>
-              <a:off x="5167440" y="1813309"/>
-              <a:ext cx="402336" cy="402336"/>
-            </a:xfrm>
-            <a:prstGeom prst="ellipse">
-              <a:avLst/>
-            </a:prstGeom>
-            <a:solidFill>
-              <a:srgbClr val="006DEB"/>
-            </a:solidFill>
-            <a:ln>
-              <a:noFill/>
-            </a:ln>
-          </p:spPr>
-          <p:txBody>
-            <a:bodyPr rtlCol="0" anchor="ctr" wrap="square" lIns="0" tIns="0" rIns="0" bIns="0">
-              <a:noAutofit/>
-            </a:bodyPr>
-            <a:lstStyle/>
-            <a:p>
-              <a:pPr algn="ctr">
-                <a:lnSpc>
-                  <a:spcPct val="110000"/>
-                </a:lnSpc>
-              </a:pPr>
-              <a:r>
-                <a:rPr sz="1100" b="1">
-                  <a:solidFill>
-                    <a:srgbClr val="FFFFFF"/>
-                  </a:solidFill>
-                  <a:latin typeface="Play"/>
-                </a:rPr>
-                <a:t>01</a:t>
-              </a:r>
-            </a:p>
-          </p:txBody>
-        </p:sp>
-        <p:sp>
-          <p:nvSpPr>
-            <p:cNvPr id="9" name="BrandDeck Diagram Node 2 Badge"/>
-            <p:cNvSpPr/>
-            <p:nvPr/>
-          </p:nvSpPr>
-          <p:spPr>
-            <a:xfrm>
-              <a:off x="5626738" y="2608837"/>
-              <a:ext cx="402336" cy="402336"/>
-            </a:xfrm>
-            <a:prstGeom prst="ellipse">
-              <a:avLst/>
-            </a:prstGeom>
-            <a:solidFill>
-              <a:srgbClr val="006DEB"/>
-            </a:solidFill>
-            <a:ln>
-              <a:noFill/>
-            </a:ln>
-          </p:spPr>
-          <p:txBody>
-            <a:bodyPr rtlCol="0" anchor="ctr" wrap="square" lIns="0" tIns="0" rIns="0" bIns="0">
-              <a:noAutofit/>
-            </a:bodyPr>
-            <a:lstStyle/>
-            <a:p>
-              <a:pPr algn="ctr">
-                <a:lnSpc>
-                  <a:spcPct val="110000"/>
-                </a:lnSpc>
-              </a:pPr>
-              <a:r>
-                <a:rPr sz="1100" b="1">
-                  <a:solidFill>
-                    <a:srgbClr val="FFFFFF"/>
-                  </a:solidFill>
-                  <a:latin typeface="Play"/>
-                </a:rPr>
-                <a:t>02</a:t>
-              </a:r>
-            </a:p>
-          </p:txBody>
-        </p:sp>
-        <p:sp>
-          <p:nvSpPr>
-            <p:cNvPr id="10" name="BrandDeck Diagram Node 3 Badge"/>
-            <p:cNvSpPr/>
-            <p:nvPr/>
-          </p:nvSpPr>
-          <p:spPr>
-            <a:xfrm>
-              <a:off x="4708141" y="2608837"/>
-              <a:ext cx="402336" cy="402336"/>
-            </a:xfrm>
-            <a:prstGeom prst="ellipse">
-              <a:avLst/>
-            </a:prstGeom>
-            <a:solidFill>
-              <a:srgbClr val="006DEB"/>
-            </a:solidFill>
-            <a:ln>
-              <a:noFill/>
-            </a:ln>
-          </p:spPr>
-          <p:txBody>
-            <a:bodyPr rtlCol="0" anchor="ctr" wrap="square" lIns="0" tIns="0" rIns="0" bIns="0">
-              <a:noAutofit/>
-            </a:bodyPr>
-            <a:lstStyle/>
-            <a:p>
-              <a:pPr algn="ctr">
-                <a:lnSpc>
-                  <a:spcPct val="110000"/>
-                </a:lnSpc>
-              </a:pPr>
-              <a:r>
-                <a:rPr sz="1100" b="1">
-                  <a:solidFill>
-                    <a:srgbClr val="FFFFFF"/>
-                  </a:solidFill>
-                  <a:latin typeface="Play"/>
-                </a:rPr>
-                <a:t>03</a:t>
-              </a:r>
-            </a:p>
-          </p:txBody>
-        </p:sp>
-        <p:sp>
-          <p:nvSpPr>
-            <p:cNvPr id="11" name="BrandDeck Diagram Legend 1 Badge"/>
-            <p:cNvSpPr/>
-            <p:nvPr/>
-          </p:nvSpPr>
-          <p:spPr>
-            <a:xfrm>
-              <a:off x="6420168" y="1154941"/>
-              <a:ext cx="310896" cy="310896"/>
-            </a:xfrm>
-            <a:prstGeom prst="ellipse">
-              <a:avLst/>
-            </a:prstGeom>
-            <a:solidFill>
-              <a:srgbClr val="006DEB"/>
-            </a:solidFill>
-            <a:ln>
-              <a:noFill/>
-            </a:ln>
-          </p:spPr>
-          <p:txBody>
-            <a:bodyPr rtlCol="0" anchor="ctr" wrap="square" lIns="0" tIns="0" rIns="0" bIns="0">
-              <a:noAutofit/>
-            </a:bodyPr>
-            <a:lstStyle/>
-            <a:p>
-              <a:pPr algn="ctr">
-                <a:lnSpc>
-                  <a:spcPct val="110000"/>
-                </a:lnSpc>
-              </a:pPr>
-              <a:r>
-                <a:rPr sz="1000" b="1">
-                  <a:solidFill>
-                    <a:srgbClr val="FFFFFF"/>
-                  </a:solidFill>
-                  <a:latin typeface="Play"/>
-                </a:rPr>
-                <a:t>01</a:t>
-              </a:r>
-            </a:p>
-          </p:txBody>
-        </p:sp>
-        <p:sp>
-          <p:nvSpPr>
-            <p:cNvPr id="12" name="BrandDeck Diagram Text 1"/>
+            <p:cNvPr id="7" name="BrandDeck Diagram Text 1"/>
             <p:cNvSpPr txBox="1"/>
             <p:nvPr/>
           </p:nvSpPr>
           <p:spPr>
             <a:xfrm>
-              <a:off x="6877368" y="711456"/>
-              <a:ext cx="1622106" cy="1197864"/>
+              <a:off x="5353977" y="807951"/>
+              <a:ext cx="2926041" cy="909201"/>
             </a:xfrm>
             <a:prstGeom prst="rect">
               <a:avLst/>
@@ -12404,46 +10544,58 @@
                 </a:lnSpc>
               </a:pPr>
               <a:r>
-                <a:rPr sz="1410" b="1">
+                <a:rPr sz="1600" b="0">
                   <a:solidFill>
-                    <a:srgbClr val="000000"/>
+                    <a:srgbClr val="FFFFFF"/>
                   </a:solidFill>
                   <a:latin typeface="Play"/>
                 </a:rPr>
-                <a:t>Старт</a:t>
-              </a:r>
-            </a:p>
-            <a:p>
-              <a:pPr algn="l">
-                <a:lnSpc>
-                  <a:spcPct val="110000"/>
-                </a:lnSpc>
-                <a:spcBef>
-                  <a:spcPts val="352"/>
-                </a:spcBef>
-              </a:pPr>
-              <a:r>
-                <a:rPr sz="1410" b="0">
-                  <a:solidFill>
-                    <a:srgbClr val="000000"/>
-                  </a:solidFill>
-                  <a:latin typeface="Play"/>
-                </a:rPr>
-                <a:t>Запуск в 2 подразделениях</a:t>
+                <a:t>Пилот длится 6 недель.</a:t>
               </a:r>
             </a:p>
           </p:txBody>
         </p:sp>
         <p:sp>
           <p:nvSpPr>
-            <p:cNvPr id="13" name="BrandDeck Diagram Legend 2 Badge"/>
+            <p:cNvPr id="8" name="BrandDeck Diagram Card 2"/>
             <p:cNvSpPr/>
             <p:nvPr/>
           </p:nvSpPr>
           <p:spPr>
             <a:xfrm>
-              <a:off x="6420168" y="2389381"/>
-              <a:ext cx="310896" cy="310896"/>
+              <a:off x="4637088" y="1958554"/>
+              <a:ext cx="3862387" cy="1172548"/>
+            </a:xfrm>
+            <a:prstGeom prst="roundRect">
+              <a:avLst>
+                <a:gd name="adj" fmla="val 8000"/>
+              </a:avLst>
+            </a:prstGeom>
+            <a:solidFill>
+              <a:srgbClr val="1A1A1A"/>
+            </a:solidFill>
+            <a:ln>
+              <a:noFill/>
+            </a:ln>
+          </p:spPr>
+          <p:txBody>
+            <a:bodyPr rtlCol="0" anchor="ctr"/>
+            <a:lstStyle/>
+            <a:p>
+              <a:pPr algn="ctr"/>
+            </a:p>
+          </p:txBody>
+        </p:sp>
+        <p:sp>
+          <p:nvSpPr>
+            <p:cNvPr id="9" name="BrandDeck Diagram Icon 2 Badge"/>
+            <p:cNvSpPr/>
+            <p:nvPr/>
+          </p:nvSpPr>
+          <p:spPr>
+            <a:xfrm>
+              <a:off x="4856544" y="2361949"/>
+              <a:ext cx="365760" cy="365760"/>
             </a:xfrm>
             <a:prstGeom prst="ellipse">
               <a:avLst/>
@@ -12456,38 +10608,137 @@
             </a:ln>
           </p:spPr>
           <p:txBody>
-            <a:bodyPr rtlCol="0" anchor="ctr" wrap="square" lIns="0" tIns="0" rIns="0" bIns="0">
-              <a:noAutofit/>
-            </a:bodyPr>
+            <a:bodyPr rtlCol="0" anchor="ctr"/>
             <a:lstStyle/>
             <a:p>
-              <a:pPr algn="ctr">
-                <a:lnSpc>
-                  <a:spcPct val="110000"/>
-                </a:lnSpc>
-              </a:pPr>
-              <a:r>
-                <a:rPr sz="1000" b="1">
-                  <a:solidFill>
-                    <a:srgbClr val="FFFFFF"/>
-                  </a:solidFill>
-                  <a:latin typeface="Play"/>
-                </a:rPr>
-                <a:t>02</a:t>
-              </a:r>
+              <a:pPr algn="ctr"/>
             </a:p>
           </p:txBody>
         </p:sp>
         <p:sp>
           <p:nvSpPr>
-            <p:cNvPr id="14" name="BrandDeck Diagram Text 2"/>
+            <p:cNvPr id="10" name="BrandDeck Icon users"/>
+            <p:cNvSpPr/>
+            <p:nvPr/>
+          </p:nvSpPr>
+          <p:spPr>
+            <a:xfrm>
+              <a:off x="4937011" y="2442416"/>
+              <a:ext cx="204825" cy="204825"/>
+            </a:xfrm>
+            <a:custGeom>
+              <a:avLst/>
+              <a:gdLst/>
+              <a:ahLst/>
+              <a:cxnLst/>
+              <a:rect l="l" t="t" r="r" b="b"/>
+              <a:pathLst>
+                <a:path w="24000" h="24000" fill="none">
+                  <a:moveTo>
+                    <a:pt x="16000" y="21000"/>
+                  </a:moveTo>
+                  <a:lnTo>
+                    <a:pt x="16000" y="19000"/>
+                  </a:lnTo>
+                  <a:cubicBezTo>
+                    <a:pt x="16000" y="16791"/>
+                    <a:pt x="14209" y="15000"/>
+                    <a:pt x="12000" y="15000"/>
+                  </a:cubicBezTo>
+                  <a:lnTo>
+                    <a:pt x="6000" y="15000"/>
+                  </a:lnTo>
+                  <a:cubicBezTo>
+                    <a:pt x="3791" y="15000"/>
+                    <a:pt x="2000" y="16791"/>
+                    <a:pt x="2000" y="19000"/>
+                  </a:cubicBezTo>
+                  <a:lnTo>
+                    <a:pt x="2000" y="21000"/>
+                  </a:lnTo>
+                </a:path>
+                <a:path w="24000" h="24000" fill="none">
+                  <a:moveTo>
+                    <a:pt x="13000" y="7000"/>
+                  </a:moveTo>
+                  <a:cubicBezTo>
+                    <a:pt x="13000" y="9209"/>
+                    <a:pt x="11209" y="11000"/>
+                    <a:pt x="9000" y="11000"/>
+                  </a:cubicBezTo>
+                  <a:cubicBezTo>
+                    <a:pt x="6791" y="11000"/>
+                    <a:pt x="5000" y="9209"/>
+                    <a:pt x="5000" y="7000"/>
+                  </a:cubicBezTo>
+                  <a:cubicBezTo>
+                    <a:pt x="5000" y="4791"/>
+                    <a:pt x="6791" y="3000"/>
+                    <a:pt x="9000" y="3000"/>
+                  </a:cubicBezTo>
+                  <a:cubicBezTo>
+                    <a:pt x="11209" y="3000"/>
+                    <a:pt x="13000" y="4791"/>
+                    <a:pt x="13000" y="7000"/>
+                  </a:cubicBezTo>
+                  <a:close/>
+                </a:path>
+                <a:path w="24000" h="24000" fill="none">
+                  <a:moveTo>
+                    <a:pt x="22000" y="21000"/>
+                  </a:moveTo>
+                  <a:lnTo>
+                    <a:pt x="22000" y="19000"/>
+                  </a:lnTo>
+                  <a:cubicBezTo>
+                    <a:pt x="21999" y="17177"/>
+                    <a:pt x="20765" y="15586"/>
+                    <a:pt x="19000" y="15130"/>
+                  </a:cubicBezTo>
+                </a:path>
+                <a:path w="24000" h="24000" fill="none">
+                  <a:moveTo>
+                    <a:pt x="16000" y="3130"/>
+                  </a:moveTo>
+                  <a:cubicBezTo>
+                    <a:pt x="17770" y="3583"/>
+                    <a:pt x="19008" y="5178"/>
+                    <a:pt x="19008" y="7005"/>
+                  </a:cubicBezTo>
+                  <a:cubicBezTo>
+                    <a:pt x="19008" y="8832"/>
+                    <a:pt x="17770" y="10427"/>
+                    <a:pt x="16000" y="10880"/>
+                  </a:cubicBezTo>
+                </a:path>
+              </a:pathLst>
+            </a:custGeom>
+            <a:noFill/>
+            <a:ln w="17068" cap="rnd">
+              <a:solidFill>
+                <a:srgbClr val="FFFFFF"/>
+              </a:solidFill>
+              <a:round/>
+            </a:ln>
+          </p:spPr>
+          <p:txBody>
+            <a:bodyPr rtlCol="0" anchor="ctr"/>
+            <a:lstStyle/>
+            <a:p>
+              <a:pPr algn="ctr"/>
+            </a:p>
+          </p:txBody>
+        </p:sp>
+        <p:sp>
+          <p:nvSpPr>
+            <p:cNvPr id="11" name="BrandDeck Diagram Text 2"/>
             <p:cNvSpPr txBox="1"/>
             <p:nvPr/>
           </p:nvSpPr>
           <p:spPr>
             <a:xfrm>
-              <a:off x="6877368" y="1945897"/>
-              <a:ext cx="1622106" cy="1197864"/>
+              <a:off x="5353977" y="2090228"/>
+              <a:ext cx="2926041" cy="909201"/>
             </a:xfrm>
             <a:prstGeom prst="rect">
               <a:avLst/>
@@ -12506,46 +10757,58 @@
                 </a:lnSpc>
               </a:pPr>
               <a:r>
-                <a:rPr sz="1410" b="1">
+                <a:rPr sz="1600" b="0">
                   <a:solidFill>
-                    <a:srgbClr val="000000"/>
+                    <a:srgbClr val="FFFFFF"/>
                   </a:solidFill>
                   <a:latin typeface="Play"/>
                 </a:rPr>
-                <a:t>Процесс</a:t>
-              </a:r>
-            </a:p>
-            <a:p>
-              <a:pPr algn="l">
-                <a:lnSpc>
-                  <a:spcPct val="110000"/>
-                </a:lnSpc>
-                <a:spcBef>
-                  <a:spcPts val="352"/>
-                </a:spcBef>
-              </a:pPr>
-              <a:r>
-                <a:rPr sz="1410" b="0">
-                  <a:solidFill>
-                    <a:srgbClr val="000000"/>
-                  </a:solidFill>
-                  <a:latin typeface="Play"/>
-                </a:rPr>
-                <a:t>Сбор данных 6 недель</a:t>
+                <a:t>Требуется команда из 3 человек.</a:t>
               </a:r>
             </a:p>
           </p:txBody>
         </p:sp>
         <p:sp>
           <p:nvSpPr>
-            <p:cNvPr id="15" name="BrandDeck Diagram Legend 3 Badge"/>
+            <p:cNvPr id="12" name="BrandDeck Diagram Card 3"/>
             <p:cNvSpPr/>
             <p:nvPr/>
           </p:nvSpPr>
           <p:spPr>
             <a:xfrm>
-              <a:off x="6420168" y="3623821"/>
-              <a:ext cx="310896" cy="310896"/>
+              <a:off x="4637088" y="3240831"/>
+              <a:ext cx="3862387" cy="1172548"/>
+            </a:xfrm>
+            <a:prstGeom prst="roundRect">
+              <a:avLst>
+                <a:gd name="adj" fmla="val 8000"/>
+              </a:avLst>
+            </a:prstGeom>
+            <a:solidFill>
+              <a:srgbClr val="1A1A1A"/>
+            </a:solidFill>
+            <a:ln>
+              <a:noFill/>
+            </a:ln>
+          </p:spPr>
+          <p:txBody>
+            <a:bodyPr rtlCol="0" anchor="ctr"/>
+            <a:lstStyle/>
+            <a:p>
+              <a:pPr algn="ctr"/>
+            </a:p>
+          </p:txBody>
+        </p:sp>
+        <p:sp>
+          <p:nvSpPr>
+            <p:cNvPr id="13" name="BrandDeck Diagram Icon 3 Badge"/>
+            <p:cNvSpPr/>
+            <p:nvPr/>
+          </p:nvSpPr>
+          <p:spPr>
+            <a:xfrm>
+              <a:off x="4856544" y="3644225"/>
+              <a:ext cx="365760" cy="365760"/>
             </a:xfrm>
             <a:prstGeom prst="ellipse">
               <a:avLst/>
@@ -12558,38 +10821,99 @@
             </a:ln>
           </p:spPr>
           <p:txBody>
-            <a:bodyPr rtlCol="0" anchor="ctr" wrap="square" lIns="0" tIns="0" rIns="0" bIns="0">
-              <a:noAutofit/>
-            </a:bodyPr>
+            <a:bodyPr rtlCol="0" anchor="ctr"/>
             <a:lstStyle/>
             <a:p>
-              <a:pPr algn="ctr">
-                <a:lnSpc>
-                  <a:spcPct val="110000"/>
-                </a:lnSpc>
-              </a:pPr>
-              <a:r>
-                <a:rPr sz="1000" b="1">
-                  <a:solidFill>
-                    <a:srgbClr val="FFFFFF"/>
-                  </a:solidFill>
-                  <a:latin typeface="Play"/>
-                </a:rPr>
-                <a:t>03</a:t>
-              </a:r>
+              <a:pPr algn="ctr"/>
             </a:p>
           </p:txBody>
         </p:sp>
         <p:sp>
           <p:nvSpPr>
-            <p:cNvPr id="16" name="BrandDeck Diagram Text 3"/>
+            <p:cNvPr id="14" name="BrandDeck Icon chart-column"/>
+            <p:cNvSpPr/>
+            <p:nvPr/>
+          </p:nvSpPr>
+          <p:spPr>
+            <a:xfrm>
+              <a:off x="4937011" y="3724692"/>
+              <a:ext cx="204825" cy="204825"/>
+            </a:xfrm>
+            <a:custGeom>
+              <a:avLst/>
+              <a:gdLst/>
+              <a:ahLst/>
+              <a:cxnLst/>
+              <a:rect l="l" t="t" r="r" b="b"/>
+              <a:pathLst>
+                <a:path w="24000" h="24000" fill="none">
+                  <a:moveTo>
+                    <a:pt x="3000" y="3000"/>
+                  </a:moveTo>
+                  <a:lnTo>
+                    <a:pt x="3000" y="19000"/>
+                  </a:lnTo>
+                  <a:cubicBezTo>
+                    <a:pt x="3000" y="20105"/>
+                    <a:pt x="3895" y="21000"/>
+                    <a:pt x="5000" y="21000"/>
+                  </a:cubicBezTo>
+                  <a:lnTo>
+                    <a:pt x="21000" y="21000"/>
+                  </a:lnTo>
+                </a:path>
+                <a:path w="24000" h="24000" fill="none">
+                  <a:moveTo>
+                    <a:pt x="18000" y="17000"/>
+                  </a:moveTo>
+                  <a:lnTo>
+                    <a:pt x="18000" y="9000"/>
+                  </a:lnTo>
+                </a:path>
+                <a:path w="24000" h="24000" fill="none">
+                  <a:moveTo>
+                    <a:pt x="13000" y="17000"/>
+                  </a:moveTo>
+                  <a:lnTo>
+                    <a:pt x="13000" y="5000"/>
+                  </a:lnTo>
+                </a:path>
+                <a:path w="24000" h="24000" fill="none">
+                  <a:moveTo>
+                    <a:pt x="8000" y="17000"/>
+                  </a:moveTo>
+                  <a:lnTo>
+                    <a:pt x="8000" y="14000"/>
+                  </a:lnTo>
+                </a:path>
+              </a:pathLst>
+            </a:custGeom>
+            <a:noFill/>
+            <a:ln w="17068" cap="rnd">
+              <a:solidFill>
+                <a:srgbClr val="FFFFFF"/>
+              </a:solidFill>
+              <a:round/>
+            </a:ln>
+          </p:spPr>
+          <p:txBody>
+            <a:bodyPr rtlCol="0" anchor="ctr"/>
+            <a:lstStyle/>
+            <a:p>
+              <a:pPr algn="ctr"/>
+            </a:p>
+          </p:txBody>
+        </p:sp>
+        <p:sp>
+          <p:nvSpPr>
+            <p:cNvPr id="15" name="BrandDeck Diagram Text 3"/>
             <p:cNvSpPr txBox="1"/>
             <p:nvPr/>
           </p:nvSpPr>
           <p:spPr>
             <a:xfrm>
-              <a:off x="6877368" y="3180337"/>
-              <a:ext cx="1622106" cy="1197864"/>
+              <a:off x="5353977" y="3372504"/>
+              <a:ext cx="2926041" cy="909201"/>
             </a:xfrm>
             <a:prstGeom prst="rect">
               <a:avLst/>
@@ -12608,32 +10932,13 @@
                 </a:lnSpc>
               </a:pPr>
               <a:r>
-                <a:rPr sz="1410" b="1">
+                <a:rPr sz="1600" b="0">
                   <a:solidFill>
-                    <a:srgbClr val="000000"/>
+                    <a:srgbClr val="FFFFFF"/>
                   </a:solidFill>
                   <a:latin typeface="Play"/>
                 </a:rPr>
-                <a:t>Финал</a:t>
-              </a:r>
-            </a:p>
-            <a:p>
-              <a:pPr algn="l">
-                <a:lnSpc>
-                  <a:spcPct val="110000"/>
-                </a:lnSpc>
-                <a:spcBef>
-                  <a:spcPts val="352"/>
-                </a:spcBef>
-              </a:pPr>
-              <a:r>
-                <a:rPr sz="1410" b="0">
-                  <a:solidFill>
-                    <a:srgbClr val="000000"/>
-                  </a:solidFill>
-                  <a:latin typeface="Play"/>
-                </a:rPr>
-                <a:t>Анализ метрик эффективности</a:t>
+                <a:t>Успех измеряется временем поиска и долей закрытых обращений.</a:t>
               </a:r>
             </a:p>
           </p:txBody>
